--- a/ai-overview.pptx
+++ b/ai-overview.pptx
@@ -249,7 +249,7 @@
           <a:p>
             <a:fld id="{982F7CBC-87DD-4F69-8F50-7ED68F7FF790}" type="datetimeFigureOut">
               <a:rPr lang="zh-TW" altLang="en-US" smtClean="0"/>
-              <a:t>2026/9/18</a:t>
+              <a:t>2026/9/19</a:t>
             </a:fld>
             <a:endParaRPr lang="zh-TW" altLang="en-US"/>
           </a:p>
@@ -426,7 +426,7 @@
           <a:p>
             <a:fld id="{863167AA-796B-4B6A-95ED-1C0BCB3E5802}" type="datetimeFigureOut">
               <a:rPr lang="zh-TW" altLang="en-US" smtClean="0"/>
-              <a:t>2026/9/18</a:t>
+              <a:t>2026/9/19</a:t>
             </a:fld>
             <a:endParaRPr lang="zh-TW" altLang="en-US"/>
           </a:p>
@@ -2598,6 +2598,291 @@
           <a:chExt cx="0" cy="0"/>
         </a:xfrm>
       </p:grpSpPr>
+      <p:cxnSp>
+        <p:nvCxnSpPr>
+          <p:cNvPr id="99" name="直線接點 98">
+            <a:extLst>
+              <a:ext uri="{FF2B5EF4-FFF2-40B4-BE49-F238E27FC236}">
+                <a16:creationId xmlns:a16="http://schemas.microsoft.com/office/drawing/2014/main" id="{9A64CC9E-E2C9-F44F-B438-82C166DD3AD6}"/>
+              </a:ext>
+            </a:extLst>
+          </p:cNvPr>
+          <p:cNvCxnSpPr/>
+          <p:nvPr/>
+        </p:nvCxnSpPr>
+        <p:spPr>
+          <a:xfrm>
+            <a:off x="5099471" y="3770641"/>
+            <a:ext cx="3600400" cy="0"/>
+          </a:xfrm>
+          <a:prstGeom prst="line">
+            <a:avLst/>
+          </a:prstGeom>
+          <a:ln w="28575">
+            <a:solidFill>
+              <a:schemeClr val="accent4">
+                <a:lumMod val="20000"/>
+                <a:lumOff val="80000"/>
+              </a:schemeClr>
+            </a:solidFill>
+            <a:prstDash val="sysDash"/>
+          </a:ln>
+        </p:spPr>
+        <p:style>
+          <a:lnRef idx="1">
+            <a:schemeClr val="accent1"/>
+          </a:lnRef>
+          <a:fillRef idx="0">
+            <a:schemeClr val="accent1"/>
+          </a:fillRef>
+          <a:effectRef idx="0">
+            <a:schemeClr val="accent1"/>
+          </a:effectRef>
+          <a:fontRef idx="minor">
+            <a:schemeClr val="tx1"/>
+          </a:fontRef>
+        </p:style>
+      </p:cxnSp>
+      <p:sp>
+        <p:nvSpPr>
+          <p:cNvPr id="14" name="橢圓 13">
+            <a:extLst>
+              <a:ext uri="{FF2B5EF4-FFF2-40B4-BE49-F238E27FC236}">
+                <a16:creationId xmlns:a16="http://schemas.microsoft.com/office/drawing/2014/main" id="{004290F5-281E-93FC-60A1-A2E3666349C4}"/>
+              </a:ext>
+            </a:extLst>
+          </p:cNvPr>
+          <p:cNvSpPr/>
+          <p:nvPr/>
+        </p:nvSpPr>
+        <p:spPr>
+          <a:xfrm>
+            <a:off x="6493367" y="3709343"/>
+            <a:ext cx="598913" cy="655761"/>
+          </a:xfrm>
+          <a:prstGeom prst="ellipse">
+            <a:avLst/>
+          </a:prstGeom>
+          <a:solidFill>
+            <a:schemeClr val="accent4">
+              <a:lumMod val="20000"/>
+              <a:lumOff val="80000"/>
+              <a:alpha val="70000"/>
+            </a:schemeClr>
+          </a:solidFill>
+          <a:ln w="31750">
+            <a:solidFill>
+              <a:schemeClr val="bg1">
+                <a:lumMod val="75000"/>
+              </a:schemeClr>
+            </a:solidFill>
+          </a:ln>
+        </p:spPr>
+        <p:style>
+          <a:lnRef idx="2">
+            <a:schemeClr val="accent1">
+              <a:shade val="15000"/>
+            </a:schemeClr>
+          </a:lnRef>
+          <a:fillRef idx="1">
+            <a:schemeClr val="accent1"/>
+          </a:fillRef>
+          <a:effectRef idx="0">
+            <a:schemeClr val="accent1"/>
+          </a:effectRef>
+          <a:fontRef idx="minor">
+            <a:schemeClr val="lt1"/>
+          </a:fontRef>
+        </p:style>
+        <p:txBody>
+          <a:bodyPr wrap="none" lIns="0" tIns="36000" rIns="0" bIns="0" rtlCol="0" anchor="ctr" anchorCtr="1"/>
+          <a:lstStyle/>
+          <a:p>
+            <a:pPr algn="ctr">
+              <a:lnSpc>
+                <a:spcPts val="1000"/>
+              </a:lnSpc>
+            </a:pPr>
+            <a:r>
+              <a:rPr lang="en-US" altLang="zh-TW" sz="1200" dirty="0">
+                <a:solidFill>
+                  <a:schemeClr val="tx1"/>
+                </a:solidFill>
+                <a:latin typeface="ADLaM Display" panose="02010000000000000000" pitchFamily="2" charset="0"/>
+                <a:ea typeface="ADLaM Display" panose="02010000000000000000" pitchFamily="2" charset="0"/>
+                <a:cs typeface="ADLaM Display" panose="02010000000000000000" pitchFamily="2" charset="0"/>
+              </a:rPr>
+              <a:t>Transformer</a:t>
+            </a:r>
+          </a:p>
+          <a:p>
+            <a:pPr algn="ctr">
+              <a:lnSpc>
+                <a:spcPts val="1200"/>
+              </a:lnSpc>
+            </a:pPr>
+            <a:r>
+              <a:rPr lang="en-US" altLang="zh-TW" sz="1000" dirty="0">
+                <a:solidFill>
+                  <a:schemeClr val="tx1"/>
+                </a:solidFill>
+                <a:latin typeface="ADLaM Display" panose="02010000000000000000" pitchFamily="2" charset="0"/>
+                <a:ea typeface="ADLaM Display" panose="02010000000000000000" pitchFamily="2" charset="0"/>
+                <a:cs typeface="ADLaM Display" panose="02010000000000000000" pitchFamily="2" charset="0"/>
+              </a:rPr>
+              <a:t>Attention</a:t>
+            </a:r>
+          </a:p>
+          <a:p>
+            <a:pPr algn="ctr"/>
+            <a:r>
+              <a:rPr lang="en-US" altLang="zh-TW" sz="800" dirty="0">
+                <a:solidFill>
+                  <a:schemeClr val="tx1"/>
+                </a:solidFill>
+                <a:ea typeface="ADLaM Display" panose="02010000000000000000" pitchFamily="2" charset="0"/>
+                <a:cs typeface="ADLaM Display" panose="02010000000000000000" pitchFamily="2" charset="0"/>
+              </a:rPr>
+              <a:t>2017</a:t>
+            </a:r>
+          </a:p>
+        </p:txBody>
+      </p:sp>
+      <p:sp>
+        <p:nvSpPr>
+          <p:cNvPr id="3" name="橢圓 2">
+            <a:extLst>
+              <a:ext uri="{FF2B5EF4-FFF2-40B4-BE49-F238E27FC236}">
+                <a16:creationId xmlns:a16="http://schemas.microsoft.com/office/drawing/2014/main" id="{AEA0B1E4-3CC1-CAFE-7ACD-0B0E606CD5A2}"/>
+              </a:ext>
+            </a:extLst>
+          </p:cNvPr>
+          <p:cNvSpPr/>
+          <p:nvPr/>
+        </p:nvSpPr>
+        <p:spPr>
+          <a:xfrm>
+            <a:off x="6060248" y="1738098"/>
+            <a:ext cx="1440160" cy="1518689"/>
+          </a:xfrm>
+          <a:prstGeom prst="ellipse">
+            <a:avLst/>
+          </a:prstGeom>
+          <a:solidFill>
+            <a:schemeClr val="accent4">
+              <a:lumMod val="20000"/>
+              <a:lumOff val="80000"/>
+              <a:alpha val="40000"/>
+            </a:schemeClr>
+          </a:solidFill>
+          <a:ln w="38100">
+            <a:solidFill>
+              <a:schemeClr val="bg1">
+                <a:lumMod val="75000"/>
+                <a:alpha val="40000"/>
+              </a:schemeClr>
+            </a:solidFill>
+          </a:ln>
+        </p:spPr>
+        <p:style>
+          <a:lnRef idx="2">
+            <a:schemeClr val="accent1">
+              <a:shade val="15000"/>
+            </a:schemeClr>
+          </a:lnRef>
+          <a:fillRef idx="1">
+            <a:schemeClr val="accent1"/>
+          </a:fillRef>
+          <a:effectRef idx="0">
+            <a:schemeClr val="accent1"/>
+          </a:effectRef>
+          <a:fontRef idx="minor">
+            <a:schemeClr val="lt1"/>
+          </a:fontRef>
+        </p:style>
+        <p:txBody>
+          <a:bodyPr wrap="none" lIns="0" tIns="144000" rIns="0" bIns="0" rtlCol="0" anchor="ctr" anchorCtr="1"/>
+          <a:lstStyle/>
+          <a:p>
+            <a:pPr algn="ctr">
+              <a:lnSpc>
+                <a:spcPts val="1200"/>
+              </a:lnSpc>
+            </a:pPr>
+            <a:r>
+              <a:rPr lang="en-US" altLang="zh-TW" sz="1400" dirty="0">
+                <a:solidFill>
+                  <a:schemeClr val="tx1"/>
+                </a:solidFill>
+                <a:latin typeface="ADLaM Display" panose="02010000000000000000" pitchFamily="2" charset="0"/>
+                <a:ea typeface="ADLaM Display" panose="02010000000000000000" pitchFamily="2" charset="0"/>
+                <a:cs typeface="ADLaM Display" panose="02010000000000000000" pitchFamily="2" charset="0"/>
+              </a:rPr>
+              <a:t>FFNN</a:t>
+            </a:r>
+          </a:p>
+          <a:p>
+            <a:pPr algn="ctr">
+              <a:lnSpc>
+                <a:spcPts val="1000"/>
+              </a:lnSpc>
+            </a:pPr>
+            <a:r>
+              <a:rPr lang="en-US" altLang="zh-TW" sz="1000" dirty="0">
+                <a:solidFill>
+                  <a:schemeClr val="tx1"/>
+                </a:solidFill>
+                <a:ea typeface="ADLaM Display" panose="02010000000000000000" pitchFamily="2" charset="0"/>
+                <a:cs typeface="ADLaM Display" panose="02010000000000000000" pitchFamily="2" charset="0"/>
+              </a:rPr>
+              <a:t>(Backpropagation)</a:t>
+            </a:r>
+          </a:p>
+          <a:p>
+            <a:pPr algn="ctr"/>
+            <a:endParaRPr lang="en-US" altLang="zh-TW" sz="1400" dirty="0">
+              <a:solidFill>
+                <a:schemeClr val="tx1"/>
+              </a:solidFill>
+              <a:latin typeface="ADLaM Display" panose="02010000000000000000" pitchFamily="2" charset="0"/>
+              <a:ea typeface="ADLaM Display" panose="02010000000000000000" pitchFamily="2" charset="0"/>
+              <a:cs typeface="ADLaM Display" panose="02010000000000000000" pitchFamily="2" charset="0"/>
+            </a:endParaRPr>
+          </a:p>
+          <a:p>
+            <a:pPr algn="ctr"/>
+            <a:endParaRPr lang="en-US" altLang="zh-TW" sz="1400" dirty="0">
+              <a:solidFill>
+                <a:schemeClr val="tx1"/>
+              </a:solidFill>
+              <a:latin typeface="ADLaM Display" panose="02010000000000000000" pitchFamily="2" charset="0"/>
+              <a:ea typeface="ADLaM Display" panose="02010000000000000000" pitchFamily="2" charset="0"/>
+              <a:cs typeface="ADLaM Display" panose="02010000000000000000" pitchFamily="2" charset="0"/>
+            </a:endParaRPr>
+          </a:p>
+          <a:p>
+            <a:pPr algn="ctr"/>
+            <a:endParaRPr lang="en-US" altLang="zh-TW" sz="1400" dirty="0">
+              <a:solidFill>
+                <a:schemeClr val="tx1"/>
+              </a:solidFill>
+              <a:latin typeface="ADLaM Display" panose="02010000000000000000" pitchFamily="2" charset="0"/>
+              <a:ea typeface="ADLaM Display" panose="02010000000000000000" pitchFamily="2" charset="0"/>
+              <a:cs typeface="ADLaM Display" panose="02010000000000000000" pitchFamily="2" charset="0"/>
+            </a:endParaRPr>
+          </a:p>
+          <a:p>
+            <a:pPr algn="ctr"/>
+            <a:endParaRPr lang="zh-TW" altLang="en-US" sz="1400" dirty="0">
+              <a:solidFill>
+                <a:schemeClr val="tx1"/>
+              </a:solidFill>
+              <a:latin typeface="ADLaM Display" panose="02010000000000000000" pitchFamily="2" charset="0"/>
+              <a:cs typeface="ADLaM Display" panose="02010000000000000000" pitchFamily="2" charset="0"/>
+            </a:endParaRPr>
+          </a:p>
+        </p:txBody>
+      </p:sp>
       <p:sp>
         <p:nvSpPr>
           <p:cNvPr id="35" name="文字方塊 34">
@@ -2612,7 +2897,7 @@
         </p:nvSpPr>
         <p:spPr>
           <a:xfrm>
-            <a:off x="766397" y="5896322"/>
+            <a:off x="922170" y="4412600"/>
             <a:ext cx="829073" cy="240536"/>
           </a:xfrm>
           <a:prstGeom prst="rect">
@@ -2664,7 +2949,7 @@
         </p:blipFill>
         <p:spPr>
           <a:xfrm>
-            <a:off x="827584" y="4022519"/>
+            <a:off x="983357" y="2150311"/>
             <a:ext cx="708323" cy="630617"/>
           </a:xfrm>
           <a:prstGeom prst="rect">
@@ -2672,143 +2957,6 @@
           </a:prstGeom>
         </p:spPr>
       </p:pic>
-      <p:sp>
-        <p:nvSpPr>
-          <p:cNvPr id="3" name="橢圓 2">
-            <a:extLst>
-              <a:ext uri="{FF2B5EF4-FFF2-40B4-BE49-F238E27FC236}">
-                <a16:creationId xmlns:a16="http://schemas.microsoft.com/office/drawing/2014/main" id="{AEA0B1E4-3CC1-CAFE-7ACD-0B0E606CD5A2}"/>
-              </a:ext>
-            </a:extLst>
-          </p:cNvPr>
-          <p:cNvSpPr/>
-          <p:nvPr/>
-        </p:nvSpPr>
-        <p:spPr>
-          <a:xfrm>
-            <a:off x="4716016" y="1838863"/>
-            <a:ext cx="1440160" cy="1440160"/>
-          </a:xfrm>
-          <a:prstGeom prst="ellipse">
-            <a:avLst/>
-          </a:prstGeom>
-          <a:solidFill>
-            <a:schemeClr val="accent4">
-              <a:lumMod val="20000"/>
-              <a:lumOff val="80000"/>
-              <a:alpha val="70000"/>
-            </a:schemeClr>
-          </a:solidFill>
-          <a:ln w="38100">
-            <a:solidFill>
-              <a:schemeClr val="bg1">
-                <a:lumMod val="75000"/>
-              </a:schemeClr>
-            </a:solidFill>
-          </a:ln>
-        </p:spPr>
-        <p:style>
-          <a:lnRef idx="2">
-            <a:schemeClr val="accent1">
-              <a:shade val="15000"/>
-            </a:schemeClr>
-          </a:lnRef>
-          <a:fillRef idx="1">
-            <a:schemeClr val="accent1"/>
-          </a:fillRef>
-          <a:effectRef idx="0">
-            <a:schemeClr val="accent1"/>
-          </a:effectRef>
-          <a:fontRef idx="minor">
-            <a:schemeClr val="lt1"/>
-          </a:fontRef>
-        </p:style>
-        <p:txBody>
-          <a:bodyPr wrap="none" lIns="0" tIns="0" rIns="0" bIns="0" rtlCol="0" anchor="ctr" anchorCtr="1"/>
-          <a:lstStyle/>
-          <a:p>
-            <a:pPr algn="ctr"/>
-            <a:r>
-              <a:rPr lang="en-US" altLang="zh-TW" sz="1400" dirty="0">
-                <a:solidFill>
-                  <a:schemeClr val="tx1"/>
-                </a:solidFill>
-                <a:latin typeface="ADLaM Display" panose="02010000000000000000" pitchFamily="2" charset="0"/>
-                <a:ea typeface="ADLaM Display" panose="02010000000000000000" pitchFamily="2" charset="0"/>
-                <a:cs typeface="ADLaM Display" panose="02010000000000000000" pitchFamily="2" charset="0"/>
-              </a:rPr>
-              <a:t>F</a:t>
-            </a:r>
-            <a:r>
-              <a:rPr lang="en-US" altLang="zh-TW" sz="1400" dirty="0">
-                <a:solidFill>
-                  <a:schemeClr val="bg1">
-                    <a:lumMod val="50000"/>
-                  </a:schemeClr>
-                </a:solidFill>
-                <a:latin typeface="ADLaM Display" panose="02010000000000000000" pitchFamily="2" charset="0"/>
-                <a:ea typeface="ADLaM Display" panose="02010000000000000000" pitchFamily="2" charset="0"/>
-                <a:cs typeface="ADLaM Display" panose="02010000000000000000" pitchFamily="2" charset="0"/>
-              </a:rPr>
-              <a:t>F</a:t>
-            </a:r>
-            <a:r>
-              <a:rPr lang="en-US" altLang="zh-TW" sz="1400" dirty="0">
-                <a:solidFill>
-                  <a:schemeClr val="tx1"/>
-                </a:solidFill>
-                <a:latin typeface="ADLaM Display" panose="02010000000000000000" pitchFamily="2" charset="0"/>
-                <a:ea typeface="ADLaM Display" panose="02010000000000000000" pitchFamily="2" charset="0"/>
-                <a:cs typeface="ADLaM Display" panose="02010000000000000000" pitchFamily="2" charset="0"/>
-              </a:rPr>
-              <a:t>NN</a:t>
-            </a:r>
-          </a:p>
-          <a:p>
-            <a:pPr algn="ctr"/>
-            <a:endParaRPr lang="en-US" altLang="zh-TW" sz="1400" dirty="0">
-              <a:solidFill>
-                <a:schemeClr val="tx1"/>
-              </a:solidFill>
-              <a:latin typeface="ADLaM Display" panose="02010000000000000000" pitchFamily="2" charset="0"/>
-              <a:ea typeface="ADLaM Display" panose="02010000000000000000" pitchFamily="2" charset="0"/>
-              <a:cs typeface="ADLaM Display" panose="02010000000000000000" pitchFamily="2" charset="0"/>
-            </a:endParaRPr>
-          </a:p>
-          <a:p>
-            <a:pPr algn="ctr"/>
-            <a:endParaRPr lang="en-US" altLang="zh-TW" sz="1400" dirty="0">
-              <a:solidFill>
-                <a:schemeClr val="tx1"/>
-              </a:solidFill>
-              <a:latin typeface="ADLaM Display" panose="02010000000000000000" pitchFamily="2" charset="0"/>
-              <a:ea typeface="ADLaM Display" panose="02010000000000000000" pitchFamily="2" charset="0"/>
-              <a:cs typeface="ADLaM Display" panose="02010000000000000000" pitchFamily="2" charset="0"/>
-            </a:endParaRPr>
-          </a:p>
-          <a:p>
-            <a:pPr algn="ctr"/>
-            <a:endParaRPr lang="en-US" altLang="zh-TW" sz="1400" dirty="0">
-              <a:solidFill>
-                <a:schemeClr val="tx1"/>
-              </a:solidFill>
-              <a:latin typeface="ADLaM Display" panose="02010000000000000000" pitchFamily="2" charset="0"/>
-              <a:ea typeface="ADLaM Display" panose="02010000000000000000" pitchFamily="2" charset="0"/>
-              <a:cs typeface="ADLaM Display" panose="02010000000000000000" pitchFamily="2" charset="0"/>
-            </a:endParaRPr>
-          </a:p>
-          <a:p>
-            <a:pPr algn="ctr"/>
-            <a:endParaRPr lang="zh-TW" altLang="en-US" sz="1400" dirty="0">
-              <a:solidFill>
-                <a:schemeClr val="tx1"/>
-              </a:solidFill>
-              <a:latin typeface="ADLaM Display" panose="02010000000000000000" pitchFamily="2" charset="0"/>
-              <a:cs typeface="ADLaM Display" panose="02010000000000000000" pitchFamily="2" charset="0"/>
-            </a:endParaRPr>
-          </a:p>
-        </p:txBody>
-      </p:sp>
       <p:sp>
         <p:nvSpPr>
           <p:cNvPr id="5" name="橢圓 4">
@@ -2823,7 +2971,7 @@
         </p:nvSpPr>
         <p:spPr>
           <a:xfrm>
-            <a:off x="5557587" y="2397153"/>
+            <a:off x="7220614" y="1916832"/>
             <a:ext cx="495818" cy="447885"/>
           </a:xfrm>
           <a:prstGeom prst="ellipse">
@@ -2881,76 +3029,6 @@
       </p:sp>
       <p:sp>
         <p:nvSpPr>
-          <p:cNvPr id="7" name="橢圓 6">
-            <a:extLst>
-              <a:ext uri="{FF2B5EF4-FFF2-40B4-BE49-F238E27FC236}">
-                <a16:creationId xmlns:a16="http://schemas.microsoft.com/office/drawing/2014/main" id="{AA368A15-3EB1-B632-32F7-35E0E54C152A}"/>
-              </a:ext>
-            </a:extLst>
-          </p:cNvPr>
-          <p:cNvSpPr/>
-          <p:nvPr/>
-        </p:nvSpPr>
-        <p:spPr>
-          <a:xfrm>
-            <a:off x="5317440" y="1746668"/>
-            <a:ext cx="245929" cy="236211"/>
-          </a:xfrm>
-          <a:prstGeom prst="ellipse">
-            <a:avLst/>
-          </a:prstGeom>
-          <a:solidFill>
-            <a:schemeClr val="accent4">
-              <a:lumMod val="20000"/>
-              <a:lumOff val="80000"/>
-              <a:alpha val="70000"/>
-            </a:schemeClr>
-          </a:solidFill>
-          <a:ln w="25400">
-            <a:solidFill>
-              <a:schemeClr val="bg1">
-                <a:lumMod val="75000"/>
-              </a:schemeClr>
-            </a:solidFill>
-          </a:ln>
-        </p:spPr>
-        <p:style>
-          <a:lnRef idx="2">
-            <a:schemeClr val="accent1">
-              <a:shade val="15000"/>
-            </a:schemeClr>
-          </a:lnRef>
-          <a:fillRef idx="1">
-            <a:schemeClr val="accent1"/>
-          </a:fillRef>
-          <a:effectRef idx="0">
-            <a:schemeClr val="accent1"/>
-          </a:effectRef>
-          <a:fontRef idx="minor">
-            <a:schemeClr val="lt1"/>
-          </a:fontRef>
-        </p:style>
-        <p:txBody>
-          <a:bodyPr wrap="none" lIns="0" tIns="0" rIns="0" bIns="0" rtlCol="0" anchor="ctr" anchorCtr="1"/>
-          <a:lstStyle/>
-          <a:p>
-            <a:pPr algn="ctr"/>
-            <a:r>
-              <a:rPr lang="en-US" altLang="zh-TW" sz="1000" dirty="0">
-                <a:solidFill>
-                  <a:schemeClr val="tx1"/>
-                </a:solidFill>
-                <a:latin typeface="ADLaM Display" panose="02010000000000000000" pitchFamily="2" charset="0"/>
-                <a:ea typeface="ADLaM Display" panose="02010000000000000000" pitchFamily="2" charset="0"/>
-                <a:cs typeface="ADLaM Display" panose="02010000000000000000" pitchFamily="2" charset="0"/>
-              </a:rPr>
-              <a:t>MLP</a:t>
-            </a:r>
-          </a:p>
-        </p:txBody>
-      </p:sp>
-      <p:sp>
-        <p:nvSpPr>
           <p:cNvPr id="10" name="橢圓 9">
             <a:extLst>
               <a:ext uri="{FF2B5EF4-FFF2-40B4-BE49-F238E27FC236}">
@@ -2963,7 +3041,7 @@
         </p:nvSpPr>
         <p:spPr>
           <a:xfrm>
-            <a:off x="4821622" y="2397153"/>
+            <a:off x="5844224" y="2374917"/>
             <a:ext cx="495818" cy="447885"/>
           </a:xfrm>
           <a:prstGeom prst="ellipse">
@@ -3033,7 +3111,7 @@
         </p:nvSpPr>
         <p:spPr>
           <a:xfrm>
-            <a:off x="4644008" y="2719499"/>
+            <a:off x="5844224" y="2697263"/>
             <a:ext cx="495818" cy="447885"/>
           </a:xfrm>
           <a:prstGeom prst="ellipse">
@@ -3103,7 +3181,7 @@
         </p:nvSpPr>
         <p:spPr>
           <a:xfrm>
-            <a:off x="5226439" y="3495047"/>
+            <a:off x="6570671" y="4299495"/>
             <a:ext cx="495818" cy="447885"/>
           </a:xfrm>
           <a:prstGeom prst="ellipse">
@@ -3141,10 +3219,14 @@
           </a:fontRef>
         </p:style>
         <p:txBody>
-          <a:bodyPr wrap="none" lIns="0" tIns="0" rIns="0" bIns="0" rtlCol="0" anchor="ctr" anchorCtr="1"/>
+          <a:bodyPr wrap="none" lIns="0" tIns="36000" rIns="0" bIns="0" rtlCol="0" anchor="ctr" anchorCtr="1"/>
           <a:lstStyle/>
           <a:p>
-            <a:pPr algn="ctr"/>
+            <a:pPr algn="ctr">
+              <a:lnSpc>
+                <a:spcPts val="1000"/>
+              </a:lnSpc>
+            </a:pPr>
             <a:r>
               <a:rPr lang="en-US" altLang="zh-TW" sz="1200" dirty="0">
                 <a:solidFill>
@@ -3154,13 +3236,17 @@
                 <a:ea typeface="ADLaM Display" panose="02010000000000000000" pitchFamily="2" charset="0"/>
                 <a:cs typeface="ADLaM Display" panose="02010000000000000000" pitchFamily="2" charset="0"/>
               </a:rPr>
-              <a:t>Transformer</a:t>
-            </a:r>
-          </a:p>
-          <a:p>
-            <a:pPr algn="ctr"/>
-            <a:r>
-              <a:rPr lang="en-US" altLang="zh-TW" sz="1200" dirty="0">
+              <a:t>GTP</a:t>
+            </a:r>
+          </a:p>
+          <a:p>
+            <a:pPr algn="ctr">
+              <a:lnSpc>
+                <a:spcPts val="1000"/>
+              </a:lnSpc>
+            </a:pPr>
+            <a:r>
+              <a:rPr lang="en-US" altLang="zh-TW" sz="1000" dirty="0">
                 <a:solidFill>
                   <a:schemeClr val="tx1"/>
                 </a:solidFill>
@@ -3187,7 +3273,7 @@
         </p:nvSpPr>
         <p:spPr>
           <a:xfrm>
-            <a:off x="5804374" y="2719498"/>
+            <a:off x="7148606" y="2693083"/>
             <a:ext cx="495818" cy="447885"/>
           </a:xfrm>
           <a:prstGeom prst="ellipse">
@@ -3257,8 +3343,8 @@
         </p:nvSpPr>
         <p:spPr>
           <a:xfrm>
-            <a:off x="6012160" y="3055310"/>
-            <a:ext cx="673879" cy="655761"/>
+            <a:off x="7642123" y="3063964"/>
+            <a:ext cx="546416" cy="540099"/>
           </a:xfrm>
           <a:prstGeom prst="ellipse">
             <a:avLst/>
@@ -3330,579 +3416,7 @@
                 <a:ea typeface="ADLaM Display" panose="02010000000000000000" pitchFamily="2" charset="0"/>
                 <a:cs typeface="ADLaM Display" panose="02010000000000000000" pitchFamily="2" charset="0"/>
               </a:rPr>
-              <a:t>Net</a:t>
-            </a:r>
-          </a:p>
-        </p:txBody>
-      </p:sp>
-      <p:sp>
-        <p:nvSpPr>
-          <p:cNvPr id="24" name="橢圓 23">
-            <a:extLst>
-              <a:ext uri="{FF2B5EF4-FFF2-40B4-BE49-F238E27FC236}">
-                <a16:creationId xmlns:a16="http://schemas.microsoft.com/office/drawing/2014/main" id="{5AD84FAD-CD1C-1567-2DA1-5D10317355DF}"/>
-              </a:ext>
-            </a:extLst>
-          </p:cNvPr>
-          <p:cNvSpPr/>
-          <p:nvPr/>
-        </p:nvSpPr>
-        <p:spPr>
-          <a:xfrm>
-            <a:off x="5226439" y="4071111"/>
-            <a:ext cx="495818" cy="447885"/>
-          </a:xfrm>
-          <a:prstGeom prst="ellipse">
-            <a:avLst/>
-          </a:prstGeom>
-          <a:solidFill>
-            <a:schemeClr val="accent4">
-              <a:lumMod val="20000"/>
-              <a:lumOff val="80000"/>
-              <a:alpha val="70000"/>
-            </a:schemeClr>
-          </a:solidFill>
-          <a:ln w="31750">
-            <a:solidFill>
-              <a:schemeClr val="bg1">
-                <a:lumMod val="75000"/>
-              </a:schemeClr>
-            </a:solidFill>
-          </a:ln>
-        </p:spPr>
-        <p:style>
-          <a:lnRef idx="2">
-            <a:schemeClr val="accent1">
-              <a:shade val="15000"/>
-            </a:schemeClr>
-          </a:lnRef>
-          <a:fillRef idx="1">
-            <a:schemeClr val="accent1"/>
-          </a:fillRef>
-          <a:effectRef idx="0">
-            <a:schemeClr val="accent1"/>
-          </a:effectRef>
-          <a:fontRef idx="minor">
-            <a:schemeClr val="lt1"/>
-          </a:fontRef>
-        </p:style>
-        <p:txBody>
-          <a:bodyPr wrap="none" lIns="0" tIns="0" rIns="0" bIns="0" rtlCol="0" anchor="ctr" anchorCtr="1"/>
-          <a:lstStyle/>
-          <a:p>
-            <a:pPr algn="ctr"/>
-            <a:r>
-              <a:rPr lang="en-US" altLang="zh-TW" sz="1200" dirty="0">
-                <a:solidFill>
-                  <a:schemeClr val="tx1"/>
-                </a:solidFill>
-                <a:latin typeface="ADLaM Display" panose="02010000000000000000" pitchFamily="2" charset="0"/>
-                <a:ea typeface="ADLaM Display" panose="02010000000000000000" pitchFamily="2" charset="0"/>
-                <a:cs typeface="ADLaM Display" panose="02010000000000000000" pitchFamily="2" charset="0"/>
-              </a:rPr>
-              <a:t>Transformer</a:t>
-            </a:r>
-          </a:p>
-          <a:p>
-            <a:pPr algn="ctr"/>
-            <a:r>
-              <a:rPr lang="en-US" altLang="zh-TW" sz="1200" dirty="0">
-                <a:solidFill>
-                  <a:schemeClr val="tx1"/>
-                </a:solidFill>
-                <a:latin typeface="ADLaM Display" panose="02010000000000000000" pitchFamily="2" charset="0"/>
-                <a:ea typeface="ADLaM Display" panose="02010000000000000000" pitchFamily="2" charset="0"/>
-                <a:cs typeface="ADLaM Display" panose="02010000000000000000" pitchFamily="2" charset="0"/>
-              </a:rPr>
-              <a:t>Attn + MoE</a:t>
-            </a:r>
-          </a:p>
-        </p:txBody>
-      </p:sp>
-      <p:cxnSp>
-        <p:nvCxnSpPr>
-          <p:cNvPr id="27" name="直線單箭頭接點 26">
-            <a:extLst>
-              <a:ext uri="{FF2B5EF4-FFF2-40B4-BE49-F238E27FC236}">
-                <a16:creationId xmlns:a16="http://schemas.microsoft.com/office/drawing/2014/main" id="{0CC5A7DD-41A0-7EEC-23DC-D93DBA4C6ABD}"/>
-              </a:ext>
-            </a:extLst>
-          </p:cNvPr>
-          <p:cNvCxnSpPr>
-            <a:cxnSpLocks/>
-            <a:endCxn id="30" idx="0"/>
-          </p:cNvCxnSpPr>
-          <p:nvPr/>
-        </p:nvCxnSpPr>
-        <p:spPr>
-          <a:xfrm>
-            <a:off x="3030706" y="4360852"/>
-            <a:ext cx="15409" cy="955881"/>
-          </a:xfrm>
-          <a:prstGeom prst="straightConnector1">
-            <a:avLst/>
-          </a:prstGeom>
-          <a:ln w="22225">
-            <a:solidFill>
-              <a:schemeClr val="accent1"/>
-            </a:solidFill>
-            <a:prstDash val="solid"/>
-            <a:tailEnd type="triangle"/>
-          </a:ln>
-        </p:spPr>
-        <p:style>
-          <a:lnRef idx="1">
-            <a:schemeClr val="accent1"/>
-          </a:lnRef>
-          <a:fillRef idx="0">
-            <a:schemeClr val="accent1"/>
-          </a:fillRef>
-          <a:effectRef idx="0">
-            <a:schemeClr val="accent1"/>
-          </a:effectRef>
-          <a:fontRef idx="minor">
-            <a:schemeClr val="tx1"/>
-          </a:fontRef>
-        </p:style>
-      </p:cxnSp>
-      <p:sp>
-        <p:nvSpPr>
-          <p:cNvPr id="28" name="矩形 27">
-            <a:extLst>
-              <a:ext uri="{FF2B5EF4-FFF2-40B4-BE49-F238E27FC236}">
-                <a16:creationId xmlns:a16="http://schemas.microsoft.com/office/drawing/2014/main" id="{D4B11118-85CB-E3B3-3B58-A81E7240DFBE}"/>
-              </a:ext>
-            </a:extLst>
-          </p:cNvPr>
-          <p:cNvSpPr/>
-          <p:nvPr/>
-        </p:nvSpPr>
-        <p:spPr>
-          <a:xfrm>
-            <a:off x="2680355" y="4476219"/>
-            <a:ext cx="731520" cy="172916"/>
-          </a:xfrm>
-          <a:prstGeom prst="rect">
-            <a:avLst/>
-          </a:prstGeom>
-          <a:solidFill>
-            <a:schemeClr val="accent3">
-              <a:lumMod val="20000"/>
-              <a:lumOff val="80000"/>
-              <a:alpha val="90000"/>
-            </a:schemeClr>
-          </a:solidFill>
-          <a:ln w="3175">
-            <a:solidFill>
-              <a:schemeClr val="accent3">
-                <a:lumMod val="60000"/>
-                <a:lumOff val="40000"/>
-              </a:schemeClr>
-            </a:solidFill>
-          </a:ln>
-        </p:spPr>
-        <p:style>
-          <a:lnRef idx="2">
-            <a:schemeClr val="accent1">
-              <a:shade val="15000"/>
-            </a:schemeClr>
-          </a:lnRef>
-          <a:fillRef idx="1">
-            <a:schemeClr val="accent1"/>
-          </a:fillRef>
-          <a:effectRef idx="0">
-            <a:schemeClr val="accent1"/>
-          </a:effectRef>
-          <a:fontRef idx="minor">
-            <a:schemeClr val="lt1"/>
-          </a:fontRef>
-        </p:style>
-        <p:txBody>
-          <a:bodyPr wrap="none" lIns="0" tIns="0" rIns="0" bIns="0" rtlCol="0" anchor="ctr"/>
-          <a:lstStyle/>
-          <a:p>
-            <a:pPr marL="0" marR="0" lvl="0" indent="0" algn="ctr" defTabSz="914400" rtl="0" eaLnBrk="1" fontAlgn="auto" latinLnBrk="0" hangingPunct="1">
-              <a:lnSpc>
-                <a:spcPct val="100000"/>
-              </a:lnSpc>
-              <a:spcBef>
-                <a:spcPts val="0"/>
-              </a:spcBef>
-              <a:spcAft>
-                <a:spcPts val="0"/>
-              </a:spcAft>
-              <a:buClrTx/>
-              <a:buSzTx/>
-              <a:buFontTx/>
-              <a:buNone/>
-              <a:tabLst/>
-              <a:defRPr/>
-            </a:pPr>
-            <a:r>
-              <a:rPr lang="en-US" altLang="zh-TW" sz="1200" b="1" dirty="0">
-                <a:ln w="0"/>
-                <a:solidFill>
-                  <a:prstClr val="black"/>
-                </a:solidFill>
-                <a:latin typeface="Calibri"/>
-                <a:ea typeface="新細明體" panose="02020500000000000000" pitchFamily="18" charset="-120"/>
-              </a:rPr>
-              <a:t>M</a:t>
-            </a:r>
-            <a:r>
-              <a:rPr kumimoji="0" lang="en-US" altLang="zh-TW" sz="1200" b="1" i="0" u="none" strike="noStrike" kern="1200" cap="none" spc="0" normalizeH="0" baseline="0" noProof="0" dirty="0">
-                <a:ln w="0"/>
-                <a:solidFill>
-                  <a:prstClr val="black"/>
-                </a:solidFill>
-                <a:effectLst/>
-                <a:uLnTx/>
-                <a:uFillTx/>
-                <a:latin typeface="Calibri"/>
-                <a:ea typeface="新細明體" panose="02020500000000000000" pitchFamily="18" charset="-120"/>
-                <a:cs typeface="+mn-cs"/>
-              </a:rPr>
-              <a:t>QA</a:t>
-            </a:r>
-          </a:p>
-        </p:txBody>
-      </p:sp>
-      <p:sp>
-        <p:nvSpPr>
-          <p:cNvPr id="29" name="矩形 28">
-            <a:extLst>
-              <a:ext uri="{FF2B5EF4-FFF2-40B4-BE49-F238E27FC236}">
-                <a16:creationId xmlns:a16="http://schemas.microsoft.com/office/drawing/2014/main" id="{019896D7-A914-F596-8731-06D7273EE94D}"/>
-              </a:ext>
-            </a:extLst>
-          </p:cNvPr>
-          <p:cNvSpPr/>
-          <p:nvPr/>
-        </p:nvSpPr>
-        <p:spPr>
-          <a:xfrm>
-            <a:off x="2680355" y="4771480"/>
-            <a:ext cx="731520" cy="165687"/>
-          </a:xfrm>
-          <a:prstGeom prst="rect">
-            <a:avLst/>
-          </a:prstGeom>
-          <a:solidFill>
-            <a:schemeClr val="accent3">
-              <a:lumMod val="20000"/>
-              <a:lumOff val="80000"/>
-              <a:alpha val="90000"/>
-            </a:schemeClr>
-          </a:solidFill>
-          <a:ln w="3175">
-            <a:solidFill>
-              <a:schemeClr val="accent3">
-                <a:lumMod val="60000"/>
-                <a:lumOff val="40000"/>
-              </a:schemeClr>
-            </a:solidFill>
-          </a:ln>
-        </p:spPr>
-        <p:style>
-          <a:lnRef idx="2">
-            <a:schemeClr val="accent1">
-              <a:shade val="15000"/>
-            </a:schemeClr>
-          </a:lnRef>
-          <a:fillRef idx="1">
-            <a:schemeClr val="accent1"/>
-          </a:fillRef>
-          <a:effectRef idx="0">
-            <a:schemeClr val="accent1"/>
-          </a:effectRef>
-          <a:fontRef idx="minor">
-            <a:schemeClr val="lt1"/>
-          </a:fontRef>
-        </p:style>
-        <p:txBody>
-          <a:bodyPr wrap="none" lIns="0" tIns="0" rIns="0" bIns="0" rtlCol="0" anchor="ctr"/>
-          <a:lstStyle/>
-          <a:p>
-            <a:pPr marL="0" marR="0" lvl="0" indent="0" algn="ctr" defTabSz="914400" rtl="0" eaLnBrk="1" fontAlgn="auto" latinLnBrk="0" hangingPunct="1">
-              <a:lnSpc>
-                <a:spcPct val="100000"/>
-              </a:lnSpc>
-              <a:spcBef>
-                <a:spcPts val="0"/>
-              </a:spcBef>
-              <a:spcAft>
-                <a:spcPts val="0"/>
-              </a:spcAft>
-              <a:buClrTx/>
-              <a:buSzTx/>
-              <a:buFontTx/>
-              <a:buNone/>
-              <a:tabLst/>
-              <a:defRPr/>
-            </a:pPr>
-            <a:r>
-              <a:rPr lang="en-US" altLang="zh-TW" sz="1200" b="1" dirty="0">
-                <a:ln w="0"/>
-                <a:solidFill>
-                  <a:prstClr val="black"/>
-                </a:solidFill>
-                <a:latin typeface="Calibri"/>
-                <a:ea typeface="新細明體" panose="02020500000000000000" pitchFamily="18" charset="-120"/>
-              </a:rPr>
-              <a:t>G</a:t>
-            </a:r>
-            <a:r>
-              <a:rPr kumimoji="0" lang="en-US" altLang="zh-TW" sz="1200" b="1" i="0" u="none" strike="noStrike" kern="1200" cap="none" spc="0" normalizeH="0" baseline="0" noProof="0" dirty="0">
-                <a:ln w="0"/>
-                <a:solidFill>
-                  <a:prstClr val="black"/>
-                </a:solidFill>
-                <a:effectLst/>
-                <a:uLnTx/>
-                <a:uFillTx/>
-                <a:latin typeface="Calibri"/>
-                <a:ea typeface="新細明體" panose="02020500000000000000" pitchFamily="18" charset="-120"/>
-                <a:cs typeface="+mn-cs"/>
-              </a:rPr>
-              <a:t>QA</a:t>
-            </a:r>
-          </a:p>
-        </p:txBody>
-      </p:sp>
-      <p:sp>
-        <p:nvSpPr>
-          <p:cNvPr id="30" name="矩形 29">
-            <a:extLst>
-              <a:ext uri="{FF2B5EF4-FFF2-40B4-BE49-F238E27FC236}">
-                <a16:creationId xmlns:a16="http://schemas.microsoft.com/office/drawing/2014/main" id="{8E97BE1F-4641-F50D-115E-0BA3293DC4A9}"/>
-              </a:ext>
-            </a:extLst>
-          </p:cNvPr>
-          <p:cNvSpPr/>
-          <p:nvPr/>
-        </p:nvSpPr>
-        <p:spPr>
-          <a:xfrm>
-            <a:off x="2680355" y="5316733"/>
-            <a:ext cx="731519" cy="348657"/>
-          </a:xfrm>
-          <a:prstGeom prst="rect">
-            <a:avLst/>
-          </a:prstGeom>
-          <a:solidFill>
-            <a:schemeClr val="accent3">
-              <a:lumMod val="20000"/>
-              <a:lumOff val="80000"/>
-              <a:alpha val="90000"/>
-            </a:schemeClr>
-          </a:solidFill>
-          <a:ln w="3175">
-            <a:solidFill>
-              <a:schemeClr val="accent3">
-                <a:lumMod val="60000"/>
-                <a:lumOff val="40000"/>
-              </a:schemeClr>
-            </a:solidFill>
-          </a:ln>
-        </p:spPr>
-        <p:style>
-          <a:lnRef idx="2">
-            <a:schemeClr val="accent1">
-              <a:shade val="15000"/>
-            </a:schemeClr>
-          </a:lnRef>
-          <a:fillRef idx="1">
-            <a:schemeClr val="accent1"/>
-          </a:fillRef>
-          <a:effectRef idx="0">
-            <a:schemeClr val="accent1"/>
-          </a:effectRef>
-          <a:fontRef idx="minor">
-            <a:schemeClr val="lt1"/>
-          </a:fontRef>
-        </p:style>
-        <p:txBody>
-          <a:bodyPr wrap="none" lIns="0" tIns="0" rIns="0" bIns="0" rtlCol="0" anchor="ctr"/>
-          <a:lstStyle/>
-          <a:p>
-            <a:pPr marL="0" marR="0" lvl="0" indent="0" algn="ctr" defTabSz="914400" rtl="0" eaLnBrk="1" fontAlgn="auto" latinLnBrk="0" hangingPunct="1">
-              <a:lnSpc>
-                <a:spcPct val="100000"/>
-              </a:lnSpc>
-              <a:spcBef>
-                <a:spcPts val="0"/>
-              </a:spcBef>
-              <a:spcAft>
-                <a:spcPts val="0"/>
-              </a:spcAft>
-              <a:buClrTx/>
-              <a:buSzTx/>
-              <a:buFontTx/>
-              <a:buNone/>
-              <a:tabLst/>
-              <a:defRPr/>
-            </a:pPr>
-            <a:r>
-              <a:rPr kumimoji="0" lang="en-US" altLang="zh-TW" sz="1200" b="1" i="0" u="none" strike="noStrike" kern="1200" cap="none" spc="0" normalizeH="0" baseline="0" noProof="0" dirty="0">
-                <a:ln w="0"/>
-                <a:solidFill>
-                  <a:prstClr val="black"/>
-                </a:solidFill>
-                <a:effectLst/>
-                <a:uLnTx/>
-                <a:uFillTx/>
-                <a:latin typeface="Calibri"/>
-                <a:ea typeface="新細明體" panose="02020500000000000000" pitchFamily="18" charset="-120"/>
-                <a:cs typeface="+mn-cs"/>
-              </a:rPr>
-              <a:t>Multi </a:t>
-            </a:r>
-            <a:r>
-              <a:rPr lang="en-US" altLang="zh-TW" sz="1200" b="1" dirty="0">
-                <a:ln w="0"/>
-                <a:solidFill>
-                  <a:prstClr val="black"/>
-                </a:solidFill>
-                <a:latin typeface="Calibri"/>
-                <a:ea typeface="新細明體" panose="02020500000000000000" pitchFamily="18" charset="-120"/>
-              </a:rPr>
-              <a:t>Latent</a:t>
-            </a:r>
-          </a:p>
-          <a:p>
-            <a:pPr marL="0" marR="0" lvl="0" indent="0" algn="ctr" defTabSz="914400" rtl="0" eaLnBrk="1" fontAlgn="auto" latinLnBrk="0" hangingPunct="1">
-              <a:lnSpc>
-                <a:spcPct val="100000"/>
-              </a:lnSpc>
-              <a:spcBef>
-                <a:spcPts val="0"/>
-              </a:spcBef>
-              <a:spcAft>
-                <a:spcPts val="0"/>
-              </a:spcAft>
-              <a:buClrTx/>
-              <a:buSzTx/>
-              <a:buFontTx/>
-              <a:buNone/>
-              <a:tabLst/>
-              <a:defRPr/>
-            </a:pPr>
-            <a:r>
-              <a:rPr kumimoji="0" lang="en-US" altLang="zh-TW" sz="1200" b="1" i="0" u="none" strike="noStrike" kern="1200" cap="none" spc="0" normalizeH="0" baseline="0" noProof="0" dirty="0">
-                <a:ln w="0"/>
-                <a:solidFill>
-                  <a:prstClr val="black"/>
-                </a:solidFill>
-                <a:effectLst/>
-                <a:uLnTx/>
-                <a:uFillTx/>
-                <a:latin typeface="Calibri"/>
-                <a:ea typeface="新細明體" panose="02020500000000000000" pitchFamily="18" charset="-120"/>
-                <a:cs typeface="+mn-cs"/>
-              </a:rPr>
-              <a:t>Attention</a:t>
-            </a:r>
-          </a:p>
-        </p:txBody>
-      </p:sp>
-      <p:sp>
-        <p:nvSpPr>
-          <p:cNvPr id="31" name="矩形 30">
-            <a:extLst>
-              <a:ext uri="{FF2B5EF4-FFF2-40B4-BE49-F238E27FC236}">
-                <a16:creationId xmlns:a16="http://schemas.microsoft.com/office/drawing/2014/main" id="{E9F6D5AD-9561-8B3B-9EE9-975ADF9B9104}"/>
-              </a:ext>
-            </a:extLst>
-          </p:cNvPr>
-          <p:cNvSpPr/>
-          <p:nvPr/>
-        </p:nvSpPr>
-        <p:spPr>
-          <a:xfrm>
-            <a:off x="2672736" y="4188187"/>
-            <a:ext cx="731520" cy="172665"/>
-          </a:xfrm>
-          <a:prstGeom prst="rect">
-            <a:avLst/>
-          </a:prstGeom>
-          <a:solidFill>
-            <a:schemeClr val="accent3">
-              <a:lumMod val="20000"/>
-              <a:lumOff val="80000"/>
-              <a:alpha val="90000"/>
-            </a:schemeClr>
-          </a:solidFill>
-          <a:ln w="3175">
-            <a:solidFill>
-              <a:schemeClr val="accent3">
-                <a:lumMod val="60000"/>
-                <a:lumOff val="40000"/>
-              </a:schemeClr>
-            </a:solidFill>
-          </a:ln>
-        </p:spPr>
-        <p:style>
-          <a:lnRef idx="2">
-            <a:schemeClr val="accent1">
-              <a:shade val="15000"/>
-            </a:schemeClr>
-          </a:lnRef>
-          <a:fillRef idx="1">
-            <a:schemeClr val="accent1"/>
-          </a:fillRef>
-          <a:effectRef idx="0">
-            <a:schemeClr val="accent1"/>
-          </a:effectRef>
-          <a:fontRef idx="minor">
-            <a:schemeClr val="lt1"/>
-          </a:fontRef>
-        </p:style>
-        <p:txBody>
-          <a:bodyPr wrap="none" lIns="0" tIns="0" rIns="0" bIns="0" rtlCol="0" anchor="ctr"/>
-          <a:lstStyle/>
-          <a:p>
-            <a:pPr marL="0" marR="0" lvl="0" indent="0" algn="ctr" defTabSz="914400" rtl="0" eaLnBrk="1" fontAlgn="auto" latinLnBrk="0" hangingPunct="1">
-              <a:lnSpc>
-                <a:spcPct val="100000"/>
-              </a:lnSpc>
-              <a:spcBef>
-                <a:spcPts val="0"/>
-              </a:spcBef>
-              <a:spcAft>
-                <a:spcPts val="0"/>
-              </a:spcAft>
-              <a:buClrTx/>
-              <a:buSzTx/>
-              <a:buFontTx/>
-              <a:buNone/>
-              <a:tabLst/>
-              <a:defRPr/>
-            </a:pPr>
-            <a:r>
-              <a:rPr lang="en-US" altLang="zh-TW" sz="1200" b="1" dirty="0">
-                <a:ln w="0"/>
-                <a:solidFill>
-                  <a:prstClr val="black"/>
-                </a:solidFill>
-                <a:latin typeface="Calibri"/>
-                <a:ea typeface="新細明體" panose="02020500000000000000" pitchFamily="18" charset="-120"/>
-              </a:rPr>
-              <a:t>MH</a:t>
-            </a:r>
-            <a:r>
-              <a:rPr kumimoji="0" lang="en-US" altLang="zh-TW" sz="1200" b="1" i="0" u="none" strike="noStrike" kern="1200" cap="none" spc="0" normalizeH="0" baseline="0" noProof="0" dirty="0">
-                <a:ln w="0"/>
-                <a:solidFill>
-                  <a:prstClr val="black"/>
-                </a:solidFill>
-                <a:effectLst/>
-                <a:uLnTx/>
-                <a:uFillTx/>
-                <a:latin typeface="Calibri"/>
-                <a:ea typeface="新細明體" panose="02020500000000000000" pitchFamily="18" charset="-120"/>
-                <a:cs typeface="+mn-cs"/>
-              </a:rPr>
-              <a:t>A</a:t>
+              <a:t>/Skip</a:t>
             </a:r>
           </a:p>
         </p:txBody>
@@ -3925,7 +3439,7 @@
         </p:nvCxnSpPr>
         <p:spPr>
           <a:xfrm flipH="1">
-            <a:off x="7236926" y="4200345"/>
+            <a:off x="8581158" y="4424879"/>
             <a:ext cx="2" cy="318651"/>
           </a:xfrm>
           <a:prstGeom prst="straightConnector1">
@@ -3933,7 +3447,9 @@
           </a:prstGeom>
           <a:ln w="22225">
             <a:solidFill>
-              <a:schemeClr val="accent1"/>
+              <a:schemeClr val="accent3">
+                <a:lumMod val="75000"/>
+              </a:schemeClr>
             </a:solidFill>
             <a:prstDash val="solid"/>
             <a:tailEnd type="triangle"/>
@@ -3968,7 +3484,7 @@
         </p:nvSpPr>
         <p:spPr>
           <a:xfrm>
-            <a:off x="7021533" y="4518996"/>
+            <a:off x="8365765" y="4743530"/>
             <a:ext cx="430785" cy="241576"/>
           </a:xfrm>
           <a:prstGeom prst="rect">
@@ -4045,131 +3561,6 @@
           </a:p>
         </p:txBody>
       </p:sp>
-      <p:sp>
-        <p:nvSpPr>
-          <p:cNvPr id="38" name="矩形 37">
-            <a:extLst>
-              <a:ext uri="{FF2B5EF4-FFF2-40B4-BE49-F238E27FC236}">
-                <a16:creationId xmlns:a16="http://schemas.microsoft.com/office/drawing/2014/main" id="{C3BBF09B-E535-6D8F-9D33-2BF80A6AE597}"/>
-              </a:ext>
-            </a:extLst>
-          </p:cNvPr>
-          <p:cNvSpPr/>
-          <p:nvPr/>
-        </p:nvSpPr>
-        <p:spPr>
-          <a:xfrm>
-            <a:off x="6746166" y="5941145"/>
-            <a:ext cx="628458" cy="361919"/>
-          </a:xfrm>
-          <a:prstGeom prst="rect">
-            <a:avLst/>
-          </a:prstGeom>
-          <a:solidFill>
-            <a:schemeClr val="accent1">
-              <a:lumMod val="20000"/>
-              <a:lumOff val="80000"/>
-              <a:alpha val="90000"/>
-            </a:schemeClr>
-          </a:solidFill>
-          <a:ln w="3175">
-            <a:solidFill>
-              <a:schemeClr val="accent1">
-                <a:lumMod val="60000"/>
-                <a:lumOff val="40000"/>
-              </a:schemeClr>
-            </a:solidFill>
-          </a:ln>
-        </p:spPr>
-        <p:style>
-          <a:lnRef idx="2">
-            <a:schemeClr val="accent1">
-              <a:shade val="15000"/>
-            </a:schemeClr>
-          </a:lnRef>
-          <a:fillRef idx="1">
-            <a:schemeClr val="accent1"/>
-          </a:fillRef>
-          <a:effectRef idx="0">
-            <a:schemeClr val="accent1"/>
-          </a:effectRef>
-          <a:fontRef idx="minor">
-            <a:schemeClr val="lt1"/>
-          </a:fontRef>
-        </p:style>
-        <p:txBody>
-          <a:bodyPr wrap="none" lIns="0" tIns="0" rIns="0" bIns="0" rtlCol="0" anchor="ctr"/>
-          <a:lstStyle/>
-          <a:p>
-            <a:pPr marL="0" marR="0" lvl="0" indent="0" algn="ctr" defTabSz="914400" rtl="0" eaLnBrk="1" fontAlgn="auto" latinLnBrk="0" hangingPunct="1">
-              <a:lnSpc>
-                <a:spcPct val="100000"/>
-              </a:lnSpc>
-              <a:spcBef>
-                <a:spcPts val="0"/>
-              </a:spcBef>
-              <a:spcAft>
-                <a:spcPts val="0"/>
-              </a:spcAft>
-              <a:buClrTx/>
-              <a:buSzTx/>
-              <a:buFontTx/>
-              <a:buNone/>
-              <a:tabLst/>
-              <a:defRPr/>
-            </a:pPr>
-            <a:r>
-              <a:rPr kumimoji="0" lang="en-US" altLang="zh-TW" sz="1200" b="1" i="0" u="none" strike="noStrike" kern="1200" cap="none" spc="0" normalizeH="0" baseline="0" noProof="0" dirty="0">
-                <a:ln w="0"/>
-                <a:solidFill>
-                  <a:prstClr val="black"/>
-                </a:solidFill>
-                <a:effectLst/>
-                <a:uLnTx/>
-                <a:uFillTx/>
-                <a:latin typeface="Calibri"/>
-                <a:ea typeface="新細明體" panose="02020500000000000000" pitchFamily="18" charset="-120"/>
-                <a:cs typeface="+mn-cs"/>
-              </a:rPr>
-              <a:t>KDA</a:t>
-            </a:r>
-          </a:p>
-          <a:p>
-            <a:pPr marL="0" marR="0" lvl="0" indent="0" algn="ctr" defTabSz="914400" rtl="0" eaLnBrk="1" fontAlgn="auto" latinLnBrk="0" hangingPunct="1">
-              <a:lnSpc>
-                <a:spcPct val="100000"/>
-              </a:lnSpc>
-              <a:spcBef>
-                <a:spcPts val="0"/>
-              </a:spcBef>
-              <a:spcAft>
-                <a:spcPts val="0"/>
-              </a:spcAft>
-              <a:buClrTx/>
-              <a:buSzTx/>
-              <a:buFontTx/>
-              <a:buNone/>
-              <a:tabLst/>
-              <a:defRPr/>
-            </a:pPr>
-            <a:r>
-              <a:rPr kumimoji="0" lang="en-US" altLang="zh-TW" sz="1200" b="1" i="0" u="none" strike="noStrike" kern="1200" cap="none" spc="0" normalizeH="0" baseline="0" noProof="0" dirty="0">
-                <a:ln w="0"/>
-                <a:solidFill>
-                  <a:prstClr val="black"/>
-                </a:solidFill>
-                <a:effectLst/>
-                <a:uLnTx/>
-                <a:uFillTx/>
-                <a:latin typeface="Calibri"/>
-                <a:ea typeface="新細明體" panose="02020500000000000000" pitchFamily="18" charset="-120"/>
-                <a:cs typeface="+mn-cs"/>
-              </a:rPr>
-              <a:t>AttnRes</a:t>
-            </a:r>
-          </a:p>
-        </p:txBody>
-      </p:sp>
       <p:cxnSp>
         <p:nvCxnSpPr>
           <p:cNvPr id="39" name="直線單箭頭接點 38">
@@ -4188,15 +3579,17 @@
         </p:nvCxnSpPr>
         <p:spPr>
           <a:xfrm flipH="1">
-            <a:off x="1181746" y="4718440"/>
-            <a:ext cx="1" cy="1080526"/>
+            <a:off x="1337519" y="2846232"/>
+            <a:ext cx="1" cy="1469012"/>
           </a:xfrm>
           <a:prstGeom prst="straightConnector1">
             <a:avLst/>
           </a:prstGeom>
           <a:ln w="22225">
             <a:solidFill>
-              <a:schemeClr val="accent1"/>
+              <a:schemeClr val="accent3">
+                <a:lumMod val="75000"/>
+              </a:schemeClr>
             </a:solidFill>
             <a:prstDash val="solid"/>
             <a:tailEnd type="triangle"/>
@@ -4231,7 +3624,7 @@
         </p:nvSpPr>
         <p:spPr>
           <a:xfrm>
-            <a:off x="827585" y="4545524"/>
+            <a:off x="983358" y="2673316"/>
             <a:ext cx="708323" cy="172916"/>
           </a:xfrm>
           <a:prstGeom prst="rect">
@@ -4330,7 +3723,7 @@
         </p:nvSpPr>
         <p:spPr>
           <a:xfrm>
-            <a:off x="827584" y="5798966"/>
+            <a:off x="983357" y="4315244"/>
             <a:ext cx="708323" cy="150314"/>
           </a:xfrm>
           <a:prstGeom prst="rect">
@@ -4407,719 +3800,6 @@
           </a:p>
         </p:txBody>
       </p:sp>
-      <p:cxnSp>
-        <p:nvCxnSpPr>
-          <p:cNvPr id="45" name="直線單箭頭接點 44">
-            <a:extLst>
-              <a:ext uri="{FF2B5EF4-FFF2-40B4-BE49-F238E27FC236}">
-                <a16:creationId xmlns:a16="http://schemas.microsoft.com/office/drawing/2014/main" id="{4ED559E8-20A7-6144-F4C3-CB32FB2CB002}"/>
-              </a:ext>
-            </a:extLst>
-          </p:cNvPr>
-          <p:cNvCxnSpPr>
-            <a:cxnSpLocks/>
-            <a:stCxn id="49" idx="2"/>
-            <a:endCxn id="50" idx="0"/>
-          </p:cNvCxnSpPr>
-          <p:nvPr/>
-        </p:nvCxnSpPr>
-        <p:spPr>
-          <a:xfrm>
-            <a:off x="2201456" y="4365058"/>
-            <a:ext cx="0" cy="986441"/>
-          </a:xfrm>
-          <a:prstGeom prst="straightConnector1">
-            <a:avLst/>
-          </a:prstGeom>
-          <a:ln w="22225">
-            <a:solidFill>
-              <a:schemeClr val="accent1"/>
-            </a:solidFill>
-            <a:prstDash val="solid"/>
-            <a:tailEnd type="triangle"/>
-          </a:ln>
-        </p:spPr>
-        <p:style>
-          <a:lnRef idx="1">
-            <a:schemeClr val="accent1"/>
-          </a:lnRef>
-          <a:fillRef idx="0">
-            <a:schemeClr val="accent1"/>
-          </a:fillRef>
-          <a:effectRef idx="0">
-            <a:schemeClr val="accent1"/>
-          </a:effectRef>
-          <a:fontRef idx="minor">
-            <a:schemeClr val="tx1"/>
-          </a:fontRef>
-        </p:style>
-      </p:cxnSp>
-      <p:sp>
-        <p:nvSpPr>
-          <p:cNvPr id="46" name="矩形 45">
-            <a:extLst>
-              <a:ext uri="{FF2B5EF4-FFF2-40B4-BE49-F238E27FC236}">
-                <a16:creationId xmlns:a16="http://schemas.microsoft.com/office/drawing/2014/main" id="{2CE58CCD-7B0B-E793-E6B9-CF9404AF1D3F}"/>
-              </a:ext>
-            </a:extLst>
-          </p:cNvPr>
-          <p:cNvSpPr/>
-          <p:nvPr/>
-        </p:nvSpPr>
-        <p:spPr>
-          <a:xfrm>
-            <a:off x="1835696" y="4480174"/>
-            <a:ext cx="731520" cy="172916"/>
-          </a:xfrm>
-          <a:prstGeom prst="rect">
-            <a:avLst/>
-          </a:prstGeom>
-          <a:solidFill>
-            <a:schemeClr val="accent3">
-              <a:lumMod val="20000"/>
-              <a:lumOff val="80000"/>
-              <a:alpha val="90000"/>
-            </a:schemeClr>
-          </a:solidFill>
-          <a:ln w="3175">
-            <a:solidFill>
-              <a:schemeClr val="accent3">
-                <a:lumMod val="60000"/>
-                <a:lumOff val="40000"/>
-              </a:schemeClr>
-            </a:solidFill>
-          </a:ln>
-        </p:spPr>
-        <p:style>
-          <a:lnRef idx="2">
-            <a:schemeClr val="accent1">
-              <a:shade val="15000"/>
-            </a:schemeClr>
-          </a:lnRef>
-          <a:fillRef idx="1">
-            <a:schemeClr val="accent1"/>
-          </a:fillRef>
-          <a:effectRef idx="0">
-            <a:schemeClr val="accent1"/>
-          </a:effectRef>
-          <a:fontRef idx="minor">
-            <a:schemeClr val="lt1"/>
-          </a:fontRef>
-        </p:style>
-        <p:txBody>
-          <a:bodyPr wrap="none" lIns="0" tIns="0" rIns="0" bIns="0" rtlCol="0" anchor="ctr"/>
-          <a:lstStyle/>
-          <a:p>
-            <a:pPr marL="0" marR="0" lvl="0" indent="0" algn="ctr" defTabSz="914400" rtl="0" eaLnBrk="1" fontAlgn="auto" latinLnBrk="0" hangingPunct="1">
-              <a:lnSpc>
-                <a:spcPct val="100000"/>
-              </a:lnSpc>
-              <a:spcBef>
-                <a:spcPts val="0"/>
-              </a:spcBef>
-              <a:spcAft>
-                <a:spcPts val="0"/>
-              </a:spcAft>
-              <a:buClrTx/>
-              <a:buSzTx/>
-              <a:buFontTx/>
-              <a:buNone/>
-              <a:tabLst/>
-              <a:defRPr/>
-            </a:pPr>
-            <a:r>
-              <a:rPr lang="en-US" altLang="zh-TW" sz="1200" b="1" dirty="0" err="1">
-                <a:ln w="0"/>
-                <a:solidFill>
-                  <a:prstClr val="black"/>
-                </a:solidFill>
-                <a:latin typeface="Calibri"/>
-                <a:ea typeface="新細明體" panose="02020500000000000000" pitchFamily="18" charset="-120"/>
-              </a:rPr>
-              <a:t>RoPE</a:t>
-            </a:r>
-            <a:endParaRPr kumimoji="0" lang="en-US" altLang="zh-TW" sz="1200" b="1" i="0" u="none" strike="noStrike" kern="1200" cap="none" spc="0" normalizeH="0" baseline="0" noProof="0" dirty="0">
-              <a:ln w="0"/>
-              <a:solidFill>
-                <a:prstClr val="black"/>
-              </a:solidFill>
-              <a:effectLst/>
-              <a:uLnTx/>
-              <a:uFillTx/>
-              <a:latin typeface="Calibri"/>
-              <a:ea typeface="新細明體" panose="02020500000000000000" pitchFamily="18" charset="-120"/>
-              <a:cs typeface="+mn-cs"/>
-            </a:endParaRPr>
-          </a:p>
-        </p:txBody>
-      </p:sp>
-      <p:sp>
-        <p:nvSpPr>
-          <p:cNvPr id="47" name="矩形 46">
-            <a:extLst>
-              <a:ext uri="{FF2B5EF4-FFF2-40B4-BE49-F238E27FC236}">
-                <a16:creationId xmlns:a16="http://schemas.microsoft.com/office/drawing/2014/main" id="{D70EE51F-11F3-E227-6416-3EF6D0A0EF82}"/>
-              </a:ext>
-            </a:extLst>
-          </p:cNvPr>
-          <p:cNvSpPr/>
-          <p:nvPr/>
-        </p:nvSpPr>
-        <p:spPr>
-          <a:xfrm>
-            <a:off x="1835696" y="4775435"/>
-            <a:ext cx="731520" cy="165687"/>
-          </a:xfrm>
-          <a:prstGeom prst="rect">
-            <a:avLst/>
-          </a:prstGeom>
-          <a:solidFill>
-            <a:schemeClr val="accent3">
-              <a:lumMod val="20000"/>
-              <a:lumOff val="80000"/>
-              <a:alpha val="90000"/>
-            </a:schemeClr>
-          </a:solidFill>
-          <a:ln w="3175">
-            <a:solidFill>
-              <a:schemeClr val="accent3">
-                <a:lumMod val="60000"/>
-                <a:lumOff val="40000"/>
-              </a:schemeClr>
-            </a:solidFill>
-          </a:ln>
-        </p:spPr>
-        <p:style>
-          <a:lnRef idx="2">
-            <a:schemeClr val="accent1">
-              <a:shade val="15000"/>
-            </a:schemeClr>
-          </a:lnRef>
-          <a:fillRef idx="1">
-            <a:schemeClr val="accent1"/>
-          </a:fillRef>
-          <a:effectRef idx="0">
-            <a:schemeClr val="accent1"/>
-          </a:effectRef>
-          <a:fontRef idx="minor">
-            <a:schemeClr val="lt1"/>
-          </a:fontRef>
-        </p:style>
-        <p:txBody>
-          <a:bodyPr wrap="none" lIns="0" tIns="0" rIns="0" bIns="0" rtlCol="0" anchor="ctr"/>
-          <a:lstStyle/>
-          <a:p>
-            <a:pPr marL="0" marR="0" lvl="0" indent="0" algn="ctr" defTabSz="914400" rtl="0" eaLnBrk="1" fontAlgn="auto" latinLnBrk="0" hangingPunct="1">
-              <a:lnSpc>
-                <a:spcPct val="100000"/>
-              </a:lnSpc>
-              <a:spcBef>
-                <a:spcPts val="0"/>
-              </a:spcBef>
-              <a:spcAft>
-                <a:spcPts val="0"/>
-              </a:spcAft>
-              <a:buClrTx/>
-              <a:buSzTx/>
-              <a:buFontTx/>
-              <a:buNone/>
-              <a:tabLst/>
-              <a:defRPr/>
-            </a:pPr>
-            <a:r>
-              <a:rPr lang="en-US" altLang="zh-TW" sz="1200" b="1" dirty="0" err="1">
-                <a:ln w="0"/>
-                <a:solidFill>
-                  <a:prstClr val="black"/>
-                </a:solidFill>
-                <a:latin typeface="Calibri"/>
-                <a:ea typeface="新細明體" panose="02020500000000000000" pitchFamily="18" charset="-120"/>
-              </a:rPr>
-              <a:t>NoPE</a:t>
-            </a:r>
-            <a:endParaRPr kumimoji="0" lang="en-US" altLang="zh-TW" sz="1200" b="1" i="0" u="none" strike="noStrike" kern="1200" cap="none" spc="0" normalizeH="0" baseline="0" noProof="0" dirty="0">
-              <a:ln w="0"/>
-              <a:solidFill>
-                <a:prstClr val="black"/>
-              </a:solidFill>
-              <a:effectLst/>
-              <a:uLnTx/>
-              <a:uFillTx/>
-              <a:latin typeface="Calibri"/>
-              <a:ea typeface="新細明體" panose="02020500000000000000" pitchFamily="18" charset="-120"/>
-              <a:cs typeface="+mn-cs"/>
-            </a:endParaRPr>
-          </a:p>
-        </p:txBody>
-      </p:sp>
-      <p:sp>
-        <p:nvSpPr>
-          <p:cNvPr id="48" name="矩形 47">
-            <a:extLst>
-              <a:ext uri="{FF2B5EF4-FFF2-40B4-BE49-F238E27FC236}">
-                <a16:creationId xmlns:a16="http://schemas.microsoft.com/office/drawing/2014/main" id="{8C481EE5-03DA-1F5B-927C-966083F6C882}"/>
-              </a:ext>
-            </a:extLst>
-          </p:cNvPr>
-          <p:cNvSpPr/>
-          <p:nvPr/>
-        </p:nvSpPr>
-        <p:spPr>
-          <a:xfrm>
-            <a:off x="1835696" y="5036848"/>
-            <a:ext cx="731520" cy="165687"/>
-          </a:xfrm>
-          <a:prstGeom prst="rect">
-            <a:avLst/>
-          </a:prstGeom>
-          <a:solidFill>
-            <a:schemeClr val="accent3">
-              <a:lumMod val="20000"/>
-              <a:lumOff val="80000"/>
-              <a:alpha val="90000"/>
-            </a:schemeClr>
-          </a:solidFill>
-          <a:ln w="3175">
-            <a:solidFill>
-              <a:schemeClr val="accent3">
-                <a:lumMod val="60000"/>
-                <a:lumOff val="40000"/>
-              </a:schemeClr>
-            </a:solidFill>
-          </a:ln>
-        </p:spPr>
-        <p:style>
-          <a:lnRef idx="2">
-            <a:schemeClr val="accent1">
-              <a:shade val="15000"/>
-            </a:schemeClr>
-          </a:lnRef>
-          <a:fillRef idx="1">
-            <a:schemeClr val="accent1"/>
-          </a:fillRef>
-          <a:effectRef idx="0">
-            <a:schemeClr val="accent1"/>
-          </a:effectRef>
-          <a:fontRef idx="minor">
-            <a:schemeClr val="lt1"/>
-          </a:fontRef>
-        </p:style>
-        <p:txBody>
-          <a:bodyPr wrap="none" lIns="0" tIns="0" rIns="0" bIns="0" rtlCol="0" anchor="ctr"/>
-          <a:lstStyle/>
-          <a:p>
-            <a:pPr marL="0" marR="0" lvl="0" indent="0" algn="ctr" defTabSz="914400" rtl="0" eaLnBrk="1" fontAlgn="auto" latinLnBrk="0" hangingPunct="1">
-              <a:lnSpc>
-                <a:spcPct val="100000"/>
-              </a:lnSpc>
-              <a:spcBef>
-                <a:spcPts val="0"/>
-              </a:spcBef>
-              <a:spcAft>
-                <a:spcPts val="0"/>
-              </a:spcAft>
-              <a:buClrTx/>
-              <a:buSzTx/>
-              <a:buFontTx/>
-              <a:buNone/>
-              <a:tabLst/>
-              <a:defRPr/>
-            </a:pPr>
-            <a:r>
-              <a:rPr kumimoji="0" lang="en-US" altLang="zh-TW" sz="1200" b="1" i="0" u="none" strike="noStrike" kern="1200" cap="none" spc="0" normalizeH="0" baseline="0" noProof="0" dirty="0">
-                <a:ln w="0"/>
-                <a:solidFill>
-                  <a:prstClr val="black"/>
-                </a:solidFill>
-                <a:effectLst/>
-                <a:uLnTx/>
-                <a:uFillTx/>
-                <a:latin typeface="Calibri"/>
-                <a:ea typeface="新細明體" panose="02020500000000000000" pitchFamily="18" charset="-120"/>
-                <a:cs typeface="+mn-cs"/>
-              </a:rPr>
-              <a:t>Decouple</a:t>
-            </a:r>
-          </a:p>
-        </p:txBody>
-      </p:sp>
-      <p:sp>
-        <p:nvSpPr>
-          <p:cNvPr id="49" name="矩形 48">
-            <a:extLst>
-              <a:ext uri="{FF2B5EF4-FFF2-40B4-BE49-F238E27FC236}">
-                <a16:creationId xmlns:a16="http://schemas.microsoft.com/office/drawing/2014/main" id="{FFDB034B-47CC-EC94-72A4-65725CFB25A7}"/>
-              </a:ext>
-            </a:extLst>
-          </p:cNvPr>
-          <p:cNvSpPr/>
-          <p:nvPr/>
-        </p:nvSpPr>
-        <p:spPr>
-          <a:xfrm>
-            <a:off x="1835696" y="4192142"/>
-            <a:ext cx="731520" cy="172916"/>
-          </a:xfrm>
-          <a:prstGeom prst="rect">
-            <a:avLst/>
-          </a:prstGeom>
-          <a:solidFill>
-            <a:schemeClr val="accent3">
-              <a:lumMod val="20000"/>
-              <a:lumOff val="80000"/>
-              <a:alpha val="90000"/>
-            </a:schemeClr>
-          </a:solidFill>
-          <a:ln w="3175">
-            <a:solidFill>
-              <a:schemeClr val="accent3">
-                <a:lumMod val="60000"/>
-                <a:lumOff val="40000"/>
-              </a:schemeClr>
-            </a:solidFill>
-          </a:ln>
-        </p:spPr>
-        <p:style>
-          <a:lnRef idx="2">
-            <a:schemeClr val="accent1">
-              <a:shade val="15000"/>
-            </a:schemeClr>
-          </a:lnRef>
-          <a:fillRef idx="1">
-            <a:schemeClr val="accent1"/>
-          </a:fillRef>
-          <a:effectRef idx="0">
-            <a:schemeClr val="accent1"/>
-          </a:effectRef>
-          <a:fontRef idx="minor">
-            <a:schemeClr val="lt1"/>
-          </a:fontRef>
-        </p:style>
-        <p:txBody>
-          <a:bodyPr wrap="none" lIns="0" tIns="0" rIns="0" bIns="0" rtlCol="0" anchor="ctr"/>
-          <a:lstStyle/>
-          <a:p>
-            <a:pPr marL="0" marR="0" lvl="0" indent="0" algn="ctr" defTabSz="914400" rtl="0" eaLnBrk="1" fontAlgn="auto" latinLnBrk="0" hangingPunct="1">
-              <a:lnSpc>
-                <a:spcPct val="100000"/>
-              </a:lnSpc>
-              <a:spcBef>
-                <a:spcPts val="0"/>
-              </a:spcBef>
-              <a:spcAft>
-                <a:spcPts val="0"/>
-              </a:spcAft>
-              <a:buClrTx/>
-              <a:buSzTx/>
-              <a:buFontTx/>
-              <a:buNone/>
-              <a:tabLst/>
-              <a:defRPr/>
-            </a:pPr>
-            <a:r>
-              <a:rPr lang="en-US" altLang="zh-TW" sz="1200" b="1" dirty="0">
-                <a:ln w="0"/>
-                <a:solidFill>
-                  <a:prstClr val="black"/>
-                </a:solidFill>
-                <a:latin typeface="Calibri"/>
-                <a:ea typeface="新細明體" panose="02020500000000000000" pitchFamily="18" charset="-120"/>
-              </a:rPr>
-              <a:t>PE</a:t>
-            </a:r>
-            <a:endParaRPr kumimoji="0" lang="en-US" altLang="zh-TW" sz="1200" b="1" i="0" u="none" strike="noStrike" kern="1200" cap="none" spc="0" normalizeH="0" baseline="0" noProof="0" dirty="0">
-              <a:ln w="0"/>
-              <a:solidFill>
-                <a:prstClr val="black"/>
-              </a:solidFill>
-              <a:effectLst/>
-              <a:uLnTx/>
-              <a:uFillTx/>
-              <a:latin typeface="Calibri"/>
-              <a:ea typeface="新細明體" panose="02020500000000000000" pitchFamily="18" charset="-120"/>
-              <a:cs typeface="+mn-cs"/>
-            </a:endParaRPr>
-          </a:p>
-        </p:txBody>
-      </p:sp>
-      <p:sp>
-        <p:nvSpPr>
-          <p:cNvPr id="50" name="矩形 49">
-            <a:extLst>
-              <a:ext uri="{FF2B5EF4-FFF2-40B4-BE49-F238E27FC236}">
-                <a16:creationId xmlns:a16="http://schemas.microsoft.com/office/drawing/2014/main" id="{E58CE629-9C97-E6A5-73B1-3258C20DCA38}"/>
-              </a:ext>
-            </a:extLst>
-          </p:cNvPr>
-          <p:cNvSpPr/>
-          <p:nvPr/>
-        </p:nvSpPr>
-        <p:spPr>
-          <a:xfrm>
-            <a:off x="1835696" y="5351499"/>
-            <a:ext cx="731520" cy="309749"/>
-          </a:xfrm>
-          <a:prstGeom prst="rect">
-            <a:avLst/>
-          </a:prstGeom>
-          <a:solidFill>
-            <a:schemeClr val="accent3">
-              <a:lumMod val="20000"/>
-              <a:lumOff val="80000"/>
-              <a:alpha val="90000"/>
-            </a:schemeClr>
-          </a:solidFill>
-          <a:ln w="3175">
-            <a:solidFill>
-              <a:schemeClr val="accent3">
-                <a:lumMod val="60000"/>
-                <a:lumOff val="40000"/>
-              </a:schemeClr>
-            </a:solidFill>
-          </a:ln>
-        </p:spPr>
-        <p:style>
-          <a:lnRef idx="2">
-            <a:schemeClr val="accent1">
-              <a:shade val="15000"/>
-            </a:schemeClr>
-          </a:lnRef>
-          <a:fillRef idx="1">
-            <a:schemeClr val="accent1"/>
-          </a:fillRef>
-          <a:effectRef idx="0">
-            <a:schemeClr val="accent1"/>
-          </a:effectRef>
-          <a:fontRef idx="minor">
-            <a:schemeClr val="lt1"/>
-          </a:fontRef>
-        </p:style>
-        <p:txBody>
-          <a:bodyPr wrap="none" lIns="0" tIns="0" rIns="0" bIns="0" rtlCol="0" anchor="ctr"/>
-          <a:lstStyle/>
-          <a:p>
-            <a:pPr marL="0" marR="0" lvl="0" indent="0" algn="ctr" defTabSz="914400" rtl="0" eaLnBrk="1" fontAlgn="auto" latinLnBrk="0" hangingPunct="1">
-              <a:lnSpc>
-                <a:spcPct val="100000"/>
-              </a:lnSpc>
-              <a:spcBef>
-                <a:spcPts val="0"/>
-              </a:spcBef>
-              <a:spcAft>
-                <a:spcPts val="0"/>
-              </a:spcAft>
-              <a:buClrTx/>
-              <a:buSzTx/>
-              <a:buFontTx/>
-              <a:buNone/>
-              <a:tabLst/>
-              <a:defRPr/>
-            </a:pPr>
-            <a:r>
-              <a:rPr kumimoji="0" lang="en-US" altLang="zh-TW" sz="1200" b="1" i="0" u="none" strike="noStrike" kern="1200" cap="none" spc="0" normalizeH="0" baseline="0" noProof="0" dirty="0" err="1">
-                <a:ln w="0"/>
-                <a:solidFill>
-                  <a:prstClr val="black"/>
-                </a:solidFill>
-                <a:effectLst/>
-                <a:uLnTx/>
-                <a:uFillTx/>
-                <a:latin typeface="Calibri"/>
-                <a:ea typeface="新細明體" panose="02020500000000000000" pitchFamily="18" charset="-120"/>
-                <a:cs typeface="+mn-cs"/>
-              </a:rPr>
-              <a:t>NoPE</a:t>
-            </a:r>
-            <a:endParaRPr kumimoji="0" lang="en-US" altLang="zh-TW" sz="1200" b="1" i="0" u="none" strike="noStrike" kern="1200" cap="none" spc="0" normalizeH="0" baseline="0" noProof="0" dirty="0">
-              <a:ln w="0"/>
-              <a:solidFill>
-                <a:prstClr val="black"/>
-              </a:solidFill>
-              <a:effectLst/>
-              <a:uLnTx/>
-              <a:uFillTx/>
-              <a:latin typeface="Calibri"/>
-              <a:ea typeface="新細明體" panose="02020500000000000000" pitchFamily="18" charset="-120"/>
-              <a:cs typeface="+mn-cs"/>
-            </a:endParaRPr>
-          </a:p>
-          <a:p>
-            <a:pPr marL="0" marR="0" lvl="0" indent="0" algn="ctr" defTabSz="914400" rtl="0" eaLnBrk="1" fontAlgn="auto" latinLnBrk="0" hangingPunct="1">
-              <a:lnSpc>
-                <a:spcPct val="100000"/>
-              </a:lnSpc>
-              <a:spcBef>
-                <a:spcPts val="0"/>
-              </a:spcBef>
-              <a:spcAft>
-                <a:spcPts val="0"/>
-              </a:spcAft>
-              <a:buClrTx/>
-              <a:buSzTx/>
-              <a:buFontTx/>
-              <a:buNone/>
-              <a:tabLst/>
-              <a:defRPr/>
-            </a:pPr>
-            <a:r>
-              <a:rPr lang="en-US" altLang="zh-TW" sz="1200" b="1" dirty="0">
-                <a:ln w="0"/>
-                <a:solidFill>
-                  <a:prstClr val="black"/>
-                </a:solidFill>
-                <a:latin typeface="Calibri"/>
-                <a:ea typeface="新細明體" panose="02020500000000000000" pitchFamily="18" charset="-120"/>
-              </a:rPr>
-              <a:t>everywhere</a:t>
-            </a:r>
-            <a:endParaRPr kumimoji="0" lang="en-US" altLang="zh-TW" sz="1200" b="1" i="0" u="none" strike="noStrike" kern="1200" cap="none" spc="0" normalizeH="0" baseline="0" noProof="0" dirty="0">
-              <a:ln w="0"/>
-              <a:solidFill>
-                <a:prstClr val="black"/>
-              </a:solidFill>
-              <a:effectLst/>
-              <a:uLnTx/>
-              <a:uFillTx/>
-              <a:latin typeface="Calibri"/>
-              <a:ea typeface="新細明體" panose="02020500000000000000" pitchFamily="18" charset="-120"/>
-              <a:cs typeface="+mn-cs"/>
-            </a:endParaRPr>
-          </a:p>
-        </p:txBody>
-      </p:sp>
-      <p:sp>
-        <p:nvSpPr>
-          <p:cNvPr id="4" name="矩形 3">
-            <a:extLst>
-              <a:ext uri="{FF2B5EF4-FFF2-40B4-BE49-F238E27FC236}">
-                <a16:creationId xmlns:a16="http://schemas.microsoft.com/office/drawing/2014/main" id="{0AF6AAD9-A49B-4E37-921F-F55608D4D506}"/>
-              </a:ext>
-            </a:extLst>
-          </p:cNvPr>
-          <p:cNvSpPr/>
-          <p:nvPr/>
-        </p:nvSpPr>
-        <p:spPr>
-          <a:xfrm>
-            <a:off x="5243358" y="5947402"/>
-            <a:ext cx="628457" cy="361918"/>
-          </a:xfrm>
-          <a:prstGeom prst="rect">
-            <a:avLst/>
-          </a:prstGeom>
-          <a:solidFill>
-            <a:schemeClr val="accent1">
-              <a:lumMod val="20000"/>
-              <a:lumOff val="80000"/>
-              <a:alpha val="90000"/>
-            </a:schemeClr>
-          </a:solidFill>
-          <a:ln w="3175">
-            <a:solidFill>
-              <a:schemeClr val="accent1">
-                <a:lumMod val="60000"/>
-                <a:lumOff val="40000"/>
-              </a:schemeClr>
-            </a:solidFill>
-          </a:ln>
-        </p:spPr>
-        <p:style>
-          <a:lnRef idx="2">
-            <a:schemeClr val="accent1">
-              <a:shade val="15000"/>
-            </a:schemeClr>
-          </a:lnRef>
-          <a:fillRef idx="1">
-            <a:schemeClr val="accent1"/>
-          </a:fillRef>
-          <a:effectRef idx="0">
-            <a:schemeClr val="accent1"/>
-          </a:effectRef>
-          <a:fontRef idx="minor">
-            <a:schemeClr val="lt1"/>
-          </a:fontRef>
-        </p:style>
-        <p:txBody>
-          <a:bodyPr wrap="none" lIns="0" tIns="0" rIns="0" bIns="0" rtlCol="0" anchor="ctr"/>
-          <a:lstStyle/>
-          <a:p>
-            <a:pPr marL="0" marR="0" lvl="0" indent="0" algn="ctr" defTabSz="914400" rtl="0" eaLnBrk="1" fontAlgn="auto" latinLnBrk="0" hangingPunct="1">
-              <a:lnSpc>
-                <a:spcPct val="100000"/>
-              </a:lnSpc>
-              <a:spcBef>
-                <a:spcPts val="0"/>
-              </a:spcBef>
-              <a:spcAft>
-                <a:spcPts val="0"/>
-              </a:spcAft>
-              <a:buClrTx/>
-              <a:buSzTx/>
-              <a:buFontTx/>
-              <a:buNone/>
-              <a:tabLst/>
-              <a:defRPr/>
-            </a:pPr>
-            <a:r>
-              <a:rPr kumimoji="0" lang="en-US" altLang="zh-TW" sz="1200" b="1" i="0" u="none" strike="noStrike" kern="1200" cap="none" spc="0" normalizeH="0" baseline="0" noProof="0" dirty="0">
-                <a:ln w="0"/>
-                <a:solidFill>
-                  <a:prstClr val="black"/>
-                </a:solidFill>
-                <a:effectLst/>
-                <a:uLnTx/>
-                <a:uFillTx/>
-                <a:latin typeface="Calibri"/>
-                <a:ea typeface="新細明體" panose="02020500000000000000" pitchFamily="18" charset="-120"/>
-                <a:cs typeface="+mn-cs"/>
-              </a:rPr>
-              <a:t>PLE</a:t>
-            </a:r>
-          </a:p>
-          <a:p>
-            <a:pPr marL="0" marR="0" lvl="0" indent="0" algn="ctr" defTabSz="914400" rtl="0" eaLnBrk="1" fontAlgn="auto" latinLnBrk="0" hangingPunct="1">
-              <a:lnSpc>
-                <a:spcPct val="100000"/>
-              </a:lnSpc>
-              <a:spcBef>
-                <a:spcPts val="0"/>
-              </a:spcBef>
-              <a:spcAft>
-                <a:spcPts val="0"/>
-              </a:spcAft>
-              <a:buClrTx/>
-              <a:buSzTx/>
-              <a:buFontTx/>
-              <a:buNone/>
-              <a:tabLst/>
-              <a:defRPr/>
-            </a:pPr>
-            <a:r>
-              <a:rPr lang="en-US" altLang="zh-TW" sz="1200" b="1" dirty="0">
-                <a:ln w="0"/>
-                <a:solidFill>
-                  <a:prstClr val="black"/>
-                </a:solidFill>
-                <a:latin typeface="Calibri"/>
-                <a:ea typeface="新細明體" panose="02020500000000000000" pitchFamily="18" charset="-120"/>
-              </a:rPr>
-              <a:t>Diffusion</a:t>
-            </a:r>
-            <a:endParaRPr kumimoji="0" lang="en-US" altLang="zh-TW" sz="1200" b="1" i="0" u="none" strike="noStrike" kern="1200" cap="none" spc="0" normalizeH="0" baseline="0" noProof="0" dirty="0">
-              <a:ln w="0"/>
-              <a:solidFill>
-                <a:prstClr val="black"/>
-              </a:solidFill>
-              <a:effectLst/>
-              <a:uLnTx/>
-              <a:uFillTx/>
-              <a:latin typeface="Calibri"/>
-              <a:ea typeface="新細明體" panose="02020500000000000000" pitchFamily="18" charset="-120"/>
-              <a:cs typeface="+mn-cs"/>
-            </a:endParaRPr>
-          </a:p>
-        </p:txBody>
-      </p:sp>
       <p:pic>
         <p:nvPicPr>
           <p:cNvPr id="13" name="圖片 12">
@@ -5142,7 +3822,7 @@
         </p:blipFill>
         <p:spPr>
           <a:xfrm>
-            <a:off x="1029964" y="5408116"/>
+            <a:off x="1185737" y="3924394"/>
             <a:ext cx="303563" cy="397148"/>
           </a:xfrm>
           <a:prstGeom prst="rect">
@@ -5164,7 +3844,7 @@
         </p:nvSpPr>
         <p:spPr>
           <a:xfrm>
-            <a:off x="7021536" y="3958769"/>
+            <a:off x="8365768" y="4183303"/>
             <a:ext cx="430784" cy="241576"/>
           </a:xfrm>
           <a:prstGeom prst="rect">
@@ -5263,7 +3943,99 @@
         </p:nvSpPr>
         <p:spPr>
           <a:xfrm>
-            <a:off x="6282141" y="3507662"/>
+            <a:off x="6909015" y="3063596"/>
+            <a:ext cx="619114" cy="562565"/>
+          </a:xfrm>
+          <a:prstGeom prst="ellipse">
+            <a:avLst/>
+          </a:prstGeom>
+          <a:solidFill>
+            <a:schemeClr val="accent4">
+              <a:lumMod val="20000"/>
+              <a:lumOff val="80000"/>
+              <a:alpha val="70000"/>
+            </a:schemeClr>
+          </a:solidFill>
+          <a:ln w="31750">
+            <a:solidFill>
+              <a:schemeClr val="bg1">
+                <a:lumMod val="75000"/>
+              </a:schemeClr>
+            </a:solidFill>
+          </a:ln>
+        </p:spPr>
+        <p:style>
+          <a:lnRef idx="2">
+            <a:schemeClr val="accent1">
+              <a:shade val="15000"/>
+            </a:schemeClr>
+          </a:lnRef>
+          <a:fillRef idx="1">
+            <a:schemeClr val="accent1"/>
+          </a:fillRef>
+          <a:effectRef idx="0">
+            <a:schemeClr val="accent1"/>
+          </a:effectRef>
+          <a:fontRef idx="minor">
+            <a:schemeClr val="lt1"/>
+          </a:fontRef>
+        </p:style>
+        <p:txBody>
+          <a:bodyPr wrap="none" lIns="0" tIns="0" rIns="0" bIns="0" rtlCol="0" anchor="ctr" anchorCtr="1"/>
+          <a:lstStyle/>
+          <a:p>
+            <a:pPr algn="ctr">
+              <a:lnSpc>
+                <a:spcPts val="1200"/>
+              </a:lnSpc>
+            </a:pPr>
+            <a:r>
+              <a:rPr lang="en-US" altLang="zh-TW" sz="1200" dirty="0">
+                <a:solidFill>
+                  <a:schemeClr val="tx1"/>
+                </a:solidFill>
+                <a:latin typeface="ADLaM Display" panose="02010000000000000000" pitchFamily="2" charset="0"/>
+                <a:ea typeface="ADLaM Display" panose="02010000000000000000" pitchFamily="2" charset="0"/>
+                <a:cs typeface="ADLaM Display" panose="02010000000000000000" pitchFamily="2" charset="0"/>
+              </a:rPr>
+              <a:t>Dense</a:t>
+            </a:r>
+          </a:p>
+          <a:p>
+            <a:pPr algn="ctr">
+              <a:lnSpc>
+                <a:spcPts val="1200"/>
+              </a:lnSpc>
+            </a:pPr>
+            <a:r>
+              <a:rPr lang="en-US" altLang="zh-TW" sz="1200" dirty="0">
+                <a:solidFill>
+                  <a:schemeClr val="tx1"/>
+                </a:solidFill>
+                <a:latin typeface="ADLaM Display" panose="02010000000000000000" pitchFamily="2" charset="0"/>
+                <a:ea typeface="ADLaM Display" panose="02010000000000000000" pitchFamily="2" charset="0"/>
+                <a:cs typeface="ADLaM Display" panose="02010000000000000000" pitchFamily="2" charset="0"/>
+              </a:rPr>
+              <a:t>Net</a:t>
+            </a:r>
+          </a:p>
+        </p:txBody>
+      </p:sp>
+      <p:sp>
+        <p:nvSpPr>
+          <p:cNvPr id="40" name="橢圓 39">
+            <a:extLst>
+              <a:ext uri="{FF2B5EF4-FFF2-40B4-BE49-F238E27FC236}">
+                <a16:creationId xmlns:a16="http://schemas.microsoft.com/office/drawing/2014/main" id="{C26C33D0-E4B4-743E-50E7-154C9AAEFFEE}"/>
+              </a:ext>
+            </a:extLst>
+          </p:cNvPr>
+          <p:cNvSpPr/>
+          <p:nvPr/>
+        </p:nvSpPr>
+        <p:spPr>
+          <a:xfrm>
+            <a:off x="7236296" y="4017679"/>
             <a:ext cx="430784" cy="419433"/>
           </a:xfrm>
           <a:prstGeom prst="ellipse">
@@ -5318,7 +4090,7 @@
                 <a:ea typeface="ADLaM Display" panose="02010000000000000000" pitchFamily="2" charset="0"/>
                 <a:cs typeface="ADLaM Display" panose="02010000000000000000" pitchFamily="2" charset="0"/>
               </a:rPr>
-              <a:t>Dense</a:t>
+              <a:t>MUDD</a:t>
             </a:r>
           </a:p>
           <a:p>
@@ -5336,17 +4108,17 @@
                 <a:ea typeface="ADLaM Display" panose="02010000000000000000" pitchFamily="2" charset="0"/>
                 <a:cs typeface="ADLaM Display" panose="02010000000000000000" pitchFamily="2" charset="0"/>
               </a:rPr>
-              <a:t>Net</a:t>
+              <a:t>Former</a:t>
             </a:r>
           </a:p>
         </p:txBody>
       </p:sp>
       <p:sp>
         <p:nvSpPr>
-          <p:cNvPr id="40" name="橢圓 39">
+          <p:cNvPr id="11" name="橢圓 10">
             <a:extLst>
               <a:ext uri="{FF2B5EF4-FFF2-40B4-BE49-F238E27FC236}">
-                <a16:creationId xmlns:a16="http://schemas.microsoft.com/office/drawing/2014/main" id="{C26C33D0-E4B4-743E-50E7-154C9AAEFFEE}"/>
+                <a16:creationId xmlns:a16="http://schemas.microsoft.com/office/drawing/2014/main" id="{5808B52B-D2E3-7FA8-BB8C-7A2EA8293243}"/>
               </a:ext>
             </a:extLst>
           </p:cNvPr>
@@ -5355,100 +4127,8 @@
         </p:nvSpPr>
         <p:spPr>
           <a:xfrm>
-            <a:off x="6445253" y="3855087"/>
-            <a:ext cx="430784" cy="419433"/>
-          </a:xfrm>
-          <a:prstGeom prst="ellipse">
-            <a:avLst/>
-          </a:prstGeom>
-          <a:solidFill>
-            <a:schemeClr val="accent4">
-              <a:lumMod val="20000"/>
-              <a:lumOff val="80000"/>
-              <a:alpha val="70000"/>
-            </a:schemeClr>
-          </a:solidFill>
-          <a:ln w="31750">
-            <a:solidFill>
-              <a:schemeClr val="bg1">
-                <a:lumMod val="75000"/>
-              </a:schemeClr>
-            </a:solidFill>
-          </a:ln>
-        </p:spPr>
-        <p:style>
-          <a:lnRef idx="2">
-            <a:schemeClr val="accent1">
-              <a:shade val="15000"/>
-            </a:schemeClr>
-          </a:lnRef>
-          <a:fillRef idx="1">
-            <a:schemeClr val="accent1"/>
-          </a:fillRef>
-          <a:effectRef idx="0">
-            <a:schemeClr val="accent1"/>
-          </a:effectRef>
-          <a:fontRef idx="minor">
-            <a:schemeClr val="lt1"/>
-          </a:fontRef>
-        </p:style>
-        <p:txBody>
-          <a:bodyPr wrap="none" lIns="0" tIns="0" rIns="0" bIns="0" rtlCol="0" anchor="ctr" anchorCtr="1"/>
-          <a:lstStyle/>
-          <a:p>
-            <a:pPr algn="ctr">
-              <a:lnSpc>
-                <a:spcPts val="1200"/>
-              </a:lnSpc>
-            </a:pPr>
-            <a:r>
-              <a:rPr lang="en-US" altLang="zh-TW" sz="1200" dirty="0">
-                <a:solidFill>
-                  <a:schemeClr val="tx1"/>
-                </a:solidFill>
-                <a:latin typeface="ADLaM Display" panose="02010000000000000000" pitchFamily="2" charset="0"/>
-                <a:ea typeface="ADLaM Display" panose="02010000000000000000" pitchFamily="2" charset="0"/>
-                <a:cs typeface="ADLaM Display" panose="02010000000000000000" pitchFamily="2" charset="0"/>
-              </a:rPr>
-              <a:t>MUDD</a:t>
-            </a:r>
-          </a:p>
-          <a:p>
-            <a:pPr algn="ctr">
-              <a:lnSpc>
-                <a:spcPts val="1200"/>
-              </a:lnSpc>
-            </a:pPr>
-            <a:r>
-              <a:rPr lang="en-US" altLang="zh-TW" sz="1200" dirty="0">
-                <a:solidFill>
-                  <a:schemeClr val="tx1"/>
-                </a:solidFill>
-                <a:latin typeface="ADLaM Display" panose="02010000000000000000" pitchFamily="2" charset="0"/>
-                <a:ea typeface="ADLaM Display" panose="02010000000000000000" pitchFamily="2" charset="0"/>
-                <a:cs typeface="ADLaM Display" panose="02010000000000000000" pitchFamily="2" charset="0"/>
-              </a:rPr>
-              <a:t>Former</a:t>
-            </a:r>
-          </a:p>
-        </p:txBody>
-      </p:sp>
-      <p:sp>
-        <p:nvSpPr>
-          <p:cNvPr id="6" name="橢圓 5">
-            <a:extLst>
-              <a:ext uri="{FF2B5EF4-FFF2-40B4-BE49-F238E27FC236}">
-                <a16:creationId xmlns:a16="http://schemas.microsoft.com/office/drawing/2014/main" id="{4ADFAB3B-2371-AE71-7C9C-93FF7B4E358E}"/>
-              </a:ext>
-            </a:extLst>
-          </p:cNvPr>
-          <p:cNvSpPr/>
-          <p:nvPr/>
-        </p:nvSpPr>
-        <p:spPr>
-          <a:xfrm>
-            <a:off x="4974143" y="2242261"/>
-            <a:ext cx="245929" cy="236211"/>
+            <a:off x="7345558" y="2276872"/>
+            <a:ext cx="245929" cy="271333"/>
           </a:xfrm>
           <a:prstGeom prst="ellipse">
             <a:avLst/>
@@ -5492,713 +4172,29 @@
             <a:r>
               <a:rPr lang="en-US" altLang="zh-TW" sz="1000" dirty="0">
                 <a:solidFill>
-                  <a:schemeClr val="tx1"/>
+                  <a:schemeClr val="tx1">
+                    <a:lumMod val="65000"/>
+                    <a:lumOff val="35000"/>
+                  </a:schemeClr>
                 </a:solidFill>
                 <a:latin typeface="ADLaM Display" panose="02010000000000000000" pitchFamily="2" charset="0"/>
                 <a:ea typeface="ADLaM Display" panose="02010000000000000000" pitchFamily="2" charset="0"/>
                 <a:cs typeface="ADLaM Display" panose="02010000000000000000" pitchFamily="2" charset="0"/>
               </a:rPr>
-              <a:t>LSA</a:t>
-            </a:r>
-          </a:p>
-        </p:txBody>
-      </p:sp>
-      <p:sp>
-        <p:nvSpPr>
-          <p:cNvPr id="11" name="橢圓 10">
-            <a:extLst>
-              <a:ext uri="{FF2B5EF4-FFF2-40B4-BE49-F238E27FC236}">
-                <a16:creationId xmlns:a16="http://schemas.microsoft.com/office/drawing/2014/main" id="{5808B52B-D2E3-7FA8-BB8C-7A2EA8293243}"/>
-              </a:ext>
-            </a:extLst>
-          </p:cNvPr>
-          <p:cNvSpPr/>
-          <p:nvPr/>
-        </p:nvSpPr>
-        <p:spPr>
-          <a:xfrm>
-            <a:off x="5694223" y="2250724"/>
-            <a:ext cx="245929" cy="236211"/>
-          </a:xfrm>
-          <a:prstGeom prst="ellipse">
-            <a:avLst/>
-          </a:prstGeom>
-          <a:solidFill>
-            <a:schemeClr val="accent4">
-              <a:lumMod val="20000"/>
-              <a:lumOff val="80000"/>
-              <a:alpha val="70000"/>
-            </a:schemeClr>
-          </a:solidFill>
-          <a:ln w="25400">
-            <a:solidFill>
-              <a:schemeClr val="bg1">
-                <a:lumMod val="75000"/>
-              </a:schemeClr>
-            </a:solidFill>
-          </a:ln>
-        </p:spPr>
-        <p:style>
-          <a:lnRef idx="2">
-            <a:schemeClr val="accent1">
-              <a:shade val="15000"/>
-            </a:schemeClr>
-          </a:lnRef>
-          <a:fillRef idx="1">
-            <a:schemeClr val="accent1"/>
-          </a:fillRef>
-          <a:effectRef idx="0">
-            <a:schemeClr val="accent1"/>
-          </a:effectRef>
-          <a:fontRef idx="minor">
-            <a:schemeClr val="lt1"/>
-          </a:fontRef>
-        </p:style>
-        <p:txBody>
-          <a:bodyPr wrap="none" lIns="0" tIns="0" rIns="0" bIns="0" rtlCol="0" anchor="ctr" anchorCtr="1"/>
-          <a:lstStyle/>
+              <a:t>AlexNet</a:t>
+            </a:r>
+          </a:p>
           <a:p>
             <a:pPr algn="ctr"/>
             <a:r>
-              <a:rPr lang="en-US" altLang="zh-TW" sz="1000" dirty="0">
-                <a:solidFill>
-                  <a:schemeClr val="tx1"/>
-                </a:solidFill>
-                <a:latin typeface="ADLaM Display" panose="02010000000000000000" pitchFamily="2" charset="0"/>
+              <a:rPr lang="en-US" altLang="zh-TW" sz="800" dirty="0">
+                <a:solidFill>
+                  <a:schemeClr val="tx1"/>
+                </a:solidFill>
                 <a:ea typeface="ADLaM Display" panose="02010000000000000000" pitchFamily="2" charset="0"/>
                 <a:cs typeface="ADLaM Display" panose="02010000000000000000" pitchFamily="2" charset="0"/>
               </a:rPr>
-              <a:t>LeNet</a:t>
-            </a:r>
-          </a:p>
-        </p:txBody>
-      </p:sp>
-      <p:sp>
-        <p:nvSpPr>
-          <p:cNvPr id="18" name="橢圓 17">
-            <a:extLst>
-              <a:ext uri="{FF2B5EF4-FFF2-40B4-BE49-F238E27FC236}">
-                <a16:creationId xmlns:a16="http://schemas.microsoft.com/office/drawing/2014/main" id="{4740E3ED-7716-EAD6-4846-308CD05C1798}"/>
-              </a:ext>
-            </a:extLst>
-          </p:cNvPr>
-          <p:cNvSpPr/>
-          <p:nvPr/>
-        </p:nvSpPr>
-        <p:spPr>
-          <a:xfrm>
-            <a:off x="5328626" y="5445679"/>
-            <a:ext cx="495818" cy="447885"/>
-          </a:xfrm>
-          <a:prstGeom prst="ellipse">
-            <a:avLst/>
-          </a:prstGeom>
-          <a:solidFill>
-            <a:schemeClr val="accent1">
-              <a:lumMod val="20000"/>
-              <a:lumOff val="80000"/>
-              <a:alpha val="70000"/>
-            </a:schemeClr>
-          </a:solidFill>
-          <a:ln w="31750">
-            <a:solidFill>
-              <a:schemeClr val="bg1">
-                <a:lumMod val="75000"/>
-              </a:schemeClr>
-            </a:solidFill>
-          </a:ln>
-        </p:spPr>
-        <p:style>
-          <a:lnRef idx="2">
-            <a:schemeClr val="accent1">
-              <a:shade val="15000"/>
-            </a:schemeClr>
-          </a:lnRef>
-          <a:fillRef idx="1">
-            <a:schemeClr val="accent1"/>
-          </a:fillRef>
-          <a:effectRef idx="0">
-            <a:schemeClr val="accent1"/>
-          </a:effectRef>
-          <a:fontRef idx="minor">
-            <a:schemeClr val="lt1"/>
-          </a:fontRef>
-        </p:style>
-        <p:txBody>
-          <a:bodyPr wrap="none" lIns="0" tIns="0" rIns="0" bIns="0" rtlCol="0" anchor="ctr" anchorCtr="1"/>
-          <a:lstStyle/>
-          <a:p>
-            <a:pPr algn="ctr"/>
-            <a:r>
-              <a:rPr lang="en-US" altLang="zh-TW" sz="1200" dirty="0">
-                <a:solidFill>
-                  <a:schemeClr val="tx1"/>
-                </a:solidFill>
-                <a:latin typeface="ADLaM Display" panose="02010000000000000000" pitchFamily="2" charset="0"/>
-                <a:ea typeface="ADLaM Display" panose="02010000000000000000" pitchFamily="2" charset="0"/>
-                <a:cs typeface="ADLaM Display" panose="02010000000000000000" pitchFamily="2" charset="0"/>
-              </a:rPr>
-              <a:t>Gemma</a:t>
-            </a:r>
-          </a:p>
-          <a:p>
-            <a:pPr algn="ctr"/>
-            <a:r>
-              <a:rPr lang="en-US" altLang="zh-TW" sz="1200" dirty="0">
-                <a:solidFill>
-                  <a:schemeClr val="tx1"/>
-                </a:solidFill>
-                <a:latin typeface="ADLaM Display" panose="02010000000000000000" pitchFamily="2" charset="0"/>
-                <a:ea typeface="ADLaM Display" panose="02010000000000000000" pitchFamily="2" charset="0"/>
-                <a:cs typeface="ADLaM Display" panose="02010000000000000000" pitchFamily="2" charset="0"/>
-              </a:rPr>
-              <a:t>4</a:t>
-            </a:r>
-          </a:p>
-        </p:txBody>
-      </p:sp>
-      <p:sp>
-        <p:nvSpPr>
-          <p:cNvPr id="23" name="橢圓 22">
-            <a:extLst>
-              <a:ext uri="{FF2B5EF4-FFF2-40B4-BE49-F238E27FC236}">
-                <a16:creationId xmlns:a16="http://schemas.microsoft.com/office/drawing/2014/main" id="{6E1686BF-BA47-45A6-230A-0A77C2804C64}"/>
-              </a:ext>
-            </a:extLst>
-          </p:cNvPr>
-          <p:cNvSpPr/>
-          <p:nvPr/>
-        </p:nvSpPr>
-        <p:spPr>
-          <a:xfrm>
-            <a:off x="6085756" y="5458660"/>
-            <a:ext cx="495818" cy="447885"/>
-          </a:xfrm>
-          <a:prstGeom prst="ellipse">
-            <a:avLst/>
-          </a:prstGeom>
-          <a:solidFill>
-            <a:schemeClr val="accent1">
-              <a:lumMod val="20000"/>
-              <a:lumOff val="80000"/>
-              <a:alpha val="70000"/>
-            </a:schemeClr>
-          </a:solidFill>
-          <a:ln w="31750">
-            <a:solidFill>
-              <a:schemeClr val="bg1">
-                <a:lumMod val="75000"/>
-              </a:schemeClr>
-            </a:solidFill>
-          </a:ln>
-        </p:spPr>
-        <p:style>
-          <a:lnRef idx="2">
-            <a:schemeClr val="accent1">
-              <a:shade val="15000"/>
-            </a:schemeClr>
-          </a:lnRef>
-          <a:fillRef idx="1">
-            <a:schemeClr val="accent1"/>
-          </a:fillRef>
-          <a:effectRef idx="0">
-            <a:schemeClr val="accent1"/>
-          </a:effectRef>
-          <a:fontRef idx="minor">
-            <a:schemeClr val="lt1"/>
-          </a:fontRef>
-        </p:style>
-        <p:txBody>
-          <a:bodyPr wrap="none" lIns="0" tIns="0" rIns="0" bIns="0" rtlCol="0" anchor="ctr" anchorCtr="1"/>
-          <a:lstStyle/>
-          <a:p>
-            <a:pPr algn="ctr"/>
-            <a:r>
-              <a:rPr lang="en-US" altLang="zh-TW" sz="1200" dirty="0">
-                <a:solidFill>
-                  <a:schemeClr val="tx1"/>
-                </a:solidFill>
-                <a:latin typeface="ADLaM Display" panose="02010000000000000000" pitchFamily="2" charset="0"/>
-                <a:ea typeface="ADLaM Display" panose="02010000000000000000" pitchFamily="2" charset="0"/>
-                <a:cs typeface="ADLaM Display" panose="02010000000000000000" pitchFamily="2" charset="0"/>
-              </a:rPr>
-              <a:t>DeepSeek</a:t>
-            </a:r>
-          </a:p>
-          <a:p>
-            <a:pPr algn="ctr"/>
-            <a:r>
-              <a:rPr lang="en-US" altLang="zh-TW" sz="1200" dirty="0">
-                <a:solidFill>
-                  <a:schemeClr val="tx1"/>
-                </a:solidFill>
-                <a:latin typeface="ADLaM Display" panose="02010000000000000000" pitchFamily="2" charset="0"/>
-                <a:ea typeface="ADLaM Display" panose="02010000000000000000" pitchFamily="2" charset="0"/>
-                <a:cs typeface="ADLaM Display" panose="02010000000000000000" pitchFamily="2" charset="0"/>
-              </a:rPr>
-              <a:t>4</a:t>
-            </a:r>
-          </a:p>
-        </p:txBody>
-      </p:sp>
-      <p:sp>
-        <p:nvSpPr>
-          <p:cNvPr id="26" name="橢圓 25">
-            <a:extLst>
-              <a:ext uri="{FF2B5EF4-FFF2-40B4-BE49-F238E27FC236}">
-                <a16:creationId xmlns:a16="http://schemas.microsoft.com/office/drawing/2014/main" id="{34720148-A5D6-90D3-A8D9-AD7D552A0552}"/>
-              </a:ext>
-            </a:extLst>
-          </p:cNvPr>
-          <p:cNvSpPr/>
-          <p:nvPr/>
-        </p:nvSpPr>
-        <p:spPr>
-          <a:xfrm>
-            <a:off x="6812486" y="5447362"/>
-            <a:ext cx="495818" cy="447885"/>
-          </a:xfrm>
-          <a:prstGeom prst="ellipse">
-            <a:avLst/>
-          </a:prstGeom>
-          <a:solidFill>
-            <a:schemeClr val="accent1">
-              <a:lumMod val="20000"/>
-              <a:lumOff val="80000"/>
-              <a:alpha val="70000"/>
-            </a:schemeClr>
-          </a:solidFill>
-          <a:ln w="31750">
-            <a:solidFill>
-              <a:schemeClr val="bg1">
-                <a:lumMod val="75000"/>
-              </a:schemeClr>
-            </a:solidFill>
-          </a:ln>
-        </p:spPr>
-        <p:style>
-          <a:lnRef idx="2">
-            <a:schemeClr val="accent1">
-              <a:shade val="15000"/>
-            </a:schemeClr>
-          </a:lnRef>
-          <a:fillRef idx="1">
-            <a:schemeClr val="accent1"/>
-          </a:fillRef>
-          <a:effectRef idx="0">
-            <a:schemeClr val="accent1"/>
-          </a:effectRef>
-          <a:fontRef idx="minor">
-            <a:schemeClr val="lt1"/>
-          </a:fontRef>
-        </p:style>
-        <p:txBody>
-          <a:bodyPr wrap="none" lIns="0" tIns="0" rIns="0" bIns="0" rtlCol="0" anchor="ctr" anchorCtr="1"/>
-          <a:lstStyle/>
-          <a:p>
-            <a:pPr algn="ctr"/>
-            <a:r>
-              <a:rPr lang="en-US" altLang="zh-TW" sz="1200" dirty="0">
-                <a:solidFill>
-                  <a:schemeClr val="tx1"/>
-                </a:solidFill>
-                <a:latin typeface="ADLaM Display" panose="02010000000000000000" pitchFamily="2" charset="0"/>
-                <a:ea typeface="ADLaM Display" panose="02010000000000000000" pitchFamily="2" charset="0"/>
-                <a:cs typeface="ADLaM Display" panose="02010000000000000000" pitchFamily="2" charset="0"/>
-              </a:rPr>
-              <a:t>Kimi</a:t>
-            </a:r>
-          </a:p>
-          <a:p>
-            <a:pPr algn="ctr"/>
-            <a:r>
-              <a:rPr lang="en-US" altLang="zh-TW" sz="1200" dirty="0">
-                <a:solidFill>
-                  <a:schemeClr val="tx1"/>
-                </a:solidFill>
-                <a:latin typeface="ADLaM Display" panose="02010000000000000000" pitchFamily="2" charset="0"/>
-                <a:ea typeface="ADLaM Display" panose="02010000000000000000" pitchFamily="2" charset="0"/>
-                <a:cs typeface="ADLaM Display" panose="02010000000000000000" pitchFamily="2" charset="0"/>
-              </a:rPr>
-              <a:t>k3</a:t>
-            </a:r>
-          </a:p>
-        </p:txBody>
-      </p:sp>
-      <p:sp>
-        <p:nvSpPr>
-          <p:cNvPr id="52" name="矩形 51">
-            <a:extLst>
-              <a:ext uri="{FF2B5EF4-FFF2-40B4-BE49-F238E27FC236}">
-                <a16:creationId xmlns:a16="http://schemas.microsoft.com/office/drawing/2014/main" id="{4609C4BF-B1FF-333B-73AC-273E88619C09}"/>
-              </a:ext>
-            </a:extLst>
-          </p:cNvPr>
-          <p:cNvSpPr/>
-          <p:nvPr/>
-        </p:nvSpPr>
-        <p:spPr>
-          <a:xfrm>
-            <a:off x="6019436" y="5941145"/>
-            <a:ext cx="628458" cy="361919"/>
-          </a:xfrm>
-          <a:prstGeom prst="rect">
-            <a:avLst/>
-          </a:prstGeom>
-          <a:solidFill>
-            <a:schemeClr val="accent1">
-              <a:lumMod val="20000"/>
-              <a:lumOff val="80000"/>
-              <a:alpha val="90000"/>
-            </a:schemeClr>
-          </a:solidFill>
-          <a:ln w="3175">
-            <a:solidFill>
-              <a:schemeClr val="accent1">
-                <a:lumMod val="60000"/>
-                <a:lumOff val="40000"/>
-              </a:schemeClr>
-            </a:solidFill>
-          </a:ln>
-        </p:spPr>
-        <p:style>
-          <a:lnRef idx="2">
-            <a:schemeClr val="accent1">
-              <a:shade val="15000"/>
-            </a:schemeClr>
-          </a:lnRef>
-          <a:fillRef idx="1">
-            <a:schemeClr val="accent1"/>
-          </a:fillRef>
-          <a:effectRef idx="0">
-            <a:schemeClr val="accent1"/>
-          </a:effectRef>
-          <a:fontRef idx="minor">
-            <a:schemeClr val="lt1"/>
-          </a:fontRef>
-        </p:style>
-        <p:txBody>
-          <a:bodyPr wrap="none" lIns="0" tIns="0" rIns="0" bIns="0" rtlCol="0" anchor="ctr"/>
-          <a:lstStyle/>
-          <a:p>
-            <a:pPr marL="0" marR="0" lvl="0" indent="0" algn="ctr" defTabSz="914400" rtl="0" eaLnBrk="1" fontAlgn="auto" latinLnBrk="0" hangingPunct="1">
-              <a:lnSpc>
-                <a:spcPct val="100000"/>
-              </a:lnSpc>
-              <a:spcBef>
-                <a:spcPts val="0"/>
-              </a:spcBef>
-              <a:spcAft>
-                <a:spcPts val="0"/>
-              </a:spcAft>
-              <a:buClrTx/>
-              <a:buSzTx/>
-              <a:buFontTx/>
-              <a:buNone/>
-              <a:tabLst/>
-              <a:defRPr/>
-            </a:pPr>
-            <a:r>
-              <a:rPr kumimoji="0" lang="en-US" altLang="zh-TW" sz="1200" b="1" i="0" u="none" strike="noStrike" kern="1200" cap="none" spc="0" normalizeH="0" baseline="0" noProof="0" dirty="0">
-                <a:ln w="0"/>
-                <a:solidFill>
-                  <a:prstClr val="black"/>
-                </a:solidFill>
-                <a:effectLst/>
-                <a:uLnTx/>
-                <a:uFillTx/>
-                <a:latin typeface="Calibri"/>
-                <a:ea typeface="新細明體" panose="02020500000000000000" pitchFamily="18" charset="-120"/>
-                <a:cs typeface="+mn-cs"/>
-              </a:rPr>
-              <a:t>Decouple</a:t>
-            </a:r>
-          </a:p>
-          <a:p>
-            <a:pPr marL="0" marR="0" lvl="0" indent="0" algn="ctr" defTabSz="914400" rtl="0" eaLnBrk="1" fontAlgn="auto" latinLnBrk="0" hangingPunct="1">
-              <a:lnSpc>
-                <a:spcPct val="100000"/>
-              </a:lnSpc>
-              <a:spcBef>
-                <a:spcPts val="0"/>
-              </a:spcBef>
-              <a:spcAft>
-                <a:spcPts val="0"/>
-              </a:spcAft>
-              <a:buClrTx/>
-              <a:buSzTx/>
-              <a:buFontTx/>
-              <a:buNone/>
-              <a:tabLst/>
-              <a:defRPr/>
-            </a:pPr>
-            <a:r>
-              <a:rPr lang="en-US" altLang="zh-TW" sz="1200" b="1" dirty="0">
-                <a:ln w="0"/>
-                <a:solidFill>
-                  <a:prstClr val="black"/>
-                </a:solidFill>
-                <a:latin typeface="Calibri"/>
-                <a:ea typeface="新細明體" panose="02020500000000000000" pitchFamily="18" charset="-120"/>
-              </a:rPr>
-              <a:t>Hybrid</a:t>
-            </a:r>
-            <a:endParaRPr kumimoji="0" lang="en-US" altLang="zh-TW" sz="1200" b="1" i="0" u="none" strike="noStrike" kern="1200" cap="none" spc="0" normalizeH="0" baseline="0" noProof="0" dirty="0">
-              <a:ln w="0"/>
-              <a:solidFill>
-                <a:prstClr val="black"/>
-              </a:solidFill>
-              <a:effectLst/>
-              <a:uLnTx/>
-              <a:uFillTx/>
-              <a:latin typeface="Calibri"/>
-              <a:ea typeface="新細明體" panose="02020500000000000000" pitchFamily="18" charset="-120"/>
-              <a:cs typeface="+mn-cs"/>
-            </a:endParaRPr>
-          </a:p>
-        </p:txBody>
-      </p:sp>
-      <p:sp>
-        <p:nvSpPr>
-          <p:cNvPr id="57" name="矩形 56">
-            <a:extLst>
-              <a:ext uri="{FF2B5EF4-FFF2-40B4-BE49-F238E27FC236}">
-                <a16:creationId xmlns:a16="http://schemas.microsoft.com/office/drawing/2014/main" id="{66E621F8-672B-F270-FE57-8799408045B4}"/>
-              </a:ext>
-            </a:extLst>
-          </p:cNvPr>
-          <p:cNvSpPr/>
-          <p:nvPr/>
-        </p:nvSpPr>
-        <p:spPr>
-          <a:xfrm>
-            <a:off x="3583502" y="5316733"/>
-            <a:ext cx="628458" cy="336368"/>
-          </a:xfrm>
-          <a:prstGeom prst="rect">
-            <a:avLst/>
-          </a:prstGeom>
-          <a:solidFill>
-            <a:schemeClr val="accent3">
-              <a:lumMod val="20000"/>
-              <a:lumOff val="80000"/>
-              <a:alpha val="90000"/>
-            </a:schemeClr>
-          </a:solidFill>
-          <a:ln w="3175">
-            <a:solidFill>
-              <a:schemeClr val="accent3">
-                <a:lumMod val="60000"/>
-                <a:lumOff val="40000"/>
-              </a:schemeClr>
-            </a:solidFill>
-          </a:ln>
-        </p:spPr>
-        <p:style>
-          <a:lnRef idx="2">
-            <a:schemeClr val="accent1">
-              <a:shade val="15000"/>
-            </a:schemeClr>
-          </a:lnRef>
-          <a:fillRef idx="1">
-            <a:schemeClr val="accent1"/>
-          </a:fillRef>
-          <a:effectRef idx="0">
-            <a:schemeClr val="accent1"/>
-          </a:effectRef>
-          <a:fontRef idx="minor">
-            <a:schemeClr val="lt1"/>
-          </a:fontRef>
-        </p:style>
-        <p:txBody>
-          <a:bodyPr wrap="none" lIns="0" tIns="0" rIns="0" bIns="0" rtlCol="0" anchor="ctr"/>
-          <a:lstStyle/>
-          <a:p>
-            <a:pPr marL="0" marR="0" lvl="0" indent="0" algn="ctr" defTabSz="914400" rtl="0" eaLnBrk="1" fontAlgn="auto" latinLnBrk="0" hangingPunct="1">
-              <a:lnSpc>
-                <a:spcPct val="100000"/>
-              </a:lnSpc>
-              <a:spcBef>
-                <a:spcPts val="0"/>
-              </a:spcBef>
-              <a:spcAft>
-                <a:spcPts val="0"/>
-              </a:spcAft>
-              <a:buClrTx/>
-              <a:buSzTx/>
-              <a:buFontTx/>
-              <a:buNone/>
-              <a:tabLst/>
-              <a:defRPr/>
-            </a:pPr>
-            <a:r>
-              <a:rPr kumimoji="0" lang="en-US" altLang="zh-TW" sz="1200" b="1" i="0" u="none" strike="noStrike" kern="1200" cap="none" spc="0" normalizeH="0" baseline="0" noProof="0" dirty="0">
-                <a:ln w="0"/>
-                <a:solidFill>
-                  <a:prstClr val="black"/>
-                </a:solidFill>
-                <a:effectLst/>
-                <a:uLnTx/>
-                <a:uFillTx/>
-                <a:latin typeface="Calibri"/>
-                <a:ea typeface="新細明體" panose="02020500000000000000" pitchFamily="18" charset="-120"/>
-                <a:cs typeface="+mn-cs"/>
-              </a:rPr>
-              <a:t>MTP</a:t>
-            </a:r>
-          </a:p>
-        </p:txBody>
-      </p:sp>
-      <p:sp>
-        <p:nvSpPr>
-          <p:cNvPr id="65" name="橢圓 64">
-            <a:extLst>
-              <a:ext uri="{FF2B5EF4-FFF2-40B4-BE49-F238E27FC236}">
-                <a16:creationId xmlns:a16="http://schemas.microsoft.com/office/drawing/2014/main" id="{AF2ADE06-0373-BCFA-7358-2B78588727A0}"/>
-              </a:ext>
-            </a:extLst>
-          </p:cNvPr>
-          <p:cNvSpPr/>
-          <p:nvPr/>
-        </p:nvSpPr>
-        <p:spPr>
-          <a:xfrm>
-            <a:off x="4292206" y="2990991"/>
-            <a:ext cx="495818" cy="447885"/>
-          </a:xfrm>
-          <a:prstGeom prst="ellipse">
-            <a:avLst/>
-          </a:prstGeom>
-          <a:solidFill>
-            <a:schemeClr val="accent4">
-              <a:lumMod val="20000"/>
-              <a:lumOff val="80000"/>
-              <a:alpha val="70000"/>
-            </a:schemeClr>
-          </a:solidFill>
-          <a:ln w="31750">
-            <a:solidFill>
-              <a:schemeClr val="bg1">
-                <a:lumMod val="75000"/>
-              </a:schemeClr>
-            </a:solidFill>
-          </a:ln>
-        </p:spPr>
-        <p:style>
-          <a:lnRef idx="2">
-            <a:schemeClr val="accent1">
-              <a:shade val="15000"/>
-            </a:schemeClr>
-          </a:lnRef>
-          <a:fillRef idx="1">
-            <a:schemeClr val="accent1"/>
-          </a:fillRef>
-          <a:effectRef idx="0">
-            <a:schemeClr val="accent1"/>
-          </a:effectRef>
-          <a:fontRef idx="minor">
-            <a:schemeClr val="lt1"/>
-          </a:fontRef>
-        </p:style>
-        <p:txBody>
-          <a:bodyPr wrap="none" lIns="0" tIns="0" rIns="0" bIns="0" rtlCol="0" anchor="ctr" anchorCtr="1"/>
-          <a:lstStyle/>
-          <a:p>
-            <a:pPr algn="ctr"/>
-            <a:r>
-              <a:rPr lang="en-US" altLang="zh-TW" sz="1200" dirty="0">
-                <a:solidFill>
-                  <a:schemeClr val="tx1"/>
-                </a:solidFill>
-                <a:latin typeface="ADLaM Display" panose="02010000000000000000" pitchFamily="2" charset="0"/>
-                <a:ea typeface="ADLaM Display" panose="02010000000000000000" pitchFamily="2" charset="0"/>
-                <a:cs typeface="ADLaM Display" panose="02010000000000000000" pitchFamily="2" charset="0"/>
-              </a:rPr>
-              <a:t>Encoder</a:t>
-            </a:r>
-          </a:p>
-          <a:p>
-            <a:pPr algn="ctr"/>
-            <a:r>
-              <a:rPr lang="en-US" altLang="zh-TW" sz="1200" dirty="0">
-                <a:solidFill>
-                  <a:schemeClr val="tx1"/>
-                </a:solidFill>
-                <a:latin typeface="ADLaM Display" panose="02010000000000000000" pitchFamily="2" charset="0"/>
-                <a:ea typeface="ADLaM Display" panose="02010000000000000000" pitchFamily="2" charset="0"/>
-                <a:cs typeface="ADLaM Display" panose="02010000000000000000" pitchFamily="2" charset="0"/>
-              </a:rPr>
-              <a:t>Decoder</a:t>
-            </a:r>
-          </a:p>
-        </p:txBody>
-      </p:sp>
-      <p:sp>
-        <p:nvSpPr>
-          <p:cNvPr id="14" name="橢圓 13">
-            <a:extLst>
-              <a:ext uri="{FF2B5EF4-FFF2-40B4-BE49-F238E27FC236}">
-                <a16:creationId xmlns:a16="http://schemas.microsoft.com/office/drawing/2014/main" id="{004290F5-281E-93FC-60A1-A2E3666349C4}"/>
-              </a:ext>
-            </a:extLst>
-          </p:cNvPr>
-          <p:cNvSpPr/>
-          <p:nvPr/>
-        </p:nvSpPr>
-        <p:spPr>
-          <a:xfrm>
-            <a:off x="3860158" y="3479210"/>
-            <a:ext cx="495818" cy="447885"/>
-          </a:xfrm>
-          <a:prstGeom prst="ellipse">
-            <a:avLst/>
-          </a:prstGeom>
-          <a:solidFill>
-            <a:schemeClr val="accent4">
-              <a:lumMod val="20000"/>
-              <a:lumOff val="80000"/>
-              <a:alpha val="70000"/>
-            </a:schemeClr>
-          </a:solidFill>
-          <a:ln w="31750">
-            <a:solidFill>
-              <a:schemeClr val="bg1">
-                <a:lumMod val="75000"/>
-              </a:schemeClr>
-            </a:solidFill>
-          </a:ln>
-        </p:spPr>
-        <p:style>
-          <a:lnRef idx="2">
-            <a:schemeClr val="accent1">
-              <a:shade val="15000"/>
-            </a:schemeClr>
-          </a:lnRef>
-          <a:fillRef idx="1">
-            <a:schemeClr val="accent1"/>
-          </a:fillRef>
-          <a:effectRef idx="0">
-            <a:schemeClr val="accent1"/>
-          </a:effectRef>
-          <a:fontRef idx="minor">
-            <a:schemeClr val="lt1"/>
-          </a:fontRef>
-        </p:style>
-        <p:txBody>
-          <a:bodyPr wrap="none" lIns="0" tIns="0" rIns="0" bIns="0" rtlCol="0" anchor="ctr" anchorCtr="1"/>
-          <a:lstStyle/>
-          <a:p>
-            <a:pPr algn="ctr"/>
-            <a:r>
-              <a:rPr lang="en-US" altLang="zh-TW" sz="1200" dirty="0">
-                <a:solidFill>
-                  <a:schemeClr val="tx1"/>
-                </a:solidFill>
-                <a:latin typeface="ADLaM Display" panose="02010000000000000000" pitchFamily="2" charset="0"/>
-                <a:ea typeface="ADLaM Display" panose="02010000000000000000" pitchFamily="2" charset="0"/>
-                <a:cs typeface="ADLaM Display" panose="02010000000000000000" pitchFamily="2" charset="0"/>
-              </a:rPr>
-              <a:t>Attention</a:t>
+              <a:t>2012</a:t>
             </a:r>
           </a:p>
         </p:txBody>
@@ -6292,7 +4288,7 @@
         </p:nvSpPr>
         <p:spPr>
           <a:xfrm>
-            <a:off x="3995936" y="2300726"/>
+            <a:off x="5340168" y="2378695"/>
             <a:ext cx="389945" cy="330225"/>
           </a:xfrm>
           <a:prstGeom prst="ellipse">
@@ -6346,6 +4342,19 @@
               <a:t>W2V</a:t>
             </a:r>
           </a:p>
+          <a:p>
+            <a:pPr algn="ctr"/>
+            <a:r>
+              <a:rPr lang="en-US" altLang="zh-TW" sz="800" dirty="0">
+                <a:solidFill>
+                  <a:schemeClr val="tx1"/>
+                </a:solidFill>
+                <a:ea typeface="ADLaM Display" panose="02010000000000000000" pitchFamily="2" charset="0"/>
+                <a:cs typeface="ADLaM Display" panose="02010000000000000000" pitchFamily="2" charset="0"/>
+              </a:rPr>
+              <a:t>2013</a:t>
+            </a:r>
+          </a:p>
         </p:txBody>
       </p:sp>
       <p:sp>
@@ -6362,7 +4371,7 @@
         </p:nvSpPr>
         <p:spPr>
           <a:xfrm>
-            <a:off x="772449" y="4685074"/>
+            <a:off x="928222" y="2812866"/>
             <a:ext cx="829073" cy="400110"/>
           </a:xfrm>
           <a:prstGeom prst="rect">
@@ -6477,6 +4486,3378 @@
           </a:p>
         </p:txBody>
       </p:sp>
+      <p:cxnSp>
+        <p:nvCxnSpPr>
+          <p:cNvPr id="2" name="直線單箭頭接點 1">
+            <a:extLst>
+              <a:ext uri="{FF2B5EF4-FFF2-40B4-BE49-F238E27FC236}">
+                <a16:creationId xmlns:a16="http://schemas.microsoft.com/office/drawing/2014/main" id="{6D182263-D83E-2C91-D3B5-E7BCC3B3EB72}"/>
+              </a:ext>
+            </a:extLst>
+          </p:cNvPr>
+          <p:cNvCxnSpPr>
+            <a:cxnSpLocks/>
+            <a:stCxn id="41" idx="2"/>
+            <a:endCxn id="76" idx="0"/>
+          </p:cNvCxnSpPr>
+          <p:nvPr/>
+        </p:nvCxnSpPr>
+        <p:spPr>
+          <a:xfrm>
+            <a:off x="3510014" y="2132856"/>
+            <a:ext cx="572" cy="1058403"/>
+          </a:xfrm>
+          <a:prstGeom prst="straightConnector1">
+            <a:avLst/>
+          </a:prstGeom>
+          <a:ln w="22225">
+            <a:solidFill>
+              <a:schemeClr val="accent3">
+                <a:lumMod val="75000"/>
+              </a:schemeClr>
+            </a:solidFill>
+            <a:prstDash val="solid"/>
+            <a:tailEnd type="triangle"/>
+          </a:ln>
+        </p:spPr>
+        <p:style>
+          <a:lnRef idx="1">
+            <a:schemeClr val="accent1"/>
+          </a:lnRef>
+          <a:fillRef idx="0">
+            <a:schemeClr val="accent1"/>
+          </a:fillRef>
+          <a:effectRef idx="0">
+            <a:schemeClr val="accent1"/>
+          </a:effectRef>
+          <a:fontRef idx="minor">
+            <a:schemeClr val="tx1"/>
+          </a:fontRef>
+        </p:style>
+      </p:cxnSp>
+      <p:sp>
+        <p:nvSpPr>
+          <p:cNvPr id="41" name="矩形 40">
+            <a:extLst>
+              <a:ext uri="{FF2B5EF4-FFF2-40B4-BE49-F238E27FC236}">
+                <a16:creationId xmlns:a16="http://schemas.microsoft.com/office/drawing/2014/main" id="{45A4C6DD-99AA-7F54-0F2F-F073F84A5039}"/>
+              </a:ext>
+            </a:extLst>
+          </p:cNvPr>
+          <p:cNvSpPr/>
+          <p:nvPr/>
+        </p:nvSpPr>
+        <p:spPr>
+          <a:xfrm>
+            <a:off x="3144254" y="1802631"/>
+            <a:ext cx="731520" cy="330225"/>
+          </a:xfrm>
+          <a:prstGeom prst="rect">
+            <a:avLst/>
+          </a:prstGeom>
+          <a:solidFill>
+            <a:schemeClr val="accent3">
+              <a:lumMod val="20000"/>
+              <a:lumOff val="80000"/>
+              <a:alpha val="90000"/>
+            </a:schemeClr>
+          </a:solidFill>
+          <a:ln w="3175">
+            <a:solidFill>
+              <a:schemeClr val="accent3">
+                <a:lumMod val="60000"/>
+                <a:lumOff val="40000"/>
+              </a:schemeClr>
+            </a:solidFill>
+          </a:ln>
+        </p:spPr>
+        <p:style>
+          <a:lnRef idx="2">
+            <a:schemeClr val="accent1">
+              <a:shade val="15000"/>
+            </a:schemeClr>
+          </a:lnRef>
+          <a:fillRef idx="1">
+            <a:schemeClr val="accent1"/>
+          </a:fillRef>
+          <a:effectRef idx="0">
+            <a:schemeClr val="accent1"/>
+          </a:effectRef>
+          <a:fontRef idx="minor">
+            <a:schemeClr val="lt1"/>
+          </a:fontRef>
+        </p:style>
+        <p:txBody>
+          <a:bodyPr wrap="none" lIns="0" tIns="0" rIns="0" bIns="0" rtlCol="0" anchor="ctr"/>
+          <a:lstStyle/>
+          <a:p>
+            <a:pPr marL="0" marR="0" lvl="0" indent="0" algn="ctr" defTabSz="914400" rtl="0" eaLnBrk="1" fontAlgn="auto" latinLnBrk="0" hangingPunct="1">
+              <a:lnSpc>
+                <a:spcPct val="100000"/>
+              </a:lnSpc>
+              <a:spcBef>
+                <a:spcPts val="0"/>
+              </a:spcBef>
+              <a:spcAft>
+                <a:spcPts val="0"/>
+              </a:spcAft>
+              <a:buClrTx/>
+              <a:buSzTx/>
+              <a:buFontTx/>
+              <a:buNone/>
+              <a:tabLst/>
+              <a:defRPr/>
+            </a:pPr>
+            <a:r>
+              <a:rPr kumimoji="0" lang="en-US" altLang="zh-TW" sz="1200" b="1" i="0" u="none" strike="noStrike" kern="1200" cap="none" spc="0" normalizeH="0" baseline="0" noProof="0" dirty="0">
+                <a:ln w="0"/>
+                <a:solidFill>
+                  <a:prstClr val="black"/>
+                </a:solidFill>
+                <a:effectLst/>
+                <a:uLnTx/>
+                <a:uFillTx/>
+                <a:latin typeface="Calibri"/>
+                <a:ea typeface="新細明體" panose="02020500000000000000" pitchFamily="18" charset="-120"/>
+                <a:cs typeface="+mn-cs"/>
+              </a:rPr>
+              <a:t>Embedding</a:t>
+            </a:r>
+          </a:p>
+          <a:p>
+            <a:pPr marL="0" marR="0" lvl="0" indent="0" algn="ctr" defTabSz="914400" rtl="0" eaLnBrk="1" fontAlgn="auto" latinLnBrk="0" hangingPunct="1">
+              <a:lnSpc>
+                <a:spcPct val="100000"/>
+              </a:lnSpc>
+              <a:spcBef>
+                <a:spcPts val="0"/>
+              </a:spcBef>
+              <a:spcAft>
+                <a:spcPts val="0"/>
+              </a:spcAft>
+              <a:buClrTx/>
+              <a:buSzTx/>
+              <a:buFontTx/>
+              <a:buNone/>
+              <a:tabLst/>
+              <a:defRPr/>
+            </a:pPr>
+            <a:r>
+              <a:rPr lang="en-US" altLang="zh-TW" sz="800" dirty="0">
+                <a:ln w="0"/>
+                <a:solidFill>
+                  <a:prstClr val="black"/>
+                </a:solidFill>
+                <a:latin typeface="Calibri"/>
+                <a:ea typeface="新細明體" panose="02020500000000000000" pitchFamily="18" charset="-120"/>
+              </a:rPr>
+              <a:t>2003</a:t>
+            </a:r>
+            <a:endParaRPr kumimoji="0" lang="en-US" altLang="zh-TW" sz="800" i="0" u="none" strike="noStrike" kern="1200" cap="none" spc="0" normalizeH="0" baseline="0" noProof="0" dirty="0">
+              <a:ln w="0"/>
+              <a:solidFill>
+                <a:prstClr val="black"/>
+              </a:solidFill>
+              <a:effectLst/>
+              <a:uLnTx/>
+              <a:uFillTx/>
+              <a:latin typeface="Calibri"/>
+              <a:ea typeface="新細明體" panose="02020500000000000000" pitchFamily="18" charset="-120"/>
+              <a:cs typeface="+mn-cs"/>
+            </a:endParaRPr>
+          </a:p>
+        </p:txBody>
+      </p:sp>
+      <p:sp>
+        <p:nvSpPr>
+          <p:cNvPr id="54" name="橢圓 53">
+            <a:extLst>
+              <a:ext uri="{FF2B5EF4-FFF2-40B4-BE49-F238E27FC236}">
+                <a16:creationId xmlns:a16="http://schemas.microsoft.com/office/drawing/2014/main" id="{E7B058A0-B589-2000-4E7B-1EBAD99DA44A}"/>
+              </a:ext>
+            </a:extLst>
+          </p:cNvPr>
+          <p:cNvSpPr/>
+          <p:nvPr/>
+        </p:nvSpPr>
+        <p:spPr>
+          <a:xfrm>
+            <a:off x="6663642" y="1124744"/>
+            <a:ext cx="245929" cy="236211"/>
+          </a:xfrm>
+          <a:prstGeom prst="ellipse">
+            <a:avLst/>
+          </a:prstGeom>
+          <a:solidFill>
+            <a:schemeClr val="accent4">
+              <a:lumMod val="20000"/>
+              <a:lumOff val="80000"/>
+              <a:alpha val="70000"/>
+            </a:schemeClr>
+          </a:solidFill>
+          <a:ln w="25400">
+            <a:solidFill>
+              <a:schemeClr val="bg1">
+                <a:lumMod val="85000"/>
+              </a:schemeClr>
+            </a:solidFill>
+          </a:ln>
+        </p:spPr>
+        <p:style>
+          <a:lnRef idx="2">
+            <a:schemeClr val="accent1">
+              <a:shade val="15000"/>
+            </a:schemeClr>
+          </a:lnRef>
+          <a:fillRef idx="1">
+            <a:schemeClr val="accent1"/>
+          </a:fillRef>
+          <a:effectRef idx="0">
+            <a:schemeClr val="accent1"/>
+          </a:effectRef>
+          <a:fontRef idx="minor">
+            <a:schemeClr val="lt1"/>
+          </a:fontRef>
+        </p:style>
+        <p:txBody>
+          <a:bodyPr wrap="none" lIns="0" tIns="0" rIns="0" bIns="0" rtlCol="0" anchor="ctr" anchorCtr="1"/>
+          <a:lstStyle/>
+          <a:p>
+            <a:pPr algn="ctr"/>
+            <a:r>
+              <a:rPr lang="en-US" altLang="zh-TW" sz="1000" dirty="0">
+                <a:solidFill>
+                  <a:schemeClr val="tx1">
+                    <a:lumMod val="65000"/>
+                    <a:lumOff val="35000"/>
+                  </a:schemeClr>
+                </a:solidFill>
+                <a:latin typeface="ADLaM Display" panose="02010000000000000000" pitchFamily="2" charset="0"/>
+                <a:ea typeface="ADLaM Display" panose="02010000000000000000" pitchFamily="2" charset="0"/>
+                <a:cs typeface="ADLaM Display" panose="02010000000000000000" pitchFamily="2" charset="0"/>
+              </a:rPr>
+              <a:t>Biological</a:t>
+            </a:r>
+          </a:p>
+          <a:p>
+            <a:pPr algn="ctr"/>
+            <a:r>
+              <a:rPr lang="en-US" altLang="zh-TW" sz="1000" dirty="0">
+                <a:solidFill>
+                  <a:schemeClr val="tx1">
+                    <a:lumMod val="65000"/>
+                    <a:lumOff val="35000"/>
+                  </a:schemeClr>
+                </a:solidFill>
+                <a:latin typeface="ADLaM Display" panose="02010000000000000000" pitchFamily="2" charset="0"/>
+                <a:ea typeface="ADLaM Display" panose="02010000000000000000" pitchFamily="2" charset="0"/>
+                <a:cs typeface="ADLaM Display" panose="02010000000000000000" pitchFamily="2" charset="0"/>
+              </a:rPr>
+              <a:t>Neuron</a:t>
+            </a:r>
+          </a:p>
+          <a:p>
+            <a:pPr algn="ctr"/>
+            <a:r>
+              <a:rPr lang="en-US" altLang="zh-TW" sz="800" dirty="0">
+                <a:solidFill>
+                  <a:schemeClr val="tx1">
+                    <a:lumMod val="65000"/>
+                    <a:lumOff val="35000"/>
+                  </a:schemeClr>
+                </a:solidFill>
+                <a:ea typeface="ADLaM Display" panose="02010000000000000000" pitchFamily="2" charset="0"/>
+                <a:cs typeface="ADLaM Display" panose="02010000000000000000" pitchFamily="2" charset="0"/>
+              </a:rPr>
+              <a:t>1943</a:t>
+            </a:r>
+          </a:p>
+        </p:txBody>
+      </p:sp>
+      <p:sp>
+        <p:nvSpPr>
+          <p:cNvPr id="66" name="文字方塊 65">
+            <a:extLst>
+              <a:ext uri="{FF2B5EF4-FFF2-40B4-BE49-F238E27FC236}">
+                <a16:creationId xmlns:a16="http://schemas.microsoft.com/office/drawing/2014/main" id="{8977116D-6C92-C727-0748-BB8161DDD895}"/>
+              </a:ext>
+            </a:extLst>
+          </p:cNvPr>
+          <p:cNvSpPr txBox="1"/>
+          <p:nvPr/>
+        </p:nvSpPr>
+        <p:spPr>
+          <a:xfrm>
+            <a:off x="7738129" y="1559595"/>
+            <a:ext cx="938327" cy="400110"/>
+          </a:xfrm>
+          <a:prstGeom prst="rect">
+            <a:avLst/>
+          </a:prstGeom>
+          <a:solidFill>
+            <a:schemeClr val="accent2">
+              <a:lumMod val="20000"/>
+              <a:lumOff val="80000"/>
+              <a:alpha val="60000"/>
+            </a:schemeClr>
+          </a:solidFill>
+        </p:spPr>
+        <p:txBody>
+          <a:bodyPr wrap="none" lIns="0" tIns="0" rIns="0" bIns="0" anchor="ctr" anchorCtr="1">
+            <a:noAutofit/>
+          </a:bodyPr>
+          <a:lstStyle/>
+          <a:p>
+            <a:pPr algn="ctr"/>
+            <a:r>
+              <a:rPr lang="en-US" altLang="zh-TW" sz="1000" b="1" dirty="0">
+                <a:effectLst/>
+              </a:rPr>
+              <a:t>Backpropagation</a:t>
+            </a:r>
+          </a:p>
+          <a:p>
+            <a:pPr algn="ctr"/>
+            <a:r>
+              <a:rPr lang="en-US" altLang="zh-TW" sz="1000" dirty="0"/>
+              <a:t>Hopfield, Hinton</a:t>
+            </a:r>
+            <a:endParaRPr lang="zh-TW" altLang="en-US" sz="800" dirty="0"/>
+          </a:p>
+        </p:txBody>
+      </p:sp>
+      <p:sp>
+        <p:nvSpPr>
+          <p:cNvPr id="7" name="橢圓 6">
+            <a:extLst>
+              <a:ext uri="{FF2B5EF4-FFF2-40B4-BE49-F238E27FC236}">
+                <a16:creationId xmlns:a16="http://schemas.microsoft.com/office/drawing/2014/main" id="{AA368A15-3EB1-B632-32F7-35E0E54C152A}"/>
+              </a:ext>
+            </a:extLst>
+          </p:cNvPr>
+          <p:cNvSpPr/>
+          <p:nvPr/>
+        </p:nvSpPr>
+        <p:spPr>
+          <a:xfrm>
+            <a:off x="6619770" y="1610374"/>
+            <a:ext cx="321115" cy="304864"/>
+          </a:xfrm>
+          <a:prstGeom prst="ellipse">
+            <a:avLst/>
+          </a:prstGeom>
+          <a:solidFill>
+            <a:schemeClr val="accent2">
+              <a:lumMod val="20000"/>
+              <a:lumOff val="80000"/>
+              <a:alpha val="70000"/>
+            </a:schemeClr>
+          </a:solidFill>
+          <a:ln w="25400">
+            <a:solidFill>
+              <a:schemeClr val="accent2">
+                <a:lumMod val="40000"/>
+                <a:lumOff val="60000"/>
+              </a:schemeClr>
+            </a:solidFill>
+          </a:ln>
+        </p:spPr>
+        <p:style>
+          <a:lnRef idx="2">
+            <a:schemeClr val="accent1">
+              <a:shade val="15000"/>
+            </a:schemeClr>
+          </a:lnRef>
+          <a:fillRef idx="1">
+            <a:schemeClr val="accent1"/>
+          </a:fillRef>
+          <a:effectRef idx="0">
+            <a:schemeClr val="accent1"/>
+          </a:effectRef>
+          <a:fontRef idx="minor">
+            <a:schemeClr val="lt1"/>
+          </a:fontRef>
+        </p:style>
+        <p:txBody>
+          <a:bodyPr wrap="none" lIns="0" tIns="0" rIns="0" bIns="0" rtlCol="0" anchor="ctr" anchorCtr="1"/>
+          <a:lstStyle/>
+          <a:p>
+            <a:pPr algn="ctr"/>
+            <a:r>
+              <a:rPr lang="en-US" altLang="zh-TW" sz="1000" dirty="0">
+                <a:solidFill>
+                  <a:schemeClr val="tx1"/>
+                </a:solidFill>
+                <a:latin typeface="ADLaM Display" panose="02010000000000000000" pitchFamily="2" charset="0"/>
+                <a:ea typeface="ADLaM Display" panose="02010000000000000000" pitchFamily="2" charset="0"/>
+                <a:cs typeface="ADLaM Display" panose="02010000000000000000" pitchFamily="2" charset="0"/>
+              </a:rPr>
+              <a:t>MLP</a:t>
+            </a:r>
+          </a:p>
+          <a:p>
+            <a:pPr algn="ctr"/>
+            <a:r>
+              <a:rPr lang="en-US" altLang="zh-TW" sz="800" dirty="0">
+                <a:solidFill>
+                  <a:schemeClr val="tx1"/>
+                </a:solidFill>
+                <a:ea typeface="ADLaM Display" panose="02010000000000000000" pitchFamily="2" charset="0"/>
+                <a:cs typeface="ADLaM Display" panose="02010000000000000000" pitchFamily="2" charset="0"/>
+              </a:rPr>
+              <a:t>2006</a:t>
+            </a:r>
+          </a:p>
+        </p:txBody>
+      </p:sp>
+      <p:sp>
+        <p:nvSpPr>
+          <p:cNvPr id="72" name="文字方塊 71">
+            <a:extLst>
+              <a:ext uri="{FF2B5EF4-FFF2-40B4-BE49-F238E27FC236}">
+                <a16:creationId xmlns:a16="http://schemas.microsoft.com/office/drawing/2014/main" id="{E065BC21-42C4-3C79-53D2-AC6017D335B8}"/>
+              </a:ext>
+            </a:extLst>
+          </p:cNvPr>
+          <p:cNvSpPr txBox="1"/>
+          <p:nvPr/>
+        </p:nvSpPr>
+        <p:spPr>
+          <a:xfrm>
+            <a:off x="192112" y="5517232"/>
+            <a:ext cx="6252096" cy="1092607"/>
+          </a:xfrm>
+          <a:prstGeom prst="rect">
+            <a:avLst/>
+          </a:prstGeom>
+          <a:solidFill>
+            <a:schemeClr val="bg1">
+              <a:alpha val="90000"/>
+            </a:schemeClr>
+          </a:solidFill>
+        </p:spPr>
+        <p:txBody>
+          <a:bodyPr wrap="none">
+            <a:spAutoFit/>
+          </a:bodyPr>
+          <a:lstStyle/>
+          <a:p>
+            <a:pPr>
+              <a:lnSpc>
+                <a:spcPts val="1800"/>
+              </a:lnSpc>
+              <a:spcBef>
+                <a:spcPts val="600"/>
+              </a:spcBef>
+              <a:spcAft>
+                <a:spcPts val="600"/>
+              </a:spcAft>
+              <a:buNone/>
+            </a:pPr>
+            <a:r>
+              <a:rPr lang="en-US" altLang="zh-TW" sz="2000" b="1" u="none" strike="noStrike" dirty="0">
+                <a:effectLst/>
+              </a:rPr>
+              <a:t>Conclusion</a:t>
+            </a:r>
+          </a:p>
+          <a:p>
+            <a:pPr marL="285750" indent="-285750">
+              <a:lnSpc>
+                <a:spcPts val="1800"/>
+              </a:lnSpc>
+              <a:spcBef>
+                <a:spcPts val="600"/>
+              </a:spcBef>
+              <a:spcAft>
+                <a:spcPts val="600"/>
+              </a:spcAft>
+              <a:buFont typeface="Wingdings" panose="05000000000000000000" pitchFamily="2" charset="2"/>
+              <a:buChar char="Ø"/>
+            </a:pPr>
+            <a:r>
+              <a:rPr lang="en-US" altLang="zh-TW" sz="1600" b="1" dirty="0"/>
+              <a:t>Model Converge:</a:t>
+            </a:r>
+            <a:r>
+              <a:rPr lang="en-US" altLang="zh-TW" sz="1600" dirty="0"/>
+              <a:t> Parameters, cost, power.</a:t>
+            </a:r>
+          </a:p>
+          <a:p>
+            <a:pPr marL="285750" indent="-285750">
+              <a:lnSpc>
+                <a:spcPts val="1800"/>
+              </a:lnSpc>
+              <a:spcBef>
+                <a:spcPts val="600"/>
+              </a:spcBef>
+              <a:spcAft>
+                <a:spcPts val="600"/>
+              </a:spcAft>
+              <a:buFont typeface="Wingdings" panose="05000000000000000000" pitchFamily="2" charset="2"/>
+              <a:buChar char="Ø"/>
+            </a:pPr>
+            <a:r>
+              <a:rPr lang="en-US" altLang="zh-TW" sz="1600" b="1" dirty="0"/>
+              <a:t>Nobel Physics 2024:</a:t>
+            </a:r>
+            <a:r>
+              <a:rPr lang="en-US" altLang="zh-TW" sz="1600" dirty="0"/>
+              <a:t> MLP= BM(physics) + Backpropagation(Hinton).</a:t>
+            </a:r>
+          </a:p>
+        </p:txBody>
+      </p:sp>
+      <p:sp>
+        <p:nvSpPr>
+          <p:cNvPr id="74" name="矩形 73">
+            <a:extLst>
+              <a:ext uri="{FF2B5EF4-FFF2-40B4-BE49-F238E27FC236}">
+                <a16:creationId xmlns:a16="http://schemas.microsoft.com/office/drawing/2014/main" id="{580E5C8E-A371-21A6-CE7A-D0B2B7C94393}"/>
+              </a:ext>
+            </a:extLst>
+          </p:cNvPr>
+          <p:cNvSpPr/>
+          <p:nvPr/>
+        </p:nvSpPr>
+        <p:spPr>
+          <a:xfrm>
+            <a:off x="3144826" y="2276872"/>
+            <a:ext cx="731520" cy="309749"/>
+          </a:xfrm>
+          <a:prstGeom prst="rect">
+            <a:avLst/>
+          </a:prstGeom>
+          <a:solidFill>
+            <a:schemeClr val="accent3">
+              <a:lumMod val="20000"/>
+              <a:lumOff val="80000"/>
+              <a:alpha val="90000"/>
+            </a:schemeClr>
+          </a:solidFill>
+          <a:ln w="3175">
+            <a:solidFill>
+              <a:schemeClr val="accent3">
+                <a:lumMod val="60000"/>
+                <a:lumOff val="40000"/>
+              </a:schemeClr>
+            </a:solidFill>
+          </a:ln>
+        </p:spPr>
+        <p:style>
+          <a:lnRef idx="2">
+            <a:schemeClr val="accent1">
+              <a:shade val="15000"/>
+            </a:schemeClr>
+          </a:lnRef>
+          <a:fillRef idx="1">
+            <a:schemeClr val="accent1"/>
+          </a:fillRef>
+          <a:effectRef idx="0">
+            <a:schemeClr val="accent1"/>
+          </a:effectRef>
+          <a:fontRef idx="minor">
+            <a:schemeClr val="lt1"/>
+          </a:fontRef>
+        </p:style>
+        <p:txBody>
+          <a:bodyPr wrap="none" lIns="0" tIns="0" rIns="0" bIns="0" rtlCol="0" anchor="ctr"/>
+          <a:lstStyle/>
+          <a:p>
+            <a:pPr marL="0" marR="0" lvl="0" indent="0" algn="ctr" defTabSz="914400" rtl="0" eaLnBrk="1" fontAlgn="auto" latinLnBrk="0" hangingPunct="1">
+              <a:lnSpc>
+                <a:spcPct val="100000"/>
+              </a:lnSpc>
+              <a:spcBef>
+                <a:spcPts val="0"/>
+              </a:spcBef>
+              <a:spcAft>
+                <a:spcPts val="0"/>
+              </a:spcAft>
+              <a:buClrTx/>
+              <a:buSzTx/>
+              <a:buFontTx/>
+              <a:buNone/>
+              <a:tabLst/>
+              <a:defRPr/>
+            </a:pPr>
+            <a:r>
+              <a:rPr kumimoji="0" lang="en-US" altLang="zh-TW" sz="1200" b="1" i="0" u="none" strike="noStrike" kern="1200" cap="none" spc="0" normalizeH="0" baseline="0" noProof="0" dirty="0">
+                <a:ln w="0"/>
+                <a:solidFill>
+                  <a:prstClr val="black"/>
+                </a:solidFill>
+                <a:effectLst/>
+                <a:uLnTx/>
+                <a:uFillTx/>
+                <a:latin typeface="Calibri"/>
+                <a:ea typeface="新細明體" panose="02020500000000000000" pitchFamily="18" charset="-120"/>
+                <a:cs typeface="+mn-cs"/>
+              </a:rPr>
+              <a:t>RNN-LM</a:t>
+            </a:r>
+          </a:p>
+          <a:p>
+            <a:pPr marL="0" marR="0" lvl="0" indent="0" algn="ctr" defTabSz="914400" rtl="0" eaLnBrk="1" fontAlgn="auto" latinLnBrk="0" hangingPunct="1">
+              <a:lnSpc>
+                <a:spcPct val="100000"/>
+              </a:lnSpc>
+              <a:spcBef>
+                <a:spcPts val="0"/>
+              </a:spcBef>
+              <a:spcAft>
+                <a:spcPts val="0"/>
+              </a:spcAft>
+              <a:buClrTx/>
+              <a:buSzTx/>
+              <a:buFontTx/>
+              <a:buNone/>
+              <a:tabLst/>
+              <a:defRPr/>
+            </a:pPr>
+            <a:r>
+              <a:rPr lang="en-US" altLang="zh-TW" sz="800" dirty="0">
+                <a:ln w="0"/>
+                <a:solidFill>
+                  <a:prstClr val="black"/>
+                </a:solidFill>
+                <a:latin typeface="Calibri"/>
+                <a:ea typeface="新細明體" panose="02020500000000000000" pitchFamily="18" charset="-120"/>
+              </a:rPr>
+              <a:t>2010</a:t>
+            </a:r>
+            <a:endParaRPr kumimoji="0" lang="en-US" altLang="zh-TW" sz="800" i="0" u="none" strike="noStrike" kern="1200" cap="none" spc="0" normalizeH="0" baseline="0" noProof="0" dirty="0">
+              <a:ln w="0"/>
+              <a:solidFill>
+                <a:prstClr val="black"/>
+              </a:solidFill>
+              <a:effectLst/>
+              <a:uLnTx/>
+              <a:uFillTx/>
+              <a:latin typeface="Calibri"/>
+              <a:ea typeface="新細明體" panose="02020500000000000000" pitchFamily="18" charset="-120"/>
+              <a:cs typeface="+mn-cs"/>
+            </a:endParaRPr>
+          </a:p>
+        </p:txBody>
+      </p:sp>
+      <p:sp>
+        <p:nvSpPr>
+          <p:cNvPr id="76" name="矩形 75">
+            <a:extLst>
+              <a:ext uri="{FF2B5EF4-FFF2-40B4-BE49-F238E27FC236}">
+                <a16:creationId xmlns:a16="http://schemas.microsoft.com/office/drawing/2014/main" id="{9F6D1A35-0C99-C511-862F-D46810142715}"/>
+              </a:ext>
+            </a:extLst>
+          </p:cNvPr>
+          <p:cNvSpPr/>
+          <p:nvPr/>
+        </p:nvSpPr>
+        <p:spPr>
+          <a:xfrm>
+            <a:off x="3144826" y="3191259"/>
+            <a:ext cx="731520" cy="309749"/>
+          </a:xfrm>
+          <a:prstGeom prst="rect">
+            <a:avLst/>
+          </a:prstGeom>
+          <a:solidFill>
+            <a:schemeClr val="accent3">
+              <a:lumMod val="20000"/>
+              <a:lumOff val="80000"/>
+              <a:alpha val="90000"/>
+            </a:schemeClr>
+          </a:solidFill>
+          <a:ln w="3175">
+            <a:solidFill>
+              <a:schemeClr val="accent3">
+                <a:lumMod val="60000"/>
+                <a:lumOff val="40000"/>
+              </a:schemeClr>
+            </a:solidFill>
+          </a:ln>
+        </p:spPr>
+        <p:style>
+          <a:lnRef idx="2">
+            <a:schemeClr val="accent1">
+              <a:shade val="15000"/>
+            </a:schemeClr>
+          </a:lnRef>
+          <a:fillRef idx="1">
+            <a:schemeClr val="accent1"/>
+          </a:fillRef>
+          <a:effectRef idx="0">
+            <a:schemeClr val="accent1"/>
+          </a:effectRef>
+          <a:fontRef idx="minor">
+            <a:schemeClr val="lt1"/>
+          </a:fontRef>
+        </p:style>
+        <p:txBody>
+          <a:bodyPr wrap="none" lIns="0" tIns="0" rIns="0" bIns="0" rtlCol="0" anchor="ctr"/>
+          <a:lstStyle/>
+          <a:p>
+            <a:pPr marL="0" marR="0" lvl="0" indent="0" algn="ctr" defTabSz="914400" rtl="0" eaLnBrk="1" fontAlgn="auto" latinLnBrk="0" hangingPunct="1">
+              <a:lnSpc>
+                <a:spcPct val="100000"/>
+              </a:lnSpc>
+              <a:spcBef>
+                <a:spcPts val="0"/>
+              </a:spcBef>
+              <a:spcAft>
+                <a:spcPts val="0"/>
+              </a:spcAft>
+              <a:buClrTx/>
+              <a:buSzTx/>
+              <a:buFontTx/>
+              <a:buNone/>
+              <a:tabLst/>
+              <a:defRPr/>
+            </a:pPr>
+            <a:r>
+              <a:rPr kumimoji="0" lang="en-US" altLang="zh-TW" sz="1200" b="1" i="0" u="none" strike="noStrike" kern="1200" cap="none" spc="0" normalizeH="0" baseline="0" noProof="0" dirty="0">
+                <a:ln w="0"/>
+                <a:solidFill>
+                  <a:prstClr val="black"/>
+                </a:solidFill>
+                <a:effectLst/>
+                <a:uLnTx/>
+                <a:uFillTx/>
+                <a:latin typeface="Calibri"/>
+                <a:ea typeface="新細明體" panose="02020500000000000000" pitchFamily="18" charset="-120"/>
+                <a:cs typeface="+mn-cs"/>
+              </a:rPr>
+              <a:t>Seq2Seq</a:t>
+            </a:r>
+          </a:p>
+          <a:p>
+            <a:pPr marL="0" marR="0" lvl="0" indent="0" algn="ctr" defTabSz="914400" rtl="0" eaLnBrk="1" fontAlgn="auto" latinLnBrk="0" hangingPunct="1">
+              <a:lnSpc>
+                <a:spcPct val="100000"/>
+              </a:lnSpc>
+              <a:spcBef>
+                <a:spcPts val="0"/>
+              </a:spcBef>
+              <a:spcAft>
+                <a:spcPts val="0"/>
+              </a:spcAft>
+              <a:buClrTx/>
+              <a:buSzTx/>
+              <a:buFontTx/>
+              <a:buNone/>
+              <a:tabLst/>
+              <a:defRPr/>
+            </a:pPr>
+            <a:r>
+              <a:rPr lang="en-US" altLang="zh-TW" sz="800" dirty="0">
+                <a:ln w="0"/>
+                <a:solidFill>
+                  <a:prstClr val="black"/>
+                </a:solidFill>
+                <a:latin typeface="Calibri"/>
+                <a:ea typeface="新細明體" panose="02020500000000000000" pitchFamily="18" charset="-120"/>
+              </a:rPr>
+              <a:t>2014</a:t>
+            </a:r>
+            <a:endParaRPr kumimoji="0" lang="en-US" altLang="zh-TW" sz="800" i="0" u="none" strike="noStrike" kern="1200" cap="none" spc="0" normalizeH="0" baseline="0" noProof="0" dirty="0">
+              <a:ln w="0"/>
+              <a:solidFill>
+                <a:prstClr val="black"/>
+              </a:solidFill>
+              <a:effectLst/>
+              <a:uLnTx/>
+              <a:uFillTx/>
+              <a:latin typeface="Calibri"/>
+              <a:ea typeface="新細明體" panose="02020500000000000000" pitchFamily="18" charset="-120"/>
+              <a:cs typeface="+mn-cs"/>
+            </a:endParaRPr>
+          </a:p>
+        </p:txBody>
+      </p:sp>
+      <p:sp>
+        <p:nvSpPr>
+          <p:cNvPr id="65" name="橢圓 64">
+            <a:extLst>
+              <a:ext uri="{FF2B5EF4-FFF2-40B4-BE49-F238E27FC236}">
+                <a16:creationId xmlns:a16="http://schemas.microsoft.com/office/drawing/2014/main" id="{AF2ADE06-0373-BCFA-7358-2B78588727A0}"/>
+              </a:ext>
+            </a:extLst>
+          </p:cNvPr>
+          <p:cNvSpPr/>
+          <p:nvPr/>
+        </p:nvSpPr>
+        <p:spPr>
+          <a:xfrm>
+            <a:off x="5484184" y="3033074"/>
+            <a:ext cx="678792" cy="663703"/>
+          </a:xfrm>
+          <a:prstGeom prst="ellipse">
+            <a:avLst/>
+          </a:prstGeom>
+          <a:solidFill>
+            <a:schemeClr val="accent4">
+              <a:lumMod val="20000"/>
+              <a:lumOff val="80000"/>
+              <a:alpha val="70000"/>
+            </a:schemeClr>
+          </a:solidFill>
+          <a:ln w="31750">
+            <a:solidFill>
+              <a:schemeClr val="bg1">
+                <a:lumMod val="75000"/>
+              </a:schemeClr>
+            </a:solidFill>
+          </a:ln>
+        </p:spPr>
+        <p:style>
+          <a:lnRef idx="2">
+            <a:schemeClr val="accent1">
+              <a:shade val="15000"/>
+            </a:schemeClr>
+          </a:lnRef>
+          <a:fillRef idx="1">
+            <a:schemeClr val="accent1"/>
+          </a:fillRef>
+          <a:effectRef idx="0">
+            <a:schemeClr val="accent1"/>
+          </a:effectRef>
+          <a:fontRef idx="minor">
+            <a:schemeClr val="lt1"/>
+          </a:fontRef>
+        </p:style>
+        <p:txBody>
+          <a:bodyPr wrap="none" lIns="0" tIns="0" rIns="0" bIns="0" rtlCol="0" anchor="ctr" anchorCtr="1"/>
+          <a:lstStyle/>
+          <a:p>
+            <a:pPr algn="ctr"/>
+            <a:r>
+              <a:rPr lang="en-US" altLang="zh-TW" sz="1200" dirty="0">
+                <a:solidFill>
+                  <a:schemeClr val="tx1"/>
+                </a:solidFill>
+                <a:latin typeface="ADLaM Display" panose="02010000000000000000" pitchFamily="2" charset="0"/>
+                <a:ea typeface="ADLaM Display" panose="02010000000000000000" pitchFamily="2" charset="0"/>
+                <a:cs typeface="ADLaM Display" panose="02010000000000000000" pitchFamily="2" charset="0"/>
+              </a:rPr>
+              <a:t>Encoder</a:t>
+            </a:r>
+          </a:p>
+          <a:p>
+            <a:pPr algn="ctr"/>
+            <a:r>
+              <a:rPr lang="en-US" altLang="zh-TW" sz="1200" dirty="0">
+                <a:solidFill>
+                  <a:schemeClr val="tx1"/>
+                </a:solidFill>
+                <a:latin typeface="ADLaM Display" panose="02010000000000000000" pitchFamily="2" charset="0"/>
+                <a:ea typeface="ADLaM Display" panose="02010000000000000000" pitchFamily="2" charset="0"/>
+                <a:cs typeface="ADLaM Display" panose="02010000000000000000" pitchFamily="2" charset="0"/>
+              </a:rPr>
+              <a:t>Decoder</a:t>
+            </a:r>
+          </a:p>
+          <a:p>
+            <a:pPr algn="ctr"/>
+            <a:r>
+              <a:rPr lang="en-US" altLang="zh-TW" sz="800" dirty="0">
+                <a:solidFill>
+                  <a:schemeClr val="tx1"/>
+                </a:solidFill>
+                <a:ea typeface="ADLaM Display" panose="02010000000000000000" pitchFamily="2" charset="0"/>
+                <a:cs typeface="ADLaM Display" panose="02010000000000000000" pitchFamily="2" charset="0"/>
+              </a:rPr>
+              <a:t>2014</a:t>
+            </a:r>
+          </a:p>
+        </p:txBody>
+      </p:sp>
+      <p:sp>
+        <p:nvSpPr>
+          <p:cNvPr id="24" name="橢圓 23">
+            <a:extLst>
+              <a:ext uri="{FF2B5EF4-FFF2-40B4-BE49-F238E27FC236}">
+                <a16:creationId xmlns:a16="http://schemas.microsoft.com/office/drawing/2014/main" id="{5AD84FAD-CD1C-1567-2DA1-5D10317355DF}"/>
+              </a:ext>
+            </a:extLst>
+          </p:cNvPr>
+          <p:cNvSpPr/>
+          <p:nvPr/>
+        </p:nvSpPr>
+        <p:spPr>
+          <a:xfrm>
+            <a:off x="6570671" y="4709307"/>
+            <a:ext cx="495818" cy="447885"/>
+          </a:xfrm>
+          <a:prstGeom prst="ellipse">
+            <a:avLst/>
+          </a:prstGeom>
+          <a:solidFill>
+            <a:schemeClr val="accent4">
+              <a:lumMod val="20000"/>
+              <a:lumOff val="80000"/>
+              <a:alpha val="70000"/>
+            </a:schemeClr>
+          </a:solidFill>
+          <a:ln w="31750">
+            <a:solidFill>
+              <a:schemeClr val="bg1">
+                <a:lumMod val="75000"/>
+              </a:schemeClr>
+            </a:solidFill>
+          </a:ln>
+        </p:spPr>
+        <p:style>
+          <a:lnRef idx="2">
+            <a:schemeClr val="accent1">
+              <a:shade val="15000"/>
+            </a:schemeClr>
+          </a:lnRef>
+          <a:fillRef idx="1">
+            <a:schemeClr val="accent1"/>
+          </a:fillRef>
+          <a:effectRef idx="0">
+            <a:schemeClr val="accent1"/>
+          </a:effectRef>
+          <a:fontRef idx="minor">
+            <a:schemeClr val="lt1"/>
+          </a:fontRef>
+        </p:style>
+        <p:txBody>
+          <a:bodyPr wrap="none" lIns="0" tIns="36000" rIns="0" bIns="0" rtlCol="0" anchor="ctr" anchorCtr="1"/>
+          <a:lstStyle/>
+          <a:p>
+            <a:pPr algn="ctr">
+              <a:lnSpc>
+                <a:spcPts val="1000"/>
+              </a:lnSpc>
+            </a:pPr>
+            <a:r>
+              <a:rPr lang="en-US" altLang="zh-TW" sz="1200" dirty="0">
+                <a:solidFill>
+                  <a:schemeClr val="tx1"/>
+                </a:solidFill>
+                <a:latin typeface="ADLaM Display" panose="02010000000000000000" pitchFamily="2" charset="0"/>
+                <a:ea typeface="ADLaM Display" panose="02010000000000000000" pitchFamily="2" charset="0"/>
+                <a:cs typeface="ADLaM Display" panose="02010000000000000000" pitchFamily="2" charset="0"/>
+              </a:rPr>
+              <a:t>GPT</a:t>
+            </a:r>
+          </a:p>
+          <a:p>
+            <a:pPr algn="ctr">
+              <a:lnSpc>
+                <a:spcPts val="1000"/>
+              </a:lnSpc>
+            </a:pPr>
+            <a:r>
+              <a:rPr lang="en-US" altLang="zh-TW" sz="1000" dirty="0">
+                <a:solidFill>
+                  <a:schemeClr val="tx1"/>
+                </a:solidFill>
+                <a:latin typeface="ADLaM Display" panose="02010000000000000000" pitchFamily="2" charset="0"/>
+                <a:ea typeface="ADLaM Display" panose="02010000000000000000" pitchFamily="2" charset="0"/>
+                <a:cs typeface="ADLaM Display" panose="02010000000000000000" pitchFamily="2" charset="0"/>
+              </a:rPr>
+              <a:t>Attn + MoE</a:t>
+            </a:r>
+          </a:p>
+        </p:txBody>
+      </p:sp>
+      <p:cxnSp>
+        <p:nvCxnSpPr>
+          <p:cNvPr id="27" name="直線單箭頭接點 26">
+            <a:extLst>
+              <a:ext uri="{FF2B5EF4-FFF2-40B4-BE49-F238E27FC236}">
+                <a16:creationId xmlns:a16="http://schemas.microsoft.com/office/drawing/2014/main" id="{0CC5A7DD-41A0-7EEC-23DC-D93DBA4C6ABD}"/>
+              </a:ext>
+            </a:extLst>
+          </p:cNvPr>
+          <p:cNvCxnSpPr>
+            <a:cxnSpLocks/>
+            <a:endCxn id="30" idx="0"/>
+          </p:cNvCxnSpPr>
+          <p:nvPr/>
+        </p:nvCxnSpPr>
+        <p:spPr>
+          <a:xfrm>
+            <a:off x="4326850" y="3697255"/>
+            <a:ext cx="15409" cy="955881"/>
+          </a:xfrm>
+          <a:prstGeom prst="straightConnector1">
+            <a:avLst/>
+          </a:prstGeom>
+          <a:ln w="22225">
+            <a:solidFill>
+              <a:schemeClr val="accent3">
+                <a:lumMod val="75000"/>
+              </a:schemeClr>
+            </a:solidFill>
+            <a:prstDash val="solid"/>
+            <a:tailEnd type="triangle"/>
+          </a:ln>
+        </p:spPr>
+        <p:style>
+          <a:lnRef idx="1">
+            <a:schemeClr val="accent1"/>
+          </a:lnRef>
+          <a:fillRef idx="0">
+            <a:schemeClr val="accent1"/>
+          </a:fillRef>
+          <a:effectRef idx="0">
+            <a:schemeClr val="accent1"/>
+          </a:effectRef>
+          <a:fontRef idx="minor">
+            <a:schemeClr val="tx1"/>
+          </a:fontRef>
+        </p:style>
+      </p:cxnSp>
+      <p:sp>
+        <p:nvSpPr>
+          <p:cNvPr id="28" name="矩形 27">
+            <a:extLst>
+              <a:ext uri="{FF2B5EF4-FFF2-40B4-BE49-F238E27FC236}">
+                <a16:creationId xmlns:a16="http://schemas.microsoft.com/office/drawing/2014/main" id="{D4B11118-85CB-E3B3-3B58-A81E7240DFBE}"/>
+              </a:ext>
+            </a:extLst>
+          </p:cNvPr>
+          <p:cNvSpPr/>
+          <p:nvPr/>
+        </p:nvSpPr>
+        <p:spPr>
+          <a:xfrm>
+            <a:off x="3976499" y="4005064"/>
+            <a:ext cx="731520" cy="172916"/>
+          </a:xfrm>
+          <a:prstGeom prst="rect">
+            <a:avLst/>
+          </a:prstGeom>
+          <a:solidFill>
+            <a:schemeClr val="accent3">
+              <a:lumMod val="20000"/>
+              <a:lumOff val="80000"/>
+              <a:alpha val="90000"/>
+            </a:schemeClr>
+          </a:solidFill>
+          <a:ln w="3175">
+            <a:solidFill>
+              <a:schemeClr val="accent3">
+                <a:lumMod val="60000"/>
+                <a:lumOff val="40000"/>
+              </a:schemeClr>
+            </a:solidFill>
+          </a:ln>
+        </p:spPr>
+        <p:style>
+          <a:lnRef idx="2">
+            <a:schemeClr val="accent1">
+              <a:shade val="15000"/>
+            </a:schemeClr>
+          </a:lnRef>
+          <a:fillRef idx="1">
+            <a:schemeClr val="accent1"/>
+          </a:fillRef>
+          <a:effectRef idx="0">
+            <a:schemeClr val="accent1"/>
+          </a:effectRef>
+          <a:fontRef idx="minor">
+            <a:schemeClr val="lt1"/>
+          </a:fontRef>
+        </p:style>
+        <p:txBody>
+          <a:bodyPr wrap="none" lIns="0" tIns="0" rIns="0" bIns="0" rtlCol="0" anchor="ctr"/>
+          <a:lstStyle/>
+          <a:p>
+            <a:pPr marL="0" marR="0" lvl="0" indent="0" algn="ctr" defTabSz="914400" rtl="0" eaLnBrk="1" fontAlgn="auto" latinLnBrk="0" hangingPunct="1">
+              <a:lnSpc>
+                <a:spcPct val="100000"/>
+              </a:lnSpc>
+              <a:spcBef>
+                <a:spcPts val="0"/>
+              </a:spcBef>
+              <a:spcAft>
+                <a:spcPts val="0"/>
+              </a:spcAft>
+              <a:buClrTx/>
+              <a:buSzTx/>
+              <a:buFontTx/>
+              <a:buNone/>
+              <a:tabLst/>
+              <a:defRPr/>
+            </a:pPr>
+            <a:r>
+              <a:rPr lang="en-US" altLang="zh-TW" sz="1200" b="1" dirty="0">
+                <a:ln w="0"/>
+                <a:solidFill>
+                  <a:prstClr val="black"/>
+                </a:solidFill>
+                <a:latin typeface="Calibri"/>
+                <a:ea typeface="新細明體" panose="02020500000000000000" pitchFamily="18" charset="-120"/>
+              </a:rPr>
+              <a:t>M</a:t>
+            </a:r>
+            <a:r>
+              <a:rPr kumimoji="0" lang="en-US" altLang="zh-TW" sz="1200" b="1" i="0" u="none" strike="noStrike" kern="1200" cap="none" spc="0" normalizeH="0" baseline="0" noProof="0" dirty="0">
+                <a:ln w="0"/>
+                <a:solidFill>
+                  <a:prstClr val="black"/>
+                </a:solidFill>
+                <a:effectLst/>
+                <a:uLnTx/>
+                <a:uFillTx/>
+                <a:latin typeface="Calibri"/>
+                <a:ea typeface="新細明體" panose="02020500000000000000" pitchFamily="18" charset="-120"/>
+                <a:cs typeface="+mn-cs"/>
+              </a:rPr>
+              <a:t>QA</a:t>
+            </a:r>
+          </a:p>
+        </p:txBody>
+      </p:sp>
+      <p:sp>
+        <p:nvSpPr>
+          <p:cNvPr id="29" name="矩形 28">
+            <a:extLst>
+              <a:ext uri="{FF2B5EF4-FFF2-40B4-BE49-F238E27FC236}">
+                <a16:creationId xmlns:a16="http://schemas.microsoft.com/office/drawing/2014/main" id="{019896D7-A914-F596-8731-06D7273EE94D}"/>
+              </a:ext>
+            </a:extLst>
+          </p:cNvPr>
+          <p:cNvSpPr/>
+          <p:nvPr/>
+        </p:nvSpPr>
+        <p:spPr>
+          <a:xfrm>
+            <a:off x="3976499" y="4293096"/>
+            <a:ext cx="731520" cy="165687"/>
+          </a:xfrm>
+          <a:prstGeom prst="rect">
+            <a:avLst/>
+          </a:prstGeom>
+          <a:solidFill>
+            <a:schemeClr val="accent3">
+              <a:lumMod val="20000"/>
+              <a:lumOff val="80000"/>
+              <a:alpha val="90000"/>
+            </a:schemeClr>
+          </a:solidFill>
+          <a:ln w="3175">
+            <a:solidFill>
+              <a:schemeClr val="accent3">
+                <a:lumMod val="60000"/>
+                <a:lumOff val="40000"/>
+              </a:schemeClr>
+            </a:solidFill>
+          </a:ln>
+        </p:spPr>
+        <p:style>
+          <a:lnRef idx="2">
+            <a:schemeClr val="accent1">
+              <a:shade val="15000"/>
+            </a:schemeClr>
+          </a:lnRef>
+          <a:fillRef idx="1">
+            <a:schemeClr val="accent1"/>
+          </a:fillRef>
+          <a:effectRef idx="0">
+            <a:schemeClr val="accent1"/>
+          </a:effectRef>
+          <a:fontRef idx="minor">
+            <a:schemeClr val="lt1"/>
+          </a:fontRef>
+        </p:style>
+        <p:txBody>
+          <a:bodyPr wrap="none" lIns="0" tIns="0" rIns="0" bIns="0" rtlCol="0" anchor="ctr"/>
+          <a:lstStyle/>
+          <a:p>
+            <a:pPr marL="0" marR="0" lvl="0" indent="0" algn="ctr" defTabSz="914400" rtl="0" eaLnBrk="1" fontAlgn="auto" latinLnBrk="0" hangingPunct="1">
+              <a:lnSpc>
+                <a:spcPct val="100000"/>
+              </a:lnSpc>
+              <a:spcBef>
+                <a:spcPts val="0"/>
+              </a:spcBef>
+              <a:spcAft>
+                <a:spcPts val="0"/>
+              </a:spcAft>
+              <a:buClrTx/>
+              <a:buSzTx/>
+              <a:buFontTx/>
+              <a:buNone/>
+              <a:tabLst/>
+              <a:defRPr/>
+            </a:pPr>
+            <a:r>
+              <a:rPr lang="en-US" altLang="zh-TW" sz="1200" b="1" dirty="0">
+                <a:ln w="0"/>
+                <a:solidFill>
+                  <a:prstClr val="black"/>
+                </a:solidFill>
+                <a:latin typeface="Calibri"/>
+                <a:ea typeface="新細明體" panose="02020500000000000000" pitchFamily="18" charset="-120"/>
+              </a:rPr>
+              <a:t>G</a:t>
+            </a:r>
+            <a:r>
+              <a:rPr kumimoji="0" lang="en-US" altLang="zh-TW" sz="1200" b="1" i="0" u="none" strike="noStrike" kern="1200" cap="none" spc="0" normalizeH="0" baseline="0" noProof="0" dirty="0">
+                <a:ln w="0"/>
+                <a:solidFill>
+                  <a:prstClr val="black"/>
+                </a:solidFill>
+                <a:effectLst/>
+                <a:uLnTx/>
+                <a:uFillTx/>
+                <a:latin typeface="Calibri"/>
+                <a:ea typeface="新細明體" panose="02020500000000000000" pitchFamily="18" charset="-120"/>
+                <a:cs typeface="+mn-cs"/>
+              </a:rPr>
+              <a:t>QA</a:t>
+            </a:r>
+          </a:p>
+        </p:txBody>
+      </p:sp>
+      <p:sp>
+        <p:nvSpPr>
+          <p:cNvPr id="30" name="矩形 29">
+            <a:extLst>
+              <a:ext uri="{FF2B5EF4-FFF2-40B4-BE49-F238E27FC236}">
+                <a16:creationId xmlns:a16="http://schemas.microsoft.com/office/drawing/2014/main" id="{8E97BE1F-4641-F50D-115E-0BA3293DC4A9}"/>
+              </a:ext>
+            </a:extLst>
+          </p:cNvPr>
+          <p:cNvSpPr/>
+          <p:nvPr/>
+        </p:nvSpPr>
+        <p:spPr>
+          <a:xfrm>
+            <a:off x="3976499" y="4653136"/>
+            <a:ext cx="731519" cy="447885"/>
+          </a:xfrm>
+          <a:prstGeom prst="rect">
+            <a:avLst/>
+          </a:prstGeom>
+          <a:solidFill>
+            <a:schemeClr val="accent3">
+              <a:lumMod val="20000"/>
+              <a:lumOff val="80000"/>
+              <a:alpha val="90000"/>
+            </a:schemeClr>
+          </a:solidFill>
+          <a:ln w="3175">
+            <a:solidFill>
+              <a:schemeClr val="accent3">
+                <a:lumMod val="60000"/>
+                <a:lumOff val="40000"/>
+              </a:schemeClr>
+            </a:solidFill>
+          </a:ln>
+        </p:spPr>
+        <p:style>
+          <a:lnRef idx="2">
+            <a:schemeClr val="accent1">
+              <a:shade val="15000"/>
+            </a:schemeClr>
+          </a:lnRef>
+          <a:fillRef idx="1">
+            <a:schemeClr val="accent1"/>
+          </a:fillRef>
+          <a:effectRef idx="0">
+            <a:schemeClr val="accent1"/>
+          </a:effectRef>
+          <a:fontRef idx="minor">
+            <a:schemeClr val="lt1"/>
+          </a:fontRef>
+        </p:style>
+        <p:txBody>
+          <a:bodyPr wrap="none" lIns="0" tIns="0" rIns="0" bIns="0" rtlCol="0" anchor="ctr"/>
+          <a:lstStyle/>
+          <a:p>
+            <a:pPr marL="0" marR="0" lvl="0" indent="0" algn="ctr" defTabSz="914400" rtl="0" eaLnBrk="1" fontAlgn="auto" latinLnBrk="0" hangingPunct="1">
+              <a:lnSpc>
+                <a:spcPts val="1000"/>
+              </a:lnSpc>
+              <a:spcBef>
+                <a:spcPts val="0"/>
+              </a:spcBef>
+              <a:spcAft>
+                <a:spcPts val="0"/>
+              </a:spcAft>
+              <a:buClrTx/>
+              <a:buSzTx/>
+              <a:buFontTx/>
+              <a:buNone/>
+              <a:tabLst/>
+              <a:defRPr/>
+            </a:pPr>
+            <a:r>
+              <a:rPr kumimoji="0" lang="en-US" altLang="zh-TW" sz="1200" b="1" i="0" u="none" strike="noStrike" kern="1200" cap="none" spc="0" normalizeH="0" baseline="0" noProof="0" dirty="0">
+                <a:ln w="0"/>
+                <a:solidFill>
+                  <a:prstClr val="black"/>
+                </a:solidFill>
+                <a:effectLst/>
+                <a:uLnTx/>
+                <a:uFillTx/>
+                <a:latin typeface="Calibri"/>
+                <a:ea typeface="新細明體" panose="02020500000000000000" pitchFamily="18" charset="-120"/>
+                <a:cs typeface="+mn-cs"/>
+              </a:rPr>
+              <a:t>Multi </a:t>
+            </a:r>
+            <a:r>
+              <a:rPr lang="en-US" altLang="zh-TW" sz="1200" b="1" dirty="0">
+                <a:ln w="0"/>
+                <a:solidFill>
+                  <a:prstClr val="black"/>
+                </a:solidFill>
+                <a:latin typeface="Calibri"/>
+                <a:ea typeface="新細明體" panose="02020500000000000000" pitchFamily="18" charset="-120"/>
+              </a:rPr>
+              <a:t>Latent</a:t>
+            </a:r>
+          </a:p>
+          <a:p>
+            <a:pPr marL="0" marR="0" lvl="0" indent="0" algn="ctr" defTabSz="914400" rtl="0" eaLnBrk="1" fontAlgn="auto" latinLnBrk="0" hangingPunct="1">
+              <a:lnSpc>
+                <a:spcPts val="1000"/>
+              </a:lnSpc>
+              <a:spcBef>
+                <a:spcPts val="0"/>
+              </a:spcBef>
+              <a:spcAft>
+                <a:spcPts val="0"/>
+              </a:spcAft>
+              <a:buClrTx/>
+              <a:buSzTx/>
+              <a:buFontTx/>
+              <a:buNone/>
+              <a:tabLst/>
+              <a:defRPr/>
+            </a:pPr>
+            <a:r>
+              <a:rPr kumimoji="0" lang="en-US" altLang="zh-TW" sz="1200" b="1" i="0" u="none" strike="noStrike" kern="1200" cap="none" spc="0" normalizeH="0" baseline="0" noProof="0" dirty="0">
+                <a:ln w="0"/>
+                <a:solidFill>
+                  <a:prstClr val="black"/>
+                </a:solidFill>
+                <a:effectLst/>
+                <a:uLnTx/>
+                <a:uFillTx/>
+                <a:latin typeface="Calibri"/>
+                <a:ea typeface="新細明體" panose="02020500000000000000" pitchFamily="18" charset="-120"/>
+                <a:cs typeface="+mn-cs"/>
+              </a:rPr>
+              <a:t>Attention</a:t>
+            </a:r>
+          </a:p>
+          <a:p>
+            <a:pPr marL="0" marR="0" lvl="0" indent="0" algn="ctr" defTabSz="914400" rtl="0" eaLnBrk="1" fontAlgn="auto" latinLnBrk="0" hangingPunct="1">
+              <a:lnSpc>
+                <a:spcPts val="1000"/>
+              </a:lnSpc>
+              <a:spcBef>
+                <a:spcPts val="0"/>
+              </a:spcBef>
+              <a:spcAft>
+                <a:spcPts val="0"/>
+              </a:spcAft>
+              <a:buClrTx/>
+              <a:buSzTx/>
+              <a:buFontTx/>
+              <a:buNone/>
+              <a:tabLst/>
+              <a:defRPr/>
+            </a:pPr>
+            <a:r>
+              <a:rPr lang="en-US" altLang="zh-TW" sz="800" dirty="0">
+                <a:ln w="0"/>
+                <a:solidFill>
+                  <a:prstClr val="black"/>
+                </a:solidFill>
+                <a:latin typeface="Calibri"/>
+                <a:ea typeface="新細明體" panose="02020500000000000000" pitchFamily="18" charset="-120"/>
+              </a:rPr>
+              <a:t>2024</a:t>
+            </a:r>
+            <a:endParaRPr kumimoji="0" lang="en-US" altLang="zh-TW" sz="800" i="0" u="none" strike="noStrike" kern="1200" cap="none" spc="0" normalizeH="0" baseline="0" noProof="0" dirty="0">
+              <a:ln w="0"/>
+              <a:solidFill>
+                <a:prstClr val="black"/>
+              </a:solidFill>
+              <a:effectLst/>
+              <a:uLnTx/>
+              <a:uFillTx/>
+              <a:latin typeface="Calibri"/>
+              <a:ea typeface="新細明體" panose="02020500000000000000" pitchFamily="18" charset="-120"/>
+              <a:cs typeface="+mn-cs"/>
+            </a:endParaRPr>
+          </a:p>
+        </p:txBody>
+      </p:sp>
+      <p:sp>
+        <p:nvSpPr>
+          <p:cNvPr id="31" name="矩形 30">
+            <a:extLst>
+              <a:ext uri="{FF2B5EF4-FFF2-40B4-BE49-F238E27FC236}">
+                <a16:creationId xmlns:a16="http://schemas.microsoft.com/office/drawing/2014/main" id="{E9F6D5AD-9561-8B3B-9EE9-975ADF9B9104}"/>
+              </a:ext>
+            </a:extLst>
+          </p:cNvPr>
+          <p:cNvSpPr/>
+          <p:nvPr/>
+        </p:nvSpPr>
+        <p:spPr>
+          <a:xfrm>
+            <a:off x="3968880" y="3717032"/>
+            <a:ext cx="731520" cy="172665"/>
+          </a:xfrm>
+          <a:prstGeom prst="rect">
+            <a:avLst/>
+          </a:prstGeom>
+          <a:solidFill>
+            <a:schemeClr val="accent3">
+              <a:lumMod val="20000"/>
+              <a:lumOff val="80000"/>
+              <a:alpha val="90000"/>
+            </a:schemeClr>
+          </a:solidFill>
+          <a:ln w="3175">
+            <a:solidFill>
+              <a:schemeClr val="accent3">
+                <a:lumMod val="60000"/>
+                <a:lumOff val="40000"/>
+              </a:schemeClr>
+            </a:solidFill>
+          </a:ln>
+        </p:spPr>
+        <p:style>
+          <a:lnRef idx="2">
+            <a:schemeClr val="accent1">
+              <a:shade val="15000"/>
+            </a:schemeClr>
+          </a:lnRef>
+          <a:fillRef idx="1">
+            <a:schemeClr val="accent1"/>
+          </a:fillRef>
+          <a:effectRef idx="0">
+            <a:schemeClr val="accent1"/>
+          </a:effectRef>
+          <a:fontRef idx="minor">
+            <a:schemeClr val="lt1"/>
+          </a:fontRef>
+        </p:style>
+        <p:txBody>
+          <a:bodyPr wrap="none" lIns="0" tIns="0" rIns="0" bIns="0" rtlCol="0" anchor="ctr"/>
+          <a:lstStyle/>
+          <a:p>
+            <a:pPr marL="0" marR="0" lvl="0" indent="0" algn="ctr" defTabSz="914400" rtl="0" eaLnBrk="1" fontAlgn="auto" latinLnBrk="0" hangingPunct="1">
+              <a:lnSpc>
+                <a:spcPct val="100000"/>
+              </a:lnSpc>
+              <a:spcBef>
+                <a:spcPts val="0"/>
+              </a:spcBef>
+              <a:spcAft>
+                <a:spcPts val="0"/>
+              </a:spcAft>
+              <a:buClrTx/>
+              <a:buSzTx/>
+              <a:buFontTx/>
+              <a:buNone/>
+              <a:tabLst/>
+              <a:defRPr/>
+            </a:pPr>
+            <a:r>
+              <a:rPr lang="en-US" altLang="zh-TW" sz="1200" b="1" dirty="0">
+                <a:ln w="0"/>
+                <a:solidFill>
+                  <a:prstClr val="black"/>
+                </a:solidFill>
+                <a:latin typeface="Calibri"/>
+                <a:ea typeface="新細明體" panose="02020500000000000000" pitchFamily="18" charset="-120"/>
+              </a:rPr>
+              <a:t>MH</a:t>
+            </a:r>
+            <a:r>
+              <a:rPr kumimoji="0" lang="en-US" altLang="zh-TW" sz="1200" b="1" i="0" u="none" strike="noStrike" kern="1200" cap="none" spc="0" normalizeH="0" baseline="0" noProof="0" dirty="0">
+                <a:ln w="0"/>
+                <a:solidFill>
+                  <a:prstClr val="black"/>
+                </a:solidFill>
+                <a:effectLst/>
+                <a:uLnTx/>
+                <a:uFillTx/>
+                <a:latin typeface="Calibri"/>
+                <a:ea typeface="新細明體" panose="02020500000000000000" pitchFamily="18" charset="-120"/>
+                <a:cs typeface="+mn-cs"/>
+              </a:rPr>
+              <a:t>A</a:t>
+            </a:r>
+          </a:p>
+        </p:txBody>
+      </p:sp>
+      <p:sp>
+        <p:nvSpPr>
+          <p:cNvPr id="38" name="矩形 37">
+            <a:extLst>
+              <a:ext uri="{FF2B5EF4-FFF2-40B4-BE49-F238E27FC236}">
+                <a16:creationId xmlns:a16="http://schemas.microsoft.com/office/drawing/2014/main" id="{C3BBF09B-E535-6D8F-9D33-2BF80A6AE597}"/>
+              </a:ext>
+            </a:extLst>
+          </p:cNvPr>
+          <p:cNvSpPr/>
+          <p:nvPr/>
+        </p:nvSpPr>
+        <p:spPr>
+          <a:xfrm>
+            <a:off x="7626401" y="5797129"/>
+            <a:ext cx="628458" cy="361919"/>
+          </a:xfrm>
+          <a:prstGeom prst="rect">
+            <a:avLst/>
+          </a:prstGeom>
+          <a:solidFill>
+            <a:schemeClr val="accent1">
+              <a:lumMod val="20000"/>
+              <a:lumOff val="80000"/>
+              <a:alpha val="90000"/>
+            </a:schemeClr>
+          </a:solidFill>
+          <a:ln w="3175">
+            <a:solidFill>
+              <a:schemeClr val="accent1">
+                <a:lumMod val="60000"/>
+                <a:lumOff val="40000"/>
+              </a:schemeClr>
+            </a:solidFill>
+          </a:ln>
+        </p:spPr>
+        <p:style>
+          <a:lnRef idx="2">
+            <a:schemeClr val="accent1">
+              <a:shade val="15000"/>
+            </a:schemeClr>
+          </a:lnRef>
+          <a:fillRef idx="1">
+            <a:schemeClr val="accent1"/>
+          </a:fillRef>
+          <a:effectRef idx="0">
+            <a:schemeClr val="accent1"/>
+          </a:effectRef>
+          <a:fontRef idx="minor">
+            <a:schemeClr val="lt1"/>
+          </a:fontRef>
+        </p:style>
+        <p:txBody>
+          <a:bodyPr wrap="none" lIns="0" tIns="0" rIns="0" bIns="0" rtlCol="0" anchor="ctr"/>
+          <a:lstStyle/>
+          <a:p>
+            <a:pPr marL="0" marR="0" lvl="0" indent="0" algn="ctr" defTabSz="914400" rtl="0" eaLnBrk="1" fontAlgn="auto" latinLnBrk="0" hangingPunct="1">
+              <a:lnSpc>
+                <a:spcPct val="100000"/>
+              </a:lnSpc>
+              <a:spcBef>
+                <a:spcPts val="0"/>
+              </a:spcBef>
+              <a:spcAft>
+                <a:spcPts val="0"/>
+              </a:spcAft>
+              <a:buClrTx/>
+              <a:buSzTx/>
+              <a:buFontTx/>
+              <a:buNone/>
+              <a:tabLst/>
+              <a:defRPr/>
+            </a:pPr>
+            <a:r>
+              <a:rPr kumimoji="0" lang="en-US" altLang="zh-TW" sz="1200" b="1" i="0" u="none" strike="noStrike" kern="1200" cap="none" spc="0" normalizeH="0" baseline="0" noProof="0" dirty="0">
+                <a:ln w="0"/>
+                <a:solidFill>
+                  <a:prstClr val="black"/>
+                </a:solidFill>
+                <a:effectLst/>
+                <a:uLnTx/>
+                <a:uFillTx/>
+                <a:latin typeface="Calibri"/>
+                <a:ea typeface="新細明體" panose="02020500000000000000" pitchFamily="18" charset="-120"/>
+                <a:cs typeface="+mn-cs"/>
+              </a:rPr>
+              <a:t>KDA</a:t>
+            </a:r>
+          </a:p>
+          <a:p>
+            <a:pPr marL="0" marR="0" lvl="0" indent="0" algn="ctr" defTabSz="914400" rtl="0" eaLnBrk="1" fontAlgn="auto" latinLnBrk="0" hangingPunct="1">
+              <a:lnSpc>
+                <a:spcPct val="100000"/>
+              </a:lnSpc>
+              <a:spcBef>
+                <a:spcPts val="0"/>
+              </a:spcBef>
+              <a:spcAft>
+                <a:spcPts val="0"/>
+              </a:spcAft>
+              <a:buClrTx/>
+              <a:buSzTx/>
+              <a:buFontTx/>
+              <a:buNone/>
+              <a:tabLst/>
+              <a:defRPr/>
+            </a:pPr>
+            <a:r>
+              <a:rPr kumimoji="0" lang="en-US" altLang="zh-TW" sz="1200" b="1" i="0" u="none" strike="noStrike" kern="1200" cap="none" spc="0" normalizeH="0" baseline="0" noProof="0" dirty="0">
+                <a:ln w="0"/>
+                <a:solidFill>
+                  <a:prstClr val="black"/>
+                </a:solidFill>
+                <a:effectLst/>
+                <a:uLnTx/>
+                <a:uFillTx/>
+                <a:latin typeface="Calibri"/>
+                <a:ea typeface="新細明體" panose="02020500000000000000" pitchFamily="18" charset="-120"/>
+                <a:cs typeface="+mn-cs"/>
+              </a:rPr>
+              <a:t>AttnRes</a:t>
+            </a:r>
+          </a:p>
+        </p:txBody>
+      </p:sp>
+      <p:cxnSp>
+        <p:nvCxnSpPr>
+          <p:cNvPr id="45" name="直線單箭頭接點 44">
+            <a:extLst>
+              <a:ext uri="{FF2B5EF4-FFF2-40B4-BE49-F238E27FC236}">
+                <a16:creationId xmlns:a16="http://schemas.microsoft.com/office/drawing/2014/main" id="{4ED559E8-20A7-6144-F4C3-CB32FB2CB002}"/>
+              </a:ext>
+            </a:extLst>
+          </p:cNvPr>
+          <p:cNvCxnSpPr>
+            <a:cxnSpLocks/>
+            <a:stCxn id="92" idx="2"/>
+            <a:endCxn id="50" idx="0"/>
+          </p:cNvCxnSpPr>
+          <p:nvPr/>
+        </p:nvCxnSpPr>
+        <p:spPr>
+          <a:xfrm>
+            <a:off x="3496707" y="3889697"/>
+            <a:ext cx="893" cy="1446235"/>
+          </a:xfrm>
+          <a:prstGeom prst="straightConnector1">
+            <a:avLst/>
+          </a:prstGeom>
+          <a:ln w="22225">
+            <a:solidFill>
+              <a:schemeClr val="accent3">
+                <a:lumMod val="75000"/>
+              </a:schemeClr>
+            </a:solidFill>
+            <a:prstDash val="solid"/>
+            <a:tailEnd type="triangle"/>
+          </a:ln>
+        </p:spPr>
+        <p:style>
+          <a:lnRef idx="1">
+            <a:schemeClr val="accent1"/>
+          </a:lnRef>
+          <a:fillRef idx="0">
+            <a:schemeClr val="accent1"/>
+          </a:fillRef>
+          <a:effectRef idx="0">
+            <a:schemeClr val="accent1"/>
+          </a:effectRef>
+          <a:fontRef idx="minor">
+            <a:schemeClr val="tx1"/>
+          </a:fontRef>
+        </p:style>
+      </p:cxnSp>
+      <p:sp>
+        <p:nvSpPr>
+          <p:cNvPr id="47" name="矩形 46">
+            <a:extLst>
+              <a:ext uri="{FF2B5EF4-FFF2-40B4-BE49-F238E27FC236}">
+                <a16:creationId xmlns:a16="http://schemas.microsoft.com/office/drawing/2014/main" id="{D70EE51F-11F3-E227-6416-3EF6D0A0EF82}"/>
+              </a:ext>
+            </a:extLst>
+          </p:cNvPr>
+          <p:cNvSpPr/>
+          <p:nvPr/>
+        </p:nvSpPr>
+        <p:spPr>
+          <a:xfrm>
+            <a:off x="3131840" y="4415441"/>
+            <a:ext cx="731520" cy="165687"/>
+          </a:xfrm>
+          <a:prstGeom prst="rect">
+            <a:avLst/>
+          </a:prstGeom>
+          <a:solidFill>
+            <a:schemeClr val="accent3">
+              <a:lumMod val="20000"/>
+              <a:lumOff val="80000"/>
+              <a:alpha val="90000"/>
+            </a:schemeClr>
+          </a:solidFill>
+          <a:ln w="3175">
+            <a:solidFill>
+              <a:schemeClr val="accent3">
+                <a:lumMod val="60000"/>
+                <a:lumOff val="40000"/>
+              </a:schemeClr>
+            </a:solidFill>
+          </a:ln>
+        </p:spPr>
+        <p:style>
+          <a:lnRef idx="2">
+            <a:schemeClr val="accent1">
+              <a:shade val="15000"/>
+            </a:schemeClr>
+          </a:lnRef>
+          <a:fillRef idx="1">
+            <a:schemeClr val="accent1"/>
+          </a:fillRef>
+          <a:effectRef idx="0">
+            <a:schemeClr val="accent1"/>
+          </a:effectRef>
+          <a:fontRef idx="minor">
+            <a:schemeClr val="lt1"/>
+          </a:fontRef>
+        </p:style>
+        <p:txBody>
+          <a:bodyPr wrap="none" lIns="0" tIns="0" rIns="0" bIns="0" rtlCol="0" anchor="ctr"/>
+          <a:lstStyle/>
+          <a:p>
+            <a:pPr marL="0" marR="0" lvl="0" indent="0" algn="ctr" defTabSz="914400" rtl="0" eaLnBrk="1" fontAlgn="auto" latinLnBrk="0" hangingPunct="1">
+              <a:lnSpc>
+                <a:spcPct val="100000"/>
+              </a:lnSpc>
+              <a:spcBef>
+                <a:spcPts val="0"/>
+              </a:spcBef>
+              <a:spcAft>
+                <a:spcPts val="0"/>
+              </a:spcAft>
+              <a:buClrTx/>
+              <a:buSzTx/>
+              <a:buFontTx/>
+              <a:buNone/>
+              <a:tabLst/>
+              <a:defRPr/>
+            </a:pPr>
+            <a:r>
+              <a:rPr lang="en-US" altLang="zh-TW" sz="1200" b="1" dirty="0">
+                <a:ln w="0"/>
+                <a:solidFill>
+                  <a:prstClr val="black"/>
+                </a:solidFill>
+                <a:latin typeface="Calibri"/>
+                <a:ea typeface="新細明體" panose="02020500000000000000" pitchFamily="18" charset="-120"/>
+              </a:rPr>
+              <a:t>NoPE</a:t>
+            </a:r>
+            <a:endParaRPr kumimoji="0" lang="en-US" altLang="zh-TW" sz="1200" b="1" i="0" u="none" strike="noStrike" kern="1200" cap="none" spc="0" normalizeH="0" baseline="0" noProof="0" dirty="0">
+              <a:ln w="0"/>
+              <a:solidFill>
+                <a:prstClr val="black"/>
+              </a:solidFill>
+              <a:effectLst/>
+              <a:uLnTx/>
+              <a:uFillTx/>
+              <a:latin typeface="Calibri"/>
+              <a:ea typeface="新細明體" panose="02020500000000000000" pitchFamily="18" charset="-120"/>
+              <a:cs typeface="+mn-cs"/>
+            </a:endParaRPr>
+          </a:p>
+        </p:txBody>
+      </p:sp>
+      <p:sp>
+        <p:nvSpPr>
+          <p:cNvPr id="48" name="矩形 47">
+            <a:extLst>
+              <a:ext uri="{FF2B5EF4-FFF2-40B4-BE49-F238E27FC236}">
+                <a16:creationId xmlns:a16="http://schemas.microsoft.com/office/drawing/2014/main" id="{8C481EE5-03DA-1F5B-927C-966083F6C882}"/>
+              </a:ext>
+            </a:extLst>
+          </p:cNvPr>
+          <p:cNvSpPr/>
+          <p:nvPr/>
+        </p:nvSpPr>
+        <p:spPr>
+          <a:xfrm>
+            <a:off x="3130947" y="4653054"/>
+            <a:ext cx="731520" cy="447885"/>
+          </a:xfrm>
+          <a:prstGeom prst="rect">
+            <a:avLst/>
+          </a:prstGeom>
+          <a:solidFill>
+            <a:schemeClr val="accent3">
+              <a:lumMod val="20000"/>
+              <a:lumOff val="80000"/>
+              <a:alpha val="90000"/>
+            </a:schemeClr>
+          </a:solidFill>
+          <a:ln w="3175">
+            <a:solidFill>
+              <a:schemeClr val="accent3">
+                <a:lumMod val="60000"/>
+                <a:lumOff val="40000"/>
+              </a:schemeClr>
+            </a:solidFill>
+          </a:ln>
+        </p:spPr>
+        <p:style>
+          <a:lnRef idx="2">
+            <a:schemeClr val="accent1">
+              <a:shade val="15000"/>
+            </a:schemeClr>
+          </a:lnRef>
+          <a:fillRef idx="1">
+            <a:schemeClr val="accent1"/>
+          </a:fillRef>
+          <a:effectRef idx="0">
+            <a:schemeClr val="accent1"/>
+          </a:effectRef>
+          <a:fontRef idx="minor">
+            <a:schemeClr val="lt1"/>
+          </a:fontRef>
+        </p:style>
+        <p:txBody>
+          <a:bodyPr wrap="none" lIns="0" tIns="0" rIns="0" bIns="0" rtlCol="0" anchor="ctr"/>
+          <a:lstStyle/>
+          <a:p>
+            <a:pPr marL="0" marR="0" lvl="0" indent="0" algn="ctr" defTabSz="914400" rtl="0" eaLnBrk="1" fontAlgn="auto" latinLnBrk="0" hangingPunct="1">
+              <a:lnSpc>
+                <a:spcPts val="1000"/>
+              </a:lnSpc>
+              <a:spcBef>
+                <a:spcPts val="0"/>
+              </a:spcBef>
+              <a:spcAft>
+                <a:spcPts val="0"/>
+              </a:spcAft>
+              <a:buClrTx/>
+              <a:buSzTx/>
+              <a:buFontTx/>
+              <a:buNone/>
+              <a:tabLst/>
+              <a:defRPr/>
+            </a:pPr>
+            <a:r>
+              <a:rPr kumimoji="0" lang="en-US" altLang="zh-TW" sz="1200" b="1" i="0" u="none" strike="noStrike" kern="1200" cap="none" spc="0" normalizeH="0" baseline="0" noProof="0" dirty="0">
+                <a:ln w="0"/>
+                <a:solidFill>
+                  <a:prstClr val="black"/>
+                </a:solidFill>
+                <a:effectLst/>
+                <a:uLnTx/>
+                <a:uFillTx/>
+                <a:latin typeface="Calibri"/>
+                <a:ea typeface="新細明體" panose="02020500000000000000" pitchFamily="18" charset="-120"/>
+                <a:cs typeface="+mn-cs"/>
+              </a:rPr>
+              <a:t>PE</a:t>
+            </a:r>
+          </a:p>
+          <a:p>
+            <a:pPr marL="0" marR="0" lvl="0" indent="0" algn="ctr" defTabSz="914400" rtl="0" eaLnBrk="1" fontAlgn="auto" latinLnBrk="0" hangingPunct="1">
+              <a:lnSpc>
+                <a:spcPts val="1000"/>
+              </a:lnSpc>
+              <a:spcBef>
+                <a:spcPts val="0"/>
+              </a:spcBef>
+              <a:spcAft>
+                <a:spcPts val="0"/>
+              </a:spcAft>
+              <a:buClrTx/>
+              <a:buSzTx/>
+              <a:buFontTx/>
+              <a:buNone/>
+              <a:tabLst/>
+              <a:defRPr/>
+            </a:pPr>
+            <a:r>
+              <a:rPr kumimoji="0" lang="en-US" altLang="zh-TW" sz="1200" b="1" i="0" u="none" strike="noStrike" kern="1200" cap="none" spc="0" normalizeH="0" baseline="0" noProof="0" dirty="0">
+                <a:ln w="0"/>
+                <a:solidFill>
+                  <a:prstClr val="black"/>
+                </a:solidFill>
+                <a:effectLst/>
+                <a:uLnTx/>
+                <a:uFillTx/>
+                <a:latin typeface="Calibri"/>
+                <a:ea typeface="新細明體" panose="02020500000000000000" pitchFamily="18" charset="-120"/>
+                <a:cs typeface="+mn-cs"/>
+              </a:rPr>
+              <a:t>Decouple</a:t>
+            </a:r>
+          </a:p>
+          <a:p>
+            <a:pPr marL="0" marR="0" lvl="0" indent="0" algn="ctr" defTabSz="914400" rtl="0" eaLnBrk="1" fontAlgn="auto" latinLnBrk="0" hangingPunct="1">
+              <a:lnSpc>
+                <a:spcPct val="100000"/>
+              </a:lnSpc>
+              <a:spcBef>
+                <a:spcPts val="0"/>
+              </a:spcBef>
+              <a:spcAft>
+                <a:spcPts val="0"/>
+              </a:spcAft>
+              <a:buClrTx/>
+              <a:buSzTx/>
+              <a:buFontTx/>
+              <a:buNone/>
+              <a:tabLst/>
+              <a:defRPr/>
+            </a:pPr>
+            <a:r>
+              <a:rPr lang="en-US" altLang="zh-TW" sz="800" dirty="0">
+                <a:ln w="0"/>
+                <a:solidFill>
+                  <a:prstClr val="black"/>
+                </a:solidFill>
+                <a:latin typeface="Calibri"/>
+                <a:ea typeface="新細明體" panose="02020500000000000000" pitchFamily="18" charset="-120"/>
+              </a:rPr>
+              <a:t>2024</a:t>
+            </a:r>
+            <a:endParaRPr kumimoji="0" lang="en-US" altLang="zh-TW" sz="800" i="0" u="none" strike="noStrike" kern="1200" cap="none" spc="0" normalizeH="0" baseline="0" noProof="0" dirty="0">
+              <a:ln w="0"/>
+              <a:solidFill>
+                <a:prstClr val="black"/>
+              </a:solidFill>
+              <a:effectLst/>
+              <a:uLnTx/>
+              <a:uFillTx/>
+              <a:latin typeface="Calibri"/>
+              <a:ea typeface="新細明體" panose="02020500000000000000" pitchFamily="18" charset="-120"/>
+              <a:cs typeface="+mn-cs"/>
+            </a:endParaRPr>
+          </a:p>
+        </p:txBody>
+      </p:sp>
+      <p:sp>
+        <p:nvSpPr>
+          <p:cNvPr id="50" name="矩形 49">
+            <a:extLst>
+              <a:ext uri="{FF2B5EF4-FFF2-40B4-BE49-F238E27FC236}">
+                <a16:creationId xmlns:a16="http://schemas.microsoft.com/office/drawing/2014/main" id="{E58CE629-9C97-E6A5-73B1-3258C20DCA38}"/>
+              </a:ext>
+            </a:extLst>
+          </p:cNvPr>
+          <p:cNvSpPr/>
+          <p:nvPr/>
+        </p:nvSpPr>
+        <p:spPr>
+          <a:xfrm>
+            <a:off x="3131840" y="5335932"/>
+            <a:ext cx="731520" cy="397324"/>
+          </a:xfrm>
+          <a:prstGeom prst="rect">
+            <a:avLst/>
+          </a:prstGeom>
+          <a:solidFill>
+            <a:schemeClr val="accent3">
+              <a:lumMod val="20000"/>
+              <a:lumOff val="80000"/>
+              <a:alpha val="90000"/>
+            </a:schemeClr>
+          </a:solidFill>
+          <a:ln w="3175">
+            <a:solidFill>
+              <a:schemeClr val="accent3">
+                <a:lumMod val="60000"/>
+                <a:lumOff val="40000"/>
+              </a:schemeClr>
+            </a:solidFill>
+          </a:ln>
+        </p:spPr>
+        <p:style>
+          <a:lnRef idx="2">
+            <a:schemeClr val="accent1">
+              <a:shade val="15000"/>
+            </a:schemeClr>
+          </a:lnRef>
+          <a:fillRef idx="1">
+            <a:schemeClr val="accent1"/>
+          </a:fillRef>
+          <a:effectRef idx="0">
+            <a:schemeClr val="accent1"/>
+          </a:effectRef>
+          <a:fontRef idx="minor">
+            <a:schemeClr val="lt1"/>
+          </a:fontRef>
+        </p:style>
+        <p:txBody>
+          <a:bodyPr wrap="none" lIns="0" tIns="0" rIns="0" bIns="0" rtlCol="0" anchor="ctr"/>
+          <a:lstStyle/>
+          <a:p>
+            <a:pPr marL="0" marR="0" lvl="0" indent="0" algn="ctr" defTabSz="914400" rtl="0" eaLnBrk="1" fontAlgn="auto" latinLnBrk="0" hangingPunct="1">
+              <a:lnSpc>
+                <a:spcPts val="1000"/>
+              </a:lnSpc>
+              <a:spcBef>
+                <a:spcPts val="0"/>
+              </a:spcBef>
+              <a:spcAft>
+                <a:spcPts val="0"/>
+              </a:spcAft>
+              <a:buClrTx/>
+              <a:buSzTx/>
+              <a:buFontTx/>
+              <a:buNone/>
+              <a:tabLst/>
+              <a:defRPr/>
+            </a:pPr>
+            <a:r>
+              <a:rPr kumimoji="0" lang="en-US" altLang="zh-TW" sz="1200" b="1" i="0" u="none" strike="noStrike" kern="1200" cap="none" spc="0" normalizeH="0" baseline="0" noProof="0" dirty="0">
+                <a:ln w="0"/>
+                <a:solidFill>
+                  <a:prstClr val="black"/>
+                </a:solidFill>
+                <a:effectLst/>
+                <a:uLnTx/>
+                <a:uFillTx/>
+                <a:latin typeface="Calibri"/>
+                <a:ea typeface="新細明體" panose="02020500000000000000" pitchFamily="18" charset="-120"/>
+                <a:cs typeface="+mn-cs"/>
+              </a:rPr>
+              <a:t>NoPE</a:t>
+            </a:r>
+          </a:p>
+          <a:p>
+            <a:pPr marL="0" marR="0" lvl="0" indent="0" algn="ctr" defTabSz="914400" rtl="0" eaLnBrk="1" fontAlgn="auto" latinLnBrk="0" hangingPunct="1">
+              <a:lnSpc>
+                <a:spcPts val="1000"/>
+              </a:lnSpc>
+              <a:spcBef>
+                <a:spcPts val="0"/>
+              </a:spcBef>
+              <a:spcAft>
+                <a:spcPts val="0"/>
+              </a:spcAft>
+              <a:buClrTx/>
+              <a:buSzTx/>
+              <a:buFontTx/>
+              <a:buNone/>
+              <a:tabLst/>
+              <a:defRPr/>
+            </a:pPr>
+            <a:r>
+              <a:rPr lang="en-US" altLang="zh-TW" sz="1200" b="1" dirty="0">
+                <a:ln w="0"/>
+                <a:solidFill>
+                  <a:prstClr val="black"/>
+                </a:solidFill>
+                <a:latin typeface="Calibri"/>
+                <a:ea typeface="新細明體" panose="02020500000000000000" pitchFamily="18" charset="-120"/>
+              </a:rPr>
+              <a:t>Everywhere</a:t>
+            </a:r>
+          </a:p>
+          <a:p>
+            <a:pPr marL="0" marR="0" lvl="0" indent="0" algn="ctr" defTabSz="914400" rtl="0" eaLnBrk="1" fontAlgn="auto" latinLnBrk="0" hangingPunct="1">
+              <a:lnSpc>
+                <a:spcPct val="100000"/>
+              </a:lnSpc>
+              <a:spcBef>
+                <a:spcPts val="0"/>
+              </a:spcBef>
+              <a:spcAft>
+                <a:spcPts val="0"/>
+              </a:spcAft>
+              <a:buClrTx/>
+              <a:buSzTx/>
+              <a:buFontTx/>
+              <a:buNone/>
+              <a:tabLst/>
+              <a:defRPr/>
+            </a:pPr>
+            <a:r>
+              <a:rPr kumimoji="0" lang="en-US" altLang="zh-TW" sz="800" i="0" u="none" strike="noStrike" kern="1200" cap="none" spc="0" normalizeH="0" baseline="0" noProof="0" dirty="0">
+                <a:ln w="0"/>
+                <a:solidFill>
+                  <a:prstClr val="black"/>
+                </a:solidFill>
+                <a:effectLst/>
+                <a:uLnTx/>
+                <a:uFillTx/>
+                <a:latin typeface="Calibri"/>
+                <a:ea typeface="新細明體" panose="02020500000000000000" pitchFamily="18" charset="-120"/>
+                <a:cs typeface="+mn-cs"/>
+              </a:rPr>
+              <a:t>2026</a:t>
+            </a:r>
+          </a:p>
+        </p:txBody>
+      </p:sp>
+      <p:sp>
+        <p:nvSpPr>
+          <p:cNvPr id="4" name="矩形 3">
+            <a:extLst>
+              <a:ext uri="{FF2B5EF4-FFF2-40B4-BE49-F238E27FC236}">
+                <a16:creationId xmlns:a16="http://schemas.microsoft.com/office/drawing/2014/main" id="{0AF6AAD9-A49B-4E37-921F-F55608D4D506}"/>
+              </a:ext>
+            </a:extLst>
+          </p:cNvPr>
+          <p:cNvSpPr/>
+          <p:nvPr/>
+        </p:nvSpPr>
+        <p:spPr>
+          <a:xfrm>
+            <a:off x="6123593" y="5803386"/>
+            <a:ext cx="628457" cy="361918"/>
+          </a:xfrm>
+          <a:prstGeom prst="rect">
+            <a:avLst/>
+          </a:prstGeom>
+          <a:solidFill>
+            <a:schemeClr val="accent1">
+              <a:lumMod val="20000"/>
+              <a:lumOff val="80000"/>
+              <a:alpha val="90000"/>
+            </a:schemeClr>
+          </a:solidFill>
+          <a:ln w="3175">
+            <a:solidFill>
+              <a:schemeClr val="accent1">
+                <a:lumMod val="60000"/>
+                <a:lumOff val="40000"/>
+              </a:schemeClr>
+            </a:solidFill>
+          </a:ln>
+        </p:spPr>
+        <p:style>
+          <a:lnRef idx="2">
+            <a:schemeClr val="accent1">
+              <a:shade val="15000"/>
+            </a:schemeClr>
+          </a:lnRef>
+          <a:fillRef idx="1">
+            <a:schemeClr val="accent1"/>
+          </a:fillRef>
+          <a:effectRef idx="0">
+            <a:schemeClr val="accent1"/>
+          </a:effectRef>
+          <a:fontRef idx="minor">
+            <a:schemeClr val="lt1"/>
+          </a:fontRef>
+        </p:style>
+        <p:txBody>
+          <a:bodyPr wrap="none" lIns="0" tIns="0" rIns="0" bIns="0" rtlCol="0" anchor="ctr"/>
+          <a:lstStyle/>
+          <a:p>
+            <a:pPr marL="0" marR="0" lvl="0" indent="0" algn="ctr" defTabSz="914400" rtl="0" eaLnBrk="1" fontAlgn="auto" latinLnBrk="0" hangingPunct="1">
+              <a:lnSpc>
+                <a:spcPct val="100000"/>
+              </a:lnSpc>
+              <a:spcBef>
+                <a:spcPts val="0"/>
+              </a:spcBef>
+              <a:spcAft>
+                <a:spcPts val="0"/>
+              </a:spcAft>
+              <a:buClrTx/>
+              <a:buSzTx/>
+              <a:buFontTx/>
+              <a:buNone/>
+              <a:tabLst/>
+              <a:defRPr/>
+            </a:pPr>
+            <a:r>
+              <a:rPr kumimoji="0" lang="en-US" altLang="zh-TW" sz="1200" b="1" i="0" u="none" strike="noStrike" kern="1200" cap="none" spc="0" normalizeH="0" baseline="0" noProof="0" dirty="0">
+                <a:ln w="0"/>
+                <a:solidFill>
+                  <a:prstClr val="black"/>
+                </a:solidFill>
+                <a:effectLst/>
+                <a:uLnTx/>
+                <a:uFillTx/>
+                <a:latin typeface="Calibri"/>
+                <a:ea typeface="新細明體" panose="02020500000000000000" pitchFamily="18" charset="-120"/>
+                <a:cs typeface="+mn-cs"/>
+              </a:rPr>
+              <a:t>PLE</a:t>
+            </a:r>
+          </a:p>
+          <a:p>
+            <a:pPr marL="0" marR="0" lvl="0" indent="0" algn="ctr" defTabSz="914400" rtl="0" eaLnBrk="1" fontAlgn="auto" latinLnBrk="0" hangingPunct="1">
+              <a:lnSpc>
+                <a:spcPct val="100000"/>
+              </a:lnSpc>
+              <a:spcBef>
+                <a:spcPts val="0"/>
+              </a:spcBef>
+              <a:spcAft>
+                <a:spcPts val="0"/>
+              </a:spcAft>
+              <a:buClrTx/>
+              <a:buSzTx/>
+              <a:buFontTx/>
+              <a:buNone/>
+              <a:tabLst/>
+              <a:defRPr/>
+            </a:pPr>
+            <a:r>
+              <a:rPr lang="en-US" altLang="zh-TW" sz="1200" b="1" dirty="0">
+                <a:ln w="0"/>
+                <a:solidFill>
+                  <a:prstClr val="black"/>
+                </a:solidFill>
+                <a:latin typeface="Calibri"/>
+                <a:ea typeface="新細明體" panose="02020500000000000000" pitchFamily="18" charset="-120"/>
+              </a:rPr>
+              <a:t>Diffusion</a:t>
+            </a:r>
+            <a:endParaRPr kumimoji="0" lang="en-US" altLang="zh-TW" sz="1200" b="1" i="0" u="none" strike="noStrike" kern="1200" cap="none" spc="0" normalizeH="0" baseline="0" noProof="0" dirty="0">
+              <a:ln w="0"/>
+              <a:solidFill>
+                <a:prstClr val="black"/>
+              </a:solidFill>
+              <a:effectLst/>
+              <a:uLnTx/>
+              <a:uFillTx/>
+              <a:latin typeface="Calibri"/>
+              <a:ea typeface="新細明體" panose="02020500000000000000" pitchFamily="18" charset="-120"/>
+              <a:cs typeface="+mn-cs"/>
+            </a:endParaRPr>
+          </a:p>
+        </p:txBody>
+      </p:sp>
+      <p:sp>
+        <p:nvSpPr>
+          <p:cNvPr id="18" name="橢圓 17">
+            <a:extLst>
+              <a:ext uri="{FF2B5EF4-FFF2-40B4-BE49-F238E27FC236}">
+                <a16:creationId xmlns:a16="http://schemas.microsoft.com/office/drawing/2014/main" id="{4740E3ED-7716-EAD6-4846-308CD05C1798}"/>
+              </a:ext>
+            </a:extLst>
+          </p:cNvPr>
+          <p:cNvSpPr/>
+          <p:nvPr/>
+        </p:nvSpPr>
+        <p:spPr>
+          <a:xfrm>
+            <a:off x="6208861" y="5301663"/>
+            <a:ext cx="495818" cy="447885"/>
+          </a:xfrm>
+          <a:prstGeom prst="ellipse">
+            <a:avLst/>
+          </a:prstGeom>
+          <a:solidFill>
+            <a:schemeClr val="accent1">
+              <a:lumMod val="20000"/>
+              <a:lumOff val="80000"/>
+              <a:alpha val="70000"/>
+            </a:schemeClr>
+          </a:solidFill>
+          <a:ln w="31750">
+            <a:solidFill>
+              <a:schemeClr val="bg1">
+                <a:lumMod val="75000"/>
+              </a:schemeClr>
+            </a:solidFill>
+          </a:ln>
+        </p:spPr>
+        <p:style>
+          <a:lnRef idx="2">
+            <a:schemeClr val="accent1">
+              <a:shade val="15000"/>
+            </a:schemeClr>
+          </a:lnRef>
+          <a:fillRef idx="1">
+            <a:schemeClr val="accent1"/>
+          </a:fillRef>
+          <a:effectRef idx="0">
+            <a:schemeClr val="accent1"/>
+          </a:effectRef>
+          <a:fontRef idx="minor">
+            <a:schemeClr val="lt1"/>
+          </a:fontRef>
+        </p:style>
+        <p:txBody>
+          <a:bodyPr wrap="none" lIns="0" tIns="0" rIns="0" bIns="0" rtlCol="0" anchor="ctr" anchorCtr="1"/>
+          <a:lstStyle/>
+          <a:p>
+            <a:pPr algn="ctr"/>
+            <a:r>
+              <a:rPr lang="en-US" altLang="zh-TW" sz="1200" dirty="0">
+                <a:solidFill>
+                  <a:schemeClr val="tx1"/>
+                </a:solidFill>
+                <a:latin typeface="ADLaM Display" panose="02010000000000000000" pitchFamily="2" charset="0"/>
+                <a:ea typeface="ADLaM Display" panose="02010000000000000000" pitchFamily="2" charset="0"/>
+                <a:cs typeface="ADLaM Display" panose="02010000000000000000" pitchFamily="2" charset="0"/>
+              </a:rPr>
+              <a:t>Gemma</a:t>
+            </a:r>
+          </a:p>
+          <a:p>
+            <a:pPr algn="ctr"/>
+            <a:r>
+              <a:rPr lang="en-US" altLang="zh-TW" sz="1200" dirty="0">
+                <a:solidFill>
+                  <a:schemeClr val="tx1"/>
+                </a:solidFill>
+                <a:latin typeface="ADLaM Display" panose="02010000000000000000" pitchFamily="2" charset="0"/>
+                <a:ea typeface="ADLaM Display" panose="02010000000000000000" pitchFamily="2" charset="0"/>
+                <a:cs typeface="ADLaM Display" panose="02010000000000000000" pitchFamily="2" charset="0"/>
+              </a:rPr>
+              <a:t>4</a:t>
+            </a:r>
+          </a:p>
+        </p:txBody>
+      </p:sp>
+      <p:sp>
+        <p:nvSpPr>
+          <p:cNvPr id="23" name="橢圓 22">
+            <a:extLst>
+              <a:ext uri="{FF2B5EF4-FFF2-40B4-BE49-F238E27FC236}">
+                <a16:creationId xmlns:a16="http://schemas.microsoft.com/office/drawing/2014/main" id="{6E1686BF-BA47-45A6-230A-0A77C2804C64}"/>
+              </a:ext>
+            </a:extLst>
+          </p:cNvPr>
+          <p:cNvSpPr/>
+          <p:nvPr/>
+        </p:nvSpPr>
+        <p:spPr>
+          <a:xfrm>
+            <a:off x="6965991" y="5314644"/>
+            <a:ext cx="495818" cy="447885"/>
+          </a:xfrm>
+          <a:prstGeom prst="ellipse">
+            <a:avLst/>
+          </a:prstGeom>
+          <a:solidFill>
+            <a:schemeClr val="accent1">
+              <a:lumMod val="20000"/>
+              <a:lumOff val="80000"/>
+              <a:alpha val="70000"/>
+            </a:schemeClr>
+          </a:solidFill>
+          <a:ln w="31750">
+            <a:solidFill>
+              <a:schemeClr val="bg1">
+                <a:lumMod val="75000"/>
+              </a:schemeClr>
+            </a:solidFill>
+          </a:ln>
+        </p:spPr>
+        <p:style>
+          <a:lnRef idx="2">
+            <a:schemeClr val="accent1">
+              <a:shade val="15000"/>
+            </a:schemeClr>
+          </a:lnRef>
+          <a:fillRef idx="1">
+            <a:schemeClr val="accent1"/>
+          </a:fillRef>
+          <a:effectRef idx="0">
+            <a:schemeClr val="accent1"/>
+          </a:effectRef>
+          <a:fontRef idx="minor">
+            <a:schemeClr val="lt1"/>
+          </a:fontRef>
+        </p:style>
+        <p:txBody>
+          <a:bodyPr wrap="none" lIns="0" tIns="0" rIns="0" bIns="0" rtlCol="0" anchor="ctr" anchorCtr="1"/>
+          <a:lstStyle/>
+          <a:p>
+            <a:pPr algn="ctr"/>
+            <a:r>
+              <a:rPr lang="en-US" altLang="zh-TW" sz="1200" dirty="0">
+                <a:solidFill>
+                  <a:schemeClr val="tx1"/>
+                </a:solidFill>
+                <a:latin typeface="ADLaM Display" panose="02010000000000000000" pitchFamily="2" charset="0"/>
+                <a:ea typeface="ADLaM Display" panose="02010000000000000000" pitchFamily="2" charset="0"/>
+                <a:cs typeface="ADLaM Display" panose="02010000000000000000" pitchFamily="2" charset="0"/>
+              </a:rPr>
+              <a:t>DeepSeek</a:t>
+            </a:r>
+          </a:p>
+          <a:p>
+            <a:pPr algn="ctr"/>
+            <a:r>
+              <a:rPr lang="en-US" altLang="zh-TW" sz="1200" dirty="0">
+                <a:solidFill>
+                  <a:schemeClr val="tx1"/>
+                </a:solidFill>
+                <a:latin typeface="ADLaM Display" panose="02010000000000000000" pitchFamily="2" charset="0"/>
+                <a:ea typeface="ADLaM Display" panose="02010000000000000000" pitchFamily="2" charset="0"/>
+                <a:cs typeface="ADLaM Display" panose="02010000000000000000" pitchFamily="2" charset="0"/>
+              </a:rPr>
+              <a:t>4</a:t>
+            </a:r>
+          </a:p>
+        </p:txBody>
+      </p:sp>
+      <p:sp>
+        <p:nvSpPr>
+          <p:cNvPr id="26" name="橢圓 25">
+            <a:extLst>
+              <a:ext uri="{FF2B5EF4-FFF2-40B4-BE49-F238E27FC236}">
+                <a16:creationId xmlns:a16="http://schemas.microsoft.com/office/drawing/2014/main" id="{34720148-A5D6-90D3-A8D9-AD7D552A0552}"/>
+              </a:ext>
+            </a:extLst>
+          </p:cNvPr>
+          <p:cNvSpPr/>
+          <p:nvPr/>
+        </p:nvSpPr>
+        <p:spPr>
+          <a:xfrm>
+            <a:off x="7692721" y="5303346"/>
+            <a:ext cx="495818" cy="447885"/>
+          </a:xfrm>
+          <a:prstGeom prst="ellipse">
+            <a:avLst/>
+          </a:prstGeom>
+          <a:solidFill>
+            <a:schemeClr val="accent1">
+              <a:lumMod val="20000"/>
+              <a:lumOff val="80000"/>
+              <a:alpha val="70000"/>
+            </a:schemeClr>
+          </a:solidFill>
+          <a:ln w="31750">
+            <a:solidFill>
+              <a:schemeClr val="bg1">
+                <a:lumMod val="75000"/>
+              </a:schemeClr>
+            </a:solidFill>
+          </a:ln>
+        </p:spPr>
+        <p:style>
+          <a:lnRef idx="2">
+            <a:schemeClr val="accent1">
+              <a:shade val="15000"/>
+            </a:schemeClr>
+          </a:lnRef>
+          <a:fillRef idx="1">
+            <a:schemeClr val="accent1"/>
+          </a:fillRef>
+          <a:effectRef idx="0">
+            <a:schemeClr val="accent1"/>
+          </a:effectRef>
+          <a:fontRef idx="minor">
+            <a:schemeClr val="lt1"/>
+          </a:fontRef>
+        </p:style>
+        <p:txBody>
+          <a:bodyPr wrap="none" lIns="0" tIns="0" rIns="0" bIns="0" rtlCol="0" anchor="ctr" anchorCtr="1"/>
+          <a:lstStyle/>
+          <a:p>
+            <a:pPr algn="ctr"/>
+            <a:r>
+              <a:rPr lang="en-US" altLang="zh-TW" sz="1200" dirty="0">
+                <a:solidFill>
+                  <a:schemeClr val="tx1"/>
+                </a:solidFill>
+                <a:latin typeface="ADLaM Display" panose="02010000000000000000" pitchFamily="2" charset="0"/>
+                <a:ea typeface="ADLaM Display" panose="02010000000000000000" pitchFamily="2" charset="0"/>
+                <a:cs typeface="ADLaM Display" panose="02010000000000000000" pitchFamily="2" charset="0"/>
+              </a:rPr>
+              <a:t>Kimi</a:t>
+            </a:r>
+          </a:p>
+          <a:p>
+            <a:pPr algn="ctr"/>
+            <a:r>
+              <a:rPr lang="en-US" altLang="zh-TW" sz="1200" dirty="0">
+                <a:solidFill>
+                  <a:schemeClr val="tx1"/>
+                </a:solidFill>
+                <a:latin typeface="ADLaM Display" panose="02010000000000000000" pitchFamily="2" charset="0"/>
+                <a:ea typeface="ADLaM Display" panose="02010000000000000000" pitchFamily="2" charset="0"/>
+                <a:cs typeface="ADLaM Display" panose="02010000000000000000" pitchFamily="2" charset="0"/>
+              </a:rPr>
+              <a:t>k3</a:t>
+            </a:r>
+          </a:p>
+        </p:txBody>
+      </p:sp>
+      <p:sp>
+        <p:nvSpPr>
+          <p:cNvPr id="52" name="矩形 51">
+            <a:extLst>
+              <a:ext uri="{FF2B5EF4-FFF2-40B4-BE49-F238E27FC236}">
+                <a16:creationId xmlns:a16="http://schemas.microsoft.com/office/drawing/2014/main" id="{4609C4BF-B1FF-333B-73AC-273E88619C09}"/>
+              </a:ext>
+            </a:extLst>
+          </p:cNvPr>
+          <p:cNvSpPr/>
+          <p:nvPr/>
+        </p:nvSpPr>
+        <p:spPr>
+          <a:xfrm>
+            <a:off x="6899671" y="5797129"/>
+            <a:ext cx="628458" cy="361919"/>
+          </a:xfrm>
+          <a:prstGeom prst="rect">
+            <a:avLst/>
+          </a:prstGeom>
+          <a:solidFill>
+            <a:schemeClr val="accent1">
+              <a:lumMod val="20000"/>
+              <a:lumOff val="80000"/>
+              <a:alpha val="90000"/>
+            </a:schemeClr>
+          </a:solidFill>
+          <a:ln w="3175">
+            <a:solidFill>
+              <a:schemeClr val="accent1">
+                <a:lumMod val="60000"/>
+                <a:lumOff val="40000"/>
+              </a:schemeClr>
+            </a:solidFill>
+          </a:ln>
+        </p:spPr>
+        <p:style>
+          <a:lnRef idx="2">
+            <a:schemeClr val="accent1">
+              <a:shade val="15000"/>
+            </a:schemeClr>
+          </a:lnRef>
+          <a:fillRef idx="1">
+            <a:schemeClr val="accent1"/>
+          </a:fillRef>
+          <a:effectRef idx="0">
+            <a:schemeClr val="accent1"/>
+          </a:effectRef>
+          <a:fontRef idx="minor">
+            <a:schemeClr val="lt1"/>
+          </a:fontRef>
+        </p:style>
+        <p:txBody>
+          <a:bodyPr wrap="none" lIns="0" tIns="0" rIns="0" bIns="0" rtlCol="0" anchor="ctr"/>
+          <a:lstStyle/>
+          <a:p>
+            <a:pPr marL="0" marR="0" lvl="0" indent="0" algn="ctr" defTabSz="914400" rtl="0" eaLnBrk="1" fontAlgn="auto" latinLnBrk="0" hangingPunct="1">
+              <a:lnSpc>
+                <a:spcPct val="100000"/>
+              </a:lnSpc>
+              <a:spcBef>
+                <a:spcPts val="0"/>
+              </a:spcBef>
+              <a:spcAft>
+                <a:spcPts val="0"/>
+              </a:spcAft>
+              <a:buClrTx/>
+              <a:buSzTx/>
+              <a:buFontTx/>
+              <a:buNone/>
+              <a:tabLst/>
+              <a:defRPr/>
+            </a:pPr>
+            <a:r>
+              <a:rPr kumimoji="0" lang="en-US" altLang="zh-TW" sz="1200" b="1" i="0" u="none" strike="noStrike" kern="1200" cap="none" spc="0" normalizeH="0" baseline="0" noProof="0" dirty="0">
+                <a:ln w="0"/>
+                <a:solidFill>
+                  <a:prstClr val="black"/>
+                </a:solidFill>
+                <a:effectLst/>
+                <a:uLnTx/>
+                <a:uFillTx/>
+                <a:latin typeface="Calibri"/>
+                <a:ea typeface="新細明體" panose="02020500000000000000" pitchFamily="18" charset="-120"/>
+                <a:cs typeface="+mn-cs"/>
+              </a:rPr>
+              <a:t>Decouple</a:t>
+            </a:r>
+          </a:p>
+          <a:p>
+            <a:pPr marL="0" marR="0" lvl="0" indent="0" algn="ctr" defTabSz="914400" rtl="0" eaLnBrk="1" fontAlgn="auto" latinLnBrk="0" hangingPunct="1">
+              <a:lnSpc>
+                <a:spcPct val="100000"/>
+              </a:lnSpc>
+              <a:spcBef>
+                <a:spcPts val="0"/>
+              </a:spcBef>
+              <a:spcAft>
+                <a:spcPts val="0"/>
+              </a:spcAft>
+              <a:buClrTx/>
+              <a:buSzTx/>
+              <a:buFontTx/>
+              <a:buNone/>
+              <a:tabLst/>
+              <a:defRPr/>
+            </a:pPr>
+            <a:r>
+              <a:rPr lang="en-US" altLang="zh-TW" sz="1200" b="1" dirty="0">
+                <a:ln w="0"/>
+                <a:solidFill>
+                  <a:prstClr val="black"/>
+                </a:solidFill>
+                <a:latin typeface="Calibri"/>
+                <a:ea typeface="新細明體" panose="02020500000000000000" pitchFamily="18" charset="-120"/>
+              </a:rPr>
+              <a:t>Hybrid</a:t>
+            </a:r>
+            <a:endParaRPr kumimoji="0" lang="en-US" altLang="zh-TW" sz="1200" b="1" i="0" u="none" strike="noStrike" kern="1200" cap="none" spc="0" normalizeH="0" baseline="0" noProof="0" dirty="0">
+              <a:ln w="0"/>
+              <a:solidFill>
+                <a:prstClr val="black"/>
+              </a:solidFill>
+              <a:effectLst/>
+              <a:uLnTx/>
+              <a:uFillTx/>
+              <a:latin typeface="Calibri"/>
+              <a:ea typeface="新細明體" panose="02020500000000000000" pitchFamily="18" charset="-120"/>
+              <a:cs typeface="+mn-cs"/>
+            </a:endParaRPr>
+          </a:p>
+        </p:txBody>
+      </p:sp>
+      <p:sp>
+        <p:nvSpPr>
+          <p:cNvPr id="57" name="矩形 56">
+            <a:extLst>
+              <a:ext uri="{FF2B5EF4-FFF2-40B4-BE49-F238E27FC236}">
+                <a16:creationId xmlns:a16="http://schemas.microsoft.com/office/drawing/2014/main" id="{66E621F8-672B-F270-FE57-8799408045B4}"/>
+              </a:ext>
+            </a:extLst>
+          </p:cNvPr>
+          <p:cNvSpPr/>
+          <p:nvPr/>
+        </p:nvSpPr>
+        <p:spPr>
+          <a:xfrm>
+            <a:off x="4855726" y="4658110"/>
+            <a:ext cx="628458" cy="442907"/>
+          </a:xfrm>
+          <a:prstGeom prst="rect">
+            <a:avLst/>
+          </a:prstGeom>
+          <a:solidFill>
+            <a:schemeClr val="accent3">
+              <a:lumMod val="20000"/>
+              <a:lumOff val="80000"/>
+              <a:alpha val="90000"/>
+            </a:schemeClr>
+          </a:solidFill>
+          <a:ln w="3175">
+            <a:solidFill>
+              <a:schemeClr val="accent3">
+                <a:lumMod val="60000"/>
+                <a:lumOff val="40000"/>
+              </a:schemeClr>
+            </a:solidFill>
+          </a:ln>
+        </p:spPr>
+        <p:style>
+          <a:lnRef idx="2">
+            <a:schemeClr val="accent1">
+              <a:shade val="15000"/>
+            </a:schemeClr>
+          </a:lnRef>
+          <a:fillRef idx="1">
+            <a:schemeClr val="accent1"/>
+          </a:fillRef>
+          <a:effectRef idx="0">
+            <a:schemeClr val="accent1"/>
+          </a:effectRef>
+          <a:fontRef idx="minor">
+            <a:schemeClr val="lt1"/>
+          </a:fontRef>
+        </p:style>
+        <p:txBody>
+          <a:bodyPr wrap="none" lIns="0" tIns="0" rIns="0" bIns="0" rtlCol="0" anchor="ctr"/>
+          <a:lstStyle/>
+          <a:p>
+            <a:pPr marL="0" marR="0" lvl="0" indent="0" algn="ctr" defTabSz="914400" rtl="0" eaLnBrk="1" fontAlgn="auto" latinLnBrk="0" hangingPunct="1">
+              <a:lnSpc>
+                <a:spcPct val="100000"/>
+              </a:lnSpc>
+              <a:spcBef>
+                <a:spcPts val="0"/>
+              </a:spcBef>
+              <a:spcAft>
+                <a:spcPts val="0"/>
+              </a:spcAft>
+              <a:buClrTx/>
+              <a:buSzTx/>
+              <a:buFontTx/>
+              <a:buNone/>
+              <a:tabLst/>
+              <a:defRPr/>
+            </a:pPr>
+            <a:r>
+              <a:rPr kumimoji="0" lang="en-US" altLang="zh-TW" sz="1200" b="1" i="0" u="none" strike="noStrike" kern="1200" cap="none" spc="0" normalizeH="0" baseline="0" noProof="0" dirty="0">
+                <a:ln w="0"/>
+                <a:solidFill>
+                  <a:prstClr val="black"/>
+                </a:solidFill>
+                <a:effectLst/>
+                <a:uLnTx/>
+                <a:uFillTx/>
+                <a:latin typeface="Calibri"/>
+                <a:ea typeface="新細明體" panose="02020500000000000000" pitchFamily="18" charset="-120"/>
+                <a:cs typeface="+mn-cs"/>
+              </a:rPr>
+              <a:t>MTP</a:t>
+            </a:r>
+          </a:p>
+          <a:p>
+            <a:pPr marL="0" marR="0" lvl="0" indent="0" algn="ctr" defTabSz="914400" rtl="0" eaLnBrk="1" fontAlgn="auto" latinLnBrk="0" hangingPunct="1">
+              <a:lnSpc>
+                <a:spcPct val="100000"/>
+              </a:lnSpc>
+              <a:spcBef>
+                <a:spcPts val="0"/>
+              </a:spcBef>
+              <a:spcAft>
+                <a:spcPts val="0"/>
+              </a:spcAft>
+              <a:buClrTx/>
+              <a:buSzTx/>
+              <a:buFontTx/>
+              <a:buNone/>
+              <a:tabLst/>
+              <a:defRPr/>
+            </a:pPr>
+            <a:r>
+              <a:rPr kumimoji="0" lang="en-US" altLang="zh-TW" sz="800" i="0" u="none" strike="noStrike" kern="1200" cap="none" spc="0" normalizeH="0" baseline="0" noProof="0" dirty="0">
+                <a:ln w="0"/>
+                <a:solidFill>
+                  <a:prstClr val="black"/>
+                </a:solidFill>
+                <a:effectLst/>
+                <a:uLnTx/>
+                <a:uFillTx/>
+                <a:latin typeface="Calibri"/>
+                <a:ea typeface="新細明體" panose="02020500000000000000" pitchFamily="18" charset="-120"/>
+                <a:cs typeface="+mn-cs"/>
+              </a:rPr>
+              <a:t>2024</a:t>
+            </a:r>
+          </a:p>
+        </p:txBody>
+      </p:sp>
+      <p:sp>
+        <p:nvSpPr>
+          <p:cNvPr id="84" name="橢圓 83">
+            <a:extLst>
+              <a:ext uri="{FF2B5EF4-FFF2-40B4-BE49-F238E27FC236}">
+                <a16:creationId xmlns:a16="http://schemas.microsoft.com/office/drawing/2014/main" id="{AF7A3337-28B9-DDBC-87D2-674B746533AD}"/>
+              </a:ext>
+            </a:extLst>
+          </p:cNvPr>
+          <p:cNvSpPr/>
+          <p:nvPr/>
+        </p:nvSpPr>
+        <p:spPr>
+          <a:xfrm>
+            <a:off x="5340168" y="1802631"/>
+            <a:ext cx="389945" cy="330225"/>
+          </a:xfrm>
+          <a:prstGeom prst="ellipse">
+            <a:avLst/>
+          </a:prstGeom>
+          <a:solidFill>
+            <a:schemeClr val="accent4">
+              <a:lumMod val="20000"/>
+              <a:lumOff val="80000"/>
+              <a:alpha val="70000"/>
+            </a:schemeClr>
+          </a:solidFill>
+          <a:ln w="25400">
+            <a:solidFill>
+              <a:schemeClr val="bg1">
+                <a:lumMod val="75000"/>
+              </a:schemeClr>
+            </a:solidFill>
+          </a:ln>
+        </p:spPr>
+        <p:style>
+          <a:lnRef idx="2">
+            <a:schemeClr val="accent1">
+              <a:shade val="15000"/>
+            </a:schemeClr>
+          </a:lnRef>
+          <a:fillRef idx="1">
+            <a:schemeClr val="accent1"/>
+          </a:fillRef>
+          <a:effectRef idx="0">
+            <a:schemeClr val="accent1"/>
+          </a:effectRef>
+          <a:fontRef idx="minor">
+            <a:schemeClr val="lt1"/>
+          </a:fontRef>
+        </p:style>
+        <p:txBody>
+          <a:bodyPr wrap="none" lIns="0" tIns="0" rIns="0" bIns="0" rtlCol="0" anchor="ctr" anchorCtr="1"/>
+          <a:lstStyle/>
+          <a:p>
+            <a:pPr algn="ctr"/>
+            <a:r>
+              <a:rPr lang="en-US" altLang="zh-TW" sz="1000" dirty="0">
+                <a:solidFill>
+                  <a:schemeClr val="tx1"/>
+                </a:solidFill>
+                <a:latin typeface="ADLaM Display" panose="02010000000000000000" pitchFamily="2" charset="0"/>
+                <a:ea typeface="ADLaM Display" panose="02010000000000000000" pitchFamily="2" charset="0"/>
+                <a:cs typeface="ADLaM Display" panose="02010000000000000000" pitchFamily="2" charset="0"/>
+              </a:rPr>
+              <a:t>Auto-regressive</a:t>
+            </a:r>
+          </a:p>
+          <a:p>
+            <a:pPr algn="ctr"/>
+            <a:r>
+              <a:rPr lang="en-US" altLang="zh-TW" sz="1000" dirty="0">
+                <a:solidFill>
+                  <a:schemeClr val="tx1"/>
+                </a:solidFill>
+                <a:latin typeface="ADLaM Display" panose="02010000000000000000" pitchFamily="2" charset="0"/>
+                <a:ea typeface="ADLaM Display" panose="02010000000000000000" pitchFamily="2" charset="0"/>
+                <a:cs typeface="ADLaM Display" panose="02010000000000000000" pitchFamily="2" charset="0"/>
+              </a:rPr>
+              <a:t>Generation</a:t>
+            </a:r>
+          </a:p>
+        </p:txBody>
+      </p:sp>
+      <p:sp>
+        <p:nvSpPr>
+          <p:cNvPr id="92" name="矩形 91">
+            <a:extLst>
+              <a:ext uri="{FF2B5EF4-FFF2-40B4-BE49-F238E27FC236}">
+                <a16:creationId xmlns:a16="http://schemas.microsoft.com/office/drawing/2014/main" id="{E30846E2-7D0C-A968-E2C8-57E4511568DE}"/>
+              </a:ext>
+            </a:extLst>
+          </p:cNvPr>
+          <p:cNvSpPr/>
+          <p:nvPr/>
+        </p:nvSpPr>
+        <p:spPr>
+          <a:xfrm>
+            <a:off x="3130947" y="3717032"/>
+            <a:ext cx="731520" cy="172665"/>
+          </a:xfrm>
+          <a:prstGeom prst="rect">
+            <a:avLst/>
+          </a:prstGeom>
+          <a:solidFill>
+            <a:schemeClr val="accent3">
+              <a:lumMod val="20000"/>
+              <a:lumOff val="80000"/>
+              <a:alpha val="90000"/>
+            </a:schemeClr>
+          </a:solidFill>
+          <a:ln w="3175">
+            <a:solidFill>
+              <a:schemeClr val="accent3">
+                <a:lumMod val="60000"/>
+                <a:lumOff val="40000"/>
+              </a:schemeClr>
+            </a:solidFill>
+          </a:ln>
+        </p:spPr>
+        <p:style>
+          <a:lnRef idx="2">
+            <a:schemeClr val="accent1">
+              <a:shade val="15000"/>
+            </a:schemeClr>
+          </a:lnRef>
+          <a:fillRef idx="1">
+            <a:schemeClr val="accent1"/>
+          </a:fillRef>
+          <a:effectRef idx="0">
+            <a:schemeClr val="accent1"/>
+          </a:effectRef>
+          <a:fontRef idx="minor">
+            <a:schemeClr val="lt1"/>
+          </a:fontRef>
+        </p:style>
+        <p:txBody>
+          <a:bodyPr wrap="none" lIns="0" tIns="0" rIns="0" bIns="0" rtlCol="0" anchor="ctr"/>
+          <a:lstStyle/>
+          <a:p>
+            <a:pPr marL="0" marR="0" lvl="0" indent="0" algn="ctr" defTabSz="914400" rtl="0" eaLnBrk="1" fontAlgn="auto" latinLnBrk="0" hangingPunct="1">
+              <a:lnSpc>
+                <a:spcPct val="100000"/>
+              </a:lnSpc>
+              <a:spcBef>
+                <a:spcPts val="0"/>
+              </a:spcBef>
+              <a:spcAft>
+                <a:spcPts val="0"/>
+              </a:spcAft>
+              <a:buClrTx/>
+              <a:buSzTx/>
+              <a:buFontTx/>
+              <a:buNone/>
+              <a:tabLst/>
+              <a:defRPr/>
+            </a:pPr>
+            <a:r>
+              <a:rPr kumimoji="0" lang="en-US" altLang="zh-TW" sz="1200" b="1" i="0" u="none" strike="noStrike" kern="1200" cap="none" spc="0" normalizeH="0" baseline="0" noProof="0" dirty="0">
+                <a:ln w="0"/>
+                <a:solidFill>
+                  <a:prstClr val="black"/>
+                </a:solidFill>
+                <a:effectLst/>
+                <a:uLnTx/>
+                <a:uFillTx/>
+                <a:latin typeface="Calibri"/>
+                <a:ea typeface="新細明體" panose="02020500000000000000" pitchFamily="18" charset="-120"/>
+                <a:cs typeface="+mn-cs"/>
+              </a:rPr>
+              <a:t>PE</a:t>
+            </a:r>
+          </a:p>
+        </p:txBody>
+      </p:sp>
+      <p:sp>
+        <p:nvSpPr>
+          <p:cNvPr id="94" name="矩形 93">
+            <a:extLst>
+              <a:ext uri="{FF2B5EF4-FFF2-40B4-BE49-F238E27FC236}">
+                <a16:creationId xmlns:a16="http://schemas.microsoft.com/office/drawing/2014/main" id="{9350837F-8A50-118D-ECBB-8C3F197DFE12}"/>
+              </a:ext>
+            </a:extLst>
+          </p:cNvPr>
+          <p:cNvSpPr/>
+          <p:nvPr/>
+        </p:nvSpPr>
+        <p:spPr>
+          <a:xfrm>
+            <a:off x="3138376" y="3996241"/>
+            <a:ext cx="731520" cy="309749"/>
+          </a:xfrm>
+          <a:prstGeom prst="rect">
+            <a:avLst/>
+          </a:prstGeom>
+          <a:solidFill>
+            <a:schemeClr val="accent3">
+              <a:lumMod val="20000"/>
+              <a:lumOff val="80000"/>
+              <a:alpha val="90000"/>
+            </a:schemeClr>
+          </a:solidFill>
+          <a:ln w="3175">
+            <a:solidFill>
+              <a:schemeClr val="accent3">
+                <a:lumMod val="60000"/>
+                <a:lumOff val="40000"/>
+              </a:schemeClr>
+            </a:solidFill>
+          </a:ln>
+        </p:spPr>
+        <p:style>
+          <a:lnRef idx="2">
+            <a:schemeClr val="accent1">
+              <a:shade val="15000"/>
+            </a:schemeClr>
+          </a:lnRef>
+          <a:fillRef idx="1">
+            <a:schemeClr val="accent1"/>
+          </a:fillRef>
+          <a:effectRef idx="0">
+            <a:schemeClr val="accent1"/>
+          </a:effectRef>
+          <a:fontRef idx="minor">
+            <a:schemeClr val="lt1"/>
+          </a:fontRef>
+        </p:style>
+        <p:txBody>
+          <a:bodyPr wrap="none" lIns="0" tIns="0" rIns="0" bIns="0" rtlCol="0" anchor="ctr"/>
+          <a:lstStyle/>
+          <a:p>
+            <a:pPr marL="0" marR="0" lvl="0" indent="0" algn="ctr" defTabSz="914400" rtl="0" eaLnBrk="1" fontAlgn="auto" latinLnBrk="0" hangingPunct="1">
+              <a:lnSpc>
+                <a:spcPct val="100000"/>
+              </a:lnSpc>
+              <a:spcBef>
+                <a:spcPts val="0"/>
+              </a:spcBef>
+              <a:spcAft>
+                <a:spcPts val="0"/>
+              </a:spcAft>
+              <a:buClrTx/>
+              <a:buSzTx/>
+              <a:buFontTx/>
+              <a:buNone/>
+              <a:tabLst/>
+              <a:defRPr/>
+            </a:pPr>
+            <a:r>
+              <a:rPr kumimoji="0" lang="en-US" altLang="zh-TW" sz="1200" b="1" i="0" u="none" strike="noStrike" kern="1200" cap="none" spc="0" normalizeH="0" baseline="0" noProof="0" dirty="0">
+                <a:ln w="0"/>
+                <a:solidFill>
+                  <a:prstClr val="black"/>
+                </a:solidFill>
+                <a:effectLst/>
+                <a:uLnTx/>
+                <a:uFillTx/>
+                <a:latin typeface="Calibri"/>
+                <a:ea typeface="新細明體" panose="02020500000000000000" pitchFamily="18" charset="-120"/>
+                <a:cs typeface="+mn-cs"/>
+              </a:rPr>
+              <a:t>RoPE</a:t>
+            </a:r>
+          </a:p>
+          <a:p>
+            <a:pPr marL="0" marR="0" lvl="0" indent="0" algn="ctr" defTabSz="914400" rtl="0" eaLnBrk="1" fontAlgn="auto" latinLnBrk="0" hangingPunct="1">
+              <a:lnSpc>
+                <a:spcPct val="100000"/>
+              </a:lnSpc>
+              <a:spcBef>
+                <a:spcPts val="0"/>
+              </a:spcBef>
+              <a:spcAft>
+                <a:spcPts val="0"/>
+              </a:spcAft>
+              <a:buClrTx/>
+              <a:buSzTx/>
+              <a:buFontTx/>
+              <a:buNone/>
+              <a:tabLst/>
+              <a:defRPr/>
+            </a:pPr>
+            <a:r>
+              <a:rPr lang="en-US" altLang="zh-TW" sz="800" dirty="0">
+                <a:ln w="0"/>
+                <a:solidFill>
+                  <a:prstClr val="black"/>
+                </a:solidFill>
+                <a:latin typeface="Calibri"/>
+                <a:ea typeface="新細明體" panose="02020500000000000000" pitchFamily="18" charset="-120"/>
+              </a:rPr>
+              <a:t>2021</a:t>
+            </a:r>
+            <a:endParaRPr kumimoji="0" lang="en-US" altLang="zh-TW" sz="800" i="0" u="none" strike="noStrike" kern="1200" cap="none" spc="0" normalizeH="0" baseline="0" noProof="0" dirty="0">
+              <a:ln w="0"/>
+              <a:solidFill>
+                <a:prstClr val="black"/>
+              </a:solidFill>
+              <a:effectLst/>
+              <a:uLnTx/>
+              <a:uFillTx/>
+              <a:latin typeface="Calibri"/>
+              <a:ea typeface="新細明體" panose="02020500000000000000" pitchFamily="18" charset="-120"/>
+              <a:cs typeface="+mn-cs"/>
+            </a:endParaRPr>
+          </a:p>
+        </p:txBody>
+      </p:sp>
+      <p:sp>
+        <p:nvSpPr>
+          <p:cNvPr id="103" name="橢圓 102">
+            <a:extLst>
+              <a:ext uri="{FF2B5EF4-FFF2-40B4-BE49-F238E27FC236}">
+                <a16:creationId xmlns:a16="http://schemas.microsoft.com/office/drawing/2014/main" id="{300B59D4-4F15-FC15-E853-6467F781666B}"/>
+              </a:ext>
+            </a:extLst>
+          </p:cNvPr>
+          <p:cNvSpPr/>
+          <p:nvPr/>
+        </p:nvSpPr>
+        <p:spPr>
+          <a:xfrm>
+            <a:off x="6270287" y="1412776"/>
+            <a:ext cx="245929" cy="236211"/>
+          </a:xfrm>
+          <a:prstGeom prst="ellipse">
+            <a:avLst/>
+          </a:prstGeom>
+          <a:solidFill>
+            <a:schemeClr val="accent4">
+              <a:lumMod val="20000"/>
+              <a:lumOff val="80000"/>
+              <a:alpha val="70000"/>
+            </a:schemeClr>
+          </a:solidFill>
+          <a:ln w="25400">
+            <a:solidFill>
+              <a:schemeClr val="bg1">
+                <a:lumMod val="85000"/>
+              </a:schemeClr>
+            </a:solidFill>
+          </a:ln>
+        </p:spPr>
+        <p:style>
+          <a:lnRef idx="2">
+            <a:schemeClr val="accent1">
+              <a:shade val="15000"/>
+            </a:schemeClr>
+          </a:lnRef>
+          <a:fillRef idx="1">
+            <a:schemeClr val="accent1"/>
+          </a:fillRef>
+          <a:effectRef idx="0">
+            <a:schemeClr val="accent1"/>
+          </a:effectRef>
+          <a:fontRef idx="minor">
+            <a:schemeClr val="lt1"/>
+          </a:fontRef>
+        </p:style>
+        <p:txBody>
+          <a:bodyPr wrap="none" lIns="0" tIns="0" rIns="0" bIns="0" rtlCol="0" anchor="ctr" anchorCtr="1"/>
+          <a:lstStyle/>
+          <a:p>
+            <a:pPr algn="ctr"/>
+            <a:r>
+              <a:rPr lang="en-US" altLang="zh-TW" sz="1000" dirty="0">
+                <a:solidFill>
+                  <a:schemeClr val="tx1">
+                    <a:lumMod val="65000"/>
+                    <a:lumOff val="35000"/>
+                  </a:schemeClr>
+                </a:solidFill>
+                <a:latin typeface="ADLaM Display" panose="02010000000000000000" pitchFamily="2" charset="0"/>
+                <a:ea typeface="ADLaM Display" panose="02010000000000000000" pitchFamily="2" charset="0"/>
+                <a:cs typeface="ADLaM Display" panose="02010000000000000000" pitchFamily="2" charset="0"/>
+              </a:rPr>
+              <a:t>LSA</a:t>
+            </a:r>
+          </a:p>
+          <a:p>
+            <a:pPr algn="ctr"/>
+            <a:r>
+              <a:rPr lang="en-US" altLang="zh-TW" sz="800" dirty="0">
+                <a:solidFill>
+                  <a:schemeClr val="tx1">
+                    <a:lumMod val="65000"/>
+                    <a:lumOff val="35000"/>
+                  </a:schemeClr>
+                </a:solidFill>
+                <a:ea typeface="ADLaM Display" panose="02010000000000000000" pitchFamily="2" charset="0"/>
+                <a:cs typeface="ADLaM Display" panose="02010000000000000000" pitchFamily="2" charset="0"/>
+              </a:rPr>
+              <a:t>1990</a:t>
+            </a:r>
+          </a:p>
+        </p:txBody>
+      </p:sp>
+      <p:sp>
+        <p:nvSpPr>
+          <p:cNvPr id="107" name="橢圓 106">
+            <a:extLst>
+              <a:ext uri="{FF2B5EF4-FFF2-40B4-BE49-F238E27FC236}">
+                <a16:creationId xmlns:a16="http://schemas.microsoft.com/office/drawing/2014/main" id="{D84F15D3-B706-CBB6-BF7E-8B7ED20FC4A3}"/>
+              </a:ext>
+            </a:extLst>
+          </p:cNvPr>
+          <p:cNvSpPr/>
+          <p:nvPr/>
+        </p:nvSpPr>
+        <p:spPr>
+          <a:xfrm>
+            <a:off x="7020272" y="1320581"/>
+            <a:ext cx="245929" cy="236211"/>
+          </a:xfrm>
+          <a:prstGeom prst="ellipse">
+            <a:avLst/>
+          </a:prstGeom>
+          <a:solidFill>
+            <a:schemeClr val="accent4">
+              <a:lumMod val="20000"/>
+              <a:lumOff val="80000"/>
+              <a:alpha val="70000"/>
+            </a:schemeClr>
+          </a:solidFill>
+          <a:ln w="25400">
+            <a:solidFill>
+              <a:schemeClr val="bg1">
+                <a:lumMod val="85000"/>
+              </a:schemeClr>
+            </a:solidFill>
+          </a:ln>
+        </p:spPr>
+        <p:style>
+          <a:lnRef idx="2">
+            <a:schemeClr val="accent1">
+              <a:shade val="15000"/>
+            </a:schemeClr>
+          </a:lnRef>
+          <a:fillRef idx="1">
+            <a:schemeClr val="accent1"/>
+          </a:fillRef>
+          <a:effectRef idx="0">
+            <a:schemeClr val="accent1"/>
+          </a:effectRef>
+          <a:fontRef idx="minor">
+            <a:schemeClr val="lt1"/>
+          </a:fontRef>
+        </p:style>
+        <p:txBody>
+          <a:bodyPr wrap="none" lIns="0" tIns="0" rIns="0" bIns="0" rtlCol="0" anchor="ctr" anchorCtr="1"/>
+          <a:lstStyle/>
+          <a:p>
+            <a:pPr algn="ctr"/>
+            <a:r>
+              <a:rPr lang="en-US" altLang="zh-TW" sz="1000" dirty="0">
+                <a:solidFill>
+                  <a:schemeClr val="tx1">
+                    <a:lumMod val="65000"/>
+                    <a:lumOff val="35000"/>
+                  </a:schemeClr>
+                </a:solidFill>
+                <a:latin typeface="ADLaM Display" panose="02010000000000000000" pitchFamily="2" charset="0"/>
+                <a:ea typeface="ADLaM Display" panose="02010000000000000000" pitchFamily="2" charset="0"/>
+                <a:cs typeface="ADLaM Display" panose="02010000000000000000" pitchFamily="2" charset="0"/>
+              </a:rPr>
+              <a:t>RBM</a:t>
+            </a:r>
+          </a:p>
+          <a:p>
+            <a:pPr algn="ctr"/>
+            <a:r>
+              <a:rPr lang="en-US" altLang="zh-TW" sz="800" dirty="0">
+                <a:solidFill>
+                  <a:schemeClr val="tx1">
+                    <a:lumMod val="65000"/>
+                    <a:lumOff val="35000"/>
+                  </a:schemeClr>
+                </a:solidFill>
+                <a:ea typeface="ADLaM Display" panose="02010000000000000000" pitchFamily="2" charset="0"/>
+                <a:cs typeface="ADLaM Display" panose="02010000000000000000" pitchFamily="2" charset="0"/>
+              </a:rPr>
+              <a:t>1986</a:t>
+            </a:r>
+          </a:p>
+        </p:txBody>
+      </p:sp>
+      <p:sp>
+        <p:nvSpPr>
+          <p:cNvPr id="109" name="橢圓 108">
+            <a:extLst>
+              <a:ext uri="{FF2B5EF4-FFF2-40B4-BE49-F238E27FC236}">
+                <a16:creationId xmlns:a16="http://schemas.microsoft.com/office/drawing/2014/main" id="{9FED7859-0BE9-D907-297A-26D7162B823D}"/>
+              </a:ext>
+            </a:extLst>
+          </p:cNvPr>
+          <p:cNvSpPr/>
+          <p:nvPr/>
+        </p:nvSpPr>
+        <p:spPr>
+          <a:xfrm>
+            <a:off x="7329952" y="1484784"/>
+            <a:ext cx="245929" cy="236211"/>
+          </a:xfrm>
+          <a:prstGeom prst="ellipse">
+            <a:avLst/>
+          </a:prstGeom>
+          <a:solidFill>
+            <a:schemeClr val="accent4">
+              <a:lumMod val="20000"/>
+              <a:lumOff val="80000"/>
+              <a:alpha val="70000"/>
+            </a:schemeClr>
+          </a:solidFill>
+          <a:ln w="25400">
+            <a:solidFill>
+              <a:schemeClr val="bg1">
+                <a:lumMod val="85000"/>
+              </a:schemeClr>
+            </a:solidFill>
+          </a:ln>
+        </p:spPr>
+        <p:style>
+          <a:lnRef idx="2">
+            <a:schemeClr val="accent1">
+              <a:shade val="15000"/>
+            </a:schemeClr>
+          </a:lnRef>
+          <a:fillRef idx="1">
+            <a:schemeClr val="accent1"/>
+          </a:fillRef>
+          <a:effectRef idx="0">
+            <a:schemeClr val="accent1"/>
+          </a:effectRef>
+          <a:fontRef idx="minor">
+            <a:schemeClr val="lt1"/>
+          </a:fontRef>
+        </p:style>
+        <p:txBody>
+          <a:bodyPr wrap="none" lIns="0" tIns="0" rIns="0" bIns="0" rtlCol="0" anchor="ctr" anchorCtr="1"/>
+          <a:lstStyle/>
+          <a:p>
+            <a:pPr algn="ctr"/>
+            <a:r>
+              <a:rPr lang="en-US" altLang="zh-TW" sz="1000" dirty="0">
+                <a:solidFill>
+                  <a:schemeClr val="tx1">
+                    <a:lumMod val="65000"/>
+                    <a:lumOff val="35000"/>
+                  </a:schemeClr>
+                </a:solidFill>
+                <a:latin typeface="ADLaM Display" panose="02010000000000000000" pitchFamily="2" charset="0"/>
+                <a:ea typeface="ADLaM Display" panose="02010000000000000000" pitchFamily="2" charset="0"/>
+                <a:cs typeface="ADLaM Display" panose="02010000000000000000" pitchFamily="2" charset="0"/>
+              </a:rPr>
+              <a:t>LeNet</a:t>
+            </a:r>
+          </a:p>
+          <a:p>
+            <a:pPr algn="ctr"/>
+            <a:r>
+              <a:rPr lang="en-US" altLang="zh-TW" sz="800" dirty="0">
+                <a:solidFill>
+                  <a:schemeClr val="tx1">
+                    <a:lumMod val="65000"/>
+                    <a:lumOff val="35000"/>
+                  </a:schemeClr>
+                </a:solidFill>
+                <a:ea typeface="ADLaM Display" panose="02010000000000000000" pitchFamily="2" charset="0"/>
+                <a:cs typeface="ADLaM Display" panose="02010000000000000000" pitchFamily="2" charset="0"/>
+              </a:rPr>
+              <a:t>1998</a:t>
+            </a:r>
+          </a:p>
+        </p:txBody>
+      </p:sp>
+      <p:cxnSp>
+        <p:nvCxnSpPr>
+          <p:cNvPr id="110" name="直線接點 109">
+            <a:extLst>
+              <a:ext uri="{FF2B5EF4-FFF2-40B4-BE49-F238E27FC236}">
+                <a16:creationId xmlns:a16="http://schemas.microsoft.com/office/drawing/2014/main" id="{B25A918D-DB22-47B3-573E-D7BF1110848B}"/>
+              </a:ext>
+            </a:extLst>
+          </p:cNvPr>
+          <p:cNvCxnSpPr>
+            <a:cxnSpLocks/>
+            <a:stCxn id="7" idx="6"/>
+            <a:endCxn id="66" idx="1"/>
+          </p:cNvCxnSpPr>
+          <p:nvPr/>
+        </p:nvCxnSpPr>
+        <p:spPr>
+          <a:xfrm flipV="1">
+            <a:off x="6940885" y="1759650"/>
+            <a:ext cx="797244" cy="3156"/>
+          </a:xfrm>
+          <a:prstGeom prst="line">
+            <a:avLst/>
+          </a:prstGeom>
+          <a:ln w="9525">
+            <a:solidFill>
+              <a:schemeClr val="accent2">
+                <a:lumMod val="60000"/>
+                <a:lumOff val="40000"/>
+              </a:schemeClr>
+            </a:solidFill>
+            <a:prstDash val="dash"/>
+          </a:ln>
+        </p:spPr>
+        <p:style>
+          <a:lnRef idx="1">
+            <a:schemeClr val="accent1"/>
+          </a:lnRef>
+          <a:fillRef idx="0">
+            <a:schemeClr val="accent1"/>
+          </a:fillRef>
+          <a:effectRef idx="0">
+            <a:schemeClr val="accent1"/>
+          </a:effectRef>
+          <a:fontRef idx="minor">
+            <a:schemeClr val="tx1"/>
+          </a:fontRef>
+        </p:style>
+      </p:cxnSp>
     </p:spTree>
     <p:extLst>
       <p:ext uri="{BB962C8B-B14F-4D97-AF65-F5344CB8AC3E}">
@@ -7175,45 +8556,7 @@
                 <a:ea typeface="新細明體" panose="02020500000000000000" pitchFamily="18" charset="-120"/>
                 <a:cs typeface="ADLaM Display" panose="02010000000000000000" pitchFamily="2" charset="0"/>
               </a:rPr>
-              <a:t>(</a:t>
-            </a:r>
-            <a:r>
-              <a:rPr kumimoji="0" lang="en-US" altLang="zh-TW" sz="1200" b="0" i="0" u="none" strike="noStrike" kern="1200" cap="none" spc="0" normalizeH="0" baseline="0" noProof="0" dirty="0" err="1">
-                <a:ln>
-                  <a:noFill/>
-                </a:ln>
-                <a:solidFill>
-                  <a:srgbClr val="4F81BD">
-                    <a:lumMod val="50000"/>
-                  </a:srgbClr>
-                </a:solidFill>
-                <a:effectLst/>
-                <a:uLnTx/>
-                <a:uFillTx/>
-                <a:latin typeface="Calibri"/>
-                <a:ea typeface="新細明體" panose="02020500000000000000" pitchFamily="18" charset="-120"/>
-                <a:cs typeface="ADLaM Display" panose="02010000000000000000" pitchFamily="2" charset="0"/>
-              </a:rPr>
-              <a:t>Attn+MoE</a:t>
-            </a:r>
-            <a:r>
-              <a:rPr kumimoji="0" lang="en-US" altLang="zh-TW" sz="1200" b="0" i="0" u="none" strike="noStrike" kern="1200" cap="none" spc="0" normalizeH="0" baseline="0" noProof="0" dirty="0">
-                <a:ln>
-                  <a:noFill/>
-                </a:ln>
-                <a:solidFill>
-                  <a:srgbClr val="4F81BD">
-                    <a:lumMod val="50000"/>
-                  </a:srgbClr>
-                </a:solidFill>
-                <a:effectLst/>
-                <a:uLnTx/>
-                <a:uFillTx/>
-                <a:latin typeface="Calibri"/>
-                <a:ea typeface="新細明體" panose="02020500000000000000" pitchFamily="18" charset="-120"/>
-                <a:cs typeface="ADLaM Display" panose="02010000000000000000" pitchFamily="2" charset="0"/>
-              </a:rPr>
-              <a:t>)</a:t>
+              <a:t>(Attn+MoE)</a:t>
             </a:r>
             <a:endParaRPr lang="zh-TW" altLang="en-US" sz="1400" dirty="0">
               <a:solidFill>
@@ -7749,6 +9092,643 @@
               </a:solidFill>
               <a:latin typeface="ADLaM Display" panose="02010000000000000000" pitchFamily="2" charset="0"/>
               <a:cs typeface="ADLaM Display" panose="02010000000000000000" pitchFamily="2" charset="0"/>
+            </a:endParaRPr>
+          </a:p>
+        </p:txBody>
+      </p:sp>
+      <p:sp>
+        <p:nvSpPr>
+          <p:cNvPr id="8" name="矩形 7">
+            <a:extLst>
+              <a:ext uri="{FF2B5EF4-FFF2-40B4-BE49-F238E27FC236}">
+                <a16:creationId xmlns:a16="http://schemas.microsoft.com/office/drawing/2014/main" id="{8759ACDC-DED9-0DB1-D903-FC622CEC7694}"/>
+              </a:ext>
+            </a:extLst>
+          </p:cNvPr>
+          <p:cNvSpPr/>
+          <p:nvPr/>
+        </p:nvSpPr>
+        <p:spPr>
+          <a:xfrm>
+            <a:off x="4427984" y="1692987"/>
+            <a:ext cx="3987977" cy="432048"/>
+          </a:xfrm>
+          <a:prstGeom prst="rect">
+            <a:avLst/>
+          </a:prstGeom>
+          <a:solidFill>
+            <a:schemeClr val="accent3">
+              <a:lumMod val="20000"/>
+              <a:lumOff val="80000"/>
+              <a:alpha val="90000"/>
+            </a:schemeClr>
+          </a:solidFill>
+          <a:ln w="3175">
+            <a:solidFill>
+              <a:schemeClr val="accent3">
+                <a:lumMod val="60000"/>
+                <a:lumOff val="40000"/>
+              </a:schemeClr>
+            </a:solidFill>
+          </a:ln>
+        </p:spPr>
+        <p:style>
+          <a:lnRef idx="2">
+            <a:schemeClr val="accent1">
+              <a:shade val="15000"/>
+            </a:schemeClr>
+          </a:lnRef>
+          <a:fillRef idx="1">
+            <a:schemeClr val="accent1"/>
+          </a:fillRef>
+          <a:effectRef idx="0">
+            <a:schemeClr val="accent1"/>
+          </a:effectRef>
+          <a:fontRef idx="minor">
+            <a:schemeClr val="lt1"/>
+          </a:fontRef>
+        </p:style>
+        <p:txBody>
+          <a:bodyPr wrap="none" lIns="0" tIns="0" rIns="0" bIns="0" rtlCol="0" anchor="ctr"/>
+          <a:lstStyle/>
+          <a:p>
+            <a:pPr marL="0" marR="0" lvl="0" indent="0" algn="ctr" defTabSz="914400" rtl="0" eaLnBrk="1" fontAlgn="auto" latinLnBrk="0" hangingPunct="1">
+              <a:lnSpc>
+                <a:spcPct val="100000"/>
+              </a:lnSpc>
+              <a:spcBef>
+                <a:spcPts val="0"/>
+              </a:spcBef>
+              <a:spcAft>
+                <a:spcPts val="0"/>
+              </a:spcAft>
+              <a:buClrTx/>
+              <a:buSzTx/>
+              <a:buFontTx/>
+              <a:buNone/>
+              <a:tabLst/>
+              <a:defRPr/>
+            </a:pPr>
+            <a:r>
+              <a:rPr kumimoji="0" lang="zh-TW" altLang="en-US" sz="1200" i="0" u="none" strike="noStrike" kern="1200" cap="none" spc="0" normalizeH="0" baseline="0" noProof="0" dirty="0">
+                <a:ln w="0"/>
+                <a:solidFill>
+                  <a:prstClr val="black"/>
+                </a:solidFill>
+                <a:effectLst/>
+                <a:uLnTx/>
+                <a:uFillTx/>
+                <a:latin typeface="微軟正黑體" panose="020B0604030504040204" pitchFamily="34" charset="-120"/>
+                <a:ea typeface="微軟正黑體" panose="020B0604030504040204" pitchFamily="34" charset="-120"/>
+              </a:rPr>
+              <a:t>諾貝爾</a:t>
+            </a:r>
+            <a:r>
+              <a:rPr kumimoji="0" lang="en-US" altLang="zh-TW" sz="1200" i="0" u="none" strike="noStrike" kern="1200" cap="none" spc="0" normalizeH="0" baseline="0" noProof="0" dirty="0">
+                <a:ln w="0"/>
+                <a:solidFill>
+                  <a:prstClr val="black"/>
+                </a:solidFill>
+                <a:effectLst/>
+                <a:uLnTx/>
+                <a:uFillTx/>
+                <a:latin typeface="微軟正黑體" panose="020B0604030504040204" pitchFamily="34" charset="-120"/>
+                <a:ea typeface="微軟正黑體" panose="020B0604030504040204" pitchFamily="34" charset="-120"/>
+              </a:rPr>
+              <a:t>.2024</a:t>
+            </a:r>
+            <a:r>
+              <a:rPr kumimoji="0" lang="zh-TW" altLang="en-US" sz="1200" i="0" u="none" strike="noStrike" kern="1200" cap="none" spc="0" normalizeH="0" baseline="0" noProof="0" dirty="0">
+                <a:ln w="0"/>
+                <a:solidFill>
+                  <a:prstClr val="black"/>
+                </a:solidFill>
+                <a:effectLst/>
+                <a:uLnTx/>
+                <a:uFillTx/>
+                <a:latin typeface="微軟正黑體" panose="020B0604030504040204" pitchFamily="34" charset="-120"/>
+                <a:ea typeface="微軟正黑體" panose="020B0604030504040204" pitchFamily="34" charset="-120"/>
+              </a:rPr>
+              <a:t>物理獎</a:t>
+            </a:r>
+            <a:endParaRPr kumimoji="0" lang="en-US" altLang="zh-TW" sz="1200" i="0" u="none" strike="noStrike" kern="1200" cap="none" spc="0" normalizeH="0" baseline="0" noProof="0" dirty="0">
+              <a:ln w="0"/>
+              <a:solidFill>
+                <a:prstClr val="black"/>
+              </a:solidFill>
+              <a:effectLst/>
+              <a:uLnTx/>
+              <a:uFillTx/>
+              <a:latin typeface="微軟正黑體" panose="020B0604030504040204" pitchFamily="34" charset="-120"/>
+              <a:ea typeface="微軟正黑體" panose="020B0604030504040204" pitchFamily="34" charset="-120"/>
+            </a:endParaRPr>
+          </a:p>
+          <a:p>
+            <a:pPr marL="0" marR="0" lvl="0" indent="0" algn="ctr" defTabSz="914400" rtl="0" eaLnBrk="1" fontAlgn="auto" latinLnBrk="0" hangingPunct="1">
+              <a:lnSpc>
+                <a:spcPct val="100000"/>
+              </a:lnSpc>
+              <a:spcBef>
+                <a:spcPts val="0"/>
+              </a:spcBef>
+              <a:spcAft>
+                <a:spcPts val="0"/>
+              </a:spcAft>
+              <a:buClrTx/>
+              <a:buSzTx/>
+              <a:buFontTx/>
+              <a:buNone/>
+              <a:tabLst/>
+              <a:defRPr/>
+            </a:pPr>
+            <a:r>
+              <a:rPr kumimoji="0" lang="zh-TW" altLang="en-US" sz="1200" i="0" u="none" strike="noStrike" kern="1200" cap="none" spc="0" normalizeH="0" baseline="0" noProof="0" dirty="0">
+                <a:ln w="0"/>
+                <a:solidFill>
+                  <a:prstClr val="black"/>
+                </a:solidFill>
+                <a:effectLst/>
+                <a:uLnTx/>
+                <a:uFillTx/>
+                <a:latin typeface="微軟正黑體" panose="020B0604030504040204" pitchFamily="34" charset="-120"/>
+                <a:ea typeface="微軟正黑體" panose="020B0604030504040204" pitchFamily="34" charset="-120"/>
+              </a:rPr>
+              <a:t>推廣物理技術到</a:t>
+            </a:r>
+            <a:r>
+              <a:rPr kumimoji="0" lang="en-US" altLang="zh-TW" sz="1200" i="0" u="none" strike="noStrike" kern="1200" cap="none" spc="0" normalizeH="0" baseline="0" noProof="0" dirty="0">
+                <a:ln w="0"/>
+                <a:solidFill>
+                  <a:prstClr val="black"/>
+                </a:solidFill>
+                <a:effectLst/>
+                <a:uLnTx/>
+                <a:uFillTx/>
+                <a:latin typeface="微軟正黑體" panose="020B0604030504040204" pitchFamily="34" charset="-120"/>
+                <a:ea typeface="微軟正黑體" panose="020B0604030504040204" pitchFamily="34" charset="-120"/>
+              </a:rPr>
+              <a:t>AI</a:t>
+            </a:r>
+            <a:r>
+              <a:rPr lang="en-US" altLang="zh-TW" sz="1200" dirty="0">
+                <a:ln w="0"/>
+                <a:solidFill>
+                  <a:prstClr val="black"/>
+                </a:solidFill>
+                <a:latin typeface="微軟正黑體" panose="020B0604030504040204" pitchFamily="34" charset="-120"/>
+                <a:ea typeface="微軟正黑體" panose="020B0604030504040204" pitchFamily="34" charset="-120"/>
+                <a:sym typeface="Wingdings" panose="05000000000000000000" pitchFamily="2" charset="2"/>
+              </a:rPr>
+              <a:t>,</a:t>
+            </a:r>
+            <a:r>
+              <a:rPr lang="zh-TW" altLang="en-US" sz="1200" dirty="0">
+                <a:ln w="0"/>
+                <a:solidFill>
+                  <a:prstClr val="black"/>
+                </a:solidFill>
+                <a:latin typeface="微軟正黑體" panose="020B0604030504040204" pitchFamily="34" charset="-120"/>
+                <a:ea typeface="微軟正黑體" panose="020B0604030504040204" pitchFamily="34" charset="-120"/>
+                <a:sym typeface="Wingdings" panose="05000000000000000000" pitchFamily="2" charset="2"/>
+              </a:rPr>
+              <a:t> </a:t>
+            </a:r>
+            <a:r>
+              <a:rPr kumimoji="0" lang="zh-TW" altLang="en-US" sz="1200" i="0" u="none" strike="noStrike" kern="1200" cap="none" spc="0" normalizeH="0" baseline="0" noProof="0" dirty="0">
+                <a:ln w="0"/>
+                <a:solidFill>
+                  <a:prstClr val="black"/>
+                </a:solidFill>
+                <a:effectLst/>
+                <a:uLnTx/>
+                <a:uFillTx/>
+                <a:latin typeface="微軟正黑體" panose="020B0604030504040204" pitchFamily="34" charset="-120"/>
+                <a:ea typeface="微軟正黑體" panose="020B0604030504040204" pitchFamily="34" charset="-120"/>
+                <a:sym typeface="Wingdings" panose="05000000000000000000" pitchFamily="2" charset="2"/>
+              </a:rPr>
+              <a:t>讓</a:t>
+            </a:r>
+            <a:r>
+              <a:rPr kumimoji="0" lang="en-US" altLang="zh-TW" sz="1200" i="0" u="none" strike="noStrike" kern="1200" cap="none" spc="0" normalizeH="0" baseline="0" noProof="0" dirty="0">
+                <a:ln w="0"/>
+                <a:solidFill>
+                  <a:prstClr val="black"/>
+                </a:solidFill>
+                <a:effectLst/>
+                <a:uLnTx/>
+                <a:uFillTx/>
+                <a:latin typeface="微軟正黑體" panose="020B0604030504040204" pitchFamily="34" charset="-120"/>
+                <a:ea typeface="微軟正黑體" panose="020B0604030504040204" pitchFamily="34" charset="-120"/>
+                <a:sym typeface="Wingdings" panose="05000000000000000000" pitchFamily="2" charset="2"/>
+              </a:rPr>
+              <a:t>MLP(BP)</a:t>
+            </a:r>
+            <a:r>
+              <a:rPr kumimoji="0" lang="zh-TW" altLang="en-US" sz="1200" i="0" u="none" strike="noStrike" kern="1200" cap="none" spc="0" normalizeH="0" baseline="0" noProof="0" dirty="0">
+                <a:ln w="0"/>
+                <a:solidFill>
+                  <a:prstClr val="black"/>
+                </a:solidFill>
+                <a:effectLst/>
+                <a:uLnTx/>
+                <a:uFillTx/>
+                <a:latin typeface="微軟正黑體" panose="020B0604030504040204" pitchFamily="34" charset="-120"/>
+                <a:ea typeface="微軟正黑體" panose="020B0604030504040204" pitchFamily="34" charset="-120"/>
+                <a:sym typeface="Wingdings" panose="05000000000000000000" pitchFamily="2" charset="2"/>
+              </a:rPr>
+              <a:t>進一步推升</a:t>
+            </a:r>
+            <a:r>
+              <a:rPr kumimoji="0" lang="en-US" altLang="zh-TW" sz="1200" i="0" u="none" strike="noStrike" kern="1200" cap="none" spc="0" normalizeH="0" baseline="0" noProof="0" dirty="0">
+                <a:ln w="0"/>
+                <a:solidFill>
+                  <a:prstClr val="black"/>
+                </a:solidFill>
+                <a:effectLst/>
+                <a:uLnTx/>
+                <a:uFillTx/>
+                <a:latin typeface="微軟正黑體" panose="020B0604030504040204" pitchFamily="34" charset="-120"/>
+                <a:ea typeface="微軟正黑體" panose="020B0604030504040204" pitchFamily="34" charset="-120"/>
+                <a:sym typeface="Wingdings" panose="05000000000000000000" pitchFamily="2" charset="2"/>
+              </a:rPr>
+              <a:t>AI</a:t>
+            </a:r>
+            <a:endParaRPr kumimoji="0" lang="en-US" altLang="zh-TW" sz="1200" i="0" u="none" strike="noStrike" kern="1200" cap="none" spc="0" normalizeH="0" baseline="0" noProof="0" dirty="0">
+              <a:ln w="0"/>
+              <a:solidFill>
+                <a:prstClr val="black"/>
+              </a:solidFill>
+              <a:effectLst/>
+              <a:uLnTx/>
+              <a:uFillTx/>
+              <a:latin typeface="微軟正黑體" panose="020B0604030504040204" pitchFamily="34" charset="-120"/>
+              <a:ea typeface="微軟正黑體" panose="020B0604030504040204" pitchFamily="34" charset="-120"/>
+            </a:endParaRPr>
+          </a:p>
+        </p:txBody>
+      </p:sp>
+      <p:sp>
+        <p:nvSpPr>
+          <p:cNvPr id="11" name="矩形 10">
+            <a:extLst>
+              <a:ext uri="{FF2B5EF4-FFF2-40B4-BE49-F238E27FC236}">
+                <a16:creationId xmlns:a16="http://schemas.microsoft.com/office/drawing/2014/main" id="{128EFDC7-98D9-B2A8-5D90-15A0EC1E068B}"/>
+              </a:ext>
+            </a:extLst>
+          </p:cNvPr>
+          <p:cNvSpPr/>
+          <p:nvPr/>
+        </p:nvSpPr>
+        <p:spPr>
+          <a:xfrm>
+            <a:off x="4427984" y="2169113"/>
+            <a:ext cx="3987977" cy="432048"/>
+          </a:xfrm>
+          <a:prstGeom prst="rect">
+            <a:avLst/>
+          </a:prstGeom>
+          <a:solidFill>
+            <a:schemeClr val="accent3">
+              <a:lumMod val="20000"/>
+              <a:lumOff val="80000"/>
+              <a:alpha val="90000"/>
+            </a:schemeClr>
+          </a:solidFill>
+          <a:ln w="3175">
+            <a:solidFill>
+              <a:schemeClr val="accent3">
+                <a:lumMod val="60000"/>
+                <a:lumOff val="40000"/>
+              </a:schemeClr>
+            </a:solidFill>
+          </a:ln>
+        </p:spPr>
+        <p:style>
+          <a:lnRef idx="2">
+            <a:schemeClr val="accent1">
+              <a:shade val="15000"/>
+            </a:schemeClr>
+          </a:lnRef>
+          <a:fillRef idx="1">
+            <a:schemeClr val="accent1"/>
+          </a:fillRef>
+          <a:effectRef idx="0">
+            <a:schemeClr val="accent1"/>
+          </a:effectRef>
+          <a:fontRef idx="minor">
+            <a:schemeClr val="lt1"/>
+          </a:fontRef>
+        </p:style>
+        <p:txBody>
+          <a:bodyPr wrap="none" lIns="0" tIns="0" rIns="0" bIns="0" rtlCol="0" anchor="ctr"/>
+          <a:lstStyle/>
+          <a:p>
+            <a:pPr marL="0" marR="0" lvl="0" indent="0" algn="ctr" defTabSz="914400" rtl="0" eaLnBrk="1" fontAlgn="auto" latinLnBrk="0" hangingPunct="1">
+              <a:lnSpc>
+                <a:spcPct val="100000"/>
+              </a:lnSpc>
+              <a:spcBef>
+                <a:spcPts val="0"/>
+              </a:spcBef>
+              <a:spcAft>
+                <a:spcPts val="0"/>
+              </a:spcAft>
+              <a:buClrTx/>
+              <a:buSzTx/>
+              <a:buFontTx/>
+              <a:buNone/>
+              <a:tabLst/>
+              <a:defRPr/>
+            </a:pPr>
+            <a:r>
+              <a:rPr kumimoji="0" lang="zh-TW" altLang="en-US" sz="1200" i="0" u="none" strike="noStrike" kern="1200" cap="none" spc="0" normalizeH="0" baseline="0" noProof="0" dirty="0">
+                <a:ln w="0"/>
+                <a:solidFill>
+                  <a:prstClr val="black"/>
+                </a:solidFill>
+                <a:effectLst/>
+                <a:uLnTx/>
+                <a:uFillTx/>
+                <a:latin typeface="微軟正黑體" panose="020B0604030504040204" pitchFamily="34" charset="-120"/>
+                <a:ea typeface="微軟正黑體" panose="020B0604030504040204" pitchFamily="34" charset="-120"/>
+              </a:rPr>
+              <a:t>諾貝爾</a:t>
+            </a:r>
+            <a:r>
+              <a:rPr kumimoji="0" lang="en-US" altLang="zh-TW" sz="1200" i="0" u="none" strike="noStrike" kern="1200" cap="none" spc="0" normalizeH="0" baseline="0" noProof="0" dirty="0">
+                <a:ln w="0"/>
+                <a:solidFill>
+                  <a:prstClr val="black"/>
+                </a:solidFill>
+                <a:effectLst/>
+                <a:uLnTx/>
+                <a:uFillTx/>
+                <a:latin typeface="微軟正黑體" panose="020B0604030504040204" pitchFamily="34" charset="-120"/>
+                <a:ea typeface="微軟正黑體" panose="020B0604030504040204" pitchFamily="34" charset="-120"/>
+              </a:rPr>
+              <a:t>.2024</a:t>
+            </a:r>
+            <a:r>
+              <a:rPr lang="zh-TW" altLang="en-US" sz="1200" dirty="0">
+                <a:ln w="0"/>
+                <a:solidFill>
+                  <a:prstClr val="black"/>
+                </a:solidFill>
+                <a:latin typeface="微軟正黑體" panose="020B0604030504040204" pitchFamily="34" charset="-120"/>
+                <a:ea typeface="微軟正黑體" panose="020B0604030504040204" pitchFamily="34" charset="-120"/>
+              </a:rPr>
+              <a:t>化學</a:t>
+            </a:r>
+            <a:r>
+              <a:rPr kumimoji="0" lang="zh-TW" altLang="en-US" sz="1200" i="0" u="none" strike="noStrike" kern="1200" cap="none" spc="0" normalizeH="0" baseline="0" noProof="0" dirty="0">
+                <a:ln w="0"/>
+                <a:solidFill>
+                  <a:prstClr val="black"/>
+                </a:solidFill>
+                <a:effectLst/>
+                <a:uLnTx/>
+                <a:uFillTx/>
+                <a:latin typeface="微軟正黑體" panose="020B0604030504040204" pitchFamily="34" charset="-120"/>
+                <a:ea typeface="微軟正黑體" panose="020B0604030504040204" pitchFamily="34" charset="-120"/>
+              </a:rPr>
+              <a:t>獎</a:t>
+            </a:r>
+            <a:endParaRPr kumimoji="0" lang="en-US" altLang="zh-TW" sz="1200" i="0" u="none" strike="noStrike" kern="1200" cap="none" spc="0" normalizeH="0" baseline="0" noProof="0" dirty="0">
+              <a:ln w="0"/>
+              <a:solidFill>
+                <a:prstClr val="black"/>
+              </a:solidFill>
+              <a:effectLst/>
+              <a:uLnTx/>
+              <a:uFillTx/>
+              <a:latin typeface="微軟正黑體" panose="020B0604030504040204" pitchFamily="34" charset="-120"/>
+              <a:ea typeface="微軟正黑體" panose="020B0604030504040204" pitchFamily="34" charset="-120"/>
+            </a:endParaRPr>
+          </a:p>
+          <a:p>
+            <a:pPr marL="0" marR="0" lvl="0" indent="0" algn="ctr" defTabSz="914400" rtl="0" eaLnBrk="1" fontAlgn="auto" latinLnBrk="0" hangingPunct="1">
+              <a:lnSpc>
+                <a:spcPct val="100000"/>
+              </a:lnSpc>
+              <a:spcBef>
+                <a:spcPts val="0"/>
+              </a:spcBef>
+              <a:spcAft>
+                <a:spcPts val="0"/>
+              </a:spcAft>
+              <a:buClrTx/>
+              <a:buSzTx/>
+              <a:buFontTx/>
+              <a:buNone/>
+              <a:tabLst/>
+              <a:defRPr/>
+            </a:pPr>
+            <a:r>
+              <a:rPr lang="zh-TW" altLang="en-US" sz="1200" dirty="0">
+                <a:ln w="0"/>
+                <a:solidFill>
+                  <a:prstClr val="black"/>
+                </a:solidFill>
+                <a:latin typeface="微軟正黑體" panose="020B0604030504040204" pitchFamily="34" charset="-120"/>
+                <a:ea typeface="微軟正黑體" panose="020B0604030504040204" pitchFamily="34" charset="-120"/>
+              </a:rPr>
+              <a:t>引用</a:t>
+            </a:r>
+            <a:r>
+              <a:rPr lang="en-US" altLang="zh-TW" sz="1200" dirty="0">
+                <a:ln w="0"/>
+                <a:solidFill>
+                  <a:prstClr val="black"/>
+                </a:solidFill>
+                <a:latin typeface="微軟正黑體" panose="020B0604030504040204" pitchFamily="34" charset="-120"/>
+                <a:ea typeface="微軟正黑體" panose="020B0604030504040204" pitchFamily="34" charset="-120"/>
+              </a:rPr>
+              <a:t>AI</a:t>
+            </a:r>
+            <a:r>
+              <a:rPr lang="zh-TW" altLang="en-US" sz="1200" dirty="0">
+                <a:ln w="0"/>
+                <a:solidFill>
+                  <a:prstClr val="black"/>
+                </a:solidFill>
+                <a:latin typeface="微軟正黑體" panose="020B0604030504040204" pitchFamily="34" charset="-120"/>
+                <a:ea typeface="微軟正黑體" panose="020B0604030504040204" pitchFamily="34" charset="-120"/>
+              </a:rPr>
+              <a:t>看清蛋白質結構</a:t>
+            </a:r>
+            <a:r>
+              <a:rPr lang="en-US" altLang="zh-TW" sz="1200" dirty="0">
+                <a:ln w="0"/>
+                <a:solidFill>
+                  <a:prstClr val="black"/>
+                </a:solidFill>
+                <a:latin typeface="微軟正黑體" panose="020B0604030504040204" pitchFamily="34" charset="-120"/>
+                <a:ea typeface="微軟正黑體" panose="020B0604030504040204" pitchFamily="34" charset="-120"/>
+              </a:rPr>
+              <a:t>,</a:t>
+            </a:r>
+            <a:r>
+              <a:rPr lang="zh-TW" altLang="en-US" sz="1200" dirty="0">
+                <a:ln w="0"/>
+                <a:solidFill>
+                  <a:prstClr val="black"/>
+                </a:solidFill>
+                <a:latin typeface="微軟正黑體" panose="020B0604030504040204" pitchFamily="34" charset="-120"/>
+                <a:ea typeface="微軟正黑體" panose="020B0604030504040204" pitchFamily="34" charset="-120"/>
+              </a:rPr>
+              <a:t> 並設計</a:t>
+            </a:r>
+            <a:r>
+              <a:rPr kumimoji="0" lang="zh-TW" altLang="en-US" sz="1200" i="0" u="none" strike="noStrike" kern="1200" cap="none" spc="0" normalizeH="0" baseline="0" noProof="0" dirty="0">
+                <a:ln w="0"/>
+                <a:solidFill>
+                  <a:prstClr val="black"/>
+                </a:solidFill>
+                <a:effectLst/>
+                <a:uLnTx/>
+                <a:uFillTx/>
+                <a:latin typeface="微軟正黑體" panose="020B0604030504040204" pitchFamily="34" charset="-120"/>
+                <a:ea typeface="微軟正黑體" panose="020B0604030504040204" pitchFamily="34" charset="-120"/>
+              </a:rPr>
+              <a:t>全新的藥物與疫苗</a:t>
+            </a:r>
+            <a:endParaRPr kumimoji="0" lang="en-US" altLang="zh-TW" sz="1200" i="0" u="none" strike="noStrike" kern="1200" cap="none" spc="0" normalizeH="0" baseline="0" noProof="0" dirty="0">
+              <a:ln w="0"/>
+              <a:solidFill>
+                <a:prstClr val="black"/>
+              </a:solidFill>
+              <a:effectLst/>
+              <a:uLnTx/>
+              <a:uFillTx/>
+              <a:latin typeface="微軟正黑體" panose="020B0604030504040204" pitchFamily="34" charset="-120"/>
+              <a:ea typeface="微軟正黑體" panose="020B0604030504040204" pitchFamily="34" charset="-120"/>
+            </a:endParaRPr>
+          </a:p>
+        </p:txBody>
+      </p:sp>
+      <p:sp>
+        <p:nvSpPr>
+          <p:cNvPr id="15" name="文字方塊 14">
+            <a:extLst>
+              <a:ext uri="{FF2B5EF4-FFF2-40B4-BE49-F238E27FC236}">
+                <a16:creationId xmlns:a16="http://schemas.microsoft.com/office/drawing/2014/main" id="{B7FC2076-425F-21C3-31C0-60F6DADEFAD6}"/>
+              </a:ext>
+            </a:extLst>
+          </p:cNvPr>
+          <p:cNvSpPr txBox="1"/>
+          <p:nvPr/>
+        </p:nvSpPr>
+        <p:spPr>
+          <a:xfrm>
+            <a:off x="323528" y="1163213"/>
+            <a:ext cx="3528392" cy="1246495"/>
+          </a:xfrm>
+          <a:prstGeom prst="rect">
+            <a:avLst/>
+          </a:prstGeom>
+          <a:noFill/>
+        </p:spPr>
+        <p:txBody>
+          <a:bodyPr wrap="square">
+            <a:spAutoFit/>
+          </a:bodyPr>
+          <a:lstStyle/>
+          <a:p>
+            <a:pPr marL="342900" marR="0" lvl="0" indent="-342900">
+              <a:spcBef>
+                <a:spcPts val="900"/>
+              </a:spcBef>
+              <a:spcAft>
+                <a:spcPts val="900"/>
+              </a:spcAft>
+              <a:buFont typeface="Arial" panose="020B0604020202020204" pitchFamily="34" charset="0"/>
+              <a:buChar char="•"/>
+            </a:pPr>
+            <a:r>
+              <a:rPr lang="zh-TW" altLang="zh-TW" sz="1000" b="1" u="none" strike="noStrike" dirty="0">
+                <a:effectLst/>
+                <a:latin typeface="+mn-lt"/>
+              </a:rPr>
+              <a:t>1985 年</a:t>
+            </a:r>
+            <a:r>
+              <a:rPr lang="zh-TW" altLang="zh-TW" sz="1000" b="0" u="none" strike="noStrike" dirty="0">
+                <a:effectLst/>
+                <a:latin typeface="+mn-lt"/>
+              </a:rPr>
+              <a:t>：辛頓（Hinton）受到物理模型啟發，在霍普菲爾德網路的基礎上發明了</a:t>
+            </a:r>
+            <a:r>
+              <a:rPr lang="zh-TW" altLang="zh-TW" sz="1000" b="1" u="none" strike="noStrike" dirty="0">
+                <a:effectLst/>
+                <a:latin typeface="+mn-lt"/>
+              </a:rPr>
+              <a:t>「玻爾茲曼機」（Boltzmann Machine）</a:t>
+            </a:r>
+            <a:r>
+              <a:rPr lang="zh-TW" altLang="zh-TW" sz="1000" b="0" u="none" strike="noStrike" dirty="0">
+                <a:effectLst/>
+                <a:latin typeface="+mn-lt"/>
+              </a:rPr>
+              <a:t>。</a:t>
+            </a:r>
+          </a:p>
+          <a:p>
+            <a:pPr marL="342900" marR="0" lvl="0" indent="-342900">
+              <a:spcBef>
+                <a:spcPts val="900"/>
+              </a:spcBef>
+              <a:spcAft>
+                <a:spcPts val="900"/>
+              </a:spcAft>
+              <a:buFont typeface="Arial" panose="020B0604020202020204" pitchFamily="34" charset="0"/>
+              <a:buChar char="•"/>
+            </a:pPr>
+            <a:r>
+              <a:rPr lang="zh-TW" altLang="zh-TW" sz="1000" b="1" u="none" strike="noStrike" dirty="0">
+                <a:effectLst/>
+                <a:latin typeface="+mn-lt"/>
+              </a:rPr>
+              <a:t>1986 年</a:t>
+            </a:r>
+            <a:r>
+              <a:rPr lang="zh-TW" altLang="zh-TW" sz="1000" b="0" u="none" strike="noStrike" dirty="0">
+                <a:effectLst/>
+                <a:latin typeface="+mn-lt"/>
+              </a:rPr>
+              <a:t>：辛頓等人推廣了</a:t>
+            </a:r>
+            <a:r>
+              <a:rPr lang="zh-TW" altLang="zh-TW" sz="1000" b="1" u="none" strike="noStrike" dirty="0">
+                <a:effectLst/>
+                <a:latin typeface="+mn-lt"/>
+              </a:rPr>
+              <a:t>反向傳播演算法（Backpropagation）</a:t>
+            </a:r>
+            <a:r>
+              <a:rPr lang="zh-TW" altLang="zh-TW" sz="1000" b="0" u="none" strike="noStrike" dirty="0">
+                <a:effectLst/>
+                <a:latin typeface="+mn-lt"/>
+              </a:rPr>
+              <a:t>，正式讓</a:t>
+            </a:r>
+            <a:r>
+              <a:rPr lang="zh-TW" altLang="zh-TW" sz="1000" b="1" u="none" strike="noStrike" dirty="0">
+                <a:effectLst/>
+                <a:latin typeface="+mn-lt"/>
+              </a:rPr>
+              <a:t>多層感知機（MLP）</a:t>
+            </a:r>
+            <a:r>
+              <a:rPr lang="zh-TW" altLang="zh-TW" sz="1000" b="0" u="none" strike="noStrike" dirty="0">
+                <a:effectLst/>
+                <a:latin typeface="+mn-lt"/>
+              </a:rPr>
+              <a:t>具備了訓練多層網路的能力。AI 迎來短暫復興。</a:t>
+            </a:r>
+            <a:endParaRPr lang="zh-TW" altLang="zh-TW" sz="1000" b="0" u="none" strike="noStrike" dirty="0">
+              <a:effectLst/>
+              <a:latin typeface="Google Sans"/>
             </a:endParaRPr>
           </a:p>
         </p:txBody>

--- a/ai-overview.pptx
+++ b/ai-overview.pptx
@@ -249,7 +249,7 @@
           <a:p>
             <a:fld id="{982F7CBC-87DD-4F69-8F50-7ED68F7FF790}" type="datetimeFigureOut">
               <a:rPr lang="zh-TW" altLang="en-US" smtClean="0"/>
-              <a:t>2026/9/19</a:t>
+              <a:t>2026/9/27</a:t>
             </a:fld>
             <a:endParaRPr lang="zh-TW" altLang="en-US"/>
           </a:p>
@@ -426,7 +426,7 @@
           <a:p>
             <a:fld id="{863167AA-796B-4B6A-95ED-1C0BCB3E5802}" type="datetimeFigureOut">
               <a:rPr lang="zh-TW" altLang="en-US" smtClean="0"/>
-              <a:t>2026/9/19</a:t>
+              <a:t>2026/9/27</a:t>
             </a:fld>
             <a:endParaRPr lang="zh-TW" altLang="en-US"/>
           </a:p>
@@ -2612,7 +2612,7 @@
         </p:nvCxnSpPr>
         <p:spPr>
           <a:xfrm>
-            <a:off x="5099471" y="3770641"/>
+            <a:off x="5292080" y="3770641"/>
             <a:ext cx="3600400" cy="0"/>
           </a:xfrm>
           <a:prstGeom prst="line">
@@ -2657,7 +2657,7 @@
         </p:nvSpPr>
         <p:spPr>
           <a:xfrm>
-            <a:off x="6493367" y="3709343"/>
+            <a:off x="6638647" y="3709343"/>
             <a:ext cx="598913" cy="655761"/>
           </a:xfrm>
           <a:prstGeom prst="ellipse">
@@ -2762,7 +2762,7 @@
         </p:nvSpPr>
         <p:spPr>
           <a:xfrm>
-            <a:off x="6060248" y="1738098"/>
+            <a:off x="6348280" y="1738098"/>
             <a:ext cx="1440160" cy="1518689"/>
           </a:xfrm>
           <a:prstGeom prst="ellipse">
@@ -2897,7 +2897,7 @@
         </p:nvSpPr>
         <p:spPr>
           <a:xfrm>
-            <a:off x="922170" y="4412600"/>
+            <a:off x="1728648" y="4412600"/>
             <a:ext cx="829073" cy="240536"/>
           </a:xfrm>
           <a:prstGeom prst="rect">
@@ -2949,7 +2949,7 @@
         </p:blipFill>
         <p:spPr>
           <a:xfrm>
-            <a:off x="983357" y="2150311"/>
+            <a:off x="1789835" y="2150311"/>
             <a:ext cx="708323" cy="630617"/>
           </a:xfrm>
           <a:prstGeom prst="rect">
@@ -2971,7 +2971,7 @@
         </p:nvSpPr>
         <p:spPr>
           <a:xfrm>
-            <a:off x="7220614" y="1916832"/>
+            <a:off x="7508646" y="1916832"/>
             <a:ext cx="495818" cy="447885"/>
           </a:xfrm>
           <a:prstGeom prst="ellipse">
@@ -3041,7 +3041,7 @@
         </p:nvSpPr>
         <p:spPr>
           <a:xfrm>
-            <a:off x="5844224" y="2374917"/>
+            <a:off x="6132256" y="2374917"/>
             <a:ext cx="495818" cy="447885"/>
           </a:xfrm>
           <a:prstGeom prst="ellipse">
@@ -3111,7 +3111,7 @@
         </p:nvSpPr>
         <p:spPr>
           <a:xfrm>
-            <a:off x="5844224" y="2697263"/>
+            <a:off x="6132256" y="2697263"/>
             <a:ext cx="495818" cy="447885"/>
           </a:xfrm>
           <a:prstGeom prst="ellipse">
@@ -3181,7 +3181,7 @@
         </p:nvSpPr>
         <p:spPr>
           <a:xfrm>
-            <a:off x="6570671" y="4299495"/>
+            <a:off x="6715951" y="4277259"/>
             <a:ext cx="495818" cy="447885"/>
           </a:xfrm>
           <a:prstGeom prst="ellipse">
@@ -3273,7 +3273,7 @@
         </p:nvSpPr>
         <p:spPr>
           <a:xfrm>
-            <a:off x="7148606" y="2693083"/>
+            <a:off x="7436638" y="2693083"/>
             <a:ext cx="495818" cy="447885"/>
           </a:xfrm>
           <a:prstGeom prst="ellipse">
@@ -3343,7 +3343,7 @@
         </p:nvSpPr>
         <p:spPr>
           <a:xfrm>
-            <a:off x="7642123" y="3063964"/>
+            <a:off x="7930155" y="3063964"/>
             <a:ext cx="546416" cy="540099"/>
           </a:xfrm>
           <a:prstGeom prst="ellipse">
@@ -3579,7 +3579,7 @@
         </p:nvCxnSpPr>
         <p:spPr>
           <a:xfrm flipH="1">
-            <a:off x="1337519" y="2846232"/>
+            <a:off x="2143997" y="2846232"/>
             <a:ext cx="1" cy="1469012"/>
           </a:xfrm>
           <a:prstGeom prst="straightConnector1">
@@ -3624,7 +3624,7 @@
         </p:nvSpPr>
         <p:spPr>
           <a:xfrm>
-            <a:off x="983358" y="2673316"/>
+            <a:off x="1789836" y="2673316"/>
             <a:ext cx="708323" cy="172916"/>
           </a:xfrm>
           <a:prstGeom prst="rect">
@@ -3723,7 +3723,7 @@
         </p:nvSpPr>
         <p:spPr>
           <a:xfrm>
-            <a:off x="983357" y="4315244"/>
+            <a:off x="1789835" y="4315244"/>
             <a:ext cx="708323" cy="150314"/>
           </a:xfrm>
           <a:prstGeom prst="rect">
@@ -3822,7 +3822,7 @@
         </p:blipFill>
         <p:spPr>
           <a:xfrm>
-            <a:off x="1185737" y="3924394"/>
+            <a:off x="1992215" y="3924394"/>
             <a:ext cx="303563" cy="397148"/>
           </a:xfrm>
           <a:prstGeom prst="rect">
@@ -3943,7 +3943,7 @@
         </p:nvSpPr>
         <p:spPr>
           <a:xfrm>
-            <a:off x="6909015" y="3063596"/>
+            <a:off x="7197047" y="3063596"/>
             <a:ext cx="619114" cy="562565"/>
           </a:xfrm>
           <a:prstGeom prst="ellipse">
@@ -4035,7 +4035,7 @@
         </p:nvSpPr>
         <p:spPr>
           <a:xfrm>
-            <a:off x="7236296" y="4017679"/>
+            <a:off x="7381576" y="4017679"/>
             <a:ext cx="430784" cy="419433"/>
           </a:xfrm>
           <a:prstGeom prst="ellipse">
@@ -4127,7 +4127,7 @@
         </p:nvSpPr>
         <p:spPr>
           <a:xfrm>
-            <a:off x="7345558" y="2276872"/>
+            <a:off x="7633590" y="2276872"/>
             <a:ext cx="245929" cy="271333"/>
           </a:xfrm>
           <a:prstGeom prst="ellipse">
@@ -4288,7 +4288,7 @@
         </p:nvSpPr>
         <p:spPr>
           <a:xfrm>
-            <a:off x="5340168" y="2378695"/>
+            <a:off x="5628200" y="2378695"/>
             <a:ext cx="389945" cy="330225"/>
           </a:xfrm>
           <a:prstGeom prst="ellipse">
@@ -4371,7 +4371,7 @@
         </p:nvSpPr>
         <p:spPr>
           <a:xfrm>
-            <a:off x="928222" y="2812866"/>
+            <a:off x="1734700" y="2812866"/>
             <a:ext cx="829073" cy="400110"/>
           </a:xfrm>
           <a:prstGeom prst="rect">
@@ -4423,7 +4423,7 @@
         </p:nvSpPr>
         <p:spPr>
           <a:xfrm>
-            <a:off x="287524" y="980728"/>
+            <a:off x="181131" y="920914"/>
             <a:ext cx="5868652" cy="707886"/>
           </a:xfrm>
           <a:prstGeom prst="rect">
@@ -4504,7 +4504,7 @@
         </p:nvCxnSpPr>
         <p:spPr>
           <a:xfrm>
-            <a:off x="3510014" y="2132856"/>
+            <a:off x="3878051" y="2132856"/>
             <a:ext cx="572" cy="1058403"/>
           </a:xfrm>
           <a:prstGeom prst="straightConnector1">
@@ -4549,7 +4549,7 @@
         </p:nvSpPr>
         <p:spPr>
           <a:xfrm>
-            <a:off x="3144254" y="1802631"/>
+            <a:off x="3512291" y="1802631"/>
             <a:ext cx="731520" cy="330225"/>
           </a:xfrm>
           <a:prstGeom prst="rect">
@@ -4682,7 +4682,7 @@
         </p:nvSpPr>
         <p:spPr>
           <a:xfrm>
-            <a:off x="6663642" y="1124744"/>
+            <a:off x="6951674" y="1124744"/>
             <a:ext cx="245929" cy="236211"/>
           </a:xfrm>
           <a:prstGeom prst="ellipse">
@@ -4788,7 +4788,7 @@
         </p:nvSpPr>
         <p:spPr>
           <a:xfrm>
-            <a:off x="7738129" y="1559595"/>
+            <a:off x="8026161" y="1559595"/>
             <a:ext cx="938327" cy="400110"/>
           </a:xfrm>
           <a:prstGeom prst="rect">
@@ -4840,7 +4840,7 @@
         </p:nvSpPr>
         <p:spPr>
           <a:xfrm>
-            <a:off x="6619770" y="1610374"/>
+            <a:off x="6907802" y="1610374"/>
             <a:ext cx="321115" cy="304864"/>
           </a:xfrm>
           <a:prstGeom prst="ellipse">
@@ -5023,7 +5023,7 @@
         </p:nvSpPr>
         <p:spPr>
           <a:xfrm>
-            <a:off x="3144826" y="2276872"/>
+            <a:off x="3512863" y="2276872"/>
             <a:ext cx="731520" cy="309749"/>
           </a:xfrm>
           <a:prstGeom prst="rect">
@@ -5156,7 +5156,7 @@
         </p:nvSpPr>
         <p:spPr>
           <a:xfrm>
-            <a:off x="3144826" y="3191259"/>
+            <a:off x="3512863" y="3191259"/>
             <a:ext cx="731520" cy="309749"/>
           </a:xfrm>
           <a:prstGeom prst="rect">
@@ -5289,7 +5289,7 @@
         </p:nvSpPr>
         <p:spPr>
           <a:xfrm>
-            <a:off x="5484184" y="3033074"/>
+            <a:off x="5772216" y="3033074"/>
             <a:ext cx="678792" cy="663703"/>
           </a:xfrm>
           <a:prstGeom prst="ellipse">
@@ -5386,7 +5386,7 @@
         </p:nvSpPr>
         <p:spPr>
           <a:xfrm>
-            <a:off x="6570671" y="4709307"/>
+            <a:off x="6715951" y="4653136"/>
             <a:ext cx="495818" cy="447885"/>
           </a:xfrm>
           <a:prstGeom prst="ellipse">
@@ -5481,7 +5481,7 @@
         </p:nvCxnSpPr>
         <p:spPr>
           <a:xfrm>
-            <a:off x="4326850" y="3697255"/>
+            <a:off x="4694887" y="3697255"/>
             <a:ext cx="15409" cy="955881"/>
           </a:xfrm>
           <a:prstGeom prst="straightConnector1">
@@ -5526,7 +5526,7 @@
         </p:nvSpPr>
         <p:spPr>
           <a:xfrm>
-            <a:off x="3976499" y="4005064"/>
+            <a:off x="4344536" y="4005064"/>
             <a:ext cx="731520" cy="172916"/>
           </a:xfrm>
           <a:prstGeom prst="rect">
@@ -5628,7 +5628,7 @@
         </p:nvSpPr>
         <p:spPr>
           <a:xfrm>
-            <a:off x="3976499" y="4293096"/>
+            <a:off x="4344536" y="4293096"/>
             <a:ext cx="731520" cy="165687"/>
           </a:xfrm>
           <a:prstGeom prst="rect">
@@ -5730,7 +5730,7 @@
         </p:nvSpPr>
         <p:spPr>
           <a:xfrm>
-            <a:off x="3976499" y="4653136"/>
+            <a:off x="4344536" y="4653136"/>
             <a:ext cx="731519" cy="447885"/>
           </a:xfrm>
           <a:prstGeom prst="rect">
@@ -5908,7 +5908,7 @@
         </p:nvSpPr>
         <p:spPr>
           <a:xfrm>
-            <a:off x="3968880" y="3717032"/>
+            <a:off x="4336917" y="3717032"/>
             <a:ext cx="731520" cy="172665"/>
           </a:xfrm>
           <a:prstGeom prst="rect">
@@ -6010,7 +6010,7 @@
         </p:nvSpPr>
         <p:spPr>
           <a:xfrm>
-            <a:off x="7626401" y="5797129"/>
+            <a:off x="7626401" y="5517232"/>
             <a:ext cx="628458" cy="361919"/>
           </a:xfrm>
           <a:prstGeom prst="rect">
@@ -6139,8 +6139,8 @@
         </p:nvCxnSpPr>
         <p:spPr>
           <a:xfrm>
-            <a:off x="3496707" y="3889697"/>
-            <a:ext cx="893" cy="1446235"/>
+            <a:off x="3864744" y="3889697"/>
+            <a:ext cx="893" cy="1339503"/>
           </a:xfrm>
           <a:prstGeom prst="straightConnector1">
             <a:avLst/>
@@ -6184,7 +6184,7 @@
         </p:nvSpPr>
         <p:spPr>
           <a:xfrm>
-            <a:off x="3131840" y="4415441"/>
+            <a:off x="3499877" y="4415441"/>
             <a:ext cx="731520" cy="165687"/>
           </a:xfrm>
           <a:prstGeom prst="rect">
@@ -6283,7 +6283,7 @@
         </p:nvSpPr>
         <p:spPr>
           <a:xfrm>
-            <a:off x="3130947" y="4653054"/>
+            <a:off x="3498984" y="4653054"/>
             <a:ext cx="731520" cy="447885"/>
           </a:xfrm>
           <a:prstGeom prst="rect">
@@ -6450,7 +6450,7 @@
         </p:nvSpPr>
         <p:spPr>
           <a:xfrm>
-            <a:off x="3131840" y="5335932"/>
+            <a:off x="3499877" y="5229200"/>
             <a:ext cx="731520" cy="397324"/>
           </a:xfrm>
           <a:prstGeom prst="rect">
@@ -6605,7 +6605,7 @@
         </p:nvSpPr>
         <p:spPr>
           <a:xfrm>
-            <a:off x="6123593" y="5803386"/>
+            <a:off x="6123593" y="5523489"/>
             <a:ext cx="628457" cy="361918"/>
           </a:xfrm>
           <a:prstGeom prst="rect">
@@ -6738,7 +6738,7 @@
         </p:nvSpPr>
         <p:spPr>
           <a:xfrm>
-            <a:off x="6208861" y="5301663"/>
+            <a:off x="6208861" y="5085184"/>
             <a:ext cx="495818" cy="447885"/>
           </a:xfrm>
           <a:prstGeom prst="ellipse">
@@ -6822,7 +6822,7 @@
         </p:nvSpPr>
         <p:spPr>
           <a:xfrm>
-            <a:off x="6965991" y="5314644"/>
+            <a:off x="6965991" y="5098165"/>
             <a:ext cx="495818" cy="447885"/>
           </a:xfrm>
           <a:prstGeom prst="ellipse">
@@ -6906,7 +6906,7 @@
         </p:nvSpPr>
         <p:spPr>
           <a:xfrm>
-            <a:off x="7692721" y="5303346"/>
+            <a:off x="7692721" y="5086867"/>
             <a:ext cx="495818" cy="447885"/>
           </a:xfrm>
           <a:prstGeom prst="ellipse">
@@ -6990,7 +6990,7 @@
         </p:nvSpPr>
         <p:spPr>
           <a:xfrm>
-            <a:off x="6899671" y="5797129"/>
+            <a:off x="6899671" y="5517232"/>
             <a:ext cx="628458" cy="361919"/>
           </a:xfrm>
           <a:prstGeom prst="rect">
@@ -7123,8 +7123,8 @@
         </p:nvSpPr>
         <p:spPr>
           <a:xfrm>
-            <a:off x="4855726" y="4658110"/>
-            <a:ext cx="628458" cy="442907"/>
+            <a:off x="5233331" y="4658110"/>
+            <a:ext cx="346781" cy="442907"/>
           </a:xfrm>
           <a:prstGeom prst="rect">
             <a:avLst/>
@@ -7248,7 +7248,7 @@
         </p:nvSpPr>
         <p:spPr>
           <a:xfrm>
-            <a:off x="5340168" y="1802631"/>
+            <a:off x="5628200" y="1802631"/>
             <a:ext cx="389945" cy="330225"/>
           </a:xfrm>
           <a:prstGeom prst="ellipse">
@@ -7332,7 +7332,7 @@
         </p:nvSpPr>
         <p:spPr>
           <a:xfrm>
-            <a:off x="3130947" y="3717032"/>
+            <a:off x="3498984" y="3717032"/>
             <a:ext cx="731520" cy="172665"/>
           </a:xfrm>
           <a:prstGeom prst="rect">
@@ -7423,7 +7423,7 @@
         </p:nvSpPr>
         <p:spPr>
           <a:xfrm>
-            <a:off x="3138376" y="3996241"/>
+            <a:off x="3506413" y="3996241"/>
             <a:ext cx="731520" cy="309749"/>
           </a:xfrm>
           <a:prstGeom prst="rect">
@@ -7556,7 +7556,7 @@
         </p:nvSpPr>
         <p:spPr>
           <a:xfrm>
-            <a:off x="6270287" y="1412776"/>
+            <a:off x="6558319" y="1412776"/>
             <a:ext cx="245929" cy="236211"/>
           </a:xfrm>
           <a:prstGeom prst="ellipse">
@@ -7645,7 +7645,7 @@
         </p:nvSpPr>
         <p:spPr>
           <a:xfrm>
-            <a:off x="7020272" y="1320581"/>
+            <a:off x="7308304" y="1320581"/>
             <a:ext cx="245929" cy="236211"/>
           </a:xfrm>
           <a:prstGeom prst="ellipse">
@@ -7734,7 +7734,7 @@
         </p:nvSpPr>
         <p:spPr>
           <a:xfrm>
-            <a:off x="7329952" y="1484784"/>
+            <a:off x="7617984" y="1484784"/>
             <a:ext cx="245929" cy="236211"/>
           </a:xfrm>
           <a:prstGeom prst="ellipse">
@@ -7827,7 +7827,7 @@
         </p:nvCxnSpPr>
         <p:spPr>
           <a:xfrm flipV="1">
-            <a:off x="6940885" y="1759650"/>
+            <a:off x="7228917" y="1759650"/>
             <a:ext cx="797244" cy="3156"/>
           </a:xfrm>
           <a:prstGeom prst="line">

--- a/ai-overview.pptx
+++ b/ai-overview.pptx
@@ -249,7 +249,7 @@
           <a:p>
             <a:fld id="{982F7CBC-87DD-4F69-8F50-7ED68F7FF790}" type="datetimeFigureOut">
               <a:rPr lang="zh-TW" altLang="en-US" smtClean="0"/>
-              <a:t>2026/9/27</a:t>
+              <a:t>2026/10/5</a:t>
             </a:fld>
             <a:endParaRPr lang="zh-TW" altLang="en-US"/>
           </a:p>
@@ -426,7 +426,7 @@
           <a:p>
             <a:fld id="{863167AA-796B-4B6A-95ED-1C0BCB3E5802}" type="datetimeFigureOut">
               <a:rPr lang="zh-TW" altLang="en-US" smtClean="0"/>
-              <a:t>2026/9/27</a:t>
+              <a:t>2026/10/5</a:t>
             </a:fld>
             <a:endParaRPr lang="zh-TW" altLang="en-US"/>
           </a:p>
@@ -1075,7 +1075,311 @@
               </a:rPr>
               <a:t>)</a:t>
             </a:r>
-            <a:endParaRPr lang="zh-TW" altLang="zh-TW" sz="1200" b="1" u="none" strike="noStrike" kern="1200" dirty="0">
+            <a:br>
+              <a:rPr lang="en-US" altLang="zh-TW" sz="1200" b="0" u="none" strike="noStrike" kern="1200" dirty="0">
+                <a:solidFill>
+                  <a:schemeClr val="tx1"/>
+                </a:solidFill>
+                <a:effectLst/>
+                <a:latin typeface="+mn-lt"/>
+                <a:ea typeface="+mn-ea"/>
+                <a:cs typeface="+mn-cs"/>
+              </a:rPr>
+            </a:br>
+            <a:br>
+              <a:rPr lang="en-US" altLang="zh-TW" sz="1200" b="0" u="none" strike="noStrike" kern="1200" dirty="0">
+                <a:solidFill>
+                  <a:schemeClr val="tx1"/>
+                </a:solidFill>
+                <a:effectLst/>
+                <a:latin typeface="+mn-lt"/>
+                <a:ea typeface="+mn-ea"/>
+                <a:cs typeface="+mn-cs"/>
+              </a:rPr>
+            </a:br>
+            <a:r>
+              <a:rPr lang="zh-TW" altLang="en-US" sz="1200" b="0" u="none" strike="noStrike" kern="1200" dirty="0">
+                <a:solidFill>
+                  <a:schemeClr val="tx1"/>
+                </a:solidFill>
+                <a:effectLst/>
+                <a:latin typeface="+mn-lt"/>
+                <a:ea typeface="+mn-ea"/>
+                <a:cs typeface="+mn-cs"/>
+              </a:rPr>
+              <a:t>結論</a:t>
+            </a:r>
+            <a:r>
+              <a:rPr lang="en-US" altLang="zh-TW" sz="1200" b="0" u="none" strike="noStrike" kern="1200" dirty="0">
+                <a:solidFill>
+                  <a:schemeClr val="tx1"/>
+                </a:solidFill>
+                <a:effectLst/>
+                <a:latin typeface="+mn-lt"/>
+                <a:ea typeface="+mn-ea"/>
+                <a:cs typeface="+mn-cs"/>
+              </a:rPr>
+              <a:t>:</a:t>
+            </a:r>
+            <a:br>
+              <a:rPr lang="en-US" altLang="zh-TW" sz="1200" b="0" u="none" strike="noStrike" kern="1200" dirty="0">
+                <a:solidFill>
+                  <a:schemeClr val="tx1"/>
+                </a:solidFill>
+                <a:effectLst/>
+                <a:latin typeface="+mn-lt"/>
+                <a:ea typeface="+mn-ea"/>
+                <a:cs typeface="+mn-cs"/>
+              </a:rPr>
+            </a:br>
+            <a:r>
+              <a:rPr lang="en-US" altLang="zh-TW" sz="1200" b="0" u="none" strike="noStrike" kern="1200" dirty="0">
+                <a:solidFill>
+                  <a:schemeClr val="tx1"/>
+                </a:solidFill>
+                <a:effectLst/>
+                <a:latin typeface="+mn-lt"/>
+                <a:ea typeface="+mn-ea"/>
+                <a:cs typeface="+mn-cs"/>
+              </a:rPr>
+              <a:t>1.</a:t>
+            </a:r>
+            <a:r>
+              <a:rPr lang="zh-TW" altLang="en-US" sz="1200" b="0" u="none" strike="noStrike" kern="1200" dirty="0">
+                <a:solidFill>
+                  <a:schemeClr val="tx1"/>
+                </a:solidFill>
+                <a:effectLst/>
+                <a:latin typeface="+mn-lt"/>
+                <a:ea typeface="+mn-ea"/>
+                <a:cs typeface="+mn-cs"/>
+              </a:rPr>
+              <a:t> 科技發展終究要回到經濟面</a:t>
+            </a:r>
+            <a:r>
+              <a:rPr lang="en-US" altLang="zh-TW" sz="1200" b="0" u="none" strike="noStrike" kern="1200" dirty="0">
+                <a:solidFill>
+                  <a:schemeClr val="tx1"/>
+                </a:solidFill>
+                <a:effectLst/>
+                <a:latin typeface="+mn-lt"/>
+                <a:ea typeface="+mn-ea"/>
+                <a:cs typeface="+mn-cs"/>
+              </a:rPr>
+              <a:t>(</a:t>
+            </a:r>
+            <a:r>
+              <a:rPr lang="zh-TW" altLang="en-US" sz="1200" b="0" u="none" strike="noStrike" kern="1200" dirty="0">
+                <a:solidFill>
+                  <a:schemeClr val="tx1"/>
+                </a:solidFill>
+                <a:effectLst/>
+                <a:latin typeface="+mn-lt"/>
+                <a:ea typeface="+mn-ea"/>
+                <a:cs typeface="+mn-cs"/>
+              </a:rPr>
+              <a:t>可行性</a:t>
+            </a:r>
+            <a:r>
+              <a:rPr lang="en-US" altLang="zh-TW" sz="1200" b="0" u="none" strike="noStrike" kern="1200" dirty="0">
+                <a:solidFill>
+                  <a:schemeClr val="tx1"/>
+                </a:solidFill>
+                <a:effectLst/>
+                <a:latin typeface="+mn-lt"/>
+                <a:ea typeface="+mn-ea"/>
+                <a:cs typeface="+mn-cs"/>
+              </a:rPr>
+              <a:t>)</a:t>
+            </a:r>
+          </a:p>
+          <a:p>
+            <a:pPr marL="0" marR="0" lvl="0" indent="0" algn="l" defTabSz="914400" rtl="0" eaLnBrk="1" fontAlgn="auto" latinLnBrk="0" hangingPunct="1">
+              <a:lnSpc>
+                <a:spcPct val="100000"/>
+              </a:lnSpc>
+              <a:spcBef>
+                <a:spcPts val="0"/>
+              </a:spcBef>
+              <a:spcAft>
+                <a:spcPts val="0"/>
+              </a:spcAft>
+              <a:buClrTx/>
+              <a:buSzTx/>
+              <a:buFontTx/>
+              <a:buNone/>
+              <a:tabLst/>
+              <a:defRPr/>
+            </a:pPr>
+            <a:r>
+              <a:rPr lang="en-US" altLang="zh-TW" sz="1200" b="0" u="none" strike="noStrike" kern="1200" dirty="0">
+                <a:solidFill>
+                  <a:schemeClr val="tx1"/>
+                </a:solidFill>
+                <a:effectLst/>
+                <a:latin typeface="+mn-lt"/>
+                <a:ea typeface="+mn-ea"/>
+                <a:cs typeface="+mn-cs"/>
+              </a:rPr>
+              <a:t>2.</a:t>
+            </a:r>
+            <a:r>
+              <a:rPr lang="zh-TW" altLang="en-US" sz="1200" b="0" u="none" strike="noStrike" kern="1200" dirty="0">
+                <a:solidFill>
+                  <a:schemeClr val="tx1"/>
+                </a:solidFill>
+                <a:effectLst/>
+                <a:latin typeface="+mn-lt"/>
+                <a:ea typeface="+mn-ea"/>
+                <a:cs typeface="+mn-cs"/>
+              </a:rPr>
+              <a:t> 諾貝爾物理獎</a:t>
+            </a:r>
+            <a:r>
+              <a:rPr lang="en-US" altLang="zh-TW" sz="1200" b="0" u="none" strike="noStrike" kern="1200" dirty="0">
+                <a:solidFill>
+                  <a:schemeClr val="tx1"/>
+                </a:solidFill>
+                <a:effectLst/>
+                <a:latin typeface="+mn-lt"/>
+                <a:ea typeface="+mn-ea"/>
+                <a:cs typeface="+mn-cs"/>
+              </a:rPr>
+              <a:t>2024:</a:t>
+            </a:r>
+            <a:r>
+              <a:rPr lang="zh-TW" altLang="en-US" sz="1200" b="0" u="none" strike="noStrike" kern="1200" dirty="0">
+                <a:solidFill>
+                  <a:schemeClr val="tx1"/>
+                </a:solidFill>
+                <a:effectLst/>
+                <a:latin typeface="+mn-lt"/>
+                <a:ea typeface="+mn-ea"/>
+                <a:cs typeface="+mn-cs"/>
+              </a:rPr>
+              <a:t> 因為</a:t>
+            </a:r>
+            <a:r>
+              <a:rPr lang="en-US" altLang="zh-TW" sz="1200" b="0" u="none" strike="noStrike" kern="1200" dirty="0">
+                <a:solidFill>
+                  <a:schemeClr val="tx1"/>
+                </a:solidFill>
+                <a:effectLst/>
+                <a:latin typeface="+mn-lt"/>
+                <a:ea typeface="+mn-ea"/>
+                <a:cs typeface="+mn-cs"/>
+              </a:rPr>
+              <a:t>Hinton</a:t>
+            </a:r>
+            <a:r>
+              <a:rPr lang="zh-TW" altLang="en-US" sz="1200" b="0" u="none" strike="noStrike" kern="1200" dirty="0">
+                <a:solidFill>
+                  <a:schemeClr val="tx1"/>
+                </a:solidFill>
+                <a:effectLst/>
+                <a:latin typeface="+mn-lt"/>
+                <a:ea typeface="+mn-ea"/>
+                <a:cs typeface="+mn-cs"/>
+              </a:rPr>
+              <a:t>等人</a:t>
+            </a:r>
+            <a:r>
+              <a:rPr lang="en-US" altLang="zh-TW" sz="1200" b="0" u="none" strike="noStrike" kern="1200" dirty="0">
+                <a:solidFill>
+                  <a:schemeClr val="tx1"/>
+                </a:solidFill>
+                <a:effectLst/>
+                <a:latin typeface="+mn-lt"/>
+                <a:ea typeface="+mn-ea"/>
+                <a:cs typeface="+mn-cs"/>
+              </a:rPr>
+              <a:t>,</a:t>
+            </a:r>
+            <a:r>
+              <a:rPr lang="zh-TW" altLang="en-US" sz="1200" b="0" u="none" strike="noStrike" kern="1200" dirty="0">
+                <a:solidFill>
+                  <a:schemeClr val="tx1"/>
+                </a:solidFill>
+                <a:effectLst/>
+                <a:latin typeface="+mn-lt"/>
+                <a:ea typeface="+mn-ea"/>
+                <a:cs typeface="+mn-cs"/>
+              </a:rPr>
+              <a:t> 將物理界的技術</a:t>
+            </a:r>
+            <a:r>
+              <a:rPr lang="en-US" altLang="zh-TW" sz="1200" b="0" u="none" strike="noStrike" kern="1200" dirty="0">
+                <a:solidFill>
+                  <a:schemeClr val="tx1"/>
+                </a:solidFill>
+                <a:effectLst/>
+                <a:latin typeface="+mn-lt"/>
+                <a:ea typeface="+mn-ea"/>
+                <a:cs typeface="+mn-cs"/>
+              </a:rPr>
+              <a:t>”</a:t>
+            </a:r>
+            <a:r>
+              <a:rPr lang="zh-TW" altLang="en-US" sz="1200" b="0" u="none" strike="noStrike" kern="1200" dirty="0">
+                <a:solidFill>
+                  <a:schemeClr val="tx1"/>
+                </a:solidFill>
+                <a:effectLst/>
+                <a:latin typeface="+mn-lt"/>
+                <a:ea typeface="+mn-ea"/>
+                <a:cs typeface="+mn-cs"/>
+              </a:rPr>
+              <a:t>發揚光大</a:t>
+            </a:r>
+            <a:r>
+              <a:rPr lang="en-US" altLang="zh-TW" sz="1200" b="0" u="none" strike="noStrike" kern="1200" dirty="0">
+                <a:solidFill>
+                  <a:schemeClr val="tx1"/>
+                </a:solidFill>
+                <a:effectLst/>
+                <a:latin typeface="+mn-lt"/>
+                <a:ea typeface="+mn-ea"/>
+                <a:cs typeface="+mn-cs"/>
+              </a:rPr>
+              <a:t>”</a:t>
+            </a:r>
+            <a:r>
+              <a:rPr lang="zh-TW" altLang="en-US" sz="1200" b="0" u="none" strike="noStrike" kern="1200" dirty="0">
+                <a:solidFill>
+                  <a:schemeClr val="tx1"/>
+                </a:solidFill>
+                <a:effectLst/>
+                <a:latin typeface="+mn-lt"/>
+                <a:ea typeface="+mn-ea"/>
+                <a:cs typeface="+mn-cs"/>
+              </a:rPr>
+              <a:t>到</a:t>
+            </a:r>
+            <a:r>
+              <a:rPr lang="en-US" altLang="zh-TW" sz="1200" b="0" u="none" strike="noStrike" kern="1200" dirty="0">
+                <a:solidFill>
+                  <a:schemeClr val="tx1"/>
+                </a:solidFill>
+                <a:effectLst/>
+                <a:latin typeface="+mn-lt"/>
+                <a:ea typeface="+mn-ea"/>
+                <a:cs typeface="+mn-cs"/>
+              </a:rPr>
+              <a:t>AI</a:t>
+            </a:r>
+            <a:r>
+              <a:rPr lang="zh-TW" altLang="en-US" sz="1200" b="0" u="none" strike="noStrike" kern="1200" dirty="0">
+                <a:solidFill>
+                  <a:schemeClr val="tx1"/>
+                </a:solidFill>
+                <a:effectLst/>
+                <a:latin typeface="+mn-lt"/>
+                <a:ea typeface="+mn-ea"/>
+                <a:cs typeface="+mn-cs"/>
+              </a:rPr>
+              <a:t>界。</a:t>
+            </a:r>
+            <a:endParaRPr lang="en-US" altLang="zh-TW" sz="1200" b="0" u="none" strike="noStrike" kern="1200" dirty="0">
               <a:solidFill>
                 <a:schemeClr val="tx1"/>
               </a:solidFill>
@@ -3439,7 +3743,7 @@
         </p:nvCxnSpPr>
         <p:spPr>
           <a:xfrm flipH="1">
-            <a:off x="8581158" y="4424879"/>
+            <a:off x="6012790" y="4424879"/>
             <a:ext cx="2" cy="318651"/>
           </a:xfrm>
           <a:prstGeom prst="straightConnector1">
@@ -3484,7 +3788,7 @@
         </p:nvSpPr>
         <p:spPr>
           <a:xfrm>
-            <a:off x="8365765" y="4743530"/>
+            <a:off x="5797397" y="4743530"/>
             <a:ext cx="430785" cy="241576"/>
           </a:xfrm>
           <a:prstGeom prst="rect">
@@ -3844,7 +4148,7 @@
         </p:nvSpPr>
         <p:spPr>
           <a:xfrm>
-            <a:off x="8365768" y="4183303"/>
+            <a:off x="5797400" y="4183303"/>
             <a:ext cx="430784" cy="241576"/>
           </a:xfrm>
           <a:prstGeom prst="rect">
@@ -6010,7 +6314,7 @@
         </p:nvSpPr>
         <p:spPr>
           <a:xfrm>
-            <a:off x="7626401" y="5517232"/>
+            <a:off x="7242946" y="5869137"/>
             <a:ext cx="628458" cy="361919"/>
           </a:xfrm>
           <a:prstGeom prst="rect">
@@ -6605,7 +6909,7 @@
         </p:nvSpPr>
         <p:spPr>
           <a:xfrm>
-            <a:off x="6123593" y="5523489"/>
+            <a:off x="5796136" y="5875394"/>
             <a:ext cx="628457" cy="361918"/>
           </a:xfrm>
           <a:prstGeom prst="rect">
@@ -6738,7 +7042,7 @@
         </p:nvSpPr>
         <p:spPr>
           <a:xfrm>
-            <a:off x="6208861" y="5085184"/>
+            <a:off x="5881404" y="5437089"/>
             <a:ext cx="495818" cy="447885"/>
           </a:xfrm>
           <a:prstGeom prst="ellipse">
@@ -6822,7 +7126,7 @@
         </p:nvSpPr>
         <p:spPr>
           <a:xfrm>
-            <a:off x="6965991" y="5098165"/>
+            <a:off x="6582536" y="5450070"/>
             <a:ext cx="495818" cy="447885"/>
           </a:xfrm>
           <a:prstGeom prst="ellipse">
@@ -6906,7 +7210,7 @@
         </p:nvSpPr>
         <p:spPr>
           <a:xfrm>
-            <a:off x="7692721" y="5086867"/>
+            <a:off x="7309266" y="5438772"/>
             <a:ext cx="495818" cy="447885"/>
           </a:xfrm>
           <a:prstGeom prst="ellipse">
@@ -6990,7 +7294,7 @@
         </p:nvSpPr>
         <p:spPr>
           <a:xfrm>
-            <a:off x="6899671" y="5517232"/>
+            <a:off x="6516216" y="5869137"/>
             <a:ext cx="628458" cy="361919"/>
           </a:xfrm>
           <a:prstGeom prst="rect">
@@ -7858,6 +8162,359 @@
           </a:fontRef>
         </p:style>
       </p:cxnSp>
+      <p:sp>
+        <p:nvSpPr>
+          <p:cNvPr id="25" name="橢圓 24">
+            <a:extLst>
+              <a:ext uri="{FF2B5EF4-FFF2-40B4-BE49-F238E27FC236}">
+                <a16:creationId xmlns:a16="http://schemas.microsoft.com/office/drawing/2014/main" id="{A05E3267-8DA7-EDEA-1EE6-91F3DCA3D62E}"/>
+              </a:ext>
+            </a:extLst>
+          </p:cNvPr>
+          <p:cNvSpPr/>
+          <p:nvPr/>
+        </p:nvSpPr>
+        <p:spPr>
+          <a:xfrm>
+            <a:off x="7956376" y="5429387"/>
+            <a:ext cx="495818" cy="447885"/>
+          </a:xfrm>
+          <a:prstGeom prst="ellipse">
+            <a:avLst/>
+          </a:prstGeom>
+          <a:solidFill>
+            <a:schemeClr val="accent1">
+              <a:lumMod val="20000"/>
+              <a:lumOff val="80000"/>
+              <a:alpha val="70000"/>
+            </a:schemeClr>
+          </a:solidFill>
+          <a:ln w="31750">
+            <a:solidFill>
+              <a:schemeClr val="bg1">
+                <a:lumMod val="75000"/>
+              </a:schemeClr>
+            </a:solidFill>
+          </a:ln>
+        </p:spPr>
+        <p:style>
+          <a:lnRef idx="2">
+            <a:schemeClr val="accent1">
+              <a:shade val="15000"/>
+            </a:schemeClr>
+          </a:lnRef>
+          <a:fillRef idx="1">
+            <a:schemeClr val="accent1"/>
+          </a:fillRef>
+          <a:effectRef idx="0">
+            <a:schemeClr val="accent1"/>
+          </a:effectRef>
+          <a:fontRef idx="minor">
+            <a:schemeClr val="lt1"/>
+          </a:fontRef>
+        </p:style>
+        <p:txBody>
+          <a:bodyPr wrap="none" lIns="0" tIns="0" rIns="0" bIns="0" rtlCol="0" anchor="ctr" anchorCtr="1"/>
+          <a:lstStyle/>
+          <a:p>
+            <a:pPr algn="ctr"/>
+            <a:r>
+              <a:rPr lang="en-US" altLang="zh-TW" sz="1200" dirty="0">
+                <a:solidFill>
+                  <a:schemeClr val="tx1"/>
+                </a:solidFill>
+                <a:latin typeface="ADLaM Display" panose="02010000000000000000" pitchFamily="2" charset="0"/>
+                <a:ea typeface="ADLaM Display" panose="02010000000000000000" pitchFamily="2" charset="0"/>
+                <a:cs typeface="ADLaM Display" panose="02010000000000000000" pitchFamily="2" charset="0"/>
+              </a:rPr>
+              <a:t>GDN</a:t>
+            </a:r>
+          </a:p>
+          <a:p>
+            <a:pPr algn="ctr"/>
+            <a:r>
+              <a:rPr lang="en-US" altLang="zh-TW" sz="1000" dirty="0">
+                <a:solidFill>
+                  <a:schemeClr val="tx1"/>
+                </a:solidFill>
+                <a:latin typeface="ADLaM Display" panose="02010000000000000000" pitchFamily="2" charset="0"/>
+                <a:ea typeface="ADLaM Display" panose="02010000000000000000" pitchFamily="2" charset="0"/>
+                <a:cs typeface="ADLaM Display" panose="02010000000000000000" pitchFamily="2" charset="0"/>
+              </a:rPr>
+              <a:t>Qwen3.5</a:t>
+            </a:r>
+          </a:p>
+        </p:txBody>
+      </p:sp>
+      <p:sp>
+        <p:nvSpPr>
+          <p:cNvPr id="37" name="橢圓 36">
+            <a:extLst>
+              <a:ext uri="{FF2B5EF4-FFF2-40B4-BE49-F238E27FC236}">
+                <a16:creationId xmlns:a16="http://schemas.microsoft.com/office/drawing/2014/main" id="{41245B26-A988-2E9B-EB09-1D273839086C}"/>
+              </a:ext>
+            </a:extLst>
+          </p:cNvPr>
+          <p:cNvSpPr/>
+          <p:nvPr/>
+        </p:nvSpPr>
+        <p:spPr>
+          <a:xfrm>
+            <a:off x="8316416" y="1268760"/>
+            <a:ext cx="245929" cy="236211"/>
+          </a:xfrm>
+          <a:prstGeom prst="ellipse">
+            <a:avLst/>
+          </a:prstGeom>
+          <a:solidFill>
+            <a:schemeClr val="accent4">
+              <a:lumMod val="20000"/>
+              <a:lumOff val="80000"/>
+              <a:alpha val="70000"/>
+            </a:schemeClr>
+          </a:solidFill>
+          <a:ln w="25400">
+            <a:solidFill>
+              <a:schemeClr val="bg1">
+                <a:lumMod val="85000"/>
+              </a:schemeClr>
+            </a:solidFill>
+          </a:ln>
+        </p:spPr>
+        <p:style>
+          <a:lnRef idx="2">
+            <a:schemeClr val="accent1">
+              <a:shade val="15000"/>
+            </a:schemeClr>
+          </a:lnRef>
+          <a:fillRef idx="1">
+            <a:schemeClr val="accent1"/>
+          </a:fillRef>
+          <a:effectRef idx="0">
+            <a:schemeClr val="accent1"/>
+          </a:effectRef>
+          <a:fontRef idx="minor">
+            <a:schemeClr val="lt1"/>
+          </a:fontRef>
+        </p:style>
+        <p:txBody>
+          <a:bodyPr wrap="none" lIns="0" tIns="0" rIns="0" bIns="0" rtlCol="0" anchor="ctr" anchorCtr="1"/>
+          <a:lstStyle/>
+          <a:p>
+            <a:pPr algn="ctr"/>
+            <a:r>
+              <a:rPr lang="en-US" altLang="zh-TW" sz="1000" dirty="0">
+                <a:solidFill>
+                  <a:schemeClr val="tx1">
+                    <a:lumMod val="65000"/>
+                    <a:lumOff val="35000"/>
+                  </a:schemeClr>
+                </a:solidFill>
+                <a:latin typeface="ADLaM Display" panose="02010000000000000000" pitchFamily="2" charset="0"/>
+                <a:ea typeface="ADLaM Display" panose="02010000000000000000" pitchFamily="2" charset="0"/>
+                <a:cs typeface="ADLaM Display" panose="02010000000000000000" pitchFamily="2" charset="0"/>
+              </a:rPr>
+              <a:t>Delta Rule</a:t>
+            </a:r>
+          </a:p>
+          <a:p>
+            <a:pPr algn="ctr"/>
+            <a:r>
+              <a:rPr lang="en-US" altLang="zh-TW" sz="800" dirty="0">
+                <a:solidFill>
+                  <a:schemeClr val="tx1">
+                    <a:lumMod val="65000"/>
+                    <a:lumOff val="35000"/>
+                  </a:schemeClr>
+                </a:solidFill>
+                <a:ea typeface="ADLaM Display" panose="02010000000000000000" pitchFamily="2" charset="0"/>
+                <a:cs typeface="ADLaM Display" panose="02010000000000000000" pitchFamily="2" charset="0"/>
+              </a:rPr>
+              <a:t>1960</a:t>
+            </a:r>
+          </a:p>
+        </p:txBody>
+      </p:sp>
+      <p:sp>
+        <p:nvSpPr>
+          <p:cNvPr id="46" name="橢圓 45">
+            <a:extLst>
+              <a:ext uri="{FF2B5EF4-FFF2-40B4-BE49-F238E27FC236}">
+                <a16:creationId xmlns:a16="http://schemas.microsoft.com/office/drawing/2014/main" id="{794F9DF3-4CFC-D6B9-C8DC-C52FC20C3B27}"/>
+              </a:ext>
+            </a:extLst>
+          </p:cNvPr>
+          <p:cNvSpPr/>
+          <p:nvPr/>
+        </p:nvSpPr>
+        <p:spPr>
+          <a:xfrm>
+            <a:off x="8460432" y="4394919"/>
+            <a:ext cx="389945" cy="330225"/>
+          </a:xfrm>
+          <a:prstGeom prst="ellipse">
+            <a:avLst/>
+          </a:prstGeom>
+          <a:solidFill>
+            <a:schemeClr val="accent4">
+              <a:lumMod val="20000"/>
+              <a:lumOff val="80000"/>
+              <a:alpha val="70000"/>
+            </a:schemeClr>
+          </a:solidFill>
+          <a:ln w="25400">
+            <a:solidFill>
+              <a:schemeClr val="bg1">
+                <a:lumMod val="75000"/>
+              </a:schemeClr>
+            </a:solidFill>
+          </a:ln>
+        </p:spPr>
+        <p:style>
+          <a:lnRef idx="2">
+            <a:schemeClr val="accent1">
+              <a:shade val="15000"/>
+            </a:schemeClr>
+          </a:lnRef>
+          <a:fillRef idx="1">
+            <a:schemeClr val="accent1"/>
+          </a:fillRef>
+          <a:effectRef idx="0">
+            <a:schemeClr val="accent1"/>
+          </a:effectRef>
+          <a:fontRef idx="minor">
+            <a:schemeClr val="lt1"/>
+          </a:fontRef>
+        </p:style>
+        <p:txBody>
+          <a:bodyPr wrap="none" lIns="0" tIns="0" rIns="0" bIns="0" rtlCol="0" anchor="ctr" anchorCtr="1"/>
+          <a:lstStyle/>
+          <a:p>
+            <a:pPr algn="ctr"/>
+            <a:r>
+              <a:rPr lang="en-US" altLang="zh-TW" sz="1000" dirty="0">
+                <a:solidFill>
+                  <a:schemeClr val="tx1"/>
+                </a:solidFill>
+                <a:latin typeface="ADLaM Display" panose="02010000000000000000" pitchFamily="2" charset="0"/>
+                <a:ea typeface="ADLaM Display" panose="02010000000000000000" pitchFamily="2" charset="0"/>
+                <a:cs typeface="ADLaM Display" panose="02010000000000000000" pitchFamily="2" charset="0"/>
+              </a:rPr>
+              <a:t>Linear</a:t>
+            </a:r>
+          </a:p>
+          <a:p>
+            <a:pPr algn="ctr"/>
+            <a:r>
+              <a:rPr lang="en-US" altLang="zh-TW" sz="1000" dirty="0">
+                <a:solidFill>
+                  <a:schemeClr val="tx1"/>
+                </a:solidFill>
+                <a:latin typeface="ADLaM Display" panose="02010000000000000000" pitchFamily="2" charset="0"/>
+                <a:ea typeface="ADLaM Display" panose="02010000000000000000" pitchFamily="2" charset="0"/>
+                <a:cs typeface="ADLaM Display" panose="02010000000000000000" pitchFamily="2" charset="0"/>
+              </a:rPr>
+              <a:t>Transformer</a:t>
+            </a:r>
+          </a:p>
+          <a:p>
+            <a:pPr algn="ctr"/>
+            <a:r>
+              <a:rPr lang="en-US" altLang="zh-TW" sz="800" dirty="0">
+                <a:solidFill>
+                  <a:schemeClr val="tx1"/>
+                </a:solidFill>
+                <a:ea typeface="ADLaM Display" panose="02010000000000000000" pitchFamily="2" charset="0"/>
+                <a:cs typeface="ADLaM Display" panose="02010000000000000000" pitchFamily="2" charset="0"/>
+              </a:rPr>
+              <a:t>2021</a:t>
+            </a:r>
+          </a:p>
+        </p:txBody>
+      </p:sp>
+      <p:sp>
+        <p:nvSpPr>
+          <p:cNvPr id="51" name="橢圓 50">
+            <a:extLst>
+              <a:ext uri="{FF2B5EF4-FFF2-40B4-BE49-F238E27FC236}">
+                <a16:creationId xmlns:a16="http://schemas.microsoft.com/office/drawing/2014/main" id="{63980A83-16E9-7791-B663-19C6A32C1EE1}"/>
+              </a:ext>
+            </a:extLst>
+          </p:cNvPr>
+          <p:cNvSpPr/>
+          <p:nvPr/>
+        </p:nvSpPr>
+        <p:spPr>
+          <a:xfrm>
+            <a:off x="8460432" y="5042991"/>
+            <a:ext cx="389945" cy="330225"/>
+          </a:xfrm>
+          <a:prstGeom prst="ellipse">
+            <a:avLst/>
+          </a:prstGeom>
+          <a:solidFill>
+            <a:schemeClr val="accent4">
+              <a:lumMod val="20000"/>
+              <a:lumOff val="80000"/>
+              <a:alpha val="70000"/>
+            </a:schemeClr>
+          </a:solidFill>
+          <a:ln w="25400">
+            <a:solidFill>
+              <a:schemeClr val="bg1">
+                <a:lumMod val="75000"/>
+              </a:schemeClr>
+            </a:solidFill>
+          </a:ln>
+        </p:spPr>
+        <p:style>
+          <a:lnRef idx="2">
+            <a:schemeClr val="accent1">
+              <a:shade val="15000"/>
+            </a:schemeClr>
+          </a:lnRef>
+          <a:fillRef idx="1">
+            <a:schemeClr val="accent1"/>
+          </a:fillRef>
+          <a:effectRef idx="0">
+            <a:schemeClr val="accent1"/>
+          </a:effectRef>
+          <a:fontRef idx="minor">
+            <a:schemeClr val="lt1"/>
+          </a:fontRef>
+        </p:style>
+        <p:txBody>
+          <a:bodyPr wrap="none" lIns="0" tIns="0" rIns="0" bIns="0" rtlCol="0" anchor="ctr" anchorCtr="1"/>
+          <a:lstStyle/>
+          <a:p>
+            <a:pPr algn="ctr"/>
+            <a:r>
+              <a:rPr lang="en-US" altLang="zh-TW" sz="1000" dirty="0">
+                <a:solidFill>
+                  <a:schemeClr val="tx1"/>
+                </a:solidFill>
+                <a:latin typeface="ADLaM Display" panose="02010000000000000000" pitchFamily="2" charset="0"/>
+                <a:ea typeface="ADLaM Display" panose="02010000000000000000" pitchFamily="2" charset="0"/>
+                <a:cs typeface="ADLaM Display" panose="02010000000000000000" pitchFamily="2" charset="0"/>
+              </a:rPr>
+              <a:t>Chunk-wise</a:t>
+            </a:r>
+          </a:p>
+          <a:p>
+            <a:pPr algn="ctr"/>
+            <a:r>
+              <a:rPr lang="en-US" altLang="zh-TW" sz="800" dirty="0">
+                <a:solidFill>
+                  <a:schemeClr val="tx1"/>
+                </a:solidFill>
+                <a:ea typeface="ADLaM Display" panose="02010000000000000000" pitchFamily="2" charset="0"/>
+                <a:cs typeface="ADLaM Display" panose="02010000000000000000" pitchFamily="2" charset="0"/>
+              </a:rPr>
+              <a:t>2024</a:t>
+            </a:r>
+          </a:p>
+        </p:txBody>
+      </p:sp>
     </p:spTree>
     <p:extLst>
       <p:ext uri="{BB962C8B-B14F-4D97-AF65-F5344CB8AC3E}">

--- a/ai-overview.pptx
+++ b/ai-overview.pptx
@@ -249,7 +249,7 @@
           <a:p>
             <a:fld id="{982F7CBC-87DD-4F69-8F50-7ED68F7FF790}" type="datetimeFigureOut">
               <a:rPr lang="zh-TW" altLang="en-US" smtClean="0"/>
-              <a:t>2026/10/5</a:t>
+              <a:t>2026/10/10</a:t>
             </a:fld>
             <a:endParaRPr lang="zh-TW" altLang="en-US"/>
           </a:p>
@@ -426,7 +426,7 @@
           <a:p>
             <a:fld id="{863167AA-796B-4B6A-95ED-1C0BCB3E5802}" type="datetimeFigureOut">
               <a:rPr lang="zh-TW" altLang="en-US" smtClean="0"/>
-              <a:t>2026/10/5</a:t>
+              <a:t>2026/10/10</a:t>
             </a:fld>
             <a:endParaRPr lang="zh-TW" altLang="en-US"/>
           </a:p>
@@ -2916,7 +2916,7 @@
         </p:nvCxnSpPr>
         <p:spPr>
           <a:xfrm>
-            <a:off x="5292080" y="3770641"/>
+            <a:off x="4572000" y="3770641"/>
             <a:ext cx="3600400" cy="0"/>
           </a:xfrm>
           <a:prstGeom prst="line">
@@ -2961,7 +2961,7 @@
         </p:nvSpPr>
         <p:spPr>
           <a:xfrm>
-            <a:off x="6638647" y="3709343"/>
+            <a:off x="5918567" y="3709343"/>
             <a:ext cx="598913" cy="655761"/>
           </a:xfrm>
           <a:prstGeom prst="ellipse">
@@ -3066,7 +3066,7 @@
         </p:nvSpPr>
         <p:spPr>
           <a:xfrm>
-            <a:off x="6348280" y="1738098"/>
+            <a:off x="5628200" y="1738098"/>
             <a:ext cx="1440160" cy="1518689"/>
           </a:xfrm>
           <a:prstGeom prst="ellipse">
@@ -3201,7 +3201,7 @@
         </p:nvSpPr>
         <p:spPr>
           <a:xfrm>
-            <a:off x="1728648" y="4412600"/>
+            <a:off x="539552" y="4412600"/>
             <a:ext cx="829073" cy="240536"/>
           </a:xfrm>
           <a:prstGeom prst="rect">
@@ -3253,7 +3253,7 @@
         </p:blipFill>
         <p:spPr>
           <a:xfrm>
-            <a:off x="1789835" y="2150311"/>
+            <a:off x="600739" y="2150311"/>
             <a:ext cx="708323" cy="630617"/>
           </a:xfrm>
           <a:prstGeom prst="rect">
@@ -3275,7 +3275,7 @@
         </p:nvSpPr>
         <p:spPr>
           <a:xfrm>
-            <a:off x="7508646" y="1916832"/>
+            <a:off x="6788566" y="1916832"/>
             <a:ext cx="495818" cy="447885"/>
           </a:xfrm>
           <a:prstGeom prst="ellipse">
@@ -3345,7 +3345,7 @@
         </p:nvSpPr>
         <p:spPr>
           <a:xfrm>
-            <a:off x="6132256" y="2374917"/>
+            <a:off x="5412176" y="2374917"/>
             <a:ext cx="495818" cy="447885"/>
           </a:xfrm>
           <a:prstGeom prst="ellipse">
@@ -3415,7 +3415,7 @@
         </p:nvSpPr>
         <p:spPr>
           <a:xfrm>
-            <a:off x="6132256" y="2697263"/>
+            <a:off x="5412176" y="2697263"/>
             <a:ext cx="495818" cy="447885"/>
           </a:xfrm>
           <a:prstGeom prst="ellipse">
@@ -3485,7 +3485,7 @@
         </p:nvSpPr>
         <p:spPr>
           <a:xfrm>
-            <a:off x="6715951" y="4277259"/>
+            <a:off x="5995871" y="4277259"/>
             <a:ext cx="495818" cy="447885"/>
           </a:xfrm>
           <a:prstGeom prst="ellipse">
@@ -3577,7 +3577,7 @@
         </p:nvSpPr>
         <p:spPr>
           <a:xfrm>
-            <a:off x="7436638" y="2693083"/>
+            <a:off x="6716558" y="2693083"/>
             <a:ext cx="495818" cy="447885"/>
           </a:xfrm>
           <a:prstGeom prst="ellipse">
@@ -3647,7 +3647,7 @@
         </p:nvSpPr>
         <p:spPr>
           <a:xfrm>
-            <a:off x="7930155" y="3063964"/>
+            <a:off x="7210075" y="3063964"/>
             <a:ext cx="546416" cy="540099"/>
           </a:xfrm>
           <a:prstGeom prst="ellipse">
@@ -3743,7 +3743,7 @@
         </p:nvCxnSpPr>
         <p:spPr>
           <a:xfrm flipH="1">
-            <a:off x="6012790" y="4424879"/>
+            <a:off x="8173030" y="4424879"/>
             <a:ext cx="2" cy="318651"/>
           </a:xfrm>
           <a:prstGeom prst="straightConnector1">
@@ -3788,7 +3788,7 @@
         </p:nvSpPr>
         <p:spPr>
           <a:xfrm>
-            <a:off x="5797397" y="4743530"/>
+            <a:off x="7957637" y="4743530"/>
             <a:ext cx="430785" cy="241576"/>
           </a:xfrm>
           <a:prstGeom prst="rect">
@@ -3883,7 +3883,7 @@
         </p:nvCxnSpPr>
         <p:spPr>
           <a:xfrm flipH="1">
-            <a:off x="2143997" y="2846232"/>
+            <a:off x="954901" y="2846232"/>
             <a:ext cx="1" cy="1469012"/>
           </a:xfrm>
           <a:prstGeom prst="straightConnector1">
@@ -3928,7 +3928,7 @@
         </p:nvSpPr>
         <p:spPr>
           <a:xfrm>
-            <a:off x="1789836" y="2673316"/>
+            <a:off x="600740" y="2673316"/>
             <a:ext cx="708323" cy="172916"/>
           </a:xfrm>
           <a:prstGeom prst="rect">
@@ -4027,7 +4027,7 @@
         </p:nvSpPr>
         <p:spPr>
           <a:xfrm>
-            <a:off x="1789835" y="4315244"/>
+            <a:off x="600739" y="4315244"/>
             <a:ext cx="708323" cy="150314"/>
           </a:xfrm>
           <a:prstGeom prst="rect">
@@ -4126,7 +4126,7 @@
         </p:blipFill>
         <p:spPr>
           <a:xfrm>
-            <a:off x="1992215" y="3924394"/>
+            <a:off x="803119" y="3924394"/>
             <a:ext cx="303563" cy="397148"/>
           </a:xfrm>
           <a:prstGeom prst="rect">
@@ -4148,7 +4148,7 @@
         </p:nvSpPr>
         <p:spPr>
           <a:xfrm>
-            <a:off x="5797400" y="4183303"/>
+            <a:off x="7957640" y="4183303"/>
             <a:ext cx="430784" cy="241576"/>
           </a:xfrm>
           <a:prstGeom prst="rect">
@@ -4247,7 +4247,7 @@
         </p:nvSpPr>
         <p:spPr>
           <a:xfrm>
-            <a:off x="7197047" y="3063596"/>
+            <a:off x="6476967" y="3063596"/>
             <a:ext cx="619114" cy="562565"/>
           </a:xfrm>
           <a:prstGeom prst="ellipse">
@@ -4339,7 +4339,7 @@
         </p:nvSpPr>
         <p:spPr>
           <a:xfrm>
-            <a:off x="7381576" y="4017679"/>
+            <a:off x="6661496" y="4017679"/>
             <a:ext cx="430784" cy="419433"/>
           </a:xfrm>
           <a:prstGeom prst="ellipse">
@@ -4431,7 +4431,7 @@
         </p:nvSpPr>
         <p:spPr>
           <a:xfrm>
-            <a:off x="7633590" y="2276872"/>
+            <a:off x="6913510" y="2276872"/>
             <a:ext cx="245929" cy="271333"/>
           </a:xfrm>
           <a:prstGeom prst="ellipse">
@@ -4592,7 +4592,7 @@
         </p:nvSpPr>
         <p:spPr>
           <a:xfrm>
-            <a:off x="5628200" y="2378695"/>
+            <a:off x="4908120" y="2378695"/>
             <a:ext cx="389945" cy="330225"/>
           </a:xfrm>
           <a:prstGeom prst="ellipse">
@@ -4675,7 +4675,7 @@
         </p:nvSpPr>
         <p:spPr>
           <a:xfrm>
-            <a:off x="1734700" y="2812866"/>
+            <a:off x="545604" y="2812866"/>
             <a:ext cx="829073" cy="400110"/>
           </a:xfrm>
           <a:prstGeom prst="rect">
@@ -4808,7 +4808,7 @@
         </p:nvCxnSpPr>
         <p:spPr>
           <a:xfrm>
-            <a:off x="3878051" y="2132856"/>
+            <a:off x="2718819" y="2132856"/>
             <a:ext cx="572" cy="1058403"/>
           </a:xfrm>
           <a:prstGeom prst="straightConnector1">
@@ -4853,7 +4853,7 @@
         </p:nvSpPr>
         <p:spPr>
           <a:xfrm>
-            <a:off x="3512291" y="1802631"/>
+            <a:off x="2353059" y="1802631"/>
             <a:ext cx="731520" cy="330225"/>
           </a:xfrm>
           <a:prstGeom prst="rect">
@@ -4986,7 +4986,7 @@
         </p:nvSpPr>
         <p:spPr>
           <a:xfrm>
-            <a:off x="6951674" y="1124744"/>
+            <a:off x="6231594" y="1124744"/>
             <a:ext cx="245929" cy="236211"/>
           </a:xfrm>
           <a:prstGeom prst="ellipse">
@@ -5092,7 +5092,7 @@
         </p:nvSpPr>
         <p:spPr>
           <a:xfrm>
-            <a:off x="8026161" y="1559595"/>
+            <a:off x="7306081" y="1559595"/>
             <a:ext cx="938327" cy="400110"/>
           </a:xfrm>
           <a:prstGeom prst="rect">
@@ -5144,7 +5144,7 @@
         </p:nvSpPr>
         <p:spPr>
           <a:xfrm>
-            <a:off x="6907802" y="1610374"/>
+            <a:off x="6187722" y="1610374"/>
             <a:ext cx="321115" cy="304864"/>
           </a:xfrm>
           <a:prstGeom prst="ellipse">
@@ -5327,7 +5327,7 @@
         </p:nvSpPr>
         <p:spPr>
           <a:xfrm>
-            <a:off x="3512863" y="2276872"/>
+            <a:off x="2353631" y="2276872"/>
             <a:ext cx="731520" cy="309749"/>
           </a:xfrm>
           <a:prstGeom prst="rect">
@@ -5460,7 +5460,7 @@
         </p:nvSpPr>
         <p:spPr>
           <a:xfrm>
-            <a:off x="3512863" y="3191259"/>
+            <a:off x="2353631" y="3191259"/>
             <a:ext cx="731520" cy="309749"/>
           </a:xfrm>
           <a:prstGeom prst="rect">
@@ -5593,7 +5593,7 @@
         </p:nvSpPr>
         <p:spPr>
           <a:xfrm>
-            <a:off x="5772216" y="3033074"/>
+            <a:off x="5052136" y="3033074"/>
             <a:ext cx="678792" cy="663703"/>
           </a:xfrm>
           <a:prstGeom prst="ellipse">
@@ -5690,7 +5690,7 @@
         </p:nvSpPr>
         <p:spPr>
           <a:xfrm>
-            <a:off x="6715951" y="4653136"/>
+            <a:off x="5995871" y="4653136"/>
             <a:ext cx="495818" cy="447885"/>
           </a:xfrm>
           <a:prstGeom prst="ellipse">
@@ -5785,7 +5785,7 @@
         </p:nvCxnSpPr>
         <p:spPr>
           <a:xfrm>
-            <a:off x="4694887" y="3697255"/>
+            <a:off x="3535655" y="3697255"/>
             <a:ext cx="15409" cy="955881"/>
           </a:xfrm>
           <a:prstGeom prst="straightConnector1">
@@ -5830,7 +5830,7 @@
         </p:nvSpPr>
         <p:spPr>
           <a:xfrm>
-            <a:off x="4344536" y="4005064"/>
+            <a:off x="3185304" y="4005064"/>
             <a:ext cx="731520" cy="172916"/>
           </a:xfrm>
           <a:prstGeom prst="rect">
@@ -5932,7 +5932,7 @@
         </p:nvSpPr>
         <p:spPr>
           <a:xfrm>
-            <a:off x="4344536" y="4293096"/>
+            <a:off x="3185304" y="4293096"/>
             <a:ext cx="731520" cy="165687"/>
           </a:xfrm>
           <a:prstGeom prst="rect">
@@ -6034,7 +6034,7 @@
         </p:nvSpPr>
         <p:spPr>
           <a:xfrm>
-            <a:off x="4344536" y="4653136"/>
+            <a:off x="3185304" y="4653136"/>
             <a:ext cx="731519" cy="447885"/>
           </a:xfrm>
           <a:prstGeom prst="rect">
@@ -6212,7 +6212,7 @@
         </p:nvSpPr>
         <p:spPr>
           <a:xfrm>
-            <a:off x="4336917" y="3717032"/>
+            <a:off x="3177685" y="3717032"/>
             <a:ext cx="731520" cy="172665"/>
           </a:xfrm>
           <a:prstGeom prst="rect">
@@ -6314,7 +6314,7 @@
         </p:nvSpPr>
         <p:spPr>
           <a:xfrm>
-            <a:off x="7242946" y="5869137"/>
+            <a:off x="6175790" y="6085161"/>
             <a:ext cx="628458" cy="361919"/>
           </a:xfrm>
           <a:prstGeom prst="rect">
@@ -6443,7 +6443,7 @@
         </p:nvCxnSpPr>
         <p:spPr>
           <a:xfrm>
-            <a:off x="3864744" y="3889697"/>
+            <a:off x="2705512" y="3889697"/>
             <a:ext cx="893" cy="1339503"/>
           </a:xfrm>
           <a:prstGeom prst="straightConnector1">
@@ -6488,7 +6488,7 @@
         </p:nvSpPr>
         <p:spPr>
           <a:xfrm>
-            <a:off x="3499877" y="4415441"/>
+            <a:off x="2340645" y="4415441"/>
             <a:ext cx="731520" cy="165687"/>
           </a:xfrm>
           <a:prstGeom prst="rect">
@@ -6587,7 +6587,7 @@
         </p:nvSpPr>
         <p:spPr>
           <a:xfrm>
-            <a:off x="3498984" y="4653054"/>
+            <a:off x="2339752" y="4653054"/>
             <a:ext cx="731520" cy="447885"/>
           </a:xfrm>
           <a:prstGeom prst="rect">
@@ -6754,7 +6754,7 @@
         </p:nvSpPr>
         <p:spPr>
           <a:xfrm>
-            <a:off x="3499877" y="5229200"/>
+            <a:off x="2340645" y="5229200"/>
             <a:ext cx="731520" cy="397324"/>
           </a:xfrm>
           <a:prstGeom prst="rect">
@@ -6909,7 +6909,7 @@
         </p:nvSpPr>
         <p:spPr>
           <a:xfrm>
-            <a:off x="5796136" y="5875394"/>
+            <a:off x="7615951" y="6091418"/>
             <a:ext cx="628457" cy="361918"/>
           </a:xfrm>
           <a:prstGeom prst="rect">
@@ -7042,7 +7042,7 @@
         </p:nvSpPr>
         <p:spPr>
           <a:xfrm>
-            <a:off x="5881404" y="5437089"/>
+            <a:off x="7701219" y="5653113"/>
             <a:ext cx="495818" cy="447885"/>
           </a:xfrm>
           <a:prstGeom prst="ellipse">
@@ -7126,7 +7126,7 @@
         </p:nvSpPr>
         <p:spPr>
           <a:xfrm>
-            <a:off x="6582536" y="5450070"/>
+            <a:off x="6962190" y="5666094"/>
             <a:ext cx="495818" cy="447885"/>
           </a:xfrm>
           <a:prstGeom prst="ellipse">
@@ -7210,7 +7210,7 @@
         </p:nvSpPr>
         <p:spPr>
           <a:xfrm>
-            <a:off x="7309266" y="5438772"/>
+            <a:off x="6242110" y="5654796"/>
             <a:ext cx="495818" cy="447885"/>
           </a:xfrm>
           <a:prstGeom prst="ellipse">
@@ -7294,7 +7294,7 @@
         </p:nvSpPr>
         <p:spPr>
           <a:xfrm>
-            <a:off x="6516216" y="5869137"/>
+            <a:off x="6895870" y="6085161"/>
             <a:ext cx="628458" cy="361919"/>
           </a:xfrm>
           <a:prstGeom prst="rect">
@@ -7427,7 +7427,7 @@
         </p:nvSpPr>
         <p:spPr>
           <a:xfrm>
-            <a:off x="5233331" y="4658110"/>
+            <a:off x="7495484" y="4849406"/>
             <a:ext cx="346781" cy="442907"/>
           </a:xfrm>
           <a:prstGeom prst="rect">
@@ -7552,7 +7552,7 @@
         </p:nvSpPr>
         <p:spPr>
           <a:xfrm>
-            <a:off x="5628200" y="1802631"/>
+            <a:off x="4908120" y="1802631"/>
             <a:ext cx="389945" cy="330225"/>
           </a:xfrm>
           <a:prstGeom prst="ellipse">
@@ -7636,7 +7636,7 @@
         </p:nvSpPr>
         <p:spPr>
           <a:xfrm>
-            <a:off x="3498984" y="3717032"/>
+            <a:off x="2339752" y="3717032"/>
             <a:ext cx="731520" cy="172665"/>
           </a:xfrm>
           <a:prstGeom prst="rect">
@@ -7727,7 +7727,7 @@
         </p:nvSpPr>
         <p:spPr>
           <a:xfrm>
-            <a:off x="3506413" y="3996241"/>
+            <a:off x="2347181" y="3996241"/>
             <a:ext cx="731520" cy="309749"/>
           </a:xfrm>
           <a:prstGeom prst="rect">
@@ -7860,7 +7860,7 @@
         </p:nvSpPr>
         <p:spPr>
           <a:xfrm>
-            <a:off x="6558319" y="1412776"/>
+            <a:off x="5838239" y="1412776"/>
             <a:ext cx="245929" cy="236211"/>
           </a:xfrm>
           <a:prstGeom prst="ellipse">
@@ -7949,7 +7949,7 @@
         </p:nvSpPr>
         <p:spPr>
           <a:xfrm>
-            <a:off x="7308304" y="1320581"/>
+            <a:off x="6588224" y="1320581"/>
             <a:ext cx="245929" cy="236211"/>
           </a:xfrm>
           <a:prstGeom prst="ellipse">
@@ -8038,7 +8038,7 @@
         </p:nvSpPr>
         <p:spPr>
           <a:xfrm>
-            <a:off x="7617984" y="1484784"/>
+            <a:off x="6897904" y="1484784"/>
             <a:ext cx="245929" cy="236211"/>
           </a:xfrm>
           <a:prstGeom prst="ellipse">
@@ -8131,7 +8131,7 @@
         </p:nvCxnSpPr>
         <p:spPr>
           <a:xfrm flipV="1">
-            <a:off x="7228917" y="1759650"/>
+            <a:off x="6508837" y="1759650"/>
             <a:ext cx="797244" cy="3156"/>
           </a:xfrm>
           <a:prstGeom prst="line">
@@ -8176,7 +8176,7 @@
         </p:nvSpPr>
         <p:spPr>
           <a:xfrm>
-            <a:off x="7956376" y="5429387"/>
+            <a:off x="5588350" y="5645411"/>
             <a:ext cx="495818" cy="447885"/>
           </a:xfrm>
           <a:prstGeom prst="ellipse">
@@ -8219,7 +8219,7 @@
           <a:p>
             <a:pPr algn="ctr"/>
             <a:r>
-              <a:rPr lang="en-US" altLang="zh-TW" sz="1200" dirty="0">
+              <a:rPr lang="en-US" altLang="zh-TW" sz="1000" dirty="0">
                 <a:solidFill>
                   <a:schemeClr val="tx1"/>
                 </a:solidFill>
@@ -8227,7 +8227,7 @@
                 <a:ea typeface="ADLaM Display" panose="02010000000000000000" pitchFamily="2" charset="0"/>
                 <a:cs typeface="ADLaM Display" panose="02010000000000000000" pitchFamily="2" charset="0"/>
               </a:rPr>
-              <a:t>GDN</a:t>
+              <a:t>Qwen</a:t>
             </a:r>
           </a:p>
           <a:p>
@@ -8241,7 +8241,7 @@
                 <a:ea typeface="ADLaM Display" panose="02010000000000000000" pitchFamily="2" charset="0"/>
                 <a:cs typeface="ADLaM Display" panose="02010000000000000000" pitchFamily="2" charset="0"/>
               </a:rPr>
-              <a:t>Qwen3.5</a:t>
+              <a:t>3.5</a:t>
             </a:r>
           </a:p>
         </p:txBody>
@@ -8260,7 +8260,7 @@
         </p:nvSpPr>
         <p:spPr>
           <a:xfrm>
-            <a:off x="8316416" y="1268760"/>
+            <a:off x="7596336" y="1268760"/>
             <a:ext cx="245929" cy="236211"/>
           </a:xfrm>
           <a:prstGeom prst="ellipse">
@@ -8349,7 +8349,7 @@
         </p:nvSpPr>
         <p:spPr>
           <a:xfrm>
-            <a:off x="8460432" y="4394919"/>
+            <a:off x="4830127" y="4221088"/>
             <a:ext cx="389945" cy="330225"/>
           </a:xfrm>
           <a:prstGeom prst="ellipse">
@@ -8390,7 +8390,11 @@
           <a:bodyPr wrap="none" lIns="0" tIns="0" rIns="0" bIns="0" rtlCol="0" anchor="ctr" anchorCtr="1"/>
           <a:lstStyle/>
           <a:p>
-            <a:pPr algn="ctr"/>
+            <a:pPr algn="ctr">
+              <a:lnSpc>
+                <a:spcPts val="1200"/>
+              </a:lnSpc>
+            </a:pPr>
             <a:r>
               <a:rPr lang="en-US" altLang="zh-TW" sz="1000" dirty="0">
                 <a:solidFill>
@@ -8400,11 +8404,15 @@
                 <a:ea typeface="ADLaM Display" panose="02010000000000000000" pitchFamily="2" charset="0"/>
                 <a:cs typeface="ADLaM Display" panose="02010000000000000000" pitchFamily="2" charset="0"/>
               </a:rPr>
-              <a:t>Linear</a:t>
-            </a:r>
-          </a:p>
-          <a:p>
-            <a:pPr algn="ctr"/>
+              <a:t>Vanilla</a:t>
+            </a:r>
+          </a:p>
+          <a:p>
+            <a:pPr algn="ctr">
+              <a:lnSpc>
+                <a:spcPts val="1200"/>
+              </a:lnSpc>
+            </a:pPr>
             <a:r>
               <a:rPr lang="en-US" altLang="zh-TW" sz="1000" dirty="0">
                 <a:solidFill>
@@ -8414,20 +8422,38 @@
                 <a:ea typeface="ADLaM Display" panose="02010000000000000000" pitchFamily="2" charset="0"/>
                 <a:cs typeface="ADLaM Display" panose="02010000000000000000" pitchFamily="2" charset="0"/>
               </a:rPr>
-              <a:t>Transformer</a:t>
-            </a:r>
-          </a:p>
-          <a:p>
-            <a:pPr algn="ctr"/>
-            <a:r>
-              <a:rPr lang="en-US" altLang="zh-TW" sz="800" dirty="0">
-                <a:solidFill>
-                  <a:schemeClr val="tx1"/>
-                </a:solidFill>
+              <a:t>Linear </a:t>
+            </a:r>
+          </a:p>
+          <a:p>
+            <a:pPr algn="ctr">
+              <a:lnSpc>
+                <a:spcPts val="1200"/>
+              </a:lnSpc>
+            </a:pPr>
+            <a:r>
+              <a:rPr lang="en-US" altLang="zh-TW" sz="1000" dirty="0">
+                <a:solidFill>
+                  <a:schemeClr val="tx1"/>
+                </a:solidFill>
+                <a:latin typeface="ADLaM Display" panose="02010000000000000000" pitchFamily="2" charset="0"/>
                 <a:ea typeface="ADLaM Display" panose="02010000000000000000" pitchFamily="2" charset="0"/>
                 <a:cs typeface="ADLaM Display" panose="02010000000000000000" pitchFamily="2" charset="0"/>
               </a:rPr>
-              <a:t>2021</a:t>
+              <a:t>Attention</a:t>
+            </a:r>
+          </a:p>
+          <a:p>
+            <a:pPr algn="ctr"/>
+            <a:r>
+              <a:rPr lang="en-US" altLang="zh-TW" sz="800" dirty="0">
+                <a:solidFill>
+                  <a:schemeClr val="tx1"/>
+                </a:solidFill>
+                <a:ea typeface="ADLaM Display" panose="02010000000000000000" pitchFamily="2" charset="0"/>
+                <a:cs typeface="ADLaM Display" panose="02010000000000000000" pitchFamily="2" charset="0"/>
+              </a:rPr>
+              <a:t>2020</a:t>
             </a:r>
           </a:p>
         </p:txBody>
@@ -8446,7 +8472,7 @@
         </p:nvSpPr>
         <p:spPr>
           <a:xfrm>
-            <a:off x="8460432" y="5042991"/>
+            <a:off x="4830127" y="5373216"/>
             <a:ext cx="389945" cy="330225"/>
           </a:xfrm>
           <a:prstGeom prst="ellipse">
@@ -8486,6 +8512,103 @@
         <p:txBody>
           <a:bodyPr wrap="none" lIns="0" tIns="0" rIns="0" bIns="0" rtlCol="0" anchor="ctr" anchorCtr="1"/>
           <a:lstStyle/>
+          <a:p>
+            <a:pPr algn="ctr"/>
+            <a:r>
+              <a:rPr lang="en-US" altLang="zh-TW" sz="1000" dirty="0">
+                <a:solidFill>
+                  <a:schemeClr val="tx1"/>
+                </a:solidFill>
+                <a:latin typeface="ADLaM Display" panose="02010000000000000000" pitchFamily="2" charset="0"/>
+                <a:ea typeface="ADLaM Display" panose="02010000000000000000" pitchFamily="2" charset="0"/>
+                <a:cs typeface="ADLaM Display" panose="02010000000000000000" pitchFamily="2" charset="0"/>
+              </a:rPr>
+              <a:t>Gated DN</a:t>
+            </a:r>
+          </a:p>
+          <a:p>
+            <a:pPr algn="ctr"/>
+            <a:r>
+              <a:rPr lang="en-US" altLang="zh-TW" sz="800" dirty="0">
+                <a:solidFill>
+                  <a:schemeClr val="tx1"/>
+                </a:solidFill>
+                <a:ea typeface="ADLaM Display" panose="02010000000000000000" pitchFamily="2" charset="0"/>
+                <a:cs typeface="ADLaM Display" panose="02010000000000000000" pitchFamily="2" charset="0"/>
+              </a:rPr>
+              <a:t>2025</a:t>
+            </a:r>
+          </a:p>
+        </p:txBody>
+      </p:sp>
+      <p:sp>
+        <p:nvSpPr>
+          <p:cNvPr id="32" name="橢圓 31">
+            <a:extLst>
+              <a:ext uri="{FF2B5EF4-FFF2-40B4-BE49-F238E27FC236}">
+                <a16:creationId xmlns:a16="http://schemas.microsoft.com/office/drawing/2014/main" id="{321BF9B8-3FD9-8BFC-9C27-8D0594D79603}"/>
+              </a:ext>
+            </a:extLst>
+          </p:cNvPr>
+          <p:cNvSpPr/>
+          <p:nvPr/>
+        </p:nvSpPr>
+        <p:spPr>
+          <a:xfrm>
+            <a:off x="4820146" y="4970983"/>
+            <a:ext cx="389945" cy="330225"/>
+          </a:xfrm>
+          <a:prstGeom prst="ellipse">
+            <a:avLst/>
+          </a:prstGeom>
+          <a:solidFill>
+            <a:schemeClr val="accent4">
+              <a:lumMod val="20000"/>
+              <a:lumOff val="80000"/>
+              <a:alpha val="70000"/>
+            </a:schemeClr>
+          </a:solidFill>
+          <a:ln w="25400">
+            <a:solidFill>
+              <a:schemeClr val="bg1">
+                <a:lumMod val="75000"/>
+              </a:schemeClr>
+            </a:solidFill>
+          </a:ln>
+        </p:spPr>
+        <p:style>
+          <a:lnRef idx="2">
+            <a:schemeClr val="accent1">
+              <a:shade val="15000"/>
+            </a:schemeClr>
+          </a:lnRef>
+          <a:fillRef idx="1">
+            <a:schemeClr val="accent1"/>
+          </a:fillRef>
+          <a:effectRef idx="0">
+            <a:schemeClr val="accent1"/>
+          </a:effectRef>
+          <a:fontRef idx="minor">
+            <a:schemeClr val="lt1"/>
+          </a:fontRef>
+        </p:style>
+        <p:txBody>
+          <a:bodyPr wrap="none" lIns="0" tIns="0" rIns="0" bIns="0" rtlCol="0" anchor="ctr" anchorCtr="1"/>
+          <a:lstStyle/>
+          <a:p>
+            <a:pPr algn="ctr"/>
+            <a:r>
+              <a:rPr lang="en-US" altLang="zh-TW" sz="1000" dirty="0">
+                <a:solidFill>
+                  <a:schemeClr val="tx1"/>
+                </a:solidFill>
+                <a:latin typeface="ADLaM Display" panose="02010000000000000000" pitchFamily="2" charset="0"/>
+                <a:ea typeface="ADLaM Display" panose="02010000000000000000" pitchFamily="2" charset="0"/>
+                <a:cs typeface="ADLaM Display" panose="02010000000000000000" pitchFamily="2" charset="0"/>
+              </a:rPr>
+              <a:t>Delta Net</a:t>
+            </a:r>
+          </a:p>
           <a:p>
             <a:pPr algn="ctr"/>
             <a:r>

--- a/ai-overview.pptx
+++ b/ai-overview.pptx
@@ -249,7 +249,7 @@
           <a:p>
             <a:fld id="{982F7CBC-87DD-4F69-8F50-7ED68F7FF790}" type="datetimeFigureOut">
               <a:rPr lang="zh-TW" altLang="en-US" smtClean="0"/>
-              <a:t>2026/10/10</a:t>
+              <a:t>2026/10/12</a:t>
             </a:fld>
             <a:endParaRPr lang="zh-TW" altLang="en-US"/>
           </a:p>
@@ -426,7 +426,7 @@
           <a:p>
             <a:fld id="{863167AA-796B-4B6A-95ED-1C0BCB3E5802}" type="datetimeFigureOut">
               <a:rPr lang="zh-TW" altLang="en-US" smtClean="0"/>
-              <a:t>2026/10/10</a:t>
+              <a:t>2026/10/12</a:t>
             </a:fld>
             <a:endParaRPr lang="zh-TW" altLang="en-US"/>
           </a:p>
@@ -4808,7 +4808,7 @@
         </p:nvCxnSpPr>
         <p:spPr>
           <a:xfrm>
-            <a:off x="2718819" y="2132856"/>
+            <a:off x="2430787" y="2132856"/>
             <a:ext cx="572" cy="1058403"/>
           </a:xfrm>
           <a:prstGeom prst="straightConnector1">
@@ -4853,7 +4853,7 @@
         </p:nvSpPr>
         <p:spPr>
           <a:xfrm>
-            <a:off x="2353059" y="1802631"/>
+            <a:off x="2065027" y="1802631"/>
             <a:ext cx="731520" cy="330225"/>
           </a:xfrm>
           <a:prstGeom prst="rect">
@@ -5327,7 +5327,7 @@
         </p:nvSpPr>
         <p:spPr>
           <a:xfrm>
-            <a:off x="2353631" y="2276872"/>
+            <a:off x="2065599" y="2276872"/>
             <a:ext cx="731520" cy="309749"/>
           </a:xfrm>
           <a:prstGeom prst="rect">
@@ -5460,7 +5460,7 @@
         </p:nvSpPr>
         <p:spPr>
           <a:xfrm>
-            <a:off x="2353631" y="3191259"/>
+            <a:off x="2065599" y="3191259"/>
             <a:ext cx="731520" cy="309749"/>
           </a:xfrm>
           <a:prstGeom prst="rect">
@@ -5785,7 +5785,7 @@
         </p:nvCxnSpPr>
         <p:spPr>
           <a:xfrm>
-            <a:off x="3535655" y="3697255"/>
+            <a:off x="3247623" y="3697255"/>
             <a:ext cx="15409" cy="955881"/>
           </a:xfrm>
           <a:prstGeom prst="straightConnector1">
@@ -5830,7 +5830,7 @@
         </p:nvSpPr>
         <p:spPr>
           <a:xfrm>
-            <a:off x="3185304" y="4005064"/>
+            <a:off x="2897272" y="4005064"/>
             <a:ext cx="731520" cy="172916"/>
           </a:xfrm>
           <a:prstGeom prst="rect">
@@ -5932,7 +5932,7 @@
         </p:nvSpPr>
         <p:spPr>
           <a:xfrm>
-            <a:off x="3185304" y="4293096"/>
+            <a:off x="2897272" y="4293096"/>
             <a:ext cx="731520" cy="165687"/>
           </a:xfrm>
           <a:prstGeom prst="rect">
@@ -6034,7 +6034,7 @@
         </p:nvSpPr>
         <p:spPr>
           <a:xfrm>
-            <a:off x="3185304" y="4653136"/>
+            <a:off x="2897272" y="4653136"/>
             <a:ext cx="731519" cy="447885"/>
           </a:xfrm>
           <a:prstGeom prst="rect">
@@ -6212,7 +6212,7 @@
         </p:nvSpPr>
         <p:spPr>
           <a:xfrm>
-            <a:off x="3177685" y="3717032"/>
+            <a:off x="2889653" y="3717032"/>
             <a:ext cx="731520" cy="172665"/>
           </a:xfrm>
           <a:prstGeom prst="rect">
@@ -6314,7 +6314,7 @@
         </p:nvSpPr>
         <p:spPr>
           <a:xfrm>
-            <a:off x="6175790" y="6085161"/>
+            <a:off x="6175790" y="6028990"/>
             <a:ext cx="628458" cy="361919"/>
           </a:xfrm>
           <a:prstGeom prst="rect">
@@ -6443,7 +6443,7 @@
         </p:nvCxnSpPr>
         <p:spPr>
           <a:xfrm>
-            <a:off x="2705512" y="3889697"/>
+            <a:off x="2417480" y="3889697"/>
             <a:ext cx="893" cy="1339503"/>
           </a:xfrm>
           <a:prstGeom prst="straightConnector1">
@@ -6488,7 +6488,7 @@
         </p:nvSpPr>
         <p:spPr>
           <a:xfrm>
-            <a:off x="2340645" y="4415441"/>
+            <a:off x="2052613" y="4415441"/>
             <a:ext cx="731520" cy="165687"/>
           </a:xfrm>
           <a:prstGeom prst="rect">
@@ -6587,7 +6587,7 @@
         </p:nvSpPr>
         <p:spPr>
           <a:xfrm>
-            <a:off x="2339752" y="4653054"/>
+            <a:off x="2051720" y="4653054"/>
             <a:ext cx="731520" cy="447885"/>
           </a:xfrm>
           <a:prstGeom prst="rect">
@@ -6754,7 +6754,7 @@
         </p:nvSpPr>
         <p:spPr>
           <a:xfrm>
-            <a:off x="2340645" y="5229200"/>
+            <a:off x="2052613" y="5229200"/>
             <a:ext cx="731520" cy="397324"/>
           </a:xfrm>
           <a:prstGeom prst="rect">
@@ -6909,7 +6909,7 @@
         </p:nvSpPr>
         <p:spPr>
           <a:xfrm>
-            <a:off x="7615951" y="6091418"/>
+            <a:off x="7615951" y="6035247"/>
             <a:ext cx="628457" cy="361918"/>
           </a:xfrm>
           <a:prstGeom prst="rect">
@@ -7042,7 +7042,7 @@
         </p:nvSpPr>
         <p:spPr>
           <a:xfrm>
-            <a:off x="7701219" y="5653113"/>
+            <a:off x="7701219" y="5596942"/>
             <a:ext cx="495818" cy="447885"/>
           </a:xfrm>
           <a:prstGeom prst="ellipse">
@@ -7126,7 +7126,7 @@
         </p:nvSpPr>
         <p:spPr>
           <a:xfrm>
-            <a:off x="6962190" y="5666094"/>
+            <a:off x="6962190" y="5609923"/>
             <a:ext cx="495818" cy="447885"/>
           </a:xfrm>
           <a:prstGeom prst="ellipse">
@@ -7210,7 +7210,7 @@
         </p:nvSpPr>
         <p:spPr>
           <a:xfrm>
-            <a:off x="6242110" y="5654796"/>
+            <a:off x="6242110" y="5598625"/>
             <a:ext cx="495818" cy="447885"/>
           </a:xfrm>
           <a:prstGeom prst="ellipse">
@@ -7294,7 +7294,7 @@
         </p:nvSpPr>
         <p:spPr>
           <a:xfrm>
-            <a:off x="6895870" y="6085161"/>
+            <a:off x="6895870" y="6028990"/>
             <a:ext cx="628458" cy="361919"/>
           </a:xfrm>
           <a:prstGeom prst="rect">
@@ -7636,7 +7636,7 @@
         </p:nvSpPr>
         <p:spPr>
           <a:xfrm>
-            <a:off x="2339752" y="3717032"/>
+            <a:off x="2051720" y="3717032"/>
             <a:ext cx="731520" cy="172665"/>
           </a:xfrm>
           <a:prstGeom prst="rect">
@@ -7727,7 +7727,7 @@
         </p:nvSpPr>
         <p:spPr>
           <a:xfrm>
-            <a:off x="2347181" y="3996241"/>
+            <a:off x="2059149" y="3996241"/>
             <a:ext cx="731520" cy="309749"/>
           </a:xfrm>
           <a:prstGeom prst="rect">
@@ -8176,7 +8176,7 @@
         </p:nvSpPr>
         <p:spPr>
           <a:xfrm>
-            <a:off x="5588350" y="5645411"/>
+            <a:off x="5588350" y="5589240"/>
             <a:ext cx="495818" cy="447885"/>
           </a:xfrm>
           <a:prstGeom prst="ellipse">
@@ -8349,7 +8349,7 @@
         </p:nvSpPr>
         <p:spPr>
           <a:xfrm>
-            <a:off x="4830127" y="4221088"/>
+            <a:off x="4974143" y="4178895"/>
             <a:ext cx="389945" cy="330225"/>
           </a:xfrm>
           <a:prstGeom prst="ellipse">
@@ -8472,7 +8472,7 @@
         </p:nvSpPr>
         <p:spPr>
           <a:xfrm>
-            <a:off x="4830127" y="5373216"/>
+            <a:off x="4974143" y="5199385"/>
             <a:ext cx="389945" cy="330225"/>
           </a:xfrm>
           <a:prstGeom prst="ellipse">
@@ -8555,7 +8555,7 @@
         </p:nvSpPr>
         <p:spPr>
           <a:xfrm>
-            <a:off x="4820146" y="4970983"/>
+            <a:off x="4964162" y="4797152"/>
             <a:ext cx="389945" cy="330225"/>
           </a:xfrm>
           <a:prstGeom prst="ellipse">
@@ -8634,6 +8634,259 @@
                 <a:cs typeface="ADLaM Display" panose="02010000000000000000" pitchFamily="2" charset="0"/>
               </a:rPr>
               <a:t>2024</a:t>
+            </a:r>
+          </a:p>
+        </p:txBody>
+      </p:sp>
+      <p:sp>
+        <p:nvSpPr>
+          <p:cNvPr id="42" name="橢圓 41">
+            <a:extLst>
+              <a:ext uri="{FF2B5EF4-FFF2-40B4-BE49-F238E27FC236}">
+                <a16:creationId xmlns:a16="http://schemas.microsoft.com/office/drawing/2014/main" id="{93296DC5-B434-3F69-60FA-EC1EB49C8739}"/>
+              </a:ext>
+            </a:extLst>
+          </p:cNvPr>
+          <p:cNvSpPr/>
+          <p:nvPr/>
+        </p:nvSpPr>
+        <p:spPr>
+          <a:xfrm>
+            <a:off x="4974143" y="5589240"/>
+            <a:ext cx="389945" cy="330225"/>
+          </a:xfrm>
+          <a:prstGeom prst="ellipse">
+            <a:avLst/>
+          </a:prstGeom>
+          <a:solidFill>
+            <a:schemeClr val="accent4">
+              <a:lumMod val="20000"/>
+              <a:lumOff val="80000"/>
+              <a:alpha val="70000"/>
+            </a:schemeClr>
+          </a:solidFill>
+          <a:ln w="25400">
+            <a:solidFill>
+              <a:schemeClr val="bg1">
+                <a:lumMod val="75000"/>
+              </a:schemeClr>
+            </a:solidFill>
+          </a:ln>
+        </p:spPr>
+        <p:style>
+          <a:lnRef idx="2">
+            <a:schemeClr val="accent1">
+              <a:shade val="15000"/>
+            </a:schemeClr>
+          </a:lnRef>
+          <a:fillRef idx="1">
+            <a:schemeClr val="accent1"/>
+          </a:fillRef>
+          <a:effectRef idx="0">
+            <a:schemeClr val="accent1"/>
+          </a:effectRef>
+          <a:fontRef idx="minor">
+            <a:schemeClr val="lt1"/>
+          </a:fontRef>
+        </p:style>
+        <p:txBody>
+          <a:bodyPr wrap="none" lIns="0" tIns="0" rIns="0" bIns="0" rtlCol="0" anchor="ctr" anchorCtr="1"/>
+          <a:lstStyle/>
+          <a:p>
+            <a:pPr algn="ctr"/>
+            <a:r>
+              <a:rPr lang="en-US" altLang="zh-TW" sz="1000" dirty="0">
+                <a:solidFill>
+                  <a:schemeClr val="tx1"/>
+                </a:solidFill>
+                <a:latin typeface="ADLaM Display" panose="02010000000000000000" pitchFamily="2" charset="0"/>
+                <a:ea typeface="ADLaM Display" panose="02010000000000000000" pitchFamily="2" charset="0"/>
+                <a:cs typeface="ADLaM Display" panose="02010000000000000000" pitchFamily="2" charset="0"/>
+              </a:rPr>
+              <a:t>GDN2</a:t>
+            </a:r>
+          </a:p>
+          <a:p>
+            <a:pPr algn="ctr"/>
+            <a:r>
+              <a:rPr lang="en-US" altLang="zh-TW" sz="800" dirty="0">
+                <a:solidFill>
+                  <a:schemeClr val="tx1"/>
+                </a:solidFill>
+                <a:ea typeface="ADLaM Display" panose="02010000000000000000" pitchFamily="2" charset="0"/>
+                <a:cs typeface="ADLaM Display" panose="02010000000000000000" pitchFamily="2" charset="0"/>
+              </a:rPr>
+              <a:t>2026</a:t>
+            </a:r>
+          </a:p>
+        </p:txBody>
+      </p:sp>
+      <p:sp>
+        <p:nvSpPr>
+          <p:cNvPr id="53" name="橢圓 52">
+            <a:extLst>
+              <a:ext uri="{FF2B5EF4-FFF2-40B4-BE49-F238E27FC236}">
+                <a16:creationId xmlns:a16="http://schemas.microsoft.com/office/drawing/2014/main" id="{F9F4F47A-CDC7-0B38-E5A5-088D4B80FB49}"/>
+              </a:ext>
+            </a:extLst>
+          </p:cNvPr>
+          <p:cNvSpPr/>
+          <p:nvPr/>
+        </p:nvSpPr>
+        <p:spPr>
+          <a:xfrm>
+            <a:off x="5783258" y="3273700"/>
+            <a:ext cx="355890" cy="360656"/>
+          </a:xfrm>
+          <a:prstGeom prst="ellipse">
+            <a:avLst/>
+          </a:prstGeom>
+          <a:solidFill>
+            <a:schemeClr val="accent4">
+              <a:lumMod val="20000"/>
+              <a:lumOff val="80000"/>
+              <a:alpha val="70000"/>
+            </a:schemeClr>
+          </a:solidFill>
+          <a:ln w="31750">
+            <a:solidFill>
+              <a:schemeClr val="bg1">
+                <a:lumMod val="75000"/>
+              </a:schemeClr>
+            </a:solidFill>
+          </a:ln>
+        </p:spPr>
+        <p:style>
+          <a:lnRef idx="2">
+            <a:schemeClr val="accent1">
+              <a:shade val="15000"/>
+            </a:schemeClr>
+          </a:lnRef>
+          <a:fillRef idx="1">
+            <a:schemeClr val="accent1"/>
+          </a:fillRef>
+          <a:effectRef idx="0">
+            <a:schemeClr val="accent1"/>
+          </a:effectRef>
+          <a:fontRef idx="minor">
+            <a:schemeClr val="lt1"/>
+          </a:fontRef>
+        </p:style>
+        <p:txBody>
+          <a:bodyPr wrap="none" lIns="0" tIns="0" rIns="0" bIns="0" rtlCol="0" anchor="ctr" anchorCtr="1"/>
+          <a:lstStyle/>
+          <a:p>
+            <a:pPr algn="ctr"/>
+            <a:r>
+              <a:rPr lang="en-US" altLang="zh-TW" sz="1200" dirty="0">
+                <a:solidFill>
+                  <a:schemeClr val="tx1"/>
+                </a:solidFill>
+                <a:latin typeface="ADLaM Display" panose="02010000000000000000" pitchFamily="2" charset="0"/>
+                <a:ea typeface="ADLaM Display" panose="02010000000000000000" pitchFamily="2" charset="0"/>
+                <a:cs typeface="ADLaM Display" panose="02010000000000000000" pitchFamily="2" charset="0"/>
+              </a:rPr>
+              <a:t>GRU</a:t>
+            </a:r>
+          </a:p>
+          <a:p>
+            <a:pPr algn="ctr"/>
+            <a:r>
+              <a:rPr lang="en-US" altLang="zh-TW" sz="800" dirty="0">
+                <a:solidFill>
+                  <a:schemeClr val="tx1"/>
+                </a:solidFill>
+                <a:ea typeface="ADLaM Display" panose="02010000000000000000" pitchFamily="2" charset="0"/>
+                <a:cs typeface="ADLaM Display" panose="02010000000000000000" pitchFamily="2" charset="0"/>
+              </a:rPr>
+              <a:t>2014</a:t>
+            </a:r>
+          </a:p>
+        </p:txBody>
+      </p:sp>
+      <p:sp>
+        <p:nvSpPr>
+          <p:cNvPr id="56" name="橢圓 55">
+            <a:extLst>
+              <a:ext uri="{FF2B5EF4-FFF2-40B4-BE49-F238E27FC236}">
+                <a16:creationId xmlns:a16="http://schemas.microsoft.com/office/drawing/2014/main" id="{D2FEA80B-EB56-2F71-D6B0-DBD3709510D9}"/>
+              </a:ext>
+            </a:extLst>
+          </p:cNvPr>
+          <p:cNvSpPr/>
+          <p:nvPr/>
+        </p:nvSpPr>
+        <p:spPr>
+          <a:xfrm>
+            <a:off x="3973087" y="3714854"/>
+            <a:ext cx="598913" cy="655761"/>
+          </a:xfrm>
+          <a:prstGeom prst="ellipse">
+            <a:avLst/>
+          </a:prstGeom>
+          <a:solidFill>
+            <a:schemeClr val="accent4">
+              <a:lumMod val="20000"/>
+              <a:lumOff val="80000"/>
+              <a:alpha val="70000"/>
+            </a:schemeClr>
+          </a:solidFill>
+          <a:ln w="31750">
+            <a:solidFill>
+              <a:schemeClr val="bg1">
+                <a:lumMod val="75000"/>
+              </a:schemeClr>
+            </a:solidFill>
+          </a:ln>
+        </p:spPr>
+        <p:style>
+          <a:lnRef idx="2">
+            <a:schemeClr val="accent1">
+              <a:shade val="15000"/>
+            </a:schemeClr>
+          </a:lnRef>
+          <a:fillRef idx="1">
+            <a:schemeClr val="accent1"/>
+          </a:fillRef>
+          <a:effectRef idx="0">
+            <a:schemeClr val="accent1"/>
+          </a:effectRef>
+          <a:fontRef idx="minor">
+            <a:schemeClr val="lt1"/>
+          </a:fontRef>
+        </p:style>
+        <p:txBody>
+          <a:bodyPr wrap="none" lIns="0" tIns="36000" rIns="0" bIns="0" rtlCol="0" anchor="ctr" anchorCtr="1"/>
+          <a:lstStyle/>
+          <a:p>
+            <a:pPr algn="ctr">
+              <a:lnSpc>
+                <a:spcPts val="1000"/>
+              </a:lnSpc>
+            </a:pPr>
+            <a:r>
+              <a:rPr lang="en-US" altLang="zh-TW" sz="1000" dirty="0">
+                <a:solidFill>
+                  <a:schemeClr val="tx1"/>
+                </a:solidFill>
+                <a:latin typeface="ADLaM Display" panose="02010000000000000000" pitchFamily="2" charset="0"/>
+                <a:ea typeface="ADLaM Display" panose="02010000000000000000" pitchFamily="2" charset="0"/>
+                <a:cs typeface="ADLaM Display" panose="02010000000000000000" pitchFamily="2" charset="0"/>
+              </a:rPr>
+              <a:t>Mamba</a:t>
+            </a:r>
+          </a:p>
+          <a:p>
+            <a:pPr algn="ctr"/>
+            <a:r>
+              <a:rPr lang="en-US" altLang="zh-TW" sz="800" dirty="0">
+                <a:solidFill>
+                  <a:schemeClr val="tx1"/>
+                </a:solidFill>
+                <a:ea typeface="ADLaM Display" panose="02010000000000000000" pitchFamily="2" charset="0"/>
+                <a:cs typeface="ADLaM Display" panose="02010000000000000000" pitchFamily="2" charset="0"/>
+              </a:rPr>
+              <a:t>2017</a:t>
             </a:r>
           </a:p>
         </p:txBody>

--- a/ai-overview.pptx
+++ b/ai-overview.pptx
@@ -5,15 +5,16 @@
     <p:sldMasterId id="2147483648" r:id="rId1"/>
   </p:sldMasterIdLst>
   <p:notesMasterIdLst>
-    <p:notesMasterId r:id="rId5"/>
+    <p:notesMasterId r:id="rId6"/>
   </p:notesMasterIdLst>
   <p:handoutMasterIdLst>
-    <p:handoutMasterId r:id="rId6"/>
+    <p:handoutMasterId r:id="rId7"/>
   </p:handoutMasterIdLst>
   <p:sldIdLst>
     <p:sldId id="3557" r:id="rId2"/>
-    <p:sldId id="3508" r:id="rId3"/>
-    <p:sldId id="3550" r:id="rId4"/>
+    <p:sldId id="3558" r:id="rId3"/>
+    <p:sldId id="3508" r:id="rId4"/>
+    <p:sldId id="3550" r:id="rId5"/>
   </p:sldIdLst>
   <p:sldSz cx="9144000" cy="6858000" type="screen4x3"/>
   <p:notesSz cx="6797675" cy="9925050"/>
@@ -118,6 +119,7 @@
         <p14:section name="Models" id="{5A048767-0D58-44AF-B962-12C29493294F}">
           <p14:sldIdLst>
             <p14:sldId id="3557"/>
+            <p14:sldId id="3558"/>
             <p14:sldId id="3508"/>
           </p14:sldIdLst>
         </p14:section>
@@ -249,7 +251,7 @@
           <a:p>
             <a:fld id="{982F7CBC-87DD-4F69-8F50-7ED68F7FF790}" type="datetimeFigureOut">
               <a:rPr lang="zh-TW" altLang="en-US" smtClean="0"/>
-              <a:t>2026/10/12</a:t>
+              <a:t>2026/10/14</a:t>
             </a:fld>
             <a:endParaRPr lang="zh-TW" altLang="en-US"/>
           </a:p>
@@ -426,7 +428,7 @@
           <a:p>
             <a:fld id="{863167AA-796B-4B6A-95ED-1C0BCB3E5802}" type="datetimeFigureOut">
               <a:rPr lang="zh-TW" altLang="en-US" smtClean="0"/>
-              <a:t>2026/10/12</a:t>
+              <a:t>2026/10/14</a:t>
             </a:fld>
             <a:endParaRPr lang="zh-TW" altLang="en-US"/>
           </a:p>
@@ -1435,6 +1437,764 @@
         <p:cNvPr id="1" name="">
           <a:extLst>
             <a:ext uri="{FF2B5EF4-FFF2-40B4-BE49-F238E27FC236}">
+              <a16:creationId xmlns:a16="http://schemas.microsoft.com/office/drawing/2014/main" id="{B2A82386-8862-3D84-2954-F944F4A03FF0}"/>
+            </a:ext>
+          </a:extLst>
+        </p:cNvPr>
+        <p:cNvGrpSpPr/>
+        <p:nvPr/>
+      </p:nvGrpSpPr>
+      <p:grpSpPr>
+        <a:xfrm>
+          <a:off x="0" y="0"/>
+          <a:ext cx="0" cy="0"/>
+          <a:chOff x="0" y="0"/>
+          <a:chExt cx="0" cy="0"/>
+        </a:xfrm>
+      </p:grpSpPr>
+      <p:sp>
+        <p:nvSpPr>
+          <p:cNvPr id="2" name="投影片影像版面配置區 1">
+            <a:extLst>
+              <a:ext uri="{FF2B5EF4-FFF2-40B4-BE49-F238E27FC236}">
+                <a16:creationId xmlns:a16="http://schemas.microsoft.com/office/drawing/2014/main" id="{D405C2CD-BE5F-5B70-E908-0C9EDC011BC2}"/>
+              </a:ext>
+            </a:extLst>
+          </p:cNvPr>
+          <p:cNvSpPr>
+            <a:spLocks noGrp="1" noRot="1" noChangeAspect="1"/>
+          </p:cNvSpPr>
+          <p:nvPr>
+            <p:ph type="sldImg"/>
+          </p:nvPr>
+        </p:nvSpPr>
+        <p:spPr/>
+        <p:txBody>
+          <a:bodyPr/>
+          <a:lstStyle/>
+          <a:p>
+            <a:endParaRPr lang="zh-TW" altLang="en-US"/>
+          </a:p>
+        </p:txBody>
+      </p:sp>
+      <p:sp>
+        <p:nvSpPr>
+          <p:cNvPr id="3" name="備忘稿版面配置區 2">
+            <a:extLst>
+              <a:ext uri="{FF2B5EF4-FFF2-40B4-BE49-F238E27FC236}">
+                <a16:creationId xmlns:a16="http://schemas.microsoft.com/office/drawing/2014/main" id="{211BFC0D-60CE-CC7B-0CB5-6565247F04BE}"/>
+              </a:ext>
+            </a:extLst>
+          </p:cNvPr>
+          <p:cNvSpPr>
+            <a:spLocks noGrp="1"/>
+          </p:cNvSpPr>
+          <p:nvPr>
+            <p:ph type="body" idx="1"/>
+          </p:nvPr>
+        </p:nvSpPr>
+        <p:spPr/>
+        <p:txBody>
+          <a:bodyPr/>
+          <a:lstStyle/>
+          <a:p>
+            <a:r>
+              <a:rPr lang="en-US" altLang="zh-TW" sz="1200" b="1" u="none" strike="noStrike" kern="1200" dirty="0">
+                <a:solidFill>
+                  <a:schemeClr val="tx1"/>
+                </a:solidFill>
+                <a:effectLst/>
+                <a:latin typeface="+mn-lt"/>
+                <a:ea typeface="+mn-ea"/>
+                <a:cs typeface="+mn-cs"/>
+              </a:rPr>
+              <a:t>RD:</a:t>
+            </a:r>
+            <a:r>
+              <a:rPr lang="zh-TW" altLang="en-US" sz="1200" b="1" u="none" strike="noStrike" kern="1200" dirty="0">
+                <a:solidFill>
+                  <a:schemeClr val="tx1"/>
+                </a:solidFill>
+                <a:effectLst/>
+                <a:latin typeface="+mn-lt"/>
+                <a:ea typeface="+mn-ea"/>
+                <a:cs typeface="+mn-cs"/>
+              </a:rPr>
+              <a:t> </a:t>
+            </a:r>
+            <a:r>
+              <a:rPr lang="zh-TW" altLang="zh-TW" sz="1200" b="1" u="none" strike="noStrike" kern="1200" dirty="0">
+                <a:solidFill>
+                  <a:schemeClr val="tx1"/>
+                </a:solidFill>
+                <a:effectLst/>
+                <a:latin typeface="+mn-lt"/>
+                <a:ea typeface="+mn-ea"/>
+                <a:cs typeface="+mn-cs"/>
+              </a:rPr>
+              <a:t>Deduc</a:t>
+            </a:r>
+            <a:r>
+              <a:rPr lang="en-US" altLang="zh-TW" sz="1200" b="1" u="none" strike="noStrike" kern="1200" dirty="0">
+                <a:solidFill>
+                  <a:schemeClr val="tx1"/>
+                </a:solidFill>
+                <a:effectLst/>
+                <a:latin typeface="+mn-lt"/>
+                <a:ea typeface="+mn-ea"/>
+                <a:cs typeface="+mn-cs"/>
+              </a:rPr>
+              <a:t>e(</a:t>
+            </a:r>
+            <a:r>
+              <a:rPr lang="zh-TW" altLang="zh-TW" sz="1200" b="1" u="none" strike="noStrike" kern="1200" dirty="0">
+                <a:solidFill>
+                  <a:schemeClr val="tx1"/>
+                </a:solidFill>
+                <a:effectLst/>
+                <a:latin typeface="+mn-lt"/>
+                <a:ea typeface="+mn-ea"/>
+                <a:cs typeface="+mn-cs"/>
+              </a:rPr>
+              <a:t>演繹</a:t>
+            </a:r>
+            <a:r>
+              <a:rPr lang="en-US" altLang="zh-TW" sz="1200" b="1" u="none" strike="noStrike" kern="1200" dirty="0">
+                <a:solidFill>
+                  <a:schemeClr val="tx1"/>
+                </a:solidFill>
+                <a:effectLst/>
+                <a:latin typeface="+mn-lt"/>
+                <a:ea typeface="+mn-ea"/>
+                <a:cs typeface="+mn-cs"/>
+              </a:rPr>
+              <a:t>):</a:t>
+            </a:r>
+            <a:r>
+              <a:rPr lang="zh-TW" altLang="en-US" sz="1200" b="1" u="none" strike="noStrike" kern="1200" dirty="0">
+                <a:solidFill>
+                  <a:schemeClr val="tx1"/>
+                </a:solidFill>
+                <a:effectLst/>
+                <a:latin typeface="+mn-lt"/>
+                <a:ea typeface="+mn-ea"/>
+                <a:cs typeface="+mn-cs"/>
+              </a:rPr>
+              <a:t> 上而下 </a:t>
+            </a:r>
+            <a:r>
+              <a:rPr lang="en-US" altLang="zh-TW" sz="1200" b="1" u="none" strike="noStrike" kern="1200" dirty="0">
+                <a:solidFill>
+                  <a:schemeClr val="tx1"/>
+                </a:solidFill>
+                <a:effectLst/>
+                <a:latin typeface="+mn-lt"/>
+                <a:ea typeface="+mn-ea"/>
+                <a:cs typeface="+mn-cs"/>
+              </a:rPr>
+              <a:t>(</a:t>
+            </a:r>
+            <a:r>
+              <a:rPr lang="zh-TW" altLang="zh-TW" sz="1200" b="0" u="none" strike="noStrike" kern="1200" dirty="0">
+                <a:solidFill>
+                  <a:schemeClr val="tx1"/>
+                </a:solidFill>
+                <a:effectLst/>
+                <a:latin typeface="+mn-lt"/>
+                <a:ea typeface="+mn-ea"/>
+                <a:cs typeface="+mn-cs"/>
+              </a:rPr>
+              <a:t>原理</a:t>
+            </a:r>
+            <a:r>
+              <a:rPr lang="en-US" altLang="zh-TW" sz="1200" b="0" u="none" strike="noStrike" kern="1200" dirty="0">
+                <a:solidFill>
+                  <a:schemeClr val="tx1"/>
+                </a:solidFill>
+                <a:effectLst/>
+                <a:latin typeface="+mn-lt"/>
+                <a:ea typeface="+mn-ea"/>
+                <a:cs typeface="+mn-cs"/>
+              </a:rPr>
+              <a:t>/</a:t>
+            </a:r>
+            <a:r>
+              <a:rPr lang="zh-TW" altLang="en-US" sz="1200" b="0" u="none" strike="noStrike" kern="1200" dirty="0">
+                <a:solidFill>
+                  <a:schemeClr val="tx1"/>
+                </a:solidFill>
+                <a:effectLst/>
+                <a:latin typeface="+mn-lt"/>
+                <a:ea typeface="+mn-ea"/>
+                <a:cs typeface="+mn-cs"/>
+              </a:rPr>
+              <a:t>想法 </a:t>
+            </a:r>
+            <a:r>
+              <a:rPr lang="zh-TW" altLang="zh-TW" sz="1200" b="0" u="none" strike="noStrike" kern="1200" dirty="0">
+                <a:solidFill>
+                  <a:schemeClr val="tx1"/>
+                </a:solidFill>
+                <a:effectLst/>
+                <a:latin typeface="+mn-lt"/>
+                <a:ea typeface="+mn-ea"/>
+                <a:cs typeface="+mn-cs"/>
+              </a:rPr>
+              <a:t>→ 結論）</a:t>
+            </a:r>
+          </a:p>
+          <a:p>
+            <a:pPr marL="0" marR="0" lvl="0" indent="0" algn="l" defTabSz="914400" rtl="0" eaLnBrk="1" fontAlgn="auto" latinLnBrk="0" hangingPunct="1">
+              <a:lnSpc>
+                <a:spcPct val="100000"/>
+              </a:lnSpc>
+              <a:spcBef>
+                <a:spcPts val="0"/>
+              </a:spcBef>
+              <a:spcAft>
+                <a:spcPts val="0"/>
+              </a:spcAft>
+              <a:buClrTx/>
+              <a:buSzTx/>
+              <a:buFontTx/>
+              <a:buNone/>
+              <a:tabLst/>
+              <a:defRPr/>
+            </a:pPr>
+            <a:r>
+              <a:rPr lang="en-US" altLang="zh-TW" sz="1200" b="1" u="none" strike="noStrike" kern="1200" dirty="0">
+                <a:solidFill>
+                  <a:schemeClr val="tx1"/>
+                </a:solidFill>
+                <a:effectLst/>
+                <a:latin typeface="+mn-lt"/>
+                <a:ea typeface="+mn-ea"/>
+                <a:cs typeface="+mn-cs"/>
+              </a:rPr>
+              <a:t>AI:</a:t>
+            </a:r>
+            <a:r>
+              <a:rPr lang="zh-TW" altLang="en-US" sz="1200" b="1" u="none" strike="noStrike" kern="1200" dirty="0">
+                <a:solidFill>
+                  <a:schemeClr val="tx1"/>
+                </a:solidFill>
+                <a:effectLst/>
+                <a:latin typeface="+mn-lt"/>
+                <a:ea typeface="+mn-ea"/>
+                <a:cs typeface="+mn-cs"/>
+              </a:rPr>
+              <a:t> </a:t>
+            </a:r>
+            <a:r>
+              <a:rPr lang="zh-TW" altLang="zh-TW" sz="1200" b="1" u="none" strike="noStrike" kern="1200" dirty="0">
+                <a:solidFill>
+                  <a:schemeClr val="tx1"/>
+                </a:solidFill>
+                <a:effectLst/>
+                <a:latin typeface="+mn-lt"/>
+                <a:ea typeface="+mn-ea"/>
+                <a:cs typeface="+mn-cs"/>
+              </a:rPr>
+              <a:t>Induction</a:t>
+            </a:r>
+            <a:r>
+              <a:rPr lang="en-US" altLang="zh-TW" sz="1200" b="1" u="none" strike="noStrike" kern="1200" dirty="0">
+                <a:solidFill>
+                  <a:schemeClr val="tx1"/>
+                </a:solidFill>
+                <a:effectLst/>
+                <a:latin typeface="+mn-lt"/>
+                <a:ea typeface="+mn-ea"/>
+                <a:cs typeface="+mn-cs"/>
+              </a:rPr>
+              <a:t>(</a:t>
+            </a:r>
+            <a:r>
+              <a:rPr lang="zh-TW" altLang="zh-TW" sz="1200" b="1" u="none" strike="noStrike" kern="1200" dirty="0">
+                <a:solidFill>
+                  <a:schemeClr val="tx1"/>
+                </a:solidFill>
+                <a:effectLst/>
+                <a:latin typeface="+mn-lt"/>
+                <a:ea typeface="+mn-ea"/>
+                <a:cs typeface="+mn-cs"/>
+              </a:rPr>
+              <a:t>歸納</a:t>
+            </a:r>
+            <a:r>
+              <a:rPr lang="en-US" altLang="zh-TW" sz="1200" b="1" u="none" strike="noStrike" kern="1200" dirty="0">
+                <a:solidFill>
+                  <a:schemeClr val="tx1"/>
+                </a:solidFill>
+                <a:effectLst/>
+                <a:latin typeface="+mn-lt"/>
+                <a:ea typeface="+mn-ea"/>
+                <a:cs typeface="+mn-cs"/>
+              </a:rPr>
+              <a:t>):</a:t>
+            </a:r>
+            <a:r>
+              <a:rPr lang="zh-TW" altLang="en-US" sz="1200" b="1" u="none" strike="noStrike" kern="1200" dirty="0">
+                <a:solidFill>
+                  <a:schemeClr val="tx1"/>
+                </a:solidFill>
+                <a:effectLst/>
+                <a:latin typeface="+mn-lt"/>
+                <a:ea typeface="+mn-ea"/>
+                <a:cs typeface="+mn-cs"/>
+              </a:rPr>
+              <a:t> 下而上 </a:t>
+            </a:r>
+            <a:r>
+              <a:rPr lang="en-US" altLang="zh-TW" sz="1200" b="1" u="none" strike="noStrike" kern="1200" dirty="0">
+                <a:solidFill>
+                  <a:schemeClr val="tx1"/>
+                </a:solidFill>
+                <a:effectLst/>
+                <a:latin typeface="+mn-lt"/>
+                <a:ea typeface="+mn-ea"/>
+                <a:cs typeface="+mn-cs"/>
+              </a:rPr>
+              <a:t>(</a:t>
+            </a:r>
+            <a:r>
+              <a:rPr lang="zh-TW" altLang="en-US" sz="1200" b="0" u="none" strike="noStrike" kern="1200" dirty="0">
+                <a:solidFill>
+                  <a:schemeClr val="tx1"/>
+                </a:solidFill>
+                <a:effectLst/>
+                <a:latin typeface="+mn-lt"/>
+                <a:ea typeface="+mn-ea"/>
+                <a:cs typeface="+mn-cs"/>
+              </a:rPr>
+              <a:t>數據</a:t>
+            </a:r>
+            <a:r>
+              <a:rPr lang="en-US" altLang="zh-TW" sz="1200" b="0" u="none" strike="noStrike" kern="1200" dirty="0">
+                <a:solidFill>
+                  <a:schemeClr val="tx1"/>
+                </a:solidFill>
+                <a:effectLst/>
+                <a:latin typeface="+mn-lt"/>
+                <a:ea typeface="+mn-ea"/>
+                <a:cs typeface="+mn-cs"/>
+              </a:rPr>
+              <a:t>/</a:t>
+            </a:r>
+            <a:r>
+              <a:rPr lang="zh-TW" altLang="zh-TW" sz="1200" b="0" u="none" strike="noStrike" kern="1200" dirty="0">
+                <a:solidFill>
+                  <a:schemeClr val="tx1"/>
+                </a:solidFill>
+                <a:effectLst/>
+                <a:latin typeface="+mn-lt"/>
+                <a:ea typeface="+mn-ea"/>
+                <a:cs typeface="+mn-cs"/>
+              </a:rPr>
+              <a:t>觀察</a:t>
+            </a:r>
+            <a:r>
+              <a:rPr lang="zh-TW" altLang="en-US" sz="1200" b="0" u="none" strike="noStrike" kern="1200" dirty="0">
+                <a:solidFill>
+                  <a:schemeClr val="tx1"/>
+                </a:solidFill>
+                <a:effectLst/>
+                <a:latin typeface="+mn-lt"/>
+                <a:ea typeface="+mn-ea"/>
+                <a:cs typeface="+mn-cs"/>
+              </a:rPr>
+              <a:t> </a:t>
+            </a:r>
+            <a:r>
+              <a:rPr lang="zh-TW" altLang="zh-TW" sz="1200" b="0" u="none" strike="noStrike" kern="1200" dirty="0">
+                <a:solidFill>
+                  <a:schemeClr val="tx1"/>
+                </a:solidFill>
+                <a:effectLst/>
+                <a:latin typeface="+mn-lt"/>
+                <a:ea typeface="+mn-ea"/>
+                <a:cs typeface="+mn-cs"/>
+              </a:rPr>
+              <a:t>→ 結論</a:t>
+            </a:r>
+            <a:r>
+              <a:rPr lang="en-US" altLang="zh-TW" sz="1200" b="0" u="none" strike="noStrike" kern="1200" dirty="0">
+                <a:solidFill>
+                  <a:schemeClr val="tx1"/>
+                </a:solidFill>
+                <a:effectLst/>
+                <a:latin typeface="+mn-lt"/>
+                <a:ea typeface="+mn-ea"/>
+                <a:cs typeface="+mn-cs"/>
+              </a:rPr>
+              <a:t>)</a:t>
+            </a:r>
+            <a:br>
+              <a:rPr lang="en-US" altLang="zh-TW" sz="1200" b="0" u="none" strike="noStrike" kern="1200" dirty="0">
+                <a:solidFill>
+                  <a:schemeClr val="tx1"/>
+                </a:solidFill>
+                <a:effectLst/>
+                <a:latin typeface="+mn-lt"/>
+                <a:ea typeface="+mn-ea"/>
+                <a:cs typeface="+mn-cs"/>
+              </a:rPr>
+            </a:br>
+            <a:br>
+              <a:rPr lang="en-US" altLang="zh-TW" sz="1200" b="0" u="none" strike="noStrike" kern="1200" dirty="0">
+                <a:solidFill>
+                  <a:schemeClr val="tx1"/>
+                </a:solidFill>
+                <a:effectLst/>
+                <a:latin typeface="+mn-lt"/>
+                <a:ea typeface="+mn-ea"/>
+                <a:cs typeface="+mn-cs"/>
+              </a:rPr>
+            </a:br>
+            <a:r>
+              <a:rPr lang="zh-TW" altLang="en-US" sz="1200" b="0" u="none" strike="noStrike" kern="1200" dirty="0">
+                <a:solidFill>
+                  <a:schemeClr val="tx1"/>
+                </a:solidFill>
+                <a:effectLst/>
+                <a:latin typeface="+mn-lt"/>
+                <a:ea typeface="+mn-ea"/>
+                <a:cs typeface="+mn-cs"/>
+              </a:rPr>
+              <a:t>結論</a:t>
+            </a:r>
+            <a:r>
+              <a:rPr lang="en-US" altLang="zh-TW" sz="1200" b="0" u="none" strike="noStrike" kern="1200" dirty="0">
+                <a:solidFill>
+                  <a:schemeClr val="tx1"/>
+                </a:solidFill>
+                <a:effectLst/>
+                <a:latin typeface="+mn-lt"/>
+                <a:ea typeface="+mn-ea"/>
+                <a:cs typeface="+mn-cs"/>
+              </a:rPr>
+              <a:t>:</a:t>
+            </a:r>
+            <a:br>
+              <a:rPr lang="en-US" altLang="zh-TW" sz="1200" b="0" u="none" strike="noStrike" kern="1200" dirty="0">
+                <a:solidFill>
+                  <a:schemeClr val="tx1"/>
+                </a:solidFill>
+                <a:effectLst/>
+                <a:latin typeface="+mn-lt"/>
+                <a:ea typeface="+mn-ea"/>
+                <a:cs typeface="+mn-cs"/>
+              </a:rPr>
+            </a:br>
+            <a:r>
+              <a:rPr lang="en-US" altLang="zh-TW" sz="1200" b="0" u="none" strike="noStrike" kern="1200" dirty="0">
+                <a:solidFill>
+                  <a:schemeClr val="tx1"/>
+                </a:solidFill>
+                <a:effectLst/>
+                <a:latin typeface="+mn-lt"/>
+                <a:ea typeface="+mn-ea"/>
+                <a:cs typeface="+mn-cs"/>
+              </a:rPr>
+              <a:t>1.</a:t>
+            </a:r>
+            <a:r>
+              <a:rPr lang="zh-TW" altLang="en-US" sz="1200" b="0" u="none" strike="noStrike" kern="1200" dirty="0">
+                <a:solidFill>
+                  <a:schemeClr val="tx1"/>
+                </a:solidFill>
+                <a:effectLst/>
+                <a:latin typeface="+mn-lt"/>
+                <a:ea typeface="+mn-ea"/>
+                <a:cs typeface="+mn-cs"/>
+              </a:rPr>
+              <a:t> 科技發展終究要回到經濟面</a:t>
+            </a:r>
+            <a:r>
+              <a:rPr lang="en-US" altLang="zh-TW" sz="1200" b="0" u="none" strike="noStrike" kern="1200" dirty="0">
+                <a:solidFill>
+                  <a:schemeClr val="tx1"/>
+                </a:solidFill>
+                <a:effectLst/>
+                <a:latin typeface="+mn-lt"/>
+                <a:ea typeface="+mn-ea"/>
+                <a:cs typeface="+mn-cs"/>
+              </a:rPr>
+              <a:t>(</a:t>
+            </a:r>
+            <a:r>
+              <a:rPr lang="zh-TW" altLang="en-US" sz="1200" b="0" u="none" strike="noStrike" kern="1200" dirty="0">
+                <a:solidFill>
+                  <a:schemeClr val="tx1"/>
+                </a:solidFill>
+                <a:effectLst/>
+                <a:latin typeface="+mn-lt"/>
+                <a:ea typeface="+mn-ea"/>
+                <a:cs typeface="+mn-cs"/>
+              </a:rPr>
+              <a:t>可行性</a:t>
+            </a:r>
+            <a:r>
+              <a:rPr lang="en-US" altLang="zh-TW" sz="1200" b="0" u="none" strike="noStrike" kern="1200" dirty="0">
+                <a:solidFill>
+                  <a:schemeClr val="tx1"/>
+                </a:solidFill>
+                <a:effectLst/>
+                <a:latin typeface="+mn-lt"/>
+                <a:ea typeface="+mn-ea"/>
+                <a:cs typeface="+mn-cs"/>
+              </a:rPr>
+              <a:t>)</a:t>
+            </a:r>
+          </a:p>
+          <a:p>
+            <a:pPr marL="0" marR="0" lvl="0" indent="0" algn="l" defTabSz="914400" rtl="0" eaLnBrk="1" fontAlgn="auto" latinLnBrk="0" hangingPunct="1">
+              <a:lnSpc>
+                <a:spcPct val="100000"/>
+              </a:lnSpc>
+              <a:spcBef>
+                <a:spcPts val="0"/>
+              </a:spcBef>
+              <a:spcAft>
+                <a:spcPts val="0"/>
+              </a:spcAft>
+              <a:buClrTx/>
+              <a:buSzTx/>
+              <a:buFontTx/>
+              <a:buNone/>
+              <a:tabLst/>
+              <a:defRPr/>
+            </a:pPr>
+            <a:r>
+              <a:rPr lang="en-US" altLang="zh-TW" sz="1200" b="0" u="none" strike="noStrike" kern="1200" dirty="0">
+                <a:solidFill>
+                  <a:schemeClr val="tx1"/>
+                </a:solidFill>
+                <a:effectLst/>
+                <a:latin typeface="+mn-lt"/>
+                <a:ea typeface="+mn-ea"/>
+                <a:cs typeface="+mn-cs"/>
+              </a:rPr>
+              <a:t>2.</a:t>
+            </a:r>
+            <a:r>
+              <a:rPr lang="zh-TW" altLang="en-US" sz="1200" b="0" u="none" strike="noStrike" kern="1200" dirty="0">
+                <a:solidFill>
+                  <a:schemeClr val="tx1"/>
+                </a:solidFill>
+                <a:effectLst/>
+                <a:latin typeface="+mn-lt"/>
+                <a:ea typeface="+mn-ea"/>
+                <a:cs typeface="+mn-cs"/>
+              </a:rPr>
+              <a:t> 諾貝爾物理獎</a:t>
+            </a:r>
+            <a:r>
+              <a:rPr lang="en-US" altLang="zh-TW" sz="1200" b="0" u="none" strike="noStrike" kern="1200" dirty="0">
+                <a:solidFill>
+                  <a:schemeClr val="tx1"/>
+                </a:solidFill>
+                <a:effectLst/>
+                <a:latin typeface="+mn-lt"/>
+                <a:ea typeface="+mn-ea"/>
+                <a:cs typeface="+mn-cs"/>
+              </a:rPr>
+              <a:t>2024:</a:t>
+            </a:r>
+            <a:r>
+              <a:rPr lang="zh-TW" altLang="en-US" sz="1200" b="0" u="none" strike="noStrike" kern="1200" dirty="0">
+                <a:solidFill>
+                  <a:schemeClr val="tx1"/>
+                </a:solidFill>
+                <a:effectLst/>
+                <a:latin typeface="+mn-lt"/>
+                <a:ea typeface="+mn-ea"/>
+                <a:cs typeface="+mn-cs"/>
+              </a:rPr>
+              <a:t> 因為</a:t>
+            </a:r>
+            <a:r>
+              <a:rPr lang="en-US" altLang="zh-TW" sz="1200" b="0" u="none" strike="noStrike" kern="1200" dirty="0">
+                <a:solidFill>
+                  <a:schemeClr val="tx1"/>
+                </a:solidFill>
+                <a:effectLst/>
+                <a:latin typeface="+mn-lt"/>
+                <a:ea typeface="+mn-ea"/>
+                <a:cs typeface="+mn-cs"/>
+              </a:rPr>
+              <a:t>Hinton</a:t>
+            </a:r>
+            <a:r>
+              <a:rPr lang="zh-TW" altLang="en-US" sz="1200" b="0" u="none" strike="noStrike" kern="1200" dirty="0">
+                <a:solidFill>
+                  <a:schemeClr val="tx1"/>
+                </a:solidFill>
+                <a:effectLst/>
+                <a:latin typeface="+mn-lt"/>
+                <a:ea typeface="+mn-ea"/>
+                <a:cs typeface="+mn-cs"/>
+              </a:rPr>
+              <a:t>等人</a:t>
+            </a:r>
+            <a:r>
+              <a:rPr lang="en-US" altLang="zh-TW" sz="1200" b="0" u="none" strike="noStrike" kern="1200" dirty="0">
+                <a:solidFill>
+                  <a:schemeClr val="tx1"/>
+                </a:solidFill>
+                <a:effectLst/>
+                <a:latin typeface="+mn-lt"/>
+                <a:ea typeface="+mn-ea"/>
+                <a:cs typeface="+mn-cs"/>
+              </a:rPr>
+              <a:t>,</a:t>
+            </a:r>
+            <a:r>
+              <a:rPr lang="zh-TW" altLang="en-US" sz="1200" b="0" u="none" strike="noStrike" kern="1200" dirty="0">
+                <a:solidFill>
+                  <a:schemeClr val="tx1"/>
+                </a:solidFill>
+                <a:effectLst/>
+                <a:latin typeface="+mn-lt"/>
+                <a:ea typeface="+mn-ea"/>
+                <a:cs typeface="+mn-cs"/>
+              </a:rPr>
+              <a:t> 將物理界的技術</a:t>
+            </a:r>
+            <a:r>
+              <a:rPr lang="en-US" altLang="zh-TW" sz="1200" b="0" u="none" strike="noStrike" kern="1200" dirty="0">
+                <a:solidFill>
+                  <a:schemeClr val="tx1"/>
+                </a:solidFill>
+                <a:effectLst/>
+                <a:latin typeface="+mn-lt"/>
+                <a:ea typeface="+mn-ea"/>
+                <a:cs typeface="+mn-cs"/>
+              </a:rPr>
+              <a:t>”</a:t>
+            </a:r>
+            <a:r>
+              <a:rPr lang="zh-TW" altLang="en-US" sz="1200" b="0" u="none" strike="noStrike" kern="1200" dirty="0">
+                <a:solidFill>
+                  <a:schemeClr val="tx1"/>
+                </a:solidFill>
+                <a:effectLst/>
+                <a:latin typeface="+mn-lt"/>
+                <a:ea typeface="+mn-ea"/>
+                <a:cs typeface="+mn-cs"/>
+              </a:rPr>
+              <a:t>發揚光大</a:t>
+            </a:r>
+            <a:r>
+              <a:rPr lang="en-US" altLang="zh-TW" sz="1200" b="0" u="none" strike="noStrike" kern="1200" dirty="0">
+                <a:solidFill>
+                  <a:schemeClr val="tx1"/>
+                </a:solidFill>
+                <a:effectLst/>
+                <a:latin typeface="+mn-lt"/>
+                <a:ea typeface="+mn-ea"/>
+                <a:cs typeface="+mn-cs"/>
+              </a:rPr>
+              <a:t>”</a:t>
+            </a:r>
+            <a:r>
+              <a:rPr lang="zh-TW" altLang="en-US" sz="1200" b="0" u="none" strike="noStrike" kern="1200" dirty="0">
+                <a:solidFill>
+                  <a:schemeClr val="tx1"/>
+                </a:solidFill>
+                <a:effectLst/>
+                <a:latin typeface="+mn-lt"/>
+                <a:ea typeface="+mn-ea"/>
+                <a:cs typeface="+mn-cs"/>
+              </a:rPr>
+              <a:t>到</a:t>
+            </a:r>
+            <a:r>
+              <a:rPr lang="en-US" altLang="zh-TW" sz="1200" b="0" u="none" strike="noStrike" kern="1200" dirty="0">
+                <a:solidFill>
+                  <a:schemeClr val="tx1"/>
+                </a:solidFill>
+                <a:effectLst/>
+                <a:latin typeface="+mn-lt"/>
+                <a:ea typeface="+mn-ea"/>
+                <a:cs typeface="+mn-cs"/>
+              </a:rPr>
+              <a:t>AI</a:t>
+            </a:r>
+            <a:r>
+              <a:rPr lang="zh-TW" altLang="en-US" sz="1200" b="0" u="none" strike="noStrike" kern="1200" dirty="0">
+                <a:solidFill>
+                  <a:schemeClr val="tx1"/>
+                </a:solidFill>
+                <a:effectLst/>
+                <a:latin typeface="+mn-lt"/>
+                <a:ea typeface="+mn-ea"/>
+                <a:cs typeface="+mn-cs"/>
+              </a:rPr>
+              <a:t>界。</a:t>
+            </a:r>
+            <a:endParaRPr lang="en-US" altLang="zh-TW" sz="1200" b="0" u="none" strike="noStrike" kern="1200" dirty="0">
+              <a:solidFill>
+                <a:schemeClr val="tx1"/>
+              </a:solidFill>
+              <a:effectLst/>
+              <a:latin typeface="+mn-lt"/>
+              <a:ea typeface="+mn-ea"/>
+              <a:cs typeface="+mn-cs"/>
+            </a:endParaRPr>
+          </a:p>
+        </p:txBody>
+      </p:sp>
+      <p:sp>
+        <p:nvSpPr>
+          <p:cNvPr id="4" name="投影片編號版面配置區 3">
+            <a:extLst>
+              <a:ext uri="{FF2B5EF4-FFF2-40B4-BE49-F238E27FC236}">
+                <a16:creationId xmlns:a16="http://schemas.microsoft.com/office/drawing/2014/main" id="{82490BEF-42B9-9F5B-A764-5B49328F813C}"/>
+              </a:ext>
+            </a:extLst>
+          </p:cNvPr>
+          <p:cNvSpPr>
+            <a:spLocks noGrp="1"/>
+          </p:cNvSpPr>
+          <p:nvPr>
+            <p:ph type="sldNum" sz="quarter" idx="5"/>
+          </p:nvPr>
+        </p:nvSpPr>
+        <p:spPr/>
+        <p:txBody>
+          <a:bodyPr/>
+          <a:lstStyle/>
+          <a:p>
+            <a:fld id="{E3A6CE5E-F349-486D-8749-82EF2AD71FA8}" type="slidenum">
+              <a:rPr lang="zh-TW" altLang="en-US" smtClean="0"/>
+              <a:t>2</a:t>
+            </a:fld>
+            <a:endParaRPr lang="zh-TW" altLang="en-US"/>
+          </a:p>
+        </p:txBody>
+      </p:sp>
+    </p:spTree>
+    <p:extLst>
+      <p:ext uri="{BB962C8B-B14F-4D97-AF65-F5344CB8AC3E}">
+        <p14:creationId xmlns:p14="http://schemas.microsoft.com/office/powerpoint/2010/main" val="2034846201"/>
+      </p:ext>
+    </p:extLst>
+  </p:cSld>
+  <p:clrMapOvr>
+    <a:masterClrMapping/>
+  </p:clrMapOvr>
+</p:notes>
+</file>
+
+<file path=ppt/notesSlides/notesSlide3.xml><?xml version="1.0" encoding="utf-8"?>
+<p:notes xmlns:a="http://schemas.openxmlformats.org/drawingml/2006/main" xmlns:r="http://schemas.openxmlformats.org/officeDocument/2006/relationships" xmlns:p="http://schemas.openxmlformats.org/presentationml/2006/main">
+  <p:cSld>
+    <p:spTree>
+      <p:nvGrpSpPr>
+        <p:cNvPr id="1" name="">
+          <a:extLst>
+            <a:ext uri="{FF2B5EF4-FFF2-40B4-BE49-F238E27FC236}">
               <a16:creationId xmlns:a16="http://schemas.microsoft.com/office/drawing/2014/main" id="{20ACE063-A9C3-2560-BC55-ACC769FCB316}"/>
             </a:ext>
           </a:extLst>
@@ -1523,7 +2283,7 @@
           <a:p>
             <a:fld id="{E3A6CE5E-F349-486D-8749-82EF2AD71FA8}" type="slidenum">
               <a:rPr lang="zh-TW" altLang="en-US" smtClean="0"/>
-              <a:t>2</a:t>
+              <a:t>3</a:t>
             </a:fld>
             <a:endParaRPr lang="zh-TW" altLang="en-US"/>
           </a:p>
@@ -1542,7 +2302,7 @@
 </p:notes>
 </file>
 
-<file path=ppt/notesSlides/notesSlide3.xml><?xml version="1.0" encoding="utf-8"?>
+<file path=ppt/notesSlides/notesSlide4.xml><?xml version="1.0" encoding="utf-8"?>
 <p:notes xmlns:a="http://schemas.openxmlformats.org/drawingml/2006/main" xmlns:r="http://schemas.openxmlformats.org/officeDocument/2006/relationships" xmlns:p="http://schemas.openxmlformats.org/presentationml/2006/main">
   <p:cSld>
     <p:spTree>
@@ -2296,7 +3056,7 @@
           <a:p>
             <a:fld id="{E3A6CE5E-F349-486D-8749-82EF2AD71FA8}" type="slidenum">
               <a:rPr lang="zh-TW" altLang="en-US" smtClean="0"/>
-              <a:t>3</a:t>
+              <a:t>4</a:t>
             </a:fld>
             <a:endParaRPr lang="zh-TW" altLang="en-US"/>
           </a:p>
@@ -6314,7 +7074,7 @@
         </p:nvSpPr>
         <p:spPr>
           <a:xfrm>
-            <a:off x="6175790" y="6028990"/>
+            <a:off x="6175790" y="5589240"/>
             <a:ext cx="628458" cy="361919"/>
           </a:xfrm>
           <a:prstGeom prst="rect">
@@ -6909,7 +7669,7 @@
         </p:nvSpPr>
         <p:spPr>
           <a:xfrm>
-            <a:off x="7615951" y="6035247"/>
+            <a:off x="7615951" y="5595497"/>
             <a:ext cx="628457" cy="361918"/>
           </a:xfrm>
           <a:prstGeom prst="rect">
@@ -7030,258 +7790,6 @@
       </p:sp>
       <p:sp>
         <p:nvSpPr>
-          <p:cNvPr id="18" name="橢圓 17">
-            <a:extLst>
-              <a:ext uri="{FF2B5EF4-FFF2-40B4-BE49-F238E27FC236}">
-                <a16:creationId xmlns:a16="http://schemas.microsoft.com/office/drawing/2014/main" id="{4740E3ED-7716-EAD6-4846-308CD05C1798}"/>
-              </a:ext>
-            </a:extLst>
-          </p:cNvPr>
-          <p:cNvSpPr/>
-          <p:nvPr/>
-        </p:nvSpPr>
-        <p:spPr>
-          <a:xfrm>
-            <a:off x="7701219" y="5596942"/>
-            <a:ext cx="495818" cy="447885"/>
-          </a:xfrm>
-          <a:prstGeom prst="ellipse">
-            <a:avLst/>
-          </a:prstGeom>
-          <a:solidFill>
-            <a:schemeClr val="accent1">
-              <a:lumMod val="20000"/>
-              <a:lumOff val="80000"/>
-              <a:alpha val="70000"/>
-            </a:schemeClr>
-          </a:solidFill>
-          <a:ln w="31750">
-            <a:solidFill>
-              <a:schemeClr val="bg1">
-                <a:lumMod val="75000"/>
-              </a:schemeClr>
-            </a:solidFill>
-          </a:ln>
-        </p:spPr>
-        <p:style>
-          <a:lnRef idx="2">
-            <a:schemeClr val="accent1">
-              <a:shade val="15000"/>
-            </a:schemeClr>
-          </a:lnRef>
-          <a:fillRef idx="1">
-            <a:schemeClr val="accent1"/>
-          </a:fillRef>
-          <a:effectRef idx="0">
-            <a:schemeClr val="accent1"/>
-          </a:effectRef>
-          <a:fontRef idx="minor">
-            <a:schemeClr val="lt1"/>
-          </a:fontRef>
-        </p:style>
-        <p:txBody>
-          <a:bodyPr wrap="none" lIns="0" tIns="0" rIns="0" bIns="0" rtlCol="0" anchor="ctr" anchorCtr="1"/>
-          <a:lstStyle/>
-          <a:p>
-            <a:pPr algn="ctr"/>
-            <a:r>
-              <a:rPr lang="en-US" altLang="zh-TW" sz="1200" dirty="0">
-                <a:solidFill>
-                  <a:schemeClr val="tx1"/>
-                </a:solidFill>
-                <a:latin typeface="ADLaM Display" panose="02010000000000000000" pitchFamily="2" charset="0"/>
-                <a:ea typeface="ADLaM Display" panose="02010000000000000000" pitchFamily="2" charset="0"/>
-                <a:cs typeface="ADLaM Display" panose="02010000000000000000" pitchFamily="2" charset="0"/>
-              </a:rPr>
-              <a:t>Gemma</a:t>
-            </a:r>
-          </a:p>
-          <a:p>
-            <a:pPr algn="ctr"/>
-            <a:r>
-              <a:rPr lang="en-US" altLang="zh-TW" sz="1200" dirty="0">
-                <a:solidFill>
-                  <a:schemeClr val="tx1"/>
-                </a:solidFill>
-                <a:latin typeface="ADLaM Display" panose="02010000000000000000" pitchFamily="2" charset="0"/>
-                <a:ea typeface="ADLaM Display" panose="02010000000000000000" pitchFamily="2" charset="0"/>
-                <a:cs typeface="ADLaM Display" panose="02010000000000000000" pitchFamily="2" charset="0"/>
-              </a:rPr>
-              <a:t>4</a:t>
-            </a:r>
-          </a:p>
-        </p:txBody>
-      </p:sp>
-      <p:sp>
-        <p:nvSpPr>
-          <p:cNvPr id="23" name="橢圓 22">
-            <a:extLst>
-              <a:ext uri="{FF2B5EF4-FFF2-40B4-BE49-F238E27FC236}">
-                <a16:creationId xmlns:a16="http://schemas.microsoft.com/office/drawing/2014/main" id="{6E1686BF-BA47-45A6-230A-0A77C2804C64}"/>
-              </a:ext>
-            </a:extLst>
-          </p:cNvPr>
-          <p:cNvSpPr/>
-          <p:nvPr/>
-        </p:nvSpPr>
-        <p:spPr>
-          <a:xfrm>
-            <a:off x="6962190" y="5609923"/>
-            <a:ext cx="495818" cy="447885"/>
-          </a:xfrm>
-          <a:prstGeom prst="ellipse">
-            <a:avLst/>
-          </a:prstGeom>
-          <a:solidFill>
-            <a:schemeClr val="accent1">
-              <a:lumMod val="20000"/>
-              <a:lumOff val="80000"/>
-              <a:alpha val="70000"/>
-            </a:schemeClr>
-          </a:solidFill>
-          <a:ln w="31750">
-            <a:solidFill>
-              <a:schemeClr val="bg1">
-                <a:lumMod val="75000"/>
-              </a:schemeClr>
-            </a:solidFill>
-          </a:ln>
-        </p:spPr>
-        <p:style>
-          <a:lnRef idx="2">
-            <a:schemeClr val="accent1">
-              <a:shade val="15000"/>
-            </a:schemeClr>
-          </a:lnRef>
-          <a:fillRef idx="1">
-            <a:schemeClr val="accent1"/>
-          </a:fillRef>
-          <a:effectRef idx="0">
-            <a:schemeClr val="accent1"/>
-          </a:effectRef>
-          <a:fontRef idx="minor">
-            <a:schemeClr val="lt1"/>
-          </a:fontRef>
-        </p:style>
-        <p:txBody>
-          <a:bodyPr wrap="none" lIns="0" tIns="0" rIns="0" bIns="0" rtlCol="0" anchor="ctr" anchorCtr="1"/>
-          <a:lstStyle/>
-          <a:p>
-            <a:pPr algn="ctr"/>
-            <a:r>
-              <a:rPr lang="en-US" altLang="zh-TW" sz="1200" dirty="0">
-                <a:solidFill>
-                  <a:schemeClr val="tx1"/>
-                </a:solidFill>
-                <a:latin typeface="ADLaM Display" panose="02010000000000000000" pitchFamily="2" charset="0"/>
-                <a:ea typeface="ADLaM Display" panose="02010000000000000000" pitchFamily="2" charset="0"/>
-                <a:cs typeface="ADLaM Display" panose="02010000000000000000" pitchFamily="2" charset="0"/>
-              </a:rPr>
-              <a:t>DeepSeek</a:t>
-            </a:r>
-          </a:p>
-          <a:p>
-            <a:pPr algn="ctr"/>
-            <a:r>
-              <a:rPr lang="en-US" altLang="zh-TW" sz="1200" dirty="0">
-                <a:solidFill>
-                  <a:schemeClr val="tx1"/>
-                </a:solidFill>
-                <a:latin typeface="ADLaM Display" panose="02010000000000000000" pitchFamily="2" charset="0"/>
-                <a:ea typeface="ADLaM Display" panose="02010000000000000000" pitchFamily="2" charset="0"/>
-                <a:cs typeface="ADLaM Display" panose="02010000000000000000" pitchFamily="2" charset="0"/>
-              </a:rPr>
-              <a:t>4</a:t>
-            </a:r>
-          </a:p>
-        </p:txBody>
-      </p:sp>
-      <p:sp>
-        <p:nvSpPr>
-          <p:cNvPr id="26" name="橢圓 25">
-            <a:extLst>
-              <a:ext uri="{FF2B5EF4-FFF2-40B4-BE49-F238E27FC236}">
-                <a16:creationId xmlns:a16="http://schemas.microsoft.com/office/drawing/2014/main" id="{34720148-A5D6-90D3-A8D9-AD7D552A0552}"/>
-              </a:ext>
-            </a:extLst>
-          </p:cNvPr>
-          <p:cNvSpPr/>
-          <p:nvPr/>
-        </p:nvSpPr>
-        <p:spPr>
-          <a:xfrm>
-            <a:off x="6242110" y="5598625"/>
-            <a:ext cx="495818" cy="447885"/>
-          </a:xfrm>
-          <a:prstGeom prst="ellipse">
-            <a:avLst/>
-          </a:prstGeom>
-          <a:solidFill>
-            <a:schemeClr val="accent1">
-              <a:lumMod val="20000"/>
-              <a:lumOff val="80000"/>
-              <a:alpha val="70000"/>
-            </a:schemeClr>
-          </a:solidFill>
-          <a:ln w="31750">
-            <a:solidFill>
-              <a:schemeClr val="bg1">
-                <a:lumMod val="75000"/>
-              </a:schemeClr>
-            </a:solidFill>
-          </a:ln>
-        </p:spPr>
-        <p:style>
-          <a:lnRef idx="2">
-            <a:schemeClr val="accent1">
-              <a:shade val="15000"/>
-            </a:schemeClr>
-          </a:lnRef>
-          <a:fillRef idx="1">
-            <a:schemeClr val="accent1"/>
-          </a:fillRef>
-          <a:effectRef idx="0">
-            <a:schemeClr val="accent1"/>
-          </a:effectRef>
-          <a:fontRef idx="minor">
-            <a:schemeClr val="lt1"/>
-          </a:fontRef>
-        </p:style>
-        <p:txBody>
-          <a:bodyPr wrap="none" lIns="0" tIns="0" rIns="0" bIns="0" rtlCol="0" anchor="ctr" anchorCtr="1"/>
-          <a:lstStyle/>
-          <a:p>
-            <a:pPr algn="ctr"/>
-            <a:r>
-              <a:rPr lang="en-US" altLang="zh-TW" sz="1200" dirty="0">
-                <a:solidFill>
-                  <a:schemeClr val="tx1"/>
-                </a:solidFill>
-                <a:latin typeface="ADLaM Display" panose="02010000000000000000" pitchFamily="2" charset="0"/>
-                <a:ea typeface="ADLaM Display" panose="02010000000000000000" pitchFamily="2" charset="0"/>
-                <a:cs typeface="ADLaM Display" panose="02010000000000000000" pitchFamily="2" charset="0"/>
-              </a:rPr>
-              <a:t>Kimi</a:t>
-            </a:r>
-          </a:p>
-          <a:p>
-            <a:pPr algn="ctr"/>
-            <a:r>
-              <a:rPr lang="en-US" altLang="zh-TW" sz="1200" dirty="0">
-                <a:solidFill>
-                  <a:schemeClr val="tx1"/>
-                </a:solidFill>
-                <a:latin typeface="ADLaM Display" panose="02010000000000000000" pitchFamily="2" charset="0"/>
-                <a:ea typeface="ADLaM Display" panose="02010000000000000000" pitchFamily="2" charset="0"/>
-                <a:cs typeface="ADLaM Display" panose="02010000000000000000" pitchFamily="2" charset="0"/>
-              </a:rPr>
-              <a:t>k3</a:t>
-            </a:r>
-          </a:p>
-        </p:txBody>
-      </p:sp>
-      <p:sp>
-        <p:nvSpPr>
           <p:cNvPr id="52" name="矩形 51">
             <a:extLst>
               <a:ext uri="{FF2B5EF4-FFF2-40B4-BE49-F238E27FC236}">
@@ -7294,7 +7802,7 @@
         </p:nvSpPr>
         <p:spPr>
           <a:xfrm>
-            <a:off x="6895870" y="6028990"/>
+            <a:off x="6895870" y="5589240"/>
             <a:ext cx="628458" cy="361919"/>
           </a:xfrm>
           <a:prstGeom prst="rect">
@@ -8164,90 +8672,6 @@
       </p:cxnSp>
       <p:sp>
         <p:nvSpPr>
-          <p:cNvPr id="25" name="橢圓 24">
-            <a:extLst>
-              <a:ext uri="{FF2B5EF4-FFF2-40B4-BE49-F238E27FC236}">
-                <a16:creationId xmlns:a16="http://schemas.microsoft.com/office/drawing/2014/main" id="{A05E3267-8DA7-EDEA-1EE6-91F3DCA3D62E}"/>
-              </a:ext>
-            </a:extLst>
-          </p:cNvPr>
-          <p:cNvSpPr/>
-          <p:nvPr/>
-        </p:nvSpPr>
-        <p:spPr>
-          <a:xfrm>
-            <a:off x="5588350" y="5589240"/>
-            <a:ext cx="495818" cy="447885"/>
-          </a:xfrm>
-          <a:prstGeom prst="ellipse">
-            <a:avLst/>
-          </a:prstGeom>
-          <a:solidFill>
-            <a:schemeClr val="accent1">
-              <a:lumMod val="20000"/>
-              <a:lumOff val="80000"/>
-              <a:alpha val="70000"/>
-            </a:schemeClr>
-          </a:solidFill>
-          <a:ln w="31750">
-            <a:solidFill>
-              <a:schemeClr val="bg1">
-                <a:lumMod val="75000"/>
-              </a:schemeClr>
-            </a:solidFill>
-          </a:ln>
-        </p:spPr>
-        <p:style>
-          <a:lnRef idx="2">
-            <a:schemeClr val="accent1">
-              <a:shade val="15000"/>
-            </a:schemeClr>
-          </a:lnRef>
-          <a:fillRef idx="1">
-            <a:schemeClr val="accent1"/>
-          </a:fillRef>
-          <a:effectRef idx="0">
-            <a:schemeClr val="accent1"/>
-          </a:effectRef>
-          <a:fontRef idx="minor">
-            <a:schemeClr val="lt1"/>
-          </a:fontRef>
-        </p:style>
-        <p:txBody>
-          <a:bodyPr wrap="none" lIns="0" tIns="0" rIns="0" bIns="0" rtlCol="0" anchor="ctr" anchorCtr="1"/>
-          <a:lstStyle/>
-          <a:p>
-            <a:pPr algn="ctr"/>
-            <a:r>
-              <a:rPr lang="en-US" altLang="zh-TW" sz="1000" dirty="0">
-                <a:solidFill>
-                  <a:schemeClr val="tx1"/>
-                </a:solidFill>
-                <a:latin typeface="ADLaM Display" panose="02010000000000000000" pitchFamily="2" charset="0"/>
-                <a:ea typeface="ADLaM Display" panose="02010000000000000000" pitchFamily="2" charset="0"/>
-                <a:cs typeface="ADLaM Display" panose="02010000000000000000" pitchFamily="2" charset="0"/>
-              </a:rPr>
-              <a:t>Qwen</a:t>
-            </a:r>
-          </a:p>
-          <a:p>
-            <a:pPr algn="ctr"/>
-            <a:r>
-              <a:rPr lang="en-US" altLang="zh-TW" sz="1000" dirty="0">
-                <a:solidFill>
-                  <a:schemeClr val="tx1"/>
-                </a:solidFill>
-                <a:latin typeface="ADLaM Display" panose="02010000000000000000" pitchFamily="2" charset="0"/>
-                <a:ea typeface="ADLaM Display" panose="02010000000000000000" pitchFamily="2" charset="0"/>
-                <a:cs typeface="ADLaM Display" panose="02010000000000000000" pitchFamily="2" charset="0"/>
-              </a:rPr>
-              <a:t>3.5</a:t>
-            </a:r>
-          </a:p>
-        </p:txBody>
-      </p:sp>
-      <p:sp>
-        <p:nvSpPr>
           <p:cNvPr id="37" name="橢圓 36">
             <a:extLst>
               <a:ext uri="{FF2B5EF4-FFF2-40B4-BE49-F238E27FC236}">
@@ -8735,7 +9159,7 @@
         </p:nvSpPr>
         <p:spPr>
           <a:xfrm>
-            <a:off x="5783258" y="3273700"/>
+            <a:off x="5783258" y="3212976"/>
             <a:ext cx="355890" cy="360656"/>
           </a:xfrm>
           <a:prstGeom prst="ellipse">
@@ -8917,6 +9341,2705 @@
 </file>
 
 <file path=ppt/slides/slide2.xml><?xml version="1.0" encoding="utf-8"?>
+<p:sld xmlns:a="http://schemas.openxmlformats.org/drawingml/2006/main" xmlns:r="http://schemas.openxmlformats.org/officeDocument/2006/relationships" xmlns:p="http://schemas.openxmlformats.org/presentationml/2006/main" show="0">
+  <p:cSld>
+    <p:spTree>
+      <p:nvGrpSpPr>
+        <p:cNvPr id="1" name="">
+          <a:extLst>
+            <a:ext uri="{FF2B5EF4-FFF2-40B4-BE49-F238E27FC236}">
+              <a16:creationId xmlns:a16="http://schemas.microsoft.com/office/drawing/2014/main" id="{A7897C64-E497-212A-0DAA-218F6BE73CA9}"/>
+            </a:ext>
+          </a:extLst>
+        </p:cNvPr>
+        <p:cNvGrpSpPr/>
+        <p:nvPr/>
+      </p:nvGrpSpPr>
+      <p:grpSpPr>
+        <a:xfrm>
+          <a:off x="0" y="0"/>
+          <a:ext cx="0" cy="0"/>
+          <a:chOff x="0" y="0"/>
+          <a:chExt cx="0" cy="0"/>
+        </a:xfrm>
+      </p:grpSpPr>
+      <p:cxnSp>
+        <p:nvCxnSpPr>
+          <p:cNvPr id="99" name="直線接點 98">
+            <a:extLst>
+              <a:ext uri="{FF2B5EF4-FFF2-40B4-BE49-F238E27FC236}">
+                <a16:creationId xmlns:a16="http://schemas.microsoft.com/office/drawing/2014/main" id="{F16CE4D4-3B68-DCEC-4608-D09EC9628A7F}"/>
+              </a:ext>
+            </a:extLst>
+          </p:cNvPr>
+          <p:cNvCxnSpPr/>
+          <p:nvPr/>
+        </p:nvCxnSpPr>
+        <p:spPr>
+          <a:xfrm>
+            <a:off x="2843808" y="1412776"/>
+            <a:ext cx="3600400" cy="0"/>
+          </a:xfrm>
+          <a:prstGeom prst="line">
+            <a:avLst/>
+          </a:prstGeom>
+          <a:ln w="28575">
+            <a:solidFill>
+              <a:schemeClr val="accent4">
+                <a:lumMod val="20000"/>
+                <a:lumOff val="80000"/>
+              </a:schemeClr>
+            </a:solidFill>
+            <a:prstDash val="sysDash"/>
+          </a:ln>
+        </p:spPr>
+        <p:style>
+          <a:lnRef idx="1">
+            <a:schemeClr val="accent1"/>
+          </a:lnRef>
+          <a:fillRef idx="0">
+            <a:schemeClr val="accent1"/>
+          </a:fillRef>
+          <a:effectRef idx="0">
+            <a:schemeClr val="accent1"/>
+          </a:effectRef>
+          <a:fontRef idx="minor">
+            <a:schemeClr val="tx1"/>
+          </a:fontRef>
+        </p:style>
+      </p:cxnSp>
+      <p:sp>
+        <p:nvSpPr>
+          <p:cNvPr id="14" name="橢圓 13">
+            <a:extLst>
+              <a:ext uri="{FF2B5EF4-FFF2-40B4-BE49-F238E27FC236}">
+                <a16:creationId xmlns:a16="http://schemas.microsoft.com/office/drawing/2014/main" id="{15967FD7-DD09-5EF9-FE63-C02BD5FED6D0}"/>
+              </a:ext>
+            </a:extLst>
+          </p:cNvPr>
+          <p:cNvSpPr/>
+          <p:nvPr/>
+        </p:nvSpPr>
+        <p:spPr>
+          <a:xfrm>
+            <a:off x="4190375" y="980728"/>
+            <a:ext cx="598913" cy="612186"/>
+          </a:xfrm>
+          <a:prstGeom prst="ellipse">
+            <a:avLst/>
+          </a:prstGeom>
+          <a:solidFill>
+            <a:schemeClr val="accent4">
+              <a:lumMod val="20000"/>
+              <a:lumOff val="80000"/>
+              <a:alpha val="70000"/>
+            </a:schemeClr>
+          </a:solidFill>
+          <a:ln w="31750">
+            <a:solidFill>
+              <a:schemeClr val="bg1">
+                <a:lumMod val="75000"/>
+              </a:schemeClr>
+            </a:solidFill>
+          </a:ln>
+        </p:spPr>
+        <p:style>
+          <a:lnRef idx="2">
+            <a:schemeClr val="accent1">
+              <a:shade val="15000"/>
+            </a:schemeClr>
+          </a:lnRef>
+          <a:fillRef idx="1">
+            <a:schemeClr val="accent1"/>
+          </a:fillRef>
+          <a:effectRef idx="0">
+            <a:schemeClr val="accent1"/>
+          </a:effectRef>
+          <a:fontRef idx="minor">
+            <a:schemeClr val="lt1"/>
+          </a:fontRef>
+        </p:style>
+        <p:txBody>
+          <a:bodyPr wrap="none" lIns="0" tIns="36000" rIns="0" bIns="0" rtlCol="0" anchor="ctr" anchorCtr="1"/>
+          <a:lstStyle/>
+          <a:p>
+            <a:pPr algn="ctr">
+              <a:lnSpc>
+                <a:spcPts val="1000"/>
+              </a:lnSpc>
+            </a:pPr>
+            <a:r>
+              <a:rPr lang="en-US" altLang="zh-TW" sz="1200" dirty="0">
+                <a:solidFill>
+                  <a:schemeClr val="tx1"/>
+                </a:solidFill>
+                <a:latin typeface="ADLaM Display" panose="02010000000000000000" pitchFamily="2" charset="0"/>
+                <a:ea typeface="ADLaM Display" panose="02010000000000000000" pitchFamily="2" charset="0"/>
+                <a:cs typeface="ADLaM Display" panose="02010000000000000000" pitchFamily="2" charset="0"/>
+              </a:rPr>
+              <a:t>Transformer</a:t>
+            </a:r>
+          </a:p>
+          <a:p>
+            <a:pPr algn="ctr">
+              <a:lnSpc>
+                <a:spcPts val="1200"/>
+              </a:lnSpc>
+            </a:pPr>
+            <a:r>
+              <a:rPr lang="en-US" altLang="zh-TW" sz="1000" dirty="0">
+                <a:solidFill>
+                  <a:schemeClr val="tx1"/>
+                </a:solidFill>
+                <a:latin typeface="ADLaM Display" panose="02010000000000000000" pitchFamily="2" charset="0"/>
+                <a:ea typeface="ADLaM Display" panose="02010000000000000000" pitchFamily="2" charset="0"/>
+                <a:cs typeface="ADLaM Display" panose="02010000000000000000" pitchFamily="2" charset="0"/>
+              </a:rPr>
+              <a:t>Attention</a:t>
+            </a:r>
+          </a:p>
+          <a:p>
+            <a:pPr algn="ctr"/>
+            <a:r>
+              <a:rPr lang="en-US" altLang="zh-TW" sz="800" dirty="0">
+                <a:solidFill>
+                  <a:schemeClr val="tx1"/>
+                </a:solidFill>
+                <a:ea typeface="ADLaM Display" panose="02010000000000000000" pitchFamily="2" charset="0"/>
+                <a:cs typeface="ADLaM Display" panose="02010000000000000000" pitchFamily="2" charset="0"/>
+              </a:rPr>
+              <a:t>2017</a:t>
+            </a:r>
+          </a:p>
+        </p:txBody>
+      </p:sp>
+      <p:sp>
+        <p:nvSpPr>
+          <p:cNvPr id="16" name="橢圓 15">
+            <a:extLst>
+              <a:ext uri="{FF2B5EF4-FFF2-40B4-BE49-F238E27FC236}">
+                <a16:creationId xmlns:a16="http://schemas.microsoft.com/office/drawing/2014/main" id="{7AC0C46A-3789-FA52-1434-C240D3BC000F}"/>
+              </a:ext>
+            </a:extLst>
+          </p:cNvPr>
+          <p:cNvSpPr/>
+          <p:nvPr/>
+        </p:nvSpPr>
+        <p:spPr>
+          <a:xfrm>
+            <a:off x="4267679" y="1684971"/>
+            <a:ext cx="495818" cy="447885"/>
+          </a:xfrm>
+          <a:prstGeom prst="ellipse">
+            <a:avLst/>
+          </a:prstGeom>
+          <a:solidFill>
+            <a:schemeClr val="accent4">
+              <a:lumMod val="20000"/>
+              <a:lumOff val="80000"/>
+              <a:alpha val="70000"/>
+            </a:schemeClr>
+          </a:solidFill>
+          <a:ln w="31750">
+            <a:solidFill>
+              <a:schemeClr val="bg1">
+                <a:lumMod val="75000"/>
+              </a:schemeClr>
+            </a:solidFill>
+          </a:ln>
+        </p:spPr>
+        <p:style>
+          <a:lnRef idx="2">
+            <a:schemeClr val="accent1">
+              <a:shade val="15000"/>
+            </a:schemeClr>
+          </a:lnRef>
+          <a:fillRef idx="1">
+            <a:schemeClr val="accent1"/>
+          </a:fillRef>
+          <a:effectRef idx="0">
+            <a:schemeClr val="accent1"/>
+          </a:effectRef>
+          <a:fontRef idx="minor">
+            <a:schemeClr val="lt1"/>
+          </a:fontRef>
+        </p:style>
+        <p:txBody>
+          <a:bodyPr wrap="none" lIns="0" tIns="36000" rIns="0" bIns="0" rtlCol="0" anchor="ctr" anchorCtr="1"/>
+          <a:lstStyle/>
+          <a:p>
+            <a:pPr algn="ctr">
+              <a:lnSpc>
+                <a:spcPts val="1000"/>
+              </a:lnSpc>
+            </a:pPr>
+            <a:r>
+              <a:rPr lang="en-US" altLang="zh-TW" sz="1200" dirty="0">
+                <a:solidFill>
+                  <a:schemeClr val="tx1"/>
+                </a:solidFill>
+                <a:latin typeface="ADLaM Display" panose="02010000000000000000" pitchFamily="2" charset="0"/>
+                <a:ea typeface="ADLaM Display" panose="02010000000000000000" pitchFamily="2" charset="0"/>
+                <a:cs typeface="ADLaM Display" panose="02010000000000000000" pitchFamily="2" charset="0"/>
+              </a:rPr>
+              <a:t>GTP</a:t>
+            </a:r>
+          </a:p>
+          <a:p>
+            <a:pPr algn="ctr">
+              <a:lnSpc>
+                <a:spcPts val="1000"/>
+              </a:lnSpc>
+            </a:pPr>
+            <a:r>
+              <a:rPr lang="en-US" altLang="zh-TW" sz="800" dirty="0">
+                <a:solidFill>
+                  <a:schemeClr val="tx1"/>
+                </a:solidFill>
+                <a:ea typeface="ADLaM Display" panose="02010000000000000000" pitchFamily="2" charset="0"/>
+                <a:cs typeface="ADLaM Display" panose="02010000000000000000" pitchFamily="2" charset="0"/>
+              </a:rPr>
+              <a:t>2018</a:t>
+            </a:r>
+          </a:p>
+        </p:txBody>
+      </p:sp>
+      <p:cxnSp>
+        <p:nvCxnSpPr>
+          <p:cNvPr id="33" name="直線單箭頭接點 32">
+            <a:extLst>
+              <a:ext uri="{FF2B5EF4-FFF2-40B4-BE49-F238E27FC236}">
+                <a16:creationId xmlns:a16="http://schemas.microsoft.com/office/drawing/2014/main" id="{3F064F87-CCBE-3BFF-CBD8-5EE02B3EB53E}"/>
+              </a:ext>
+            </a:extLst>
+          </p:cNvPr>
+          <p:cNvCxnSpPr>
+            <a:cxnSpLocks/>
+            <a:stCxn id="34" idx="2"/>
+            <a:endCxn id="36" idx="0"/>
+          </p:cNvCxnSpPr>
+          <p:nvPr/>
+        </p:nvCxnSpPr>
+        <p:spPr>
+          <a:xfrm flipH="1">
+            <a:off x="7788756" y="3398381"/>
+            <a:ext cx="2" cy="318651"/>
+          </a:xfrm>
+          <a:prstGeom prst="straightConnector1">
+            <a:avLst/>
+          </a:prstGeom>
+          <a:ln w="22225">
+            <a:solidFill>
+              <a:schemeClr val="accent3">
+                <a:lumMod val="75000"/>
+              </a:schemeClr>
+            </a:solidFill>
+            <a:prstDash val="solid"/>
+            <a:tailEnd type="triangle"/>
+          </a:ln>
+        </p:spPr>
+        <p:style>
+          <a:lnRef idx="1">
+            <a:schemeClr val="accent1"/>
+          </a:lnRef>
+          <a:fillRef idx="0">
+            <a:schemeClr val="accent1"/>
+          </a:fillRef>
+          <a:effectRef idx="0">
+            <a:schemeClr val="accent1"/>
+          </a:effectRef>
+          <a:fontRef idx="minor">
+            <a:schemeClr val="tx1"/>
+          </a:fontRef>
+        </p:style>
+      </p:cxnSp>
+      <p:sp>
+        <p:nvSpPr>
+          <p:cNvPr id="36" name="矩形 35">
+            <a:extLst>
+              <a:ext uri="{FF2B5EF4-FFF2-40B4-BE49-F238E27FC236}">
+                <a16:creationId xmlns:a16="http://schemas.microsoft.com/office/drawing/2014/main" id="{2A781AF4-8E61-1106-C389-D0483CFF274D}"/>
+              </a:ext>
+            </a:extLst>
+          </p:cNvPr>
+          <p:cNvSpPr/>
+          <p:nvPr/>
+        </p:nvSpPr>
+        <p:spPr>
+          <a:xfrm>
+            <a:off x="7573363" y="3717032"/>
+            <a:ext cx="430785" cy="241576"/>
+          </a:xfrm>
+          <a:prstGeom prst="rect">
+            <a:avLst/>
+          </a:prstGeom>
+          <a:solidFill>
+            <a:schemeClr val="accent3">
+              <a:lumMod val="20000"/>
+              <a:lumOff val="80000"/>
+              <a:alpha val="90000"/>
+            </a:schemeClr>
+          </a:solidFill>
+          <a:ln w="3175">
+            <a:solidFill>
+              <a:schemeClr val="accent3">
+                <a:lumMod val="60000"/>
+                <a:lumOff val="40000"/>
+              </a:schemeClr>
+            </a:solidFill>
+          </a:ln>
+        </p:spPr>
+        <p:style>
+          <a:lnRef idx="2">
+            <a:schemeClr val="accent1">
+              <a:shade val="15000"/>
+            </a:schemeClr>
+          </a:lnRef>
+          <a:fillRef idx="1">
+            <a:schemeClr val="accent1"/>
+          </a:fillRef>
+          <a:effectRef idx="0">
+            <a:schemeClr val="accent1"/>
+          </a:effectRef>
+          <a:fontRef idx="minor">
+            <a:schemeClr val="lt1"/>
+          </a:fontRef>
+        </p:style>
+        <p:txBody>
+          <a:bodyPr wrap="none" lIns="0" tIns="0" rIns="0" bIns="0" rtlCol="0" anchor="ctr"/>
+          <a:lstStyle/>
+          <a:p>
+            <a:pPr marL="0" marR="0" lvl="0" indent="0" algn="ctr" defTabSz="914400" rtl="0" eaLnBrk="1" fontAlgn="auto" latinLnBrk="0" hangingPunct="1">
+              <a:lnSpc>
+                <a:spcPct val="100000"/>
+              </a:lnSpc>
+              <a:spcBef>
+                <a:spcPts val="0"/>
+              </a:spcBef>
+              <a:spcAft>
+                <a:spcPts val="0"/>
+              </a:spcAft>
+              <a:buClrTx/>
+              <a:buSzTx/>
+              <a:buFontTx/>
+              <a:buNone/>
+              <a:tabLst/>
+              <a:defRPr/>
+            </a:pPr>
+            <a:r>
+              <a:rPr kumimoji="0" lang="en-US" altLang="zh-TW" sz="1200" b="1" i="0" u="none" strike="noStrike" kern="1200" cap="none" spc="0" normalizeH="0" baseline="0" noProof="0" dirty="0">
+                <a:ln w="0"/>
+                <a:solidFill>
+                  <a:prstClr val="black"/>
+                </a:solidFill>
+                <a:effectLst/>
+                <a:uLnTx/>
+                <a:uFillTx/>
+                <a:latin typeface="Calibri"/>
+                <a:ea typeface="新細明體" panose="02020500000000000000" pitchFamily="18" charset="-120"/>
+                <a:cs typeface="+mn-cs"/>
+              </a:rPr>
+              <a:t>mHC</a:t>
+            </a:r>
+          </a:p>
+        </p:txBody>
+      </p:sp>
+      <p:sp>
+        <p:nvSpPr>
+          <p:cNvPr id="34" name="矩形 33">
+            <a:extLst>
+              <a:ext uri="{FF2B5EF4-FFF2-40B4-BE49-F238E27FC236}">
+                <a16:creationId xmlns:a16="http://schemas.microsoft.com/office/drawing/2014/main" id="{AAC6C902-D95B-24E2-7D43-1FA35FA2D842}"/>
+              </a:ext>
+            </a:extLst>
+          </p:cNvPr>
+          <p:cNvSpPr/>
+          <p:nvPr/>
+        </p:nvSpPr>
+        <p:spPr>
+          <a:xfrm>
+            <a:off x="7573366" y="3156805"/>
+            <a:ext cx="430784" cy="241576"/>
+          </a:xfrm>
+          <a:prstGeom prst="rect">
+            <a:avLst/>
+          </a:prstGeom>
+          <a:solidFill>
+            <a:schemeClr val="accent3">
+              <a:lumMod val="20000"/>
+              <a:lumOff val="80000"/>
+              <a:alpha val="90000"/>
+            </a:schemeClr>
+          </a:solidFill>
+          <a:ln w="3175">
+            <a:solidFill>
+              <a:schemeClr val="accent3">
+                <a:lumMod val="60000"/>
+                <a:lumOff val="40000"/>
+              </a:schemeClr>
+            </a:solidFill>
+          </a:ln>
+        </p:spPr>
+        <p:style>
+          <a:lnRef idx="2">
+            <a:schemeClr val="accent1">
+              <a:shade val="15000"/>
+            </a:schemeClr>
+          </a:lnRef>
+          <a:fillRef idx="1">
+            <a:schemeClr val="accent1"/>
+          </a:fillRef>
+          <a:effectRef idx="0">
+            <a:schemeClr val="accent1"/>
+          </a:effectRef>
+          <a:fontRef idx="minor">
+            <a:schemeClr val="lt1"/>
+          </a:fontRef>
+        </p:style>
+        <p:txBody>
+          <a:bodyPr wrap="none" lIns="0" tIns="0" rIns="0" bIns="0" rtlCol="0" anchor="ctr"/>
+          <a:lstStyle/>
+          <a:p>
+            <a:pPr marL="0" marR="0" lvl="0" indent="0" algn="ctr" defTabSz="914400" rtl="0" eaLnBrk="1" fontAlgn="auto" latinLnBrk="0" hangingPunct="1">
+              <a:lnSpc>
+                <a:spcPct val="100000"/>
+              </a:lnSpc>
+              <a:spcBef>
+                <a:spcPts val="0"/>
+              </a:spcBef>
+              <a:spcAft>
+                <a:spcPts val="0"/>
+              </a:spcAft>
+              <a:buClrTx/>
+              <a:buSzTx/>
+              <a:buFontTx/>
+              <a:buNone/>
+              <a:tabLst/>
+              <a:defRPr/>
+            </a:pPr>
+            <a:r>
+              <a:rPr lang="en-US" altLang="zh-TW" sz="1200" b="1" dirty="0">
+                <a:ln w="0"/>
+                <a:solidFill>
+                  <a:prstClr val="black"/>
+                </a:solidFill>
+                <a:latin typeface="Calibri"/>
+                <a:ea typeface="新細明體" panose="02020500000000000000" pitchFamily="18" charset="-120"/>
+              </a:rPr>
+              <a:t>HC</a:t>
+            </a:r>
+            <a:endParaRPr kumimoji="0" lang="en-US" altLang="zh-TW" sz="1200" b="1" i="0" u="none" strike="noStrike" kern="1200" cap="none" spc="0" normalizeH="0" baseline="0" noProof="0" dirty="0">
+              <a:ln w="0"/>
+              <a:solidFill>
+                <a:prstClr val="black"/>
+              </a:solidFill>
+              <a:effectLst/>
+              <a:uLnTx/>
+              <a:uFillTx/>
+              <a:latin typeface="Calibri"/>
+              <a:ea typeface="新細明體" panose="02020500000000000000" pitchFamily="18" charset="-120"/>
+              <a:cs typeface="+mn-cs"/>
+            </a:endParaRPr>
+          </a:p>
+        </p:txBody>
+      </p:sp>
+      <p:sp>
+        <p:nvSpPr>
+          <p:cNvPr id="8" name="標題 1">
+            <a:extLst>
+              <a:ext uri="{FF2B5EF4-FFF2-40B4-BE49-F238E27FC236}">
+                <a16:creationId xmlns:a16="http://schemas.microsoft.com/office/drawing/2014/main" id="{B302838B-3520-CB01-4E29-719098A7D96B}"/>
+              </a:ext>
+            </a:extLst>
+          </p:cNvPr>
+          <p:cNvSpPr txBox="1">
+            <a:spLocks/>
+          </p:cNvSpPr>
+          <p:nvPr/>
+        </p:nvSpPr>
+        <p:spPr>
+          <a:xfrm>
+            <a:off x="179512" y="116632"/>
+            <a:ext cx="7713554" cy="612186"/>
+          </a:xfrm>
+          <a:prstGeom prst="rect">
+            <a:avLst/>
+          </a:prstGeom>
+        </p:spPr>
+        <p:txBody>
+          <a:bodyPr/>
+          <a:lstStyle>
+            <a:lvl1pPr algn="l" defTabSz="914400" rtl="0" eaLnBrk="1" latinLnBrk="0" hangingPunct="1">
+              <a:spcBef>
+                <a:spcPct val="0"/>
+              </a:spcBef>
+              <a:buNone/>
+              <a:defRPr sz="2400" kern="1200">
+                <a:solidFill>
+                  <a:schemeClr val="tx1"/>
+                </a:solidFill>
+                <a:latin typeface="+mj-lt"/>
+                <a:ea typeface="+mj-ea"/>
+                <a:cs typeface="+mj-cs"/>
+              </a:defRPr>
+            </a:lvl1pPr>
+          </a:lstStyle>
+          <a:p>
+            <a:r>
+              <a:rPr lang="en-US" altLang="zh-TW" sz="2800" dirty="0">
+                <a:latin typeface="Noto Sans HK" panose="020B0200000000000000" pitchFamily="34" charset="-120"/>
+                <a:ea typeface="Noto Sans HK" panose="020B0200000000000000" pitchFamily="34" charset="-120"/>
+                <a:cs typeface="Aharoni" panose="020F0502020204030204" pitchFamily="2" charset="-79"/>
+              </a:rPr>
+              <a:t>AI Models</a:t>
+            </a:r>
+          </a:p>
+          <a:p>
+            <a:r>
+              <a:rPr lang="en-US" altLang="zh-TW" sz="1400" dirty="0">
+                <a:latin typeface="Noto Sans HK" panose="020B0200000000000000" pitchFamily="34" charset="-120"/>
+                <a:ea typeface="Noto Sans HK" panose="020B0200000000000000" pitchFamily="34" charset="-120"/>
+                <a:cs typeface="Aharoni" panose="020F0502020204030204" pitchFamily="2" charset="-79"/>
+                <a:sym typeface="Wingdings" panose="05000000000000000000" pitchFamily="2" charset="2"/>
+              </a:rPr>
+              <a:t>From rules to reasoning.</a:t>
+            </a:r>
+          </a:p>
+          <a:p>
+            <a:pPr marL="285750" indent="-285750">
+              <a:buFontTx/>
+              <a:buChar char="-"/>
+            </a:pPr>
+            <a:endParaRPr lang="en-US" altLang="zh-TW" sz="1400" dirty="0">
+              <a:latin typeface="Noto Sans HK" panose="020B0200000000000000" pitchFamily="34" charset="-120"/>
+              <a:ea typeface="Noto Sans HK" panose="020B0200000000000000" pitchFamily="34" charset="-120"/>
+              <a:cs typeface="Arial" panose="020B0604020202020204" pitchFamily="34" charset="0"/>
+            </a:endParaRPr>
+          </a:p>
+        </p:txBody>
+      </p:sp>
+      <p:sp>
+        <p:nvSpPr>
+          <p:cNvPr id="72" name="文字方塊 71">
+            <a:extLst>
+              <a:ext uri="{FF2B5EF4-FFF2-40B4-BE49-F238E27FC236}">
+                <a16:creationId xmlns:a16="http://schemas.microsoft.com/office/drawing/2014/main" id="{6AF52C16-2168-4130-50A1-C3D3D63B4197}"/>
+              </a:ext>
+            </a:extLst>
+          </p:cNvPr>
+          <p:cNvSpPr txBox="1"/>
+          <p:nvPr/>
+        </p:nvSpPr>
+        <p:spPr>
+          <a:xfrm>
+            <a:off x="192112" y="5517232"/>
+            <a:ext cx="6252096" cy="1092607"/>
+          </a:xfrm>
+          <a:prstGeom prst="rect">
+            <a:avLst/>
+          </a:prstGeom>
+          <a:solidFill>
+            <a:schemeClr val="bg1">
+              <a:alpha val="90000"/>
+            </a:schemeClr>
+          </a:solidFill>
+        </p:spPr>
+        <p:txBody>
+          <a:bodyPr wrap="none">
+            <a:spAutoFit/>
+          </a:bodyPr>
+          <a:lstStyle/>
+          <a:p>
+            <a:pPr>
+              <a:lnSpc>
+                <a:spcPts val="1800"/>
+              </a:lnSpc>
+              <a:spcBef>
+                <a:spcPts val="600"/>
+              </a:spcBef>
+              <a:spcAft>
+                <a:spcPts val="600"/>
+              </a:spcAft>
+              <a:buNone/>
+            </a:pPr>
+            <a:r>
+              <a:rPr lang="en-US" altLang="zh-TW" sz="2000" b="1" u="none" strike="noStrike" dirty="0">
+                <a:effectLst/>
+              </a:rPr>
+              <a:t>Conclusion</a:t>
+            </a:r>
+          </a:p>
+          <a:p>
+            <a:pPr marL="285750" indent="-285750">
+              <a:lnSpc>
+                <a:spcPts val="1800"/>
+              </a:lnSpc>
+              <a:spcBef>
+                <a:spcPts val="600"/>
+              </a:spcBef>
+              <a:spcAft>
+                <a:spcPts val="600"/>
+              </a:spcAft>
+              <a:buFont typeface="Wingdings" panose="05000000000000000000" pitchFamily="2" charset="2"/>
+              <a:buChar char="Ø"/>
+            </a:pPr>
+            <a:r>
+              <a:rPr lang="en-US" altLang="zh-TW" sz="1600" b="1" dirty="0"/>
+              <a:t>Model Converge:</a:t>
+            </a:r>
+            <a:r>
+              <a:rPr lang="en-US" altLang="zh-TW" sz="1600" dirty="0"/>
+              <a:t> Parameters, cost, power.</a:t>
+            </a:r>
+          </a:p>
+          <a:p>
+            <a:pPr marL="285750" indent="-285750">
+              <a:lnSpc>
+                <a:spcPts val="1800"/>
+              </a:lnSpc>
+              <a:spcBef>
+                <a:spcPts val="600"/>
+              </a:spcBef>
+              <a:spcAft>
+                <a:spcPts val="600"/>
+              </a:spcAft>
+              <a:buFont typeface="Wingdings" panose="05000000000000000000" pitchFamily="2" charset="2"/>
+              <a:buChar char="Ø"/>
+            </a:pPr>
+            <a:r>
+              <a:rPr lang="en-US" altLang="zh-TW" sz="1600" b="1" dirty="0"/>
+              <a:t>Nobel Physics 2024:</a:t>
+            </a:r>
+            <a:r>
+              <a:rPr lang="en-US" altLang="zh-TW" sz="1600" dirty="0"/>
+              <a:t> MLP= BM(physics) + Backpropagation(Hinton).</a:t>
+            </a:r>
+          </a:p>
+        </p:txBody>
+      </p:sp>
+      <p:sp>
+        <p:nvSpPr>
+          <p:cNvPr id="24" name="橢圓 23">
+            <a:extLst>
+              <a:ext uri="{FF2B5EF4-FFF2-40B4-BE49-F238E27FC236}">
+                <a16:creationId xmlns:a16="http://schemas.microsoft.com/office/drawing/2014/main" id="{4BDB1BF6-24B0-CB6A-0B45-5907FF877D9F}"/>
+              </a:ext>
+            </a:extLst>
+          </p:cNvPr>
+          <p:cNvSpPr/>
+          <p:nvPr/>
+        </p:nvSpPr>
+        <p:spPr>
+          <a:xfrm>
+            <a:off x="4267679" y="2276872"/>
+            <a:ext cx="495818" cy="447885"/>
+          </a:xfrm>
+          <a:prstGeom prst="ellipse">
+            <a:avLst/>
+          </a:prstGeom>
+          <a:solidFill>
+            <a:schemeClr val="accent4">
+              <a:lumMod val="20000"/>
+              <a:lumOff val="80000"/>
+              <a:alpha val="70000"/>
+            </a:schemeClr>
+          </a:solidFill>
+          <a:ln w="31750">
+            <a:solidFill>
+              <a:schemeClr val="bg1">
+                <a:lumMod val="75000"/>
+              </a:schemeClr>
+            </a:solidFill>
+          </a:ln>
+        </p:spPr>
+        <p:style>
+          <a:lnRef idx="2">
+            <a:schemeClr val="accent1">
+              <a:shade val="15000"/>
+            </a:schemeClr>
+          </a:lnRef>
+          <a:fillRef idx="1">
+            <a:schemeClr val="accent1"/>
+          </a:fillRef>
+          <a:effectRef idx="0">
+            <a:schemeClr val="accent1"/>
+          </a:effectRef>
+          <a:fontRef idx="minor">
+            <a:schemeClr val="lt1"/>
+          </a:fontRef>
+        </p:style>
+        <p:txBody>
+          <a:bodyPr wrap="none" lIns="0" tIns="36000" rIns="0" bIns="0" rtlCol="0" anchor="ctr" anchorCtr="1"/>
+          <a:lstStyle/>
+          <a:p>
+            <a:pPr algn="ctr">
+              <a:lnSpc>
+                <a:spcPts val="1000"/>
+              </a:lnSpc>
+            </a:pPr>
+            <a:r>
+              <a:rPr lang="en-US" altLang="zh-TW" sz="1200" dirty="0">
+                <a:solidFill>
+                  <a:schemeClr val="tx1"/>
+                </a:solidFill>
+                <a:latin typeface="ADLaM Display" panose="02010000000000000000" pitchFamily="2" charset="0"/>
+                <a:ea typeface="ADLaM Display" panose="02010000000000000000" pitchFamily="2" charset="0"/>
+                <a:cs typeface="ADLaM Display" panose="02010000000000000000" pitchFamily="2" charset="0"/>
+              </a:rPr>
+              <a:t>GPT</a:t>
+            </a:r>
+          </a:p>
+          <a:p>
+            <a:pPr algn="ctr">
+              <a:lnSpc>
+                <a:spcPts val="1000"/>
+              </a:lnSpc>
+            </a:pPr>
+            <a:r>
+              <a:rPr lang="en-US" altLang="zh-TW" sz="1000" dirty="0">
+                <a:solidFill>
+                  <a:schemeClr val="tx1"/>
+                </a:solidFill>
+                <a:latin typeface="ADLaM Display" panose="02010000000000000000" pitchFamily="2" charset="0"/>
+                <a:ea typeface="ADLaM Display" panose="02010000000000000000" pitchFamily="2" charset="0"/>
+                <a:cs typeface="ADLaM Display" panose="02010000000000000000" pitchFamily="2" charset="0"/>
+              </a:rPr>
+              <a:t>Attn + MoE</a:t>
+            </a:r>
+          </a:p>
+        </p:txBody>
+      </p:sp>
+      <p:sp>
+        <p:nvSpPr>
+          <p:cNvPr id="18" name="橢圓 17">
+            <a:extLst>
+              <a:ext uri="{FF2B5EF4-FFF2-40B4-BE49-F238E27FC236}">
+                <a16:creationId xmlns:a16="http://schemas.microsoft.com/office/drawing/2014/main" id="{0D9E50EB-7031-DD4C-B0D6-576897B391B0}"/>
+              </a:ext>
+            </a:extLst>
+          </p:cNvPr>
+          <p:cNvSpPr/>
+          <p:nvPr/>
+        </p:nvSpPr>
+        <p:spPr>
+          <a:xfrm>
+            <a:off x="5169345" y="4781313"/>
+            <a:ext cx="495818" cy="447885"/>
+          </a:xfrm>
+          <a:prstGeom prst="ellipse">
+            <a:avLst/>
+          </a:prstGeom>
+          <a:solidFill>
+            <a:schemeClr val="accent1">
+              <a:lumMod val="20000"/>
+              <a:lumOff val="80000"/>
+              <a:alpha val="70000"/>
+            </a:schemeClr>
+          </a:solidFill>
+          <a:ln w="31750">
+            <a:solidFill>
+              <a:schemeClr val="bg1">
+                <a:lumMod val="75000"/>
+              </a:schemeClr>
+            </a:solidFill>
+          </a:ln>
+        </p:spPr>
+        <p:style>
+          <a:lnRef idx="2">
+            <a:schemeClr val="accent1">
+              <a:shade val="15000"/>
+            </a:schemeClr>
+          </a:lnRef>
+          <a:fillRef idx="1">
+            <a:schemeClr val="accent1"/>
+          </a:fillRef>
+          <a:effectRef idx="0">
+            <a:schemeClr val="accent1"/>
+          </a:effectRef>
+          <a:fontRef idx="minor">
+            <a:schemeClr val="lt1"/>
+          </a:fontRef>
+        </p:style>
+        <p:txBody>
+          <a:bodyPr wrap="none" lIns="0" tIns="0" rIns="0" bIns="0" rtlCol="0" anchor="ctr" anchorCtr="1"/>
+          <a:lstStyle/>
+          <a:p>
+            <a:pPr algn="ctr"/>
+            <a:r>
+              <a:rPr lang="en-US" altLang="zh-TW" sz="1000" dirty="0">
+                <a:solidFill>
+                  <a:schemeClr val="tx1"/>
+                </a:solidFill>
+                <a:latin typeface="ADLaM Display" panose="02010000000000000000" pitchFamily="2" charset="0"/>
+                <a:ea typeface="ADLaM Display" panose="02010000000000000000" pitchFamily="2" charset="0"/>
+                <a:cs typeface="ADLaM Display" panose="02010000000000000000" pitchFamily="2" charset="0"/>
+              </a:rPr>
+              <a:t>Gemma</a:t>
+            </a:r>
+          </a:p>
+          <a:p>
+            <a:pPr algn="ctr"/>
+            <a:r>
+              <a:rPr lang="en-US" altLang="zh-TW" sz="1000" dirty="0">
+                <a:solidFill>
+                  <a:schemeClr val="tx1"/>
+                </a:solidFill>
+                <a:latin typeface="ADLaM Display" panose="02010000000000000000" pitchFamily="2" charset="0"/>
+                <a:ea typeface="ADLaM Display" panose="02010000000000000000" pitchFamily="2" charset="0"/>
+                <a:cs typeface="ADLaM Display" panose="02010000000000000000" pitchFamily="2" charset="0"/>
+              </a:rPr>
+              <a:t>4</a:t>
+            </a:r>
+          </a:p>
+        </p:txBody>
+      </p:sp>
+      <p:sp>
+        <p:nvSpPr>
+          <p:cNvPr id="23" name="橢圓 22">
+            <a:extLst>
+              <a:ext uri="{FF2B5EF4-FFF2-40B4-BE49-F238E27FC236}">
+                <a16:creationId xmlns:a16="http://schemas.microsoft.com/office/drawing/2014/main" id="{991CDBA6-9E41-3841-E585-55EA172911FE}"/>
+              </a:ext>
+            </a:extLst>
+          </p:cNvPr>
+          <p:cNvSpPr/>
+          <p:nvPr/>
+        </p:nvSpPr>
+        <p:spPr>
+          <a:xfrm>
+            <a:off x="3644134" y="4781314"/>
+            <a:ext cx="495818" cy="447885"/>
+          </a:xfrm>
+          <a:prstGeom prst="ellipse">
+            <a:avLst/>
+          </a:prstGeom>
+          <a:solidFill>
+            <a:schemeClr val="accent1">
+              <a:lumMod val="20000"/>
+              <a:lumOff val="80000"/>
+              <a:alpha val="70000"/>
+            </a:schemeClr>
+          </a:solidFill>
+          <a:ln w="31750">
+            <a:solidFill>
+              <a:schemeClr val="bg1">
+                <a:lumMod val="75000"/>
+              </a:schemeClr>
+            </a:solidFill>
+          </a:ln>
+        </p:spPr>
+        <p:style>
+          <a:lnRef idx="2">
+            <a:schemeClr val="accent1">
+              <a:shade val="15000"/>
+            </a:schemeClr>
+          </a:lnRef>
+          <a:fillRef idx="1">
+            <a:schemeClr val="accent1"/>
+          </a:fillRef>
+          <a:effectRef idx="0">
+            <a:schemeClr val="accent1"/>
+          </a:effectRef>
+          <a:fontRef idx="minor">
+            <a:schemeClr val="lt1"/>
+          </a:fontRef>
+        </p:style>
+        <p:txBody>
+          <a:bodyPr wrap="none" lIns="0" tIns="0" rIns="0" bIns="0" rtlCol="0" anchor="ctr" anchorCtr="1"/>
+          <a:lstStyle/>
+          <a:p>
+            <a:pPr algn="ctr"/>
+            <a:r>
+              <a:rPr lang="en-US" altLang="zh-TW" sz="1000" dirty="0">
+                <a:solidFill>
+                  <a:schemeClr val="tx1"/>
+                </a:solidFill>
+                <a:latin typeface="ADLaM Display" panose="02010000000000000000" pitchFamily="2" charset="0"/>
+                <a:ea typeface="ADLaM Display" panose="02010000000000000000" pitchFamily="2" charset="0"/>
+                <a:cs typeface="ADLaM Display" panose="02010000000000000000" pitchFamily="2" charset="0"/>
+              </a:rPr>
+              <a:t>DeepSeek</a:t>
+            </a:r>
+          </a:p>
+          <a:p>
+            <a:pPr algn="ctr"/>
+            <a:r>
+              <a:rPr lang="en-US" altLang="zh-TW" sz="1000" dirty="0">
+                <a:solidFill>
+                  <a:schemeClr val="tx1"/>
+                </a:solidFill>
+                <a:latin typeface="ADLaM Display" panose="02010000000000000000" pitchFamily="2" charset="0"/>
+                <a:ea typeface="ADLaM Display" panose="02010000000000000000" pitchFamily="2" charset="0"/>
+                <a:cs typeface="ADLaM Display" panose="02010000000000000000" pitchFamily="2" charset="0"/>
+              </a:rPr>
+              <a:t>V4</a:t>
+            </a:r>
+          </a:p>
+        </p:txBody>
+      </p:sp>
+      <p:sp>
+        <p:nvSpPr>
+          <p:cNvPr id="26" name="橢圓 25">
+            <a:extLst>
+              <a:ext uri="{FF2B5EF4-FFF2-40B4-BE49-F238E27FC236}">
+                <a16:creationId xmlns:a16="http://schemas.microsoft.com/office/drawing/2014/main" id="{7AC47DAB-57D8-78F8-57CA-6F50B371B065}"/>
+              </a:ext>
+            </a:extLst>
+          </p:cNvPr>
+          <p:cNvSpPr/>
+          <p:nvPr/>
+        </p:nvSpPr>
+        <p:spPr>
+          <a:xfrm>
+            <a:off x="2267744" y="4781313"/>
+            <a:ext cx="495818" cy="447885"/>
+          </a:xfrm>
+          <a:prstGeom prst="ellipse">
+            <a:avLst/>
+          </a:prstGeom>
+          <a:solidFill>
+            <a:schemeClr val="accent1">
+              <a:lumMod val="20000"/>
+              <a:lumOff val="80000"/>
+              <a:alpha val="70000"/>
+            </a:schemeClr>
+          </a:solidFill>
+          <a:ln w="31750">
+            <a:solidFill>
+              <a:schemeClr val="bg1">
+                <a:lumMod val="75000"/>
+              </a:schemeClr>
+            </a:solidFill>
+          </a:ln>
+        </p:spPr>
+        <p:style>
+          <a:lnRef idx="2">
+            <a:schemeClr val="accent1">
+              <a:shade val="15000"/>
+            </a:schemeClr>
+          </a:lnRef>
+          <a:fillRef idx="1">
+            <a:schemeClr val="accent1"/>
+          </a:fillRef>
+          <a:effectRef idx="0">
+            <a:schemeClr val="accent1"/>
+          </a:effectRef>
+          <a:fontRef idx="minor">
+            <a:schemeClr val="lt1"/>
+          </a:fontRef>
+        </p:style>
+        <p:txBody>
+          <a:bodyPr wrap="none" lIns="0" tIns="0" rIns="0" bIns="0" rtlCol="0" anchor="ctr" anchorCtr="1"/>
+          <a:lstStyle/>
+          <a:p>
+            <a:pPr algn="ctr"/>
+            <a:r>
+              <a:rPr lang="en-US" altLang="zh-TW" sz="1000" dirty="0">
+                <a:solidFill>
+                  <a:schemeClr val="tx1"/>
+                </a:solidFill>
+                <a:latin typeface="ADLaM Display" panose="02010000000000000000" pitchFamily="2" charset="0"/>
+                <a:ea typeface="ADLaM Display" panose="02010000000000000000" pitchFamily="2" charset="0"/>
+                <a:cs typeface="ADLaM Display" panose="02010000000000000000" pitchFamily="2" charset="0"/>
+              </a:rPr>
+              <a:t>Kimi</a:t>
+            </a:r>
+          </a:p>
+          <a:p>
+            <a:pPr algn="ctr"/>
+            <a:r>
+              <a:rPr lang="en-US" altLang="zh-TW" sz="1000" dirty="0">
+                <a:solidFill>
+                  <a:schemeClr val="tx1"/>
+                </a:solidFill>
+                <a:latin typeface="ADLaM Display" panose="02010000000000000000" pitchFamily="2" charset="0"/>
+                <a:ea typeface="ADLaM Display" panose="02010000000000000000" pitchFamily="2" charset="0"/>
+                <a:cs typeface="ADLaM Display" panose="02010000000000000000" pitchFamily="2" charset="0"/>
+              </a:rPr>
+              <a:t>k3</a:t>
+            </a:r>
+          </a:p>
+        </p:txBody>
+      </p:sp>
+      <p:sp>
+        <p:nvSpPr>
+          <p:cNvPr id="57" name="矩形 56">
+            <a:extLst>
+              <a:ext uri="{FF2B5EF4-FFF2-40B4-BE49-F238E27FC236}">
+                <a16:creationId xmlns:a16="http://schemas.microsoft.com/office/drawing/2014/main" id="{8DEAD8F7-92A3-8B2C-F0B0-25BE7676FF37}"/>
+              </a:ext>
+            </a:extLst>
+          </p:cNvPr>
+          <p:cNvSpPr/>
+          <p:nvPr/>
+        </p:nvSpPr>
+        <p:spPr>
+          <a:xfrm>
+            <a:off x="7111210" y="3822908"/>
+            <a:ext cx="346781" cy="442907"/>
+          </a:xfrm>
+          <a:prstGeom prst="rect">
+            <a:avLst/>
+          </a:prstGeom>
+          <a:solidFill>
+            <a:schemeClr val="accent3">
+              <a:lumMod val="20000"/>
+              <a:lumOff val="80000"/>
+              <a:alpha val="90000"/>
+            </a:schemeClr>
+          </a:solidFill>
+          <a:ln w="3175">
+            <a:solidFill>
+              <a:schemeClr val="accent3">
+                <a:lumMod val="60000"/>
+                <a:lumOff val="40000"/>
+              </a:schemeClr>
+            </a:solidFill>
+          </a:ln>
+        </p:spPr>
+        <p:style>
+          <a:lnRef idx="2">
+            <a:schemeClr val="accent1">
+              <a:shade val="15000"/>
+            </a:schemeClr>
+          </a:lnRef>
+          <a:fillRef idx="1">
+            <a:schemeClr val="accent1"/>
+          </a:fillRef>
+          <a:effectRef idx="0">
+            <a:schemeClr val="accent1"/>
+          </a:effectRef>
+          <a:fontRef idx="minor">
+            <a:schemeClr val="lt1"/>
+          </a:fontRef>
+        </p:style>
+        <p:txBody>
+          <a:bodyPr wrap="none" lIns="0" tIns="0" rIns="0" bIns="0" rtlCol="0" anchor="ctr"/>
+          <a:lstStyle/>
+          <a:p>
+            <a:pPr marL="0" marR="0" lvl="0" indent="0" algn="ctr" defTabSz="914400" rtl="0" eaLnBrk="1" fontAlgn="auto" latinLnBrk="0" hangingPunct="1">
+              <a:lnSpc>
+                <a:spcPct val="100000"/>
+              </a:lnSpc>
+              <a:spcBef>
+                <a:spcPts val="0"/>
+              </a:spcBef>
+              <a:spcAft>
+                <a:spcPts val="0"/>
+              </a:spcAft>
+              <a:buClrTx/>
+              <a:buSzTx/>
+              <a:buFontTx/>
+              <a:buNone/>
+              <a:tabLst/>
+              <a:defRPr/>
+            </a:pPr>
+            <a:r>
+              <a:rPr kumimoji="0" lang="en-US" altLang="zh-TW" sz="1200" b="1" i="0" u="none" strike="noStrike" kern="1200" cap="none" spc="0" normalizeH="0" baseline="0" noProof="0" dirty="0">
+                <a:ln w="0"/>
+                <a:solidFill>
+                  <a:prstClr val="black"/>
+                </a:solidFill>
+                <a:effectLst/>
+                <a:uLnTx/>
+                <a:uFillTx/>
+                <a:latin typeface="Calibri"/>
+                <a:ea typeface="新細明體" panose="02020500000000000000" pitchFamily="18" charset="-120"/>
+                <a:cs typeface="+mn-cs"/>
+              </a:rPr>
+              <a:t>MTP</a:t>
+            </a:r>
+          </a:p>
+          <a:p>
+            <a:pPr marL="0" marR="0" lvl="0" indent="0" algn="ctr" defTabSz="914400" rtl="0" eaLnBrk="1" fontAlgn="auto" latinLnBrk="0" hangingPunct="1">
+              <a:lnSpc>
+                <a:spcPct val="100000"/>
+              </a:lnSpc>
+              <a:spcBef>
+                <a:spcPts val="0"/>
+              </a:spcBef>
+              <a:spcAft>
+                <a:spcPts val="0"/>
+              </a:spcAft>
+              <a:buClrTx/>
+              <a:buSzTx/>
+              <a:buFontTx/>
+              <a:buNone/>
+              <a:tabLst/>
+              <a:defRPr/>
+            </a:pPr>
+            <a:r>
+              <a:rPr kumimoji="0" lang="en-US" altLang="zh-TW" sz="800" i="0" u="none" strike="noStrike" kern="1200" cap="none" spc="0" normalizeH="0" baseline="0" noProof="0" dirty="0">
+                <a:ln w="0"/>
+                <a:solidFill>
+                  <a:prstClr val="black"/>
+                </a:solidFill>
+                <a:effectLst/>
+                <a:uLnTx/>
+                <a:uFillTx/>
+                <a:latin typeface="Calibri"/>
+                <a:ea typeface="新細明體" panose="02020500000000000000" pitchFamily="18" charset="-120"/>
+                <a:cs typeface="+mn-cs"/>
+              </a:rPr>
+              <a:t>2024</a:t>
+            </a:r>
+          </a:p>
+        </p:txBody>
+      </p:sp>
+      <p:sp>
+        <p:nvSpPr>
+          <p:cNvPr id="25" name="橢圓 24">
+            <a:extLst>
+              <a:ext uri="{FF2B5EF4-FFF2-40B4-BE49-F238E27FC236}">
+                <a16:creationId xmlns:a16="http://schemas.microsoft.com/office/drawing/2014/main" id="{9DC722B1-7EF2-5910-6ACF-AA91B85DEB41}"/>
+              </a:ext>
+            </a:extLst>
+          </p:cNvPr>
+          <p:cNvSpPr/>
+          <p:nvPr/>
+        </p:nvSpPr>
+        <p:spPr>
+          <a:xfrm>
+            <a:off x="2924054" y="4781315"/>
+            <a:ext cx="495818" cy="447885"/>
+          </a:xfrm>
+          <a:prstGeom prst="ellipse">
+            <a:avLst/>
+          </a:prstGeom>
+          <a:solidFill>
+            <a:schemeClr val="accent1">
+              <a:lumMod val="20000"/>
+              <a:lumOff val="80000"/>
+              <a:alpha val="70000"/>
+            </a:schemeClr>
+          </a:solidFill>
+          <a:ln w="31750">
+            <a:solidFill>
+              <a:schemeClr val="bg1">
+                <a:lumMod val="75000"/>
+              </a:schemeClr>
+            </a:solidFill>
+          </a:ln>
+        </p:spPr>
+        <p:style>
+          <a:lnRef idx="2">
+            <a:schemeClr val="accent1">
+              <a:shade val="15000"/>
+            </a:schemeClr>
+          </a:lnRef>
+          <a:fillRef idx="1">
+            <a:schemeClr val="accent1"/>
+          </a:fillRef>
+          <a:effectRef idx="0">
+            <a:schemeClr val="accent1"/>
+          </a:effectRef>
+          <a:fontRef idx="minor">
+            <a:schemeClr val="lt1"/>
+          </a:fontRef>
+        </p:style>
+        <p:txBody>
+          <a:bodyPr wrap="none" lIns="0" tIns="0" rIns="0" bIns="0" rtlCol="0" anchor="ctr" anchorCtr="1"/>
+          <a:lstStyle/>
+          <a:p>
+            <a:pPr algn="ctr"/>
+            <a:r>
+              <a:rPr lang="en-US" altLang="zh-TW" sz="1000" dirty="0">
+                <a:solidFill>
+                  <a:schemeClr val="tx1"/>
+                </a:solidFill>
+                <a:latin typeface="ADLaM Display" panose="02010000000000000000" pitchFamily="2" charset="0"/>
+                <a:ea typeface="ADLaM Display" panose="02010000000000000000" pitchFamily="2" charset="0"/>
+                <a:cs typeface="ADLaM Display" panose="02010000000000000000" pitchFamily="2" charset="0"/>
+              </a:rPr>
+              <a:t>Qwen</a:t>
+            </a:r>
+          </a:p>
+          <a:p>
+            <a:pPr algn="ctr"/>
+            <a:r>
+              <a:rPr lang="en-US" altLang="zh-TW" sz="1000" dirty="0">
+                <a:solidFill>
+                  <a:schemeClr val="tx1"/>
+                </a:solidFill>
+                <a:latin typeface="ADLaM Display" panose="02010000000000000000" pitchFamily="2" charset="0"/>
+                <a:ea typeface="ADLaM Display" panose="02010000000000000000" pitchFamily="2" charset="0"/>
+                <a:cs typeface="ADLaM Display" panose="02010000000000000000" pitchFamily="2" charset="0"/>
+              </a:rPr>
+              <a:t>3.8</a:t>
+            </a:r>
+          </a:p>
+        </p:txBody>
+      </p:sp>
+      <p:sp>
+        <p:nvSpPr>
+          <p:cNvPr id="46" name="橢圓 45">
+            <a:extLst>
+              <a:ext uri="{FF2B5EF4-FFF2-40B4-BE49-F238E27FC236}">
+                <a16:creationId xmlns:a16="http://schemas.microsoft.com/office/drawing/2014/main" id="{140EB4E5-AB38-DCDD-4601-092026526603}"/>
+              </a:ext>
+            </a:extLst>
+          </p:cNvPr>
+          <p:cNvSpPr/>
+          <p:nvPr/>
+        </p:nvSpPr>
+        <p:spPr>
+          <a:xfrm>
+            <a:off x="3245951" y="2132856"/>
+            <a:ext cx="389945" cy="330225"/>
+          </a:xfrm>
+          <a:prstGeom prst="ellipse">
+            <a:avLst/>
+          </a:prstGeom>
+          <a:solidFill>
+            <a:schemeClr val="accent4">
+              <a:lumMod val="20000"/>
+              <a:lumOff val="80000"/>
+              <a:alpha val="70000"/>
+            </a:schemeClr>
+          </a:solidFill>
+          <a:ln w="25400">
+            <a:solidFill>
+              <a:schemeClr val="bg1">
+                <a:lumMod val="75000"/>
+              </a:schemeClr>
+            </a:solidFill>
+          </a:ln>
+        </p:spPr>
+        <p:style>
+          <a:lnRef idx="2">
+            <a:schemeClr val="accent1">
+              <a:shade val="15000"/>
+            </a:schemeClr>
+          </a:lnRef>
+          <a:fillRef idx="1">
+            <a:schemeClr val="accent1"/>
+          </a:fillRef>
+          <a:effectRef idx="0">
+            <a:schemeClr val="accent1"/>
+          </a:effectRef>
+          <a:fontRef idx="minor">
+            <a:schemeClr val="lt1"/>
+          </a:fontRef>
+        </p:style>
+        <p:txBody>
+          <a:bodyPr wrap="none" lIns="0" tIns="0" rIns="0" bIns="0" rtlCol="0" anchor="ctr" anchorCtr="1"/>
+          <a:lstStyle/>
+          <a:p>
+            <a:pPr algn="ctr">
+              <a:lnSpc>
+                <a:spcPts val="1200"/>
+              </a:lnSpc>
+            </a:pPr>
+            <a:r>
+              <a:rPr lang="en-US" altLang="zh-TW" sz="1000" dirty="0">
+                <a:solidFill>
+                  <a:schemeClr val="tx1"/>
+                </a:solidFill>
+                <a:latin typeface="ADLaM Display" panose="02010000000000000000" pitchFamily="2" charset="0"/>
+                <a:ea typeface="ADLaM Display" panose="02010000000000000000" pitchFamily="2" charset="0"/>
+                <a:cs typeface="ADLaM Display" panose="02010000000000000000" pitchFamily="2" charset="0"/>
+              </a:rPr>
+              <a:t>Vanilla</a:t>
+            </a:r>
+          </a:p>
+          <a:p>
+            <a:pPr algn="ctr">
+              <a:lnSpc>
+                <a:spcPts val="1200"/>
+              </a:lnSpc>
+            </a:pPr>
+            <a:r>
+              <a:rPr lang="en-US" altLang="zh-TW" sz="1000" dirty="0">
+                <a:solidFill>
+                  <a:schemeClr val="tx1"/>
+                </a:solidFill>
+                <a:latin typeface="ADLaM Display" panose="02010000000000000000" pitchFamily="2" charset="0"/>
+                <a:ea typeface="ADLaM Display" panose="02010000000000000000" pitchFamily="2" charset="0"/>
+                <a:cs typeface="ADLaM Display" panose="02010000000000000000" pitchFamily="2" charset="0"/>
+              </a:rPr>
+              <a:t>Linear </a:t>
+            </a:r>
+          </a:p>
+          <a:p>
+            <a:pPr algn="ctr">
+              <a:lnSpc>
+                <a:spcPts val="1200"/>
+              </a:lnSpc>
+            </a:pPr>
+            <a:r>
+              <a:rPr lang="en-US" altLang="zh-TW" sz="1000" dirty="0">
+                <a:solidFill>
+                  <a:schemeClr val="tx1"/>
+                </a:solidFill>
+                <a:latin typeface="ADLaM Display" panose="02010000000000000000" pitchFamily="2" charset="0"/>
+                <a:ea typeface="ADLaM Display" panose="02010000000000000000" pitchFamily="2" charset="0"/>
+                <a:cs typeface="ADLaM Display" panose="02010000000000000000" pitchFamily="2" charset="0"/>
+              </a:rPr>
+              <a:t>Attention</a:t>
+            </a:r>
+          </a:p>
+          <a:p>
+            <a:pPr algn="ctr"/>
+            <a:r>
+              <a:rPr lang="en-US" altLang="zh-TW" sz="800" dirty="0">
+                <a:solidFill>
+                  <a:schemeClr val="tx1"/>
+                </a:solidFill>
+                <a:ea typeface="ADLaM Display" panose="02010000000000000000" pitchFamily="2" charset="0"/>
+                <a:cs typeface="ADLaM Display" panose="02010000000000000000" pitchFamily="2" charset="0"/>
+              </a:rPr>
+              <a:t>2020</a:t>
+            </a:r>
+          </a:p>
+        </p:txBody>
+      </p:sp>
+      <p:sp>
+        <p:nvSpPr>
+          <p:cNvPr id="51" name="橢圓 50">
+            <a:extLst>
+              <a:ext uri="{FF2B5EF4-FFF2-40B4-BE49-F238E27FC236}">
+                <a16:creationId xmlns:a16="http://schemas.microsoft.com/office/drawing/2014/main" id="{A24D9A64-7951-F444-90E3-B3DBF5C2B7C2}"/>
+              </a:ext>
+            </a:extLst>
+          </p:cNvPr>
+          <p:cNvSpPr/>
+          <p:nvPr/>
+        </p:nvSpPr>
+        <p:spPr>
+          <a:xfrm>
+            <a:off x="3245951" y="3429000"/>
+            <a:ext cx="389945" cy="330225"/>
+          </a:xfrm>
+          <a:prstGeom prst="ellipse">
+            <a:avLst/>
+          </a:prstGeom>
+          <a:solidFill>
+            <a:schemeClr val="accent4">
+              <a:lumMod val="20000"/>
+              <a:lumOff val="80000"/>
+              <a:alpha val="70000"/>
+            </a:schemeClr>
+          </a:solidFill>
+          <a:ln w="25400">
+            <a:solidFill>
+              <a:schemeClr val="bg1">
+                <a:lumMod val="75000"/>
+              </a:schemeClr>
+            </a:solidFill>
+          </a:ln>
+        </p:spPr>
+        <p:style>
+          <a:lnRef idx="2">
+            <a:schemeClr val="accent1">
+              <a:shade val="15000"/>
+            </a:schemeClr>
+          </a:lnRef>
+          <a:fillRef idx="1">
+            <a:schemeClr val="accent1"/>
+          </a:fillRef>
+          <a:effectRef idx="0">
+            <a:schemeClr val="accent1"/>
+          </a:effectRef>
+          <a:fontRef idx="minor">
+            <a:schemeClr val="lt1"/>
+          </a:fontRef>
+        </p:style>
+        <p:txBody>
+          <a:bodyPr wrap="none" lIns="0" tIns="0" rIns="0" bIns="0" rtlCol="0" anchor="ctr" anchorCtr="1"/>
+          <a:lstStyle/>
+          <a:p>
+            <a:pPr algn="ctr"/>
+            <a:r>
+              <a:rPr lang="en-US" altLang="zh-TW" sz="1000" dirty="0">
+                <a:solidFill>
+                  <a:schemeClr val="tx1"/>
+                </a:solidFill>
+                <a:latin typeface="ADLaM Display" panose="02010000000000000000" pitchFamily="2" charset="0"/>
+                <a:ea typeface="ADLaM Display" panose="02010000000000000000" pitchFamily="2" charset="0"/>
+                <a:cs typeface="ADLaM Display" panose="02010000000000000000" pitchFamily="2" charset="0"/>
+              </a:rPr>
+              <a:t>Gated DN</a:t>
+            </a:r>
+          </a:p>
+          <a:p>
+            <a:pPr algn="ctr"/>
+            <a:r>
+              <a:rPr lang="en-US" altLang="zh-TW" sz="800" dirty="0">
+                <a:solidFill>
+                  <a:schemeClr val="tx1"/>
+                </a:solidFill>
+                <a:ea typeface="ADLaM Display" panose="02010000000000000000" pitchFamily="2" charset="0"/>
+                <a:cs typeface="ADLaM Display" panose="02010000000000000000" pitchFamily="2" charset="0"/>
+              </a:rPr>
+              <a:t>2025</a:t>
+            </a:r>
+          </a:p>
+        </p:txBody>
+      </p:sp>
+      <p:sp>
+        <p:nvSpPr>
+          <p:cNvPr id="32" name="橢圓 31">
+            <a:extLst>
+              <a:ext uri="{FF2B5EF4-FFF2-40B4-BE49-F238E27FC236}">
+                <a16:creationId xmlns:a16="http://schemas.microsoft.com/office/drawing/2014/main" id="{CABC683C-D4EE-CE9D-3171-8CA226B75346}"/>
+              </a:ext>
+            </a:extLst>
+          </p:cNvPr>
+          <p:cNvSpPr/>
+          <p:nvPr/>
+        </p:nvSpPr>
+        <p:spPr>
+          <a:xfrm>
+            <a:off x="3261204" y="2924944"/>
+            <a:ext cx="346781" cy="330225"/>
+          </a:xfrm>
+          <a:prstGeom prst="ellipse">
+            <a:avLst/>
+          </a:prstGeom>
+          <a:solidFill>
+            <a:schemeClr val="accent4">
+              <a:lumMod val="20000"/>
+              <a:lumOff val="80000"/>
+              <a:alpha val="70000"/>
+            </a:schemeClr>
+          </a:solidFill>
+          <a:ln w="25400">
+            <a:solidFill>
+              <a:schemeClr val="bg1">
+                <a:lumMod val="75000"/>
+              </a:schemeClr>
+            </a:solidFill>
+          </a:ln>
+        </p:spPr>
+        <p:style>
+          <a:lnRef idx="2">
+            <a:schemeClr val="accent1">
+              <a:shade val="15000"/>
+            </a:schemeClr>
+          </a:lnRef>
+          <a:fillRef idx="1">
+            <a:schemeClr val="accent1"/>
+          </a:fillRef>
+          <a:effectRef idx="0">
+            <a:schemeClr val="accent1"/>
+          </a:effectRef>
+          <a:fontRef idx="minor">
+            <a:schemeClr val="lt1"/>
+          </a:fontRef>
+        </p:style>
+        <p:txBody>
+          <a:bodyPr wrap="none" lIns="0" tIns="0" rIns="0" bIns="0" rtlCol="0" anchor="ctr" anchorCtr="1"/>
+          <a:lstStyle/>
+          <a:p>
+            <a:pPr algn="ctr"/>
+            <a:r>
+              <a:rPr lang="en-US" altLang="zh-TW" sz="1000" dirty="0">
+                <a:solidFill>
+                  <a:schemeClr val="tx1"/>
+                </a:solidFill>
+                <a:latin typeface="ADLaM Display" panose="02010000000000000000" pitchFamily="2" charset="0"/>
+                <a:ea typeface="ADLaM Display" panose="02010000000000000000" pitchFamily="2" charset="0"/>
+                <a:cs typeface="ADLaM Display" panose="02010000000000000000" pitchFamily="2" charset="0"/>
+              </a:rPr>
+              <a:t>Delta Net</a:t>
+            </a:r>
+          </a:p>
+          <a:p>
+            <a:pPr algn="ctr"/>
+            <a:r>
+              <a:rPr lang="en-US" altLang="zh-TW" sz="1000" dirty="0">
+                <a:solidFill>
+                  <a:schemeClr val="tx1"/>
+                </a:solidFill>
+                <a:latin typeface="ADLaM Display" panose="02010000000000000000" pitchFamily="2" charset="0"/>
+                <a:ea typeface="ADLaM Display" panose="02010000000000000000" pitchFamily="2" charset="0"/>
+                <a:cs typeface="ADLaM Display" panose="02010000000000000000" pitchFamily="2" charset="0"/>
+              </a:rPr>
+              <a:t>Chunk-wise</a:t>
+            </a:r>
+          </a:p>
+          <a:p>
+            <a:pPr algn="ctr"/>
+            <a:r>
+              <a:rPr lang="en-US" altLang="zh-TW" sz="800" dirty="0">
+                <a:solidFill>
+                  <a:schemeClr val="tx1"/>
+                </a:solidFill>
+                <a:ea typeface="ADLaM Display" panose="02010000000000000000" pitchFamily="2" charset="0"/>
+                <a:cs typeface="ADLaM Display" panose="02010000000000000000" pitchFamily="2" charset="0"/>
+              </a:rPr>
+              <a:t>2024</a:t>
+            </a:r>
+          </a:p>
+        </p:txBody>
+      </p:sp>
+      <p:sp>
+        <p:nvSpPr>
+          <p:cNvPr id="42" name="橢圓 41">
+            <a:extLst>
+              <a:ext uri="{FF2B5EF4-FFF2-40B4-BE49-F238E27FC236}">
+                <a16:creationId xmlns:a16="http://schemas.microsoft.com/office/drawing/2014/main" id="{72DF3FD3-E88D-2E86-3E26-9DAD1EE10F48}"/>
+              </a:ext>
+            </a:extLst>
+          </p:cNvPr>
+          <p:cNvSpPr/>
+          <p:nvPr/>
+        </p:nvSpPr>
+        <p:spPr>
+          <a:xfrm>
+            <a:off x="3143696" y="3861048"/>
+            <a:ext cx="598912" cy="557997"/>
+          </a:xfrm>
+          <a:prstGeom prst="ellipse">
+            <a:avLst/>
+          </a:prstGeom>
+          <a:solidFill>
+            <a:schemeClr val="accent4">
+              <a:lumMod val="20000"/>
+              <a:lumOff val="80000"/>
+              <a:alpha val="70000"/>
+            </a:schemeClr>
+          </a:solidFill>
+          <a:ln w="25400">
+            <a:solidFill>
+              <a:schemeClr val="bg1">
+                <a:lumMod val="75000"/>
+              </a:schemeClr>
+            </a:solidFill>
+          </a:ln>
+        </p:spPr>
+        <p:style>
+          <a:lnRef idx="2">
+            <a:schemeClr val="accent1">
+              <a:shade val="15000"/>
+            </a:schemeClr>
+          </a:lnRef>
+          <a:fillRef idx="1">
+            <a:schemeClr val="accent1"/>
+          </a:fillRef>
+          <a:effectRef idx="0">
+            <a:schemeClr val="accent1"/>
+          </a:effectRef>
+          <a:fontRef idx="minor">
+            <a:schemeClr val="lt1"/>
+          </a:fontRef>
+        </p:style>
+        <p:txBody>
+          <a:bodyPr wrap="none" lIns="0" tIns="0" rIns="0" bIns="0" rtlCol="0" anchor="ctr" anchorCtr="1"/>
+          <a:lstStyle/>
+          <a:p>
+            <a:pPr algn="ctr"/>
+            <a:r>
+              <a:rPr lang="en-US" altLang="zh-TW" sz="1000" dirty="0">
+                <a:solidFill>
+                  <a:schemeClr val="tx1"/>
+                </a:solidFill>
+                <a:latin typeface="ADLaM Display" panose="02010000000000000000" pitchFamily="2" charset="0"/>
+                <a:ea typeface="ADLaM Display" panose="02010000000000000000" pitchFamily="2" charset="0"/>
+                <a:cs typeface="ADLaM Display" panose="02010000000000000000" pitchFamily="2" charset="0"/>
+              </a:rPr>
+              <a:t>FG</a:t>
+            </a:r>
+            <a:r>
+              <a:rPr lang="en-US" altLang="zh-TW" sz="1000" baseline="30000" dirty="0">
+                <a:solidFill>
+                  <a:schemeClr val="tx1"/>
+                </a:solidFill>
+                <a:latin typeface="ADLaM Display" panose="02010000000000000000" pitchFamily="2" charset="0"/>
+                <a:ea typeface="ADLaM Display" panose="02010000000000000000" pitchFamily="2" charset="0"/>
+                <a:cs typeface="ADLaM Display" panose="02010000000000000000" pitchFamily="2" charset="0"/>
+              </a:rPr>
+              <a:t>2</a:t>
+            </a:r>
+            <a:r>
+              <a:rPr lang="en-US" altLang="zh-TW" sz="1000" dirty="0">
+                <a:solidFill>
+                  <a:schemeClr val="tx1"/>
+                </a:solidFill>
+                <a:latin typeface="ADLaM Display" panose="02010000000000000000" pitchFamily="2" charset="0"/>
+                <a:ea typeface="ADLaM Display" panose="02010000000000000000" pitchFamily="2" charset="0"/>
+                <a:cs typeface="ADLaM Display" panose="02010000000000000000" pitchFamily="2" charset="0"/>
+              </a:rPr>
+              <a:t>-GDN</a:t>
+            </a:r>
+          </a:p>
+          <a:p>
+            <a:pPr algn="ctr"/>
+            <a:r>
+              <a:rPr lang="en-US" altLang="zh-TW" sz="800" dirty="0">
+                <a:solidFill>
+                  <a:schemeClr val="tx1"/>
+                </a:solidFill>
+                <a:ea typeface="ADLaM Display" panose="02010000000000000000" pitchFamily="2" charset="0"/>
+                <a:cs typeface="ADLaM Display" panose="02010000000000000000" pitchFamily="2" charset="0"/>
+              </a:rPr>
+              <a:t>2026</a:t>
+            </a:r>
+          </a:p>
+        </p:txBody>
+      </p:sp>
+      <p:sp>
+        <p:nvSpPr>
+          <p:cNvPr id="56" name="橢圓 55">
+            <a:extLst>
+              <a:ext uri="{FF2B5EF4-FFF2-40B4-BE49-F238E27FC236}">
+                <a16:creationId xmlns:a16="http://schemas.microsoft.com/office/drawing/2014/main" id="{E9B2C012-79D4-DC2E-8136-FB25168D99C2}"/>
+              </a:ext>
+            </a:extLst>
+          </p:cNvPr>
+          <p:cNvSpPr/>
+          <p:nvPr/>
+        </p:nvSpPr>
+        <p:spPr>
+          <a:xfrm>
+            <a:off x="2349378" y="2564904"/>
+            <a:ext cx="389945" cy="414562"/>
+          </a:xfrm>
+          <a:prstGeom prst="ellipse">
+            <a:avLst/>
+          </a:prstGeom>
+          <a:solidFill>
+            <a:schemeClr val="accent4">
+              <a:lumMod val="20000"/>
+              <a:lumOff val="80000"/>
+              <a:alpha val="70000"/>
+            </a:schemeClr>
+          </a:solidFill>
+          <a:ln w="31750">
+            <a:solidFill>
+              <a:schemeClr val="bg1">
+                <a:lumMod val="75000"/>
+              </a:schemeClr>
+            </a:solidFill>
+          </a:ln>
+        </p:spPr>
+        <p:style>
+          <a:lnRef idx="2">
+            <a:schemeClr val="accent1">
+              <a:shade val="15000"/>
+            </a:schemeClr>
+          </a:lnRef>
+          <a:fillRef idx="1">
+            <a:schemeClr val="accent1"/>
+          </a:fillRef>
+          <a:effectRef idx="0">
+            <a:schemeClr val="accent1"/>
+          </a:effectRef>
+          <a:fontRef idx="minor">
+            <a:schemeClr val="lt1"/>
+          </a:fontRef>
+        </p:style>
+        <p:txBody>
+          <a:bodyPr wrap="none" lIns="0" tIns="36000" rIns="0" bIns="0" rtlCol="0" anchor="ctr" anchorCtr="1"/>
+          <a:lstStyle/>
+          <a:p>
+            <a:pPr algn="ctr">
+              <a:lnSpc>
+                <a:spcPts val="1000"/>
+              </a:lnSpc>
+            </a:pPr>
+            <a:r>
+              <a:rPr lang="en-US" altLang="zh-TW" sz="1000" dirty="0">
+                <a:solidFill>
+                  <a:schemeClr val="tx1"/>
+                </a:solidFill>
+                <a:latin typeface="ADLaM Display" panose="02010000000000000000" pitchFamily="2" charset="0"/>
+                <a:ea typeface="ADLaM Display" panose="02010000000000000000" pitchFamily="2" charset="0"/>
+                <a:cs typeface="ADLaM Display" panose="02010000000000000000" pitchFamily="2" charset="0"/>
+              </a:rPr>
+              <a:t>Mamba</a:t>
+            </a:r>
+          </a:p>
+          <a:p>
+            <a:pPr algn="ctr"/>
+            <a:r>
+              <a:rPr lang="en-US" altLang="zh-TW" sz="800" dirty="0">
+                <a:solidFill>
+                  <a:schemeClr val="tx1"/>
+                </a:solidFill>
+                <a:ea typeface="ADLaM Display" panose="02010000000000000000" pitchFamily="2" charset="0"/>
+                <a:cs typeface="ADLaM Display" panose="02010000000000000000" pitchFamily="2" charset="0"/>
+              </a:rPr>
+              <a:t>2023</a:t>
+            </a:r>
+          </a:p>
+        </p:txBody>
+      </p:sp>
+      <p:sp>
+        <p:nvSpPr>
+          <p:cNvPr id="49" name="橢圓 48">
+            <a:extLst>
+              <a:ext uri="{FF2B5EF4-FFF2-40B4-BE49-F238E27FC236}">
+                <a16:creationId xmlns:a16="http://schemas.microsoft.com/office/drawing/2014/main" id="{0F6EB330-E419-47E7-E5BC-5B2C9F1905D7}"/>
+              </a:ext>
+            </a:extLst>
+          </p:cNvPr>
+          <p:cNvSpPr/>
+          <p:nvPr/>
+        </p:nvSpPr>
+        <p:spPr>
+          <a:xfrm>
+            <a:off x="5150373" y="1684971"/>
+            <a:ext cx="495818" cy="442166"/>
+          </a:xfrm>
+          <a:prstGeom prst="ellipse">
+            <a:avLst/>
+          </a:prstGeom>
+          <a:solidFill>
+            <a:schemeClr val="accent4">
+              <a:lumMod val="20000"/>
+              <a:lumOff val="80000"/>
+              <a:alpha val="70000"/>
+            </a:schemeClr>
+          </a:solidFill>
+          <a:ln w="31750">
+            <a:solidFill>
+              <a:schemeClr val="bg1">
+                <a:lumMod val="75000"/>
+              </a:schemeClr>
+            </a:solidFill>
+          </a:ln>
+        </p:spPr>
+        <p:style>
+          <a:lnRef idx="2">
+            <a:schemeClr val="accent1">
+              <a:shade val="15000"/>
+            </a:schemeClr>
+          </a:lnRef>
+          <a:fillRef idx="1">
+            <a:schemeClr val="accent1"/>
+          </a:fillRef>
+          <a:effectRef idx="0">
+            <a:schemeClr val="accent1"/>
+          </a:effectRef>
+          <a:fontRef idx="minor">
+            <a:schemeClr val="lt1"/>
+          </a:fontRef>
+        </p:style>
+        <p:txBody>
+          <a:bodyPr wrap="none" lIns="0" tIns="36000" rIns="0" bIns="0" rtlCol="0" anchor="ctr" anchorCtr="1"/>
+          <a:lstStyle/>
+          <a:p>
+            <a:pPr algn="ctr">
+              <a:lnSpc>
+                <a:spcPts val="1000"/>
+              </a:lnSpc>
+            </a:pPr>
+            <a:r>
+              <a:rPr lang="en-US" altLang="zh-TW" sz="1200" dirty="0">
+                <a:solidFill>
+                  <a:schemeClr val="tx1"/>
+                </a:solidFill>
+                <a:latin typeface="ADLaM Display" panose="02010000000000000000" pitchFamily="2" charset="0"/>
+                <a:ea typeface="ADLaM Display" panose="02010000000000000000" pitchFamily="2" charset="0"/>
+                <a:cs typeface="ADLaM Display" panose="02010000000000000000" pitchFamily="2" charset="0"/>
+              </a:rPr>
+              <a:t>BERT</a:t>
+            </a:r>
+            <a:endParaRPr lang="en-US" altLang="zh-TW" sz="1000" dirty="0">
+              <a:solidFill>
+                <a:schemeClr val="tx1"/>
+              </a:solidFill>
+              <a:latin typeface="ADLaM Display" panose="02010000000000000000" pitchFamily="2" charset="0"/>
+              <a:ea typeface="ADLaM Display" panose="02010000000000000000" pitchFamily="2" charset="0"/>
+              <a:cs typeface="ADLaM Display" panose="02010000000000000000" pitchFamily="2" charset="0"/>
+            </a:endParaRPr>
+          </a:p>
+          <a:p>
+            <a:pPr algn="ctr"/>
+            <a:r>
+              <a:rPr lang="en-US" altLang="zh-TW" sz="800" dirty="0">
+                <a:solidFill>
+                  <a:schemeClr val="tx1"/>
+                </a:solidFill>
+                <a:ea typeface="ADLaM Display" panose="02010000000000000000" pitchFamily="2" charset="0"/>
+                <a:cs typeface="ADLaM Display" panose="02010000000000000000" pitchFamily="2" charset="0"/>
+              </a:rPr>
+              <a:t>2018</a:t>
+            </a:r>
+          </a:p>
+        </p:txBody>
+      </p:sp>
+      <p:sp>
+        <p:nvSpPr>
+          <p:cNvPr id="58" name="橢圓 57">
+            <a:extLst>
+              <a:ext uri="{FF2B5EF4-FFF2-40B4-BE49-F238E27FC236}">
+                <a16:creationId xmlns:a16="http://schemas.microsoft.com/office/drawing/2014/main" id="{FD1502A9-4E79-6669-67B1-033C2082F9CC}"/>
+              </a:ext>
+            </a:extLst>
+          </p:cNvPr>
+          <p:cNvSpPr/>
+          <p:nvPr/>
+        </p:nvSpPr>
+        <p:spPr>
+          <a:xfrm>
+            <a:off x="2244895" y="3159034"/>
+            <a:ext cx="598913" cy="557998"/>
+          </a:xfrm>
+          <a:prstGeom prst="ellipse">
+            <a:avLst/>
+          </a:prstGeom>
+          <a:solidFill>
+            <a:schemeClr val="accent4">
+              <a:lumMod val="20000"/>
+              <a:lumOff val="80000"/>
+              <a:alpha val="70000"/>
+            </a:schemeClr>
+          </a:solidFill>
+          <a:ln w="31750">
+            <a:solidFill>
+              <a:schemeClr val="bg1">
+                <a:lumMod val="75000"/>
+              </a:schemeClr>
+            </a:solidFill>
+          </a:ln>
+        </p:spPr>
+        <p:style>
+          <a:lnRef idx="2">
+            <a:schemeClr val="accent1">
+              <a:shade val="15000"/>
+            </a:schemeClr>
+          </a:lnRef>
+          <a:fillRef idx="1">
+            <a:schemeClr val="accent1"/>
+          </a:fillRef>
+          <a:effectRef idx="0">
+            <a:schemeClr val="accent1"/>
+          </a:effectRef>
+          <a:fontRef idx="minor">
+            <a:schemeClr val="lt1"/>
+          </a:fontRef>
+        </p:style>
+        <p:txBody>
+          <a:bodyPr wrap="none" lIns="0" tIns="36000" rIns="0" bIns="0" rtlCol="0" anchor="ctr" anchorCtr="1"/>
+          <a:lstStyle/>
+          <a:p>
+            <a:pPr algn="ctr">
+              <a:lnSpc>
+                <a:spcPts val="1000"/>
+              </a:lnSpc>
+            </a:pPr>
+            <a:r>
+              <a:rPr lang="en-US" altLang="zh-TW" sz="1000" dirty="0">
+                <a:solidFill>
+                  <a:schemeClr val="tx1"/>
+                </a:solidFill>
+                <a:latin typeface="ADLaM Display" panose="02010000000000000000" pitchFamily="2" charset="0"/>
+                <a:ea typeface="ADLaM Display" panose="02010000000000000000" pitchFamily="2" charset="0"/>
+                <a:cs typeface="ADLaM Display" panose="02010000000000000000" pitchFamily="2" charset="0"/>
+              </a:rPr>
+              <a:t>Mamba 2</a:t>
+            </a:r>
+          </a:p>
+          <a:p>
+            <a:pPr algn="ctr">
+              <a:lnSpc>
+                <a:spcPts val="1000"/>
+              </a:lnSpc>
+            </a:pPr>
+            <a:r>
+              <a:rPr lang="en-US" altLang="zh-TW" sz="1000" dirty="0">
+                <a:solidFill>
+                  <a:schemeClr val="tx1"/>
+                </a:solidFill>
+                <a:ea typeface="ADLaM Display" panose="02010000000000000000" pitchFamily="2" charset="0"/>
+                <a:cs typeface="ADLaM Display" panose="02010000000000000000" pitchFamily="2" charset="0"/>
+              </a:rPr>
+              <a:t>Membrane</a:t>
+            </a:r>
+          </a:p>
+          <a:p>
+            <a:pPr algn="ctr">
+              <a:lnSpc>
+                <a:spcPts val="1000"/>
+              </a:lnSpc>
+            </a:pPr>
+            <a:r>
+              <a:rPr lang="en-US" altLang="zh-TW" sz="1000" dirty="0">
+                <a:solidFill>
+                  <a:schemeClr val="tx1"/>
+                </a:solidFill>
+                <a:ea typeface="ADLaM Display" panose="02010000000000000000" pitchFamily="2" charset="0"/>
+                <a:cs typeface="ADLaM Display" panose="02010000000000000000" pitchFamily="2" charset="0"/>
+              </a:rPr>
+              <a:t>-driven</a:t>
+            </a:r>
+            <a:r>
+              <a:rPr lang="zh-TW" altLang="en-US" sz="1000" dirty="0">
+                <a:solidFill>
+                  <a:schemeClr val="tx1"/>
+                </a:solidFill>
+                <a:ea typeface="ADLaM Display" panose="02010000000000000000" pitchFamily="2" charset="0"/>
+                <a:cs typeface="ADLaM Display" panose="02010000000000000000" pitchFamily="2" charset="0"/>
+              </a:rPr>
+              <a:t> </a:t>
+            </a:r>
+            <a:r>
+              <a:rPr lang="en-US" altLang="zh-TW" sz="1000" dirty="0">
+                <a:solidFill>
+                  <a:schemeClr val="tx1"/>
+                </a:solidFill>
+                <a:ea typeface="ADLaM Display" panose="02010000000000000000" pitchFamily="2" charset="0"/>
+                <a:cs typeface="ADLaM Display" panose="02010000000000000000" pitchFamily="2" charset="0"/>
+              </a:rPr>
+              <a:t>PEFT</a:t>
+            </a:r>
+          </a:p>
+          <a:p>
+            <a:pPr algn="ctr"/>
+            <a:r>
+              <a:rPr lang="en-US" altLang="zh-TW" sz="800" dirty="0">
+                <a:solidFill>
+                  <a:schemeClr val="tx1"/>
+                </a:solidFill>
+                <a:ea typeface="ADLaM Display" panose="02010000000000000000" pitchFamily="2" charset="0"/>
+                <a:cs typeface="ADLaM Display" panose="02010000000000000000" pitchFamily="2" charset="0"/>
+              </a:rPr>
+              <a:t>2025</a:t>
+            </a:r>
+          </a:p>
+        </p:txBody>
+      </p:sp>
+      <p:sp>
+        <p:nvSpPr>
+          <p:cNvPr id="60" name="橢圓 59">
+            <a:extLst>
+              <a:ext uri="{FF2B5EF4-FFF2-40B4-BE49-F238E27FC236}">
+                <a16:creationId xmlns:a16="http://schemas.microsoft.com/office/drawing/2014/main" id="{8CEAF70D-C216-C6BA-AE72-D652D1764CC8}"/>
+              </a:ext>
+            </a:extLst>
+          </p:cNvPr>
+          <p:cNvSpPr/>
+          <p:nvPr/>
+        </p:nvSpPr>
+        <p:spPr>
+          <a:xfrm>
+            <a:off x="2244896" y="3861048"/>
+            <a:ext cx="598912" cy="557997"/>
+          </a:xfrm>
+          <a:prstGeom prst="ellipse">
+            <a:avLst/>
+          </a:prstGeom>
+          <a:solidFill>
+            <a:schemeClr val="accent4">
+              <a:lumMod val="20000"/>
+              <a:lumOff val="80000"/>
+              <a:alpha val="70000"/>
+            </a:schemeClr>
+          </a:solidFill>
+          <a:ln w="31750">
+            <a:solidFill>
+              <a:schemeClr val="bg1">
+                <a:lumMod val="75000"/>
+              </a:schemeClr>
+            </a:solidFill>
+          </a:ln>
+        </p:spPr>
+        <p:style>
+          <a:lnRef idx="2">
+            <a:schemeClr val="accent1">
+              <a:shade val="15000"/>
+            </a:schemeClr>
+          </a:lnRef>
+          <a:fillRef idx="1">
+            <a:schemeClr val="accent1"/>
+          </a:fillRef>
+          <a:effectRef idx="0">
+            <a:schemeClr val="accent1"/>
+          </a:effectRef>
+          <a:fontRef idx="minor">
+            <a:schemeClr val="lt1"/>
+          </a:fontRef>
+        </p:style>
+        <p:txBody>
+          <a:bodyPr wrap="none" lIns="0" tIns="36000" rIns="0" bIns="0" rtlCol="0" anchor="ctr" anchorCtr="1"/>
+          <a:lstStyle/>
+          <a:p>
+            <a:pPr algn="ctr">
+              <a:lnSpc>
+                <a:spcPts val="1000"/>
+              </a:lnSpc>
+            </a:pPr>
+            <a:r>
+              <a:rPr lang="en-US" altLang="zh-TW" sz="1000" dirty="0">
+                <a:solidFill>
+                  <a:schemeClr val="tx1"/>
+                </a:solidFill>
+                <a:latin typeface="ADLaM Display" panose="02010000000000000000" pitchFamily="2" charset="0"/>
+                <a:ea typeface="ADLaM Display" panose="02010000000000000000" pitchFamily="2" charset="0"/>
+                <a:cs typeface="ADLaM Display" panose="02010000000000000000" pitchFamily="2" charset="0"/>
+              </a:rPr>
+              <a:t>Mamba 3</a:t>
+            </a:r>
+          </a:p>
+          <a:p>
+            <a:pPr algn="ctr"/>
+            <a:r>
+              <a:rPr lang="en-US" altLang="zh-TW" sz="800" dirty="0">
+                <a:solidFill>
+                  <a:schemeClr val="tx1"/>
+                </a:solidFill>
+                <a:ea typeface="ADLaM Display" panose="02010000000000000000" pitchFamily="2" charset="0"/>
+                <a:cs typeface="ADLaM Display" panose="02010000000000000000" pitchFamily="2" charset="0"/>
+              </a:rPr>
+              <a:t>2026</a:t>
+            </a:r>
+          </a:p>
+        </p:txBody>
+      </p:sp>
+      <p:sp>
+        <p:nvSpPr>
+          <p:cNvPr id="62" name="橢圓 61">
+            <a:extLst>
+              <a:ext uri="{FF2B5EF4-FFF2-40B4-BE49-F238E27FC236}">
+                <a16:creationId xmlns:a16="http://schemas.microsoft.com/office/drawing/2014/main" id="{9B8E7921-46EA-190E-BF0A-95EA01373290}"/>
+              </a:ext>
+            </a:extLst>
+          </p:cNvPr>
+          <p:cNvSpPr/>
+          <p:nvPr/>
+        </p:nvSpPr>
+        <p:spPr>
+          <a:xfrm>
+            <a:off x="4222118" y="3501008"/>
+            <a:ext cx="598912" cy="557997"/>
+          </a:xfrm>
+          <a:prstGeom prst="ellipse">
+            <a:avLst/>
+          </a:prstGeom>
+          <a:solidFill>
+            <a:schemeClr val="accent4">
+              <a:lumMod val="20000"/>
+              <a:lumOff val="80000"/>
+              <a:alpha val="70000"/>
+            </a:schemeClr>
+          </a:solidFill>
+          <a:ln w="25400">
+            <a:solidFill>
+              <a:schemeClr val="bg1">
+                <a:lumMod val="75000"/>
+              </a:schemeClr>
+            </a:solidFill>
+          </a:ln>
+        </p:spPr>
+        <p:style>
+          <a:lnRef idx="2">
+            <a:schemeClr val="accent1">
+              <a:shade val="15000"/>
+            </a:schemeClr>
+          </a:lnRef>
+          <a:fillRef idx="1">
+            <a:schemeClr val="accent1"/>
+          </a:fillRef>
+          <a:effectRef idx="0">
+            <a:schemeClr val="accent1"/>
+          </a:effectRef>
+          <a:fontRef idx="minor">
+            <a:schemeClr val="lt1"/>
+          </a:fontRef>
+        </p:style>
+        <p:txBody>
+          <a:bodyPr wrap="none" lIns="0" tIns="0" rIns="0" bIns="0" rtlCol="0" anchor="ctr" anchorCtr="1"/>
+          <a:lstStyle/>
+          <a:p>
+            <a:pPr algn="ctr"/>
+            <a:r>
+              <a:rPr lang="en-US" altLang="zh-TW" sz="1000" dirty="0">
+                <a:solidFill>
+                  <a:schemeClr val="tx1"/>
+                </a:solidFill>
+                <a:latin typeface="ADLaM Display" panose="02010000000000000000" pitchFamily="2" charset="0"/>
+                <a:ea typeface="ADLaM Display" panose="02010000000000000000" pitchFamily="2" charset="0"/>
+                <a:cs typeface="ADLaM Display" panose="02010000000000000000" pitchFamily="2" charset="0"/>
+              </a:rPr>
+              <a:t>Sparse MoE</a:t>
+            </a:r>
+          </a:p>
+          <a:p>
+            <a:pPr algn="ctr"/>
+            <a:r>
+              <a:rPr lang="en-US" altLang="zh-TW" sz="1000" dirty="0">
+                <a:solidFill>
+                  <a:schemeClr val="tx1"/>
+                </a:solidFill>
+                <a:ea typeface="ADLaM Display" panose="02010000000000000000" pitchFamily="2" charset="0"/>
+                <a:cs typeface="ADLaM Display" panose="02010000000000000000" pitchFamily="2" charset="0"/>
+              </a:rPr>
+              <a:t>MLA / Fine-Grained</a:t>
+            </a:r>
+          </a:p>
+          <a:p>
+            <a:pPr algn="ctr"/>
+            <a:r>
+              <a:rPr lang="en-US" altLang="zh-TW" sz="800" dirty="0">
+                <a:solidFill>
+                  <a:schemeClr val="tx1"/>
+                </a:solidFill>
+                <a:ea typeface="ADLaM Display" panose="02010000000000000000" pitchFamily="2" charset="0"/>
+                <a:cs typeface="ADLaM Display" panose="02010000000000000000" pitchFamily="2" charset="0"/>
+              </a:rPr>
+              <a:t>2026</a:t>
+            </a:r>
+          </a:p>
+        </p:txBody>
+      </p:sp>
+      <p:sp>
+        <p:nvSpPr>
+          <p:cNvPr id="64" name="橢圓 63">
+            <a:extLst>
+              <a:ext uri="{FF2B5EF4-FFF2-40B4-BE49-F238E27FC236}">
+                <a16:creationId xmlns:a16="http://schemas.microsoft.com/office/drawing/2014/main" id="{48A4F24D-0DEA-C809-8043-80321469F71D}"/>
+              </a:ext>
+            </a:extLst>
+          </p:cNvPr>
+          <p:cNvSpPr/>
+          <p:nvPr/>
+        </p:nvSpPr>
+        <p:spPr>
+          <a:xfrm>
+            <a:off x="2345142" y="1196752"/>
+            <a:ext cx="389945" cy="414562"/>
+          </a:xfrm>
+          <a:prstGeom prst="ellipse">
+            <a:avLst/>
+          </a:prstGeom>
+          <a:solidFill>
+            <a:schemeClr val="accent4">
+              <a:lumMod val="20000"/>
+              <a:lumOff val="80000"/>
+              <a:alpha val="70000"/>
+            </a:schemeClr>
+          </a:solidFill>
+          <a:ln w="31750">
+            <a:solidFill>
+              <a:schemeClr val="bg1">
+                <a:lumMod val="75000"/>
+              </a:schemeClr>
+            </a:solidFill>
+          </a:ln>
+        </p:spPr>
+        <p:style>
+          <a:lnRef idx="2">
+            <a:schemeClr val="accent1">
+              <a:shade val="15000"/>
+            </a:schemeClr>
+          </a:lnRef>
+          <a:fillRef idx="1">
+            <a:schemeClr val="accent1"/>
+          </a:fillRef>
+          <a:effectRef idx="0">
+            <a:schemeClr val="accent1"/>
+          </a:effectRef>
+          <a:fontRef idx="minor">
+            <a:schemeClr val="lt1"/>
+          </a:fontRef>
+        </p:style>
+        <p:txBody>
+          <a:bodyPr wrap="none" lIns="0" tIns="36000" rIns="0" bIns="0" rtlCol="0" anchor="ctr" anchorCtr="1"/>
+          <a:lstStyle/>
+          <a:p>
+            <a:pPr algn="ctr">
+              <a:lnSpc>
+                <a:spcPts val="1000"/>
+              </a:lnSpc>
+            </a:pPr>
+            <a:r>
+              <a:rPr lang="en-US" altLang="zh-TW" sz="1000" dirty="0">
+                <a:solidFill>
+                  <a:schemeClr val="tx1"/>
+                </a:solidFill>
+                <a:latin typeface="ADLaM Display" panose="02010000000000000000" pitchFamily="2" charset="0"/>
+                <a:ea typeface="ADLaM Display" panose="02010000000000000000" pitchFamily="2" charset="0"/>
+                <a:cs typeface="ADLaM Display" panose="02010000000000000000" pitchFamily="2" charset="0"/>
+              </a:rPr>
+              <a:t>SSM</a:t>
+            </a:r>
+          </a:p>
+          <a:p>
+            <a:pPr algn="ctr"/>
+            <a:r>
+              <a:rPr lang="en-US" altLang="zh-TW" sz="800" dirty="0">
+                <a:solidFill>
+                  <a:schemeClr val="tx1"/>
+                </a:solidFill>
+                <a:ea typeface="ADLaM Display" panose="02010000000000000000" pitchFamily="2" charset="0"/>
+                <a:cs typeface="ADLaM Display" panose="02010000000000000000" pitchFamily="2" charset="0"/>
+              </a:rPr>
+              <a:t>1970</a:t>
+            </a:r>
+          </a:p>
+        </p:txBody>
+      </p:sp>
+      <p:sp>
+        <p:nvSpPr>
+          <p:cNvPr id="68" name="橢圓 67">
+            <a:extLst>
+              <a:ext uri="{FF2B5EF4-FFF2-40B4-BE49-F238E27FC236}">
+                <a16:creationId xmlns:a16="http://schemas.microsoft.com/office/drawing/2014/main" id="{4EBEB091-6791-B45A-BF04-3D5EF38066A7}"/>
+              </a:ext>
+            </a:extLst>
+          </p:cNvPr>
+          <p:cNvSpPr/>
+          <p:nvPr/>
+        </p:nvSpPr>
+        <p:spPr>
+          <a:xfrm>
+            <a:off x="4292206" y="4781313"/>
+            <a:ext cx="495818" cy="447885"/>
+          </a:xfrm>
+          <a:prstGeom prst="ellipse">
+            <a:avLst/>
+          </a:prstGeom>
+          <a:solidFill>
+            <a:schemeClr val="accent1">
+              <a:lumMod val="20000"/>
+              <a:lumOff val="80000"/>
+              <a:alpha val="70000"/>
+            </a:schemeClr>
+          </a:solidFill>
+          <a:ln w="31750">
+            <a:solidFill>
+              <a:schemeClr val="bg1">
+                <a:lumMod val="75000"/>
+              </a:schemeClr>
+            </a:solidFill>
+          </a:ln>
+        </p:spPr>
+        <p:style>
+          <a:lnRef idx="2">
+            <a:schemeClr val="accent1">
+              <a:shade val="15000"/>
+            </a:schemeClr>
+          </a:lnRef>
+          <a:fillRef idx="1">
+            <a:schemeClr val="accent1"/>
+          </a:fillRef>
+          <a:effectRef idx="0">
+            <a:schemeClr val="accent1"/>
+          </a:effectRef>
+          <a:fontRef idx="minor">
+            <a:schemeClr val="lt1"/>
+          </a:fontRef>
+        </p:style>
+        <p:txBody>
+          <a:bodyPr wrap="none" lIns="0" tIns="0" rIns="0" bIns="0" rtlCol="0" anchor="ctr" anchorCtr="1"/>
+          <a:lstStyle/>
+          <a:p>
+            <a:pPr algn="ctr"/>
+            <a:r>
+              <a:rPr lang="en-US" altLang="zh-TW" sz="1000" dirty="0">
+                <a:solidFill>
+                  <a:schemeClr val="tx1"/>
+                </a:solidFill>
+                <a:latin typeface="ADLaM Display" panose="02010000000000000000" pitchFamily="2" charset="0"/>
+                <a:ea typeface="ADLaM Display" panose="02010000000000000000" pitchFamily="2" charset="0"/>
+                <a:cs typeface="ADLaM Display" panose="02010000000000000000" pitchFamily="2" charset="0"/>
+              </a:rPr>
+              <a:t>Z.AI GLM</a:t>
+            </a:r>
+          </a:p>
+          <a:p>
+            <a:pPr algn="ctr"/>
+            <a:r>
+              <a:rPr lang="en-US" altLang="zh-TW" sz="1000" dirty="0">
+                <a:solidFill>
+                  <a:schemeClr val="tx1"/>
+                </a:solidFill>
+                <a:latin typeface="ADLaM Display" panose="02010000000000000000" pitchFamily="2" charset="0"/>
+                <a:ea typeface="ADLaM Display" panose="02010000000000000000" pitchFamily="2" charset="0"/>
+                <a:cs typeface="ADLaM Display" panose="02010000000000000000" pitchFamily="2" charset="0"/>
+              </a:rPr>
+              <a:t>5</a:t>
+            </a:r>
+          </a:p>
+        </p:txBody>
+      </p:sp>
+      <p:sp>
+        <p:nvSpPr>
+          <p:cNvPr id="70" name="橢圓 69">
+            <a:extLst>
+              <a:ext uri="{FF2B5EF4-FFF2-40B4-BE49-F238E27FC236}">
+                <a16:creationId xmlns:a16="http://schemas.microsoft.com/office/drawing/2014/main" id="{3EF1AC3F-5BB5-F2E6-4097-C06077F08E0A}"/>
+              </a:ext>
+            </a:extLst>
+          </p:cNvPr>
+          <p:cNvSpPr/>
+          <p:nvPr/>
+        </p:nvSpPr>
+        <p:spPr>
+          <a:xfrm>
+            <a:off x="5485256" y="2880036"/>
+            <a:ext cx="598912" cy="557997"/>
+          </a:xfrm>
+          <a:prstGeom prst="ellipse">
+            <a:avLst/>
+          </a:prstGeom>
+          <a:solidFill>
+            <a:schemeClr val="accent4">
+              <a:lumMod val="20000"/>
+              <a:lumOff val="80000"/>
+              <a:alpha val="70000"/>
+            </a:schemeClr>
+          </a:solidFill>
+          <a:ln w="25400">
+            <a:solidFill>
+              <a:schemeClr val="bg1">
+                <a:lumMod val="75000"/>
+              </a:schemeClr>
+            </a:solidFill>
+          </a:ln>
+        </p:spPr>
+        <p:style>
+          <a:lnRef idx="2">
+            <a:schemeClr val="accent1">
+              <a:shade val="15000"/>
+            </a:schemeClr>
+          </a:lnRef>
+          <a:fillRef idx="1">
+            <a:schemeClr val="accent1"/>
+          </a:fillRef>
+          <a:effectRef idx="0">
+            <a:schemeClr val="accent1"/>
+          </a:effectRef>
+          <a:fontRef idx="minor">
+            <a:schemeClr val="lt1"/>
+          </a:fontRef>
+        </p:style>
+        <p:txBody>
+          <a:bodyPr wrap="none" lIns="0" tIns="0" rIns="0" bIns="0" rtlCol="0" anchor="ctr" anchorCtr="1"/>
+          <a:lstStyle/>
+          <a:p>
+            <a:pPr algn="ctr"/>
+            <a:r>
+              <a:rPr lang="en-US" altLang="zh-TW" sz="1000" dirty="0">
+                <a:solidFill>
+                  <a:schemeClr val="tx1"/>
+                </a:solidFill>
+                <a:latin typeface="ADLaM Display" panose="02010000000000000000" pitchFamily="2" charset="0"/>
+                <a:ea typeface="ADLaM Display" panose="02010000000000000000" pitchFamily="2" charset="0"/>
+                <a:cs typeface="ADLaM Display" panose="02010000000000000000" pitchFamily="2" charset="0"/>
+              </a:rPr>
+              <a:t>Dense Transformer</a:t>
+            </a:r>
+          </a:p>
+          <a:p>
+            <a:pPr algn="ctr"/>
+            <a:r>
+              <a:rPr lang="en-US" altLang="zh-TW" sz="1000" dirty="0">
+                <a:solidFill>
+                  <a:schemeClr val="tx1"/>
+                </a:solidFill>
+                <a:ea typeface="ADLaM Display" panose="02010000000000000000" pitchFamily="2" charset="0"/>
+                <a:cs typeface="ADLaM Display" panose="02010000000000000000" pitchFamily="2" charset="0"/>
+              </a:rPr>
+              <a:t>GQA</a:t>
+            </a:r>
+          </a:p>
+          <a:p>
+            <a:pPr algn="ctr"/>
+            <a:r>
+              <a:rPr lang="en-US" altLang="zh-TW" sz="800" dirty="0">
+                <a:solidFill>
+                  <a:schemeClr val="tx1"/>
+                </a:solidFill>
+                <a:ea typeface="ADLaM Display" panose="02010000000000000000" pitchFamily="2" charset="0"/>
+                <a:cs typeface="ADLaM Display" panose="02010000000000000000" pitchFamily="2" charset="0"/>
+              </a:rPr>
+              <a:t>2020</a:t>
+            </a:r>
+          </a:p>
+        </p:txBody>
+      </p:sp>
+      <p:sp>
+        <p:nvSpPr>
+          <p:cNvPr id="75" name="橢圓 74">
+            <a:extLst>
+              <a:ext uri="{FF2B5EF4-FFF2-40B4-BE49-F238E27FC236}">
+                <a16:creationId xmlns:a16="http://schemas.microsoft.com/office/drawing/2014/main" id="{54620C3C-C2B0-CF97-9598-3A329A535343}"/>
+              </a:ext>
+            </a:extLst>
+          </p:cNvPr>
+          <p:cNvSpPr/>
+          <p:nvPr/>
+        </p:nvSpPr>
+        <p:spPr>
+          <a:xfrm>
+            <a:off x="5820242" y="4784938"/>
+            <a:ext cx="495818" cy="447885"/>
+          </a:xfrm>
+          <a:prstGeom prst="ellipse">
+            <a:avLst/>
+          </a:prstGeom>
+          <a:solidFill>
+            <a:schemeClr val="accent1">
+              <a:lumMod val="20000"/>
+              <a:lumOff val="80000"/>
+              <a:alpha val="70000"/>
+            </a:schemeClr>
+          </a:solidFill>
+          <a:ln w="31750">
+            <a:solidFill>
+              <a:schemeClr val="bg1">
+                <a:lumMod val="75000"/>
+              </a:schemeClr>
+            </a:solidFill>
+          </a:ln>
+        </p:spPr>
+        <p:style>
+          <a:lnRef idx="2">
+            <a:schemeClr val="accent1">
+              <a:shade val="15000"/>
+            </a:schemeClr>
+          </a:lnRef>
+          <a:fillRef idx="1">
+            <a:schemeClr val="accent1"/>
+          </a:fillRef>
+          <a:effectRef idx="0">
+            <a:schemeClr val="accent1"/>
+          </a:effectRef>
+          <a:fontRef idx="minor">
+            <a:schemeClr val="lt1"/>
+          </a:fontRef>
+        </p:style>
+        <p:txBody>
+          <a:bodyPr wrap="none" lIns="0" tIns="0" rIns="0" bIns="0" rtlCol="0" anchor="ctr" anchorCtr="1"/>
+          <a:lstStyle/>
+          <a:p>
+            <a:pPr algn="ctr"/>
+            <a:r>
+              <a:rPr lang="en-US" altLang="zh-TW" sz="1000" dirty="0">
+                <a:solidFill>
+                  <a:schemeClr val="tx1"/>
+                </a:solidFill>
+                <a:latin typeface="ADLaM Display" panose="02010000000000000000" pitchFamily="2" charset="0"/>
+                <a:ea typeface="ADLaM Display" panose="02010000000000000000" pitchFamily="2" charset="0"/>
+                <a:cs typeface="ADLaM Display" panose="02010000000000000000" pitchFamily="2" charset="0"/>
+              </a:rPr>
+              <a:t>MS Phi</a:t>
+            </a:r>
+          </a:p>
+          <a:p>
+            <a:pPr algn="ctr"/>
+            <a:r>
+              <a:rPr lang="en-US" altLang="zh-TW" sz="1000" dirty="0">
+                <a:solidFill>
+                  <a:schemeClr val="tx1"/>
+                </a:solidFill>
+                <a:latin typeface="ADLaM Display" panose="02010000000000000000" pitchFamily="2" charset="0"/>
+                <a:ea typeface="ADLaM Display" panose="02010000000000000000" pitchFamily="2" charset="0"/>
+                <a:cs typeface="ADLaM Display" panose="02010000000000000000" pitchFamily="2" charset="0"/>
+              </a:rPr>
+              <a:t>4-mini</a:t>
+            </a:r>
+          </a:p>
+        </p:txBody>
+      </p:sp>
+      <p:sp>
+        <p:nvSpPr>
+          <p:cNvPr id="78" name="橢圓 77">
+            <a:extLst>
+              <a:ext uri="{FF2B5EF4-FFF2-40B4-BE49-F238E27FC236}">
+                <a16:creationId xmlns:a16="http://schemas.microsoft.com/office/drawing/2014/main" id="{EED1C818-C6C1-6299-20AD-EB0482E640D3}"/>
+              </a:ext>
+            </a:extLst>
+          </p:cNvPr>
+          <p:cNvSpPr/>
+          <p:nvPr/>
+        </p:nvSpPr>
+        <p:spPr>
+          <a:xfrm>
+            <a:off x="6452446" y="4777688"/>
+            <a:ext cx="495818" cy="447885"/>
+          </a:xfrm>
+          <a:prstGeom prst="ellipse">
+            <a:avLst/>
+          </a:prstGeom>
+          <a:solidFill>
+            <a:schemeClr val="accent1">
+              <a:lumMod val="20000"/>
+              <a:lumOff val="80000"/>
+              <a:alpha val="70000"/>
+            </a:schemeClr>
+          </a:solidFill>
+          <a:ln w="31750">
+            <a:solidFill>
+              <a:schemeClr val="bg1">
+                <a:lumMod val="75000"/>
+              </a:schemeClr>
+            </a:solidFill>
+          </a:ln>
+        </p:spPr>
+        <p:style>
+          <a:lnRef idx="2">
+            <a:schemeClr val="accent1">
+              <a:shade val="15000"/>
+            </a:schemeClr>
+          </a:lnRef>
+          <a:fillRef idx="1">
+            <a:schemeClr val="accent1"/>
+          </a:fillRef>
+          <a:effectRef idx="0">
+            <a:schemeClr val="accent1"/>
+          </a:effectRef>
+          <a:fontRef idx="minor">
+            <a:schemeClr val="lt1"/>
+          </a:fontRef>
+        </p:style>
+        <p:txBody>
+          <a:bodyPr wrap="none" lIns="0" tIns="0" rIns="0" bIns="0" rtlCol="0" anchor="ctr" anchorCtr="1"/>
+          <a:lstStyle/>
+          <a:p>
+            <a:pPr algn="ctr"/>
+            <a:r>
+              <a:rPr lang="en-US" altLang="zh-TW" sz="1000" dirty="0">
+                <a:solidFill>
+                  <a:schemeClr val="tx1"/>
+                </a:solidFill>
+                <a:latin typeface="ADLaM Display" panose="02010000000000000000" pitchFamily="2" charset="0"/>
+                <a:ea typeface="ADLaM Display" panose="02010000000000000000" pitchFamily="2" charset="0"/>
+                <a:cs typeface="ADLaM Display" panose="02010000000000000000" pitchFamily="2" charset="0"/>
+              </a:rPr>
+              <a:t>Llama</a:t>
+            </a:r>
+          </a:p>
+          <a:p>
+            <a:pPr algn="ctr"/>
+            <a:r>
+              <a:rPr lang="en-US" altLang="zh-TW" sz="1000" dirty="0">
+                <a:solidFill>
+                  <a:schemeClr val="tx1"/>
+                </a:solidFill>
+                <a:latin typeface="ADLaM Display" panose="02010000000000000000" pitchFamily="2" charset="0"/>
+                <a:ea typeface="ADLaM Display" panose="02010000000000000000" pitchFamily="2" charset="0"/>
+                <a:cs typeface="ADLaM Display" panose="02010000000000000000" pitchFamily="2" charset="0"/>
+              </a:rPr>
+              <a:t>4</a:t>
+            </a:r>
+          </a:p>
+        </p:txBody>
+      </p:sp>
+      <p:sp>
+        <p:nvSpPr>
+          <p:cNvPr id="82" name="橢圓 81">
+            <a:extLst>
+              <a:ext uri="{FF2B5EF4-FFF2-40B4-BE49-F238E27FC236}">
+                <a16:creationId xmlns:a16="http://schemas.microsoft.com/office/drawing/2014/main" id="{9AC75EC1-AEAB-94F1-3A21-9BE297B1FCC1}"/>
+              </a:ext>
+            </a:extLst>
+          </p:cNvPr>
+          <p:cNvSpPr/>
+          <p:nvPr/>
+        </p:nvSpPr>
+        <p:spPr>
+          <a:xfrm>
+            <a:off x="5502695" y="3800301"/>
+            <a:ext cx="598912" cy="557997"/>
+          </a:xfrm>
+          <a:prstGeom prst="ellipse">
+            <a:avLst/>
+          </a:prstGeom>
+          <a:solidFill>
+            <a:schemeClr val="accent4">
+              <a:lumMod val="20000"/>
+              <a:lumOff val="80000"/>
+              <a:alpha val="70000"/>
+            </a:schemeClr>
+          </a:solidFill>
+          <a:ln w="25400">
+            <a:solidFill>
+              <a:schemeClr val="bg1">
+                <a:lumMod val="75000"/>
+              </a:schemeClr>
+            </a:solidFill>
+          </a:ln>
+        </p:spPr>
+        <p:style>
+          <a:lnRef idx="2">
+            <a:schemeClr val="accent1">
+              <a:shade val="15000"/>
+            </a:schemeClr>
+          </a:lnRef>
+          <a:fillRef idx="1">
+            <a:schemeClr val="accent1"/>
+          </a:fillRef>
+          <a:effectRef idx="0">
+            <a:schemeClr val="accent1"/>
+          </a:effectRef>
+          <a:fontRef idx="minor">
+            <a:schemeClr val="lt1"/>
+          </a:fontRef>
+        </p:style>
+        <p:txBody>
+          <a:bodyPr wrap="none" lIns="0" tIns="0" rIns="0" bIns="0" rtlCol="0" anchor="ctr" anchorCtr="1"/>
+          <a:lstStyle/>
+          <a:p>
+            <a:pPr algn="ctr"/>
+            <a:r>
+              <a:rPr lang="en-US" altLang="zh-TW" sz="1000" dirty="0">
+                <a:solidFill>
+                  <a:schemeClr val="tx1"/>
+                </a:solidFill>
+                <a:ea typeface="ADLaM Display" panose="02010000000000000000" pitchFamily="2" charset="0"/>
+                <a:cs typeface="ADLaM Display" panose="02010000000000000000" pitchFamily="2" charset="0"/>
+              </a:rPr>
+              <a:t>Early</a:t>
+            </a:r>
+          </a:p>
+          <a:p>
+            <a:pPr algn="ctr"/>
+            <a:r>
+              <a:rPr lang="en-US" altLang="zh-TW" sz="1000" dirty="0">
+                <a:solidFill>
+                  <a:schemeClr val="tx1"/>
+                </a:solidFill>
+                <a:ea typeface="ADLaM Display" panose="02010000000000000000" pitchFamily="2" charset="0"/>
+                <a:cs typeface="ADLaM Display" panose="02010000000000000000" pitchFamily="2" charset="0"/>
+              </a:rPr>
+              <a:t>Fusion</a:t>
+            </a:r>
+          </a:p>
+          <a:p>
+            <a:pPr algn="ctr"/>
+            <a:r>
+              <a:rPr lang="en-US" altLang="zh-TW" sz="800" dirty="0">
+                <a:solidFill>
+                  <a:schemeClr val="tx1"/>
+                </a:solidFill>
+                <a:ea typeface="ADLaM Display" panose="02010000000000000000" pitchFamily="2" charset="0"/>
+                <a:cs typeface="ADLaM Display" panose="02010000000000000000" pitchFamily="2" charset="0"/>
+              </a:rPr>
+              <a:t>2026</a:t>
+            </a:r>
+          </a:p>
+        </p:txBody>
+      </p:sp>
+    </p:spTree>
+    <p:extLst>
+      <p:ext uri="{BB962C8B-B14F-4D97-AF65-F5344CB8AC3E}">
+        <p14:creationId xmlns:p14="http://schemas.microsoft.com/office/powerpoint/2010/main" val="4064324689"/>
+      </p:ext>
+    </p:extLst>
+  </p:cSld>
+  <p:clrMapOvr>
+    <a:masterClrMapping/>
+  </p:clrMapOvr>
+  <mc:AlternateContent xmlns:mc="http://schemas.openxmlformats.org/markup-compatibility/2006" xmlns:p159="http://schemas.microsoft.com/office/powerpoint/2015/09/main">
+    <mc:Choice Requires="p159">
+      <p:transition xmlns:p14="http://schemas.microsoft.com/office/powerpoint/2010/main" spd="slow" p14:dur="2000" advClick="0">
+        <p159:morph option="byObject"/>
+      </p:transition>
+    </mc:Choice>
+    <mc:Fallback xmlns="">
+      <p:transition spd="slow" advClick="0">
+        <p:fade/>
+      </p:transition>
+    </mc:Fallback>
+  </mc:AlternateContent>
+</p:sld>
+</file>
+
+<file path=ppt/slides/slide3.xml><?xml version="1.0" encoding="utf-8"?>
 <p:sld xmlns:a="http://schemas.openxmlformats.org/drawingml/2006/main" xmlns:r="http://schemas.openxmlformats.org/officeDocument/2006/relationships" xmlns:p="http://schemas.openxmlformats.org/presentationml/2006/main">
   <p:cSld>
     <p:spTree>
@@ -9589,7 +12712,45 @@
                 <a:ea typeface="新細明體" panose="02020500000000000000" pitchFamily="18" charset="-120"/>
                 <a:cs typeface="ADLaM Display" panose="02010000000000000000" pitchFamily="2" charset="0"/>
               </a:rPr>
-              <a:t>(Attn+MoE)</a:t>
+              <a:t>(</a:t>
+            </a:r>
+            <a:r>
+              <a:rPr kumimoji="0" lang="en-US" altLang="zh-TW" sz="1200" b="0" i="0" u="none" strike="noStrike" kern="1200" cap="none" spc="0" normalizeH="0" baseline="0" noProof="0" dirty="0" err="1">
+                <a:ln>
+                  <a:noFill/>
+                </a:ln>
+                <a:solidFill>
+                  <a:srgbClr val="4F81BD">
+                    <a:lumMod val="50000"/>
+                  </a:srgbClr>
+                </a:solidFill>
+                <a:effectLst/>
+                <a:uLnTx/>
+                <a:uFillTx/>
+                <a:latin typeface="Calibri"/>
+                <a:ea typeface="新細明體" panose="02020500000000000000" pitchFamily="18" charset="-120"/>
+                <a:cs typeface="ADLaM Display" panose="02010000000000000000" pitchFamily="2" charset="0"/>
+              </a:rPr>
+              <a:t>Attn+MoE</a:t>
+            </a:r>
+            <a:r>
+              <a:rPr kumimoji="0" lang="en-US" altLang="zh-TW" sz="1200" b="0" i="0" u="none" strike="noStrike" kern="1200" cap="none" spc="0" normalizeH="0" baseline="0" noProof="0" dirty="0">
+                <a:ln>
+                  <a:noFill/>
+                </a:ln>
+                <a:solidFill>
+                  <a:srgbClr val="4F81BD">
+                    <a:lumMod val="50000"/>
+                  </a:srgbClr>
+                </a:solidFill>
+                <a:effectLst/>
+                <a:uLnTx/>
+                <a:uFillTx/>
+                <a:latin typeface="Calibri"/>
+                <a:ea typeface="新細明體" panose="02020500000000000000" pitchFamily="18" charset="-120"/>
+                <a:cs typeface="ADLaM Display" panose="02010000000000000000" pitchFamily="2" charset="0"/>
+              </a:rPr>
+              <a:t>)</a:t>
             </a:r>
             <a:endParaRPr lang="zh-TW" altLang="en-US" sz="1400" dirty="0">
               <a:solidFill>
@@ -10787,7 +13948,7 @@
 </p:sld>
 </file>
 
-<file path=ppt/slides/slide3.xml><?xml version="1.0" encoding="utf-8"?>
+<file path=ppt/slides/slide4.xml><?xml version="1.0" encoding="utf-8"?>
 <p:sld xmlns:a="http://schemas.openxmlformats.org/drawingml/2006/main" xmlns:r="http://schemas.openxmlformats.org/officeDocument/2006/relationships" xmlns:p="http://schemas.openxmlformats.org/presentationml/2006/main">
   <p:cSld>
     <p:spTree>

--- a/ai-overview.pptx
+++ b/ai-overview.pptx
@@ -251,7 +251,7 @@
           <a:p>
             <a:fld id="{982F7CBC-87DD-4F69-8F50-7ED68F7FF790}" type="datetimeFigureOut">
               <a:rPr lang="zh-TW" altLang="en-US" smtClean="0"/>
-              <a:t>2026/10/14</a:t>
+              <a:t>2026/10/15</a:t>
             </a:fld>
             <a:endParaRPr lang="zh-TW" altLang="en-US"/>
           </a:p>
@@ -428,7 +428,7 @@
           <a:p>
             <a:fld id="{863167AA-796B-4B6A-95ED-1C0BCB3E5802}" type="datetimeFigureOut">
               <a:rPr lang="zh-TW" altLang="en-US" smtClean="0"/>
-              <a:t>2026/10/14</a:t>
+              <a:t>2026/10/15</a:t>
             </a:fld>
             <a:endParaRPr lang="zh-TW" altLang="en-US"/>
           </a:p>
@@ -10584,8 +10584,8 @@
         </p:nvSpPr>
         <p:spPr>
           <a:xfrm>
-            <a:off x="3245951" y="2132856"/>
-            <a:ext cx="389945" cy="330225"/>
+            <a:off x="2924054" y="2076685"/>
+            <a:ext cx="495818" cy="488218"/>
           </a:xfrm>
           <a:prstGeom prst="ellipse">
             <a:avLst/>
@@ -10707,7 +10707,7 @@
         </p:nvSpPr>
         <p:spPr>
           <a:xfrm>
-            <a:off x="3245951" y="3429000"/>
+            <a:off x="3090079" y="3284984"/>
             <a:ext cx="389945" cy="330225"/>
           </a:xfrm>
           <a:prstGeom prst="ellipse">
@@ -10771,7 +10771,7 @@
                 <a:ea typeface="ADLaM Display" panose="02010000000000000000" pitchFamily="2" charset="0"/>
                 <a:cs typeface="ADLaM Display" panose="02010000000000000000" pitchFamily="2" charset="0"/>
               </a:rPr>
-              <a:t>2025</a:t>
+              <a:t>2025.03</a:t>
             </a:r>
           </a:p>
         </p:txBody>
@@ -10790,7 +10790,7 @@
         </p:nvSpPr>
         <p:spPr>
           <a:xfrm>
-            <a:off x="3261204" y="2924944"/>
+            <a:off x="3105332" y="2852936"/>
             <a:ext cx="346781" cy="330225"/>
           </a:xfrm>
           <a:prstGeom prst="ellipse">
@@ -10887,8 +10887,8 @@
         </p:nvSpPr>
         <p:spPr>
           <a:xfrm>
-            <a:off x="3143696" y="3861048"/>
-            <a:ext cx="598912" cy="557997"/>
+            <a:off x="3245951" y="3933056"/>
+            <a:ext cx="389945" cy="360040"/>
           </a:xfrm>
           <a:prstGeom prst="ellipse">
             <a:avLst/>
@@ -10992,7 +10992,7 @@
         </p:nvSpPr>
         <p:spPr>
           <a:xfrm>
-            <a:off x="2349378" y="2564904"/>
+            <a:off x="1148091" y="2564904"/>
             <a:ext cx="389945" cy="414562"/>
           </a:xfrm>
           <a:prstGeom prst="ellipse">
@@ -11079,7 +11079,7 @@
         </p:nvSpPr>
         <p:spPr>
           <a:xfrm>
-            <a:off x="5150373" y="1684971"/>
+            <a:off x="5516342" y="1684971"/>
             <a:ext cx="495818" cy="442166"/>
           </a:xfrm>
           <a:prstGeom prst="ellipse">
@@ -11174,7 +11174,7 @@
         </p:nvSpPr>
         <p:spPr>
           <a:xfrm>
-            <a:off x="2244895" y="3159034"/>
+            <a:off x="1043608" y="3159034"/>
             <a:ext cx="598913" cy="557998"/>
           </a:xfrm>
           <a:prstGeom prst="ellipse">
@@ -11315,7 +11315,7 @@
         </p:nvSpPr>
         <p:spPr>
           <a:xfrm>
-            <a:off x="2244896" y="3861048"/>
+            <a:off x="1043609" y="3861048"/>
             <a:ext cx="598912" cy="557997"/>
           </a:xfrm>
           <a:prstGeom prst="ellipse">
@@ -11498,7 +11498,7 @@
         </p:nvSpPr>
         <p:spPr>
           <a:xfrm>
-            <a:off x="2345142" y="1196752"/>
+            <a:off x="1148090" y="1205495"/>
             <a:ext cx="389945" cy="414562"/>
           </a:xfrm>
           <a:prstGeom prst="ellipse">
@@ -11669,8 +11669,8 @@
         </p:nvSpPr>
         <p:spPr>
           <a:xfrm>
-            <a:off x="5485256" y="2880036"/>
-            <a:ext cx="598912" cy="557997"/>
+            <a:off x="5004048" y="2076686"/>
+            <a:ext cx="495818" cy="452332"/>
           </a:xfrm>
           <a:prstGeom prst="ellipse">
             <a:avLst/>
@@ -11720,7 +11720,21 @@
                 <a:ea typeface="ADLaM Display" panose="02010000000000000000" pitchFamily="2" charset="0"/>
                 <a:cs typeface="ADLaM Display" panose="02010000000000000000" pitchFamily="2" charset="0"/>
               </a:rPr>
-              <a:t>Dense Transformer</a:t>
+              <a:t>Dense</a:t>
+            </a:r>
+          </a:p>
+          <a:p>
+            <a:pPr algn="ctr"/>
+            <a:r>
+              <a:rPr lang="en-US" altLang="zh-TW" sz="1000" dirty="0">
+                <a:solidFill>
+                  <a:schemeClr val="tx1"/>
+                </a:solidFill>
+                <a:latin typeface="ADLaM Display" panose="02010000000000000000" pitchFamily="2" charset="0"/>
+                <a:ea typeface="ADLaM Display" panose="02010000000000000000" pitchFamily="2" charset="0"/>
+                <a:cs typeface="ADLaM Display" panose="02010000000000000000" pitchFamily="2" charset="0"/>
+              </a:rPr>
+              <a:t>Transformer</a:t>
             </a:r>
           </a:p>
           <a:p>
@@ -11933,7 +11947,7 @@
         </p:nvSpPr>
         <p:spPr>
           <a:xfrm>
-            <a:off x="5502695" y="3800301"/>
+            <a:off x="5557264" y="3800301"/>
             <a:ext cx="598912" cy="557997"/>
           </a:xfrm>
           <a:prstGeom prst="ellipse">
@@ -12010,6 +12024,172 @@
                 <a:cs typeface="ADLaM Display" panose="02010000000000000000" pitchFamily="2" charset="0"/>
               </a:rPr>
               <a:t>2026</a:t>
+            </a:r>
+          </a:p>
+        </p:txBody>
+      </p:sp>
+      <p:sp>
+        <p:nvSpPr>
+          <p:cNvPr id="3" name="橢圓 2">
+            <a:extLst>
+              <a:ext uri="{FF2B5EF4-FFF2-40B4-BE49-F238E27FC236}">
+                <a16:creationId xmlns:a16="http://schemas.microsoft.com/office/drawing/2014/main" id="{71F8658A-6E2C-450A-08C2-DC9754E12BD1}"/>
+              </a:ext>
+            </a:extLst>
+          </p:cNvPr>
+          <p:cNvSpPr/>
+          <p:nvPr/>
+        </p:nvSpPr>
+        <p:spPr>
+          <a:xfrm>
+            <a:off x="2667797" y="3933056"/>
+            <a:ext cx="389945" cy="360040"/>
+          </a:xfrm>
+          <a:prstGeom prst="ellipse">
+            <a:avLst/>
+          </a:prstGeom>
+          <a:solidFill>
+            <a:schemeClr val="accent4">
+              <a:lumMod val="20000"/>
+              <a:lumOff val="80000"/>
+              <a:alpha val="70000"/>
+            </a:schemeClr>
+          </a:solidFill>
+          <a:ln w="25400">
+            <a:solidFill>
+              <a:schemeClr val="bg1">
+                <a:lumMod val="75000"/>
+              </a:schemeClr>
+            </a:solidFill>
+          </a:ln>
+        </p:spPr>
+        <p:style>
+          <a:lnRef idx="2">
+            <a:schemeClr val="accent1">
+              <a:shade val="15000"/>
+            </a:schemeClr>
+          </a:lnRef>
+          <a:fillRef idx="1">
+            <a:schemeClr val="accent1"/>
+          </a:fillRef>
+          <a:effectRef idx="0">
+            <a:schemeClr val="accent1"/>
+          </a:effectRef>
+          <a:fontRef idx="minor">
+            <a:schemeClr val="lt1"/>
+          </a:fontRef>
+        </p:style>
+        <p:txBody>
+          <a:bodyPr wrap="none" lIns="0" tIns="0" rIns="0" bIns="0" rtlCol="0" anchor="ctr" anchorCtr="1"/>
+          <a:lstStyle/>
+          <a:p>
+            <a:pPr algn="ctr"/>
+            <a:r>
+              <a:rPr lang="en-US" altLang="zh-TW" sz="1000" dirty="0">
+                <a:solidFill>
+                  <a:schemeClr val="tx1"/>
+                </a:solidFill>
+                <a:latin typeface="ADLaM Display" panose="02010000000000000000" pitchFamily="2" charset="0"/>
+                <a:ea typeface="ADLaM Display" panose="02010000000000000000" pitchFamily="2" charset="0"/>
+                <a:cs typeface="ADLaM Display" panose="02010000000000000000" pitchFamily="2" charset="0"/>
+              </a:rPr>
+              <a:t>GDN2</a:t>
+            </a:r>
+          </a:p>
+          <a:p>
+            <a:pPr algn="ctr"/>
+            <a:r>
+              <a:rPr lang="en-US" altLang="zh-TW" sz="800" dirty="0">
+                <a:solidFill>
+                  <a:schemeClr val="tx1"/>
+                </a:solidFill>
+                <a:ea typeface="ADLaM Display" panose="02010000000000000000" pitchFamily="2" charset="0"/>
+                <a:cs typeface="ADLaM Display" panose="02010000000000000000" pitchFamily="2" charset="0"/>
+              </a:rPr>
+              <a:t>2026</a:t>
+            </a:r>
+          </a:p>
+        </p:txBody>
+      </p:sp>
+      <p:sp>
+        <p:nvSpPr>
+          <p:cNvPr id="4" name="橢圓 3">
+            <a:extLst>
+              <a:ext uri="{FF2B5EF4-FFF2-40B4-BE49-F238E27FC236}">
+                <a16:creationId xmlns:a16="http://schemas.microsoft.com/office/drawing/2014/main" id="{C3EEC88D-333A-91ED-F25A-F8F26491C4BF}"/>
+              </a:ext>
+            </a:extLst>
+          </p:cNvPr>
+          <p:cNvSpPr/>
+          <p:nvPr/>
+        </p:nvSpPr>
+        <p:spPr>
+          <a:xfrm>
+            <a:off x="2915816" y="3530823"/>
+            <a:ext cx="389945" cy="330225"/>
+          </a:xfrm>
+          <a:prstGeom prst="ellipse">
+            <a:avLst/>
+          </a:prstGeom>
+          <a:solidFill>
+            <a:schemeClr val="accent4">
+              <a:lumMod val="20000"/>
+              <a:lumOff val="80000"/>
+              <a:alpha val="70000"/>
+            </a:schemeClr>
+          </a:solidFill>
+          <a:ln w="25400">
+            <a:solidFill>
+              <a:schemeClr val="bg1">
+                <a:lumMod val="75000"/>
+              </a:schemeClr>
+            </a:solidFill>
+          </a:ln>
+        </p:spPr>
+        <p:style>
+          <a:lnRef idx="2">
+            <a:schemeClr val="accent1">
+              <a:shade val="15000"/>
+            </a:schemeClr>
+          </a:lnRef>
+          <a:fillRef idx="1">
+            <a:schemeClr val="accent1"/>
+          </a:fillRef>
+          <a:effectRef idx="0">
+            <a:schemeClr val="accent1"/>
+          </a:effectRef>
+          <a:fontRef idx="minor">
+            <a:schemeClr val="lt1"/>
+          </a:fontRef>
+        </p:style>
+        <p:txBody>
+          <a:bodyPr wrap="none" lIns="0" tIns="0" rIns="0" bIns="0" rtlCol="0" anchor="ctr" anchorCtr="1"/>
+          <a:lstStyle/>
+          <a:p>
+            <a:pPr algn="ctr"/>
+            <a:r>
+              <a:rPr lang="en-US" altLang="zh-TW" sz="1000" dirty="0">
+                <a:solidFill>
+                  <a:schemeClr val="tx1"/>
+                </a:solidFill>
+                <a:latin typeface="ADLaM Display" panose="02010000000000000000" pitchFamily="2" charset="0"/>
+                <a:ea typeface="ADLaM Display" panose="02010000000000000000" pitchFamily="2" charset="0"/>
+                <a:cs typeface="ADLaM Display" panose="02010000000000000000" pitchFamily="2" charset="0"/>
+              </a:rPr>
+              <a:t>KDA</a:t>
+            </a:r>
+          </a:p>
+          <a:p>
+            <a:pPr algn="ctr"/>
+            <a:r>
+              <a:rPr lang="en-US" altLang="zh-TW" sz="800" dirty="0">
+                <a:solidFill>
+                  <a:schemeClr val="tx1"/>
+                </a:solidFill>
+                <a:ea typeface="ADLaM Display" panose="02010000000000000000" pitchFamily="2" charset="0"/>
+                <a:cs typeface="ADLaM Display" panose="02010000000000000000" pitchFamily="2" charset="0"/>
+              </a:rPr>
+              <a:t>2025.10</a:t>
             </a:r>
           </a:p>
         </p:txBody>
@@ -13979,7 +14159,7 @@
         </p:nvSpPr>
         <p:spPr>
           <a:xfrm>
-            <a:off x="356839" y="2605549"/>
+            <a:off x="356839" y="3037597"/>
             <a:ext cx="8496944" cy="3631763"/>
           </a:xfrm>
           <a:prstGeom prst="rect">
@@ -14272,7 +14452,7 @@
                 <a:latin typeface="微軟正黑體" panose="020B0604030504040204" pitchFamily="34" charset="-120"/>
                 <a:ea typeface="微軟正黑體" panose="020B0604030504040204" pitchFamily="34" charset="-120"/>
               </a:rPr>
-              <a:t>台妹</a:t>
+              <a:t>塔妹</a:t>
             </a:r>
             <a:r>
               <a:rPr lang="en-US" altLang="zh-TW" sz="1000" b="1" dirty="0">
@@ -14302,7 +14482,7 @@
                 <a:latin typeface="微軟正黑體" panose="020B0604030504040204" pitchFamily="34" charset="-120"/>
                 <a:ea typeface="微軟正黑體" panose="020B0604030504040204" pitchFamily="34" charset="-120"/>
               </a:rPr>
-              <a:t>-</a:t>
+              <a:t>–</a:t>
             </a:r>
             <a:r>
               <a:rPr lang="zh-TW" altLang="en-US" sz="1000" b="1" dirty="0">
@@ -14820,6 +15000,316 @@
               <a:ea typeface="Noto Sans HK" panose="020B0200000000000000" pitchFamily="34" charset="-120"/>
               <a:cs typeface="Arial" panose="020B0604020202020204" pitchFamily="34" charset="0"/>
             </a:endParaRPr>
+          </a:p>
+        </p:txBody>
+      </p:sp>
+      <p:sp>
+        <p:nvSpPr>
+          <p:cNvPr id="3" name="文字方塊 2">
+            <a:extLst>
+              <a:ext uri="{FF2B5EF4-FFF2-40B4-BE49-F238E27FC236}">
+                <a16:creationId xmlns:a16="http://schemas.microsoft.com/office/drawing/2014/main" id="{37EAF38C-7900-B82F-FF5E-D6FE3E5AE3A6}"/>
+              </a:ext>
+            </a:extLst>
+          </p:cNvPr>
+          <p:cNvSpPr txBox="1"/>
+          <p:nvPr/>
+        </p:nvSpPr>
+        <p:spPr>
+          <a:xfrm>
+            <a:off x="179510" y="980728"/>
+            <a:ext cx="8136906" cy="1862048"/>
+          </a:xfrm>
+          <a:prstGeom prst="rect">
+            <a:avLst/>
+          </a:prstGeom>
+          <a:solidFill>
+            <a:sysClr val="window" lastClr="FFFFFF">
+              <a:alpha val="90000"/>
+            </a:sysClr>
+          </a:solidFill>
+        </p:spPr>
+        <p:txBody>
+          <a:bodyPr wrap="square">
+            <a:spAutoFit/>
+          </a:bodyPr>
+          <a:lstStyle/>
+          <a:p>
+            <a:pPr marL="0" marR="0" lvl="0" indent="0" defTabSz="914400" eaLnBrk="1" fontAlgn="auto" latinLnBrk="0" hangingPunct="1">
+              <a:lnSpc>
+                <a:spcPts val="1800"/>
+              </a:lnSpc>
+              <a:spcBef>
+                <a:spcPts val="600"/>
+              </a:spcBef>
+              <a:spcAft>
+                <a:spcPts val="600"/>
+              </a:spcAft>
+              <a:buClrTx/>
+              <a:buSzTx/>
+              <a:buFontTx/>
+              <a:buNone/>
+              <a:tabLst/>
+              <a:defRPr/>
+            </a:pPr>
+            <a:r>
+              <a:rPr kumimoji="0" lang="en-US" altLang="zh-TW" sz="2000" b="1" i="0" u="none" strike="noStrike" kern="0" cap="none" spc="0" normalizeH="0" baseline="0" noProof="0" dirty="0">
+                <a:ln>
+                  <a:noFill/>
+                </a:ln>
+                <a:solidFill>
+                  <a:prstClr val="black"/>
+                </a:solidFill>
+                <a:effectLst/>
+                <a:uLnTx/>
+                <a:uFillTx/>
+                <a:latin typeface="Calibri"/>
+              </a:rPr>
+              <a:t>Features</a:t>
+            </a:r>
+          </a:p>
+          <a:p>
+            <a:pPr marL="285750" marR="0" lvl="0" indent="-285750" defTabSz="914400" eaLnBrk="1" fontAlgn="auto" latinLnBrk="0" hangingPunct="1">
+              <a:lnSpc>
+                <a:spcPts val="1800"/>
+              </a:lnSpc>
+              <a:spcBef>
+                <a:spcPts val="600"/>
+              </a:spcBef>
+              <a:spcAft>
+                <a:spcPts val="600"/>
+              </a:spcAft>
+              <a:buClrTx/>
+              <a:buSzTx/>
+              <a:buFont typeface="Wingdings" panose="05000000000000000000" pitchFamily="2" charset="2"/>
+              <a:buChar char="Ø"/>
+              <a:tabLst/>
+              <a:defRPr/>
+            </a:pPr>
+            <a:r>
+              <a:rPr kumimoji="0" lang="en-US" altLang="zh-TW" sz="1600" b="1" i="0" u="none" strike="noStrike" kern="0" cap="none" spc="0" normalizeH="0" baseline="0" noProof="0" dirty="0">
+                <a:ln>
+                  <a:noFill/>
+                </a:ln>
+                <a:solidFill>
+                  <a:prstClr val="black"/>
+                </a:solidFill>
+                <a:effectLst/>
+                <a:uLnTx/>
+                <a:uFillTx/>
+                <a:latin typeface="Calibri"/>
+              </a:rPr>
+              <a:t>TAIDE</a:t>
+            </a:r>
+            <a:r>
+              <a:rPr kumimoji="0" lang="en-US" altLang="zh-TW" sz="1600" i="0" u="none" strike="noStrike" kern="0" cap="none" spc="0" normalizeH="0" baseline="0" noProof="0" dirty="0">
+                <a:ln>
+                  <a:noFill/>
+                </a:ln>
+                <a:solidFill>
+                  <a:prstClr val="black"/>
+                </a:solidFill>
+                <a:effectLst/>
+                <a:uLnTx/>
+                <a:uFillTx/>
+                <a:latin typeface="Calibri"/>
+              </a:rPr>
+              <a:t>: Taiwan </a:t>
+            </a:r>
+            <a:r>
+              <a:rPr kumimoji="0" lang="en-US" altLang="zh-TW" sz="1600" i="0" u="none" strike="noStrike" kern="0" cap="none" spc="0" normalizeH="0" baseline="0" noProof="0" dirty="0" err="1">
+                <a:ln>
+                  <a:noFill/>
+                </a:ln>
+                <a:solidFill>
+                  <a:prstClr val="black"/>
+                </a:solidFill>
+                <a:effectLst/>
+                <a:uLnTx/>
+                <a:uFillTx/>
+                <a:latin typeface="Calibri"/>
+              </a:rPr>
+              <a:t>goverment</a:t>
+            </a:r>
+            <a:r>
+              <a:rPr kumimoji="0" lang="en-US" altLang="zh-TW" sz="1600" b="0" i="0" u="none" strike="noStrike" kern="0" cap="none" spc="0" normalizeH="0" baseline="0" noProof="0" dirty="0">
+                <a:ln>
+                  <a:noFill/>
+                </a:ln>
+                <a:solidFill>
+                  <a:prstClr val="black"/>
+                </a:solidFill>
+                <a:effectLst/>
+                <a:uLnTx/>
+                <a:uFillTx/>
+                <a:latin typeface="Calibri"/>
+              </a:rPr>
+              <a:t>.</a:t>
+            </a:r>
+            <a:endParaRPr kumimoji="0" lang="en-US" altLang="zh-TW" sz="1600" b="1" i="0" u="none" strike="noStrike" kern="0" cap="none" spc="0" normalizeH="0" baseline="0" noProof="0" dirty="0">
+              <a:ln>
+                <a:noFill/>
+              </a:ln>
+              <a:solidFill>
+                <a:prstClr val="black"/>
+              </a:solidFill>
+              <a:effectLst/>
+              <a:uLnTx/>
+              <a:uFillTx/>
+              <a:latin typeface="Calibri"/>
+            </a:endParaRPr>
+          </a:p>
+          <a:p>
+            <a:pPr marL="285750" marR="0" lvl="0" indent="-285750" defTabSz="914400" eaLnBrk="1" fontAlgn="auto" latinLnBrk="0" hangingPunct="1">
+              <a:lnSpc>
+                <a:spcPts val="1800"/>
+              </a:lnSpc>
+              <a:spcBef>
+                <a:spcPts val="600"/>
+              </a:spcBef>
+              <a:spcAft>
+                <a:spcPts val="600"/>
+              </a:spcAft>
+              <a:buClrTx/>
+              <a:buSzTx/>
+              <a:buFont typeface="Wingdings" panose="05000000000000000000" pitchFamily="2" charset="2"/>
+              <a:buChar char="Ø"/>
+              <a:tabLst/>
+              <a:defRPr/>
+            </a:pPr>
+            <a:r>
+              <a:rPr kumimoji="0" lang="en-US" altLang="zh-TW" sz="1600" b="1" i="0" u="none" strike="noStrike" kern="0" cap="none" spc="0" normalizeH="0" baseline="0" noProof="0" dirty="0">
+                <a:ln>
+                  <a:noFill/>
+                </a:ln>
+                <a:solidFill>
+                  <a:prstClr val="black"/>
+                </a:solidFill>
+                <a:effectLst/>
+                <a:uLnTx/>
+                <a:uFillTx/>
+                <a:latin typeface="Calibri"/>
+              </a:rPr>
+              <a:t>Project TAME</a:t>
+            </a:r>
+            <a:r>
+              <a:rPr kumimoji="0" lang="en-US" altLang="zh-TW" sz="1600" i="0" u="none" strike="noStrike" kern="0" cap="none" spc="0" normalizeH="0" baseline="0" noProof="0" dirty="0">
+                <a:ln>
+                  <a:noFill/>
+                </a:ln>
+                <a:solidFill>
+                  <a:prstClr val="black"/>
+                </a:solidFill>
+                <a:effectLst/>
+                <a:uLnTx/>
+                <a:uFillTx/>
+                <a:latin typeface="Calibri"/>
+              </a:rPr>
+              <a:t>: NTU, </a:t>
+            </a:r>
+            <a:r>
+              <a:rPr kumimoji="0" lang="en-US" altLang="zh-TW" sz="1600" b="0" i="0" u="none" strike="noStrike" kern="0" cap="none" spc="0" normalizeH="0" baseline="0" noProof="0" dirty="0">
+                <a:ln>
+                  <a:noFill/>
+                </a:ln>
+                <a:solidFill>
+                  <a:prstClr val="black"/>
+                </a:solidFill>
+                <a:effectLst/>
+                <a:uLnTx/>
+                <a:uFillTx/>
+                <a:latin typeface="Calibri"/>
+              </a:rPr>
+              <a:t>.</a:t>
+            </a:r>
+          </a:p>
+          <a:p>
+            <a:pPr marL="285750" indent="-285750">
+              <a:lnSpc>
+                <a:spcPts val="1800"/>
+              </a:lnSpc>
+              <a:spcBef>
+                <a:spcPts val="600"/>
+              </a:spcBef>
+              <a:spcAft>
+                <a:spcPts val="600"/>
+              </a:spcAft>
+              <a:buFont typeface="Wingdings" panose="05000000000000000000" pitchFamily="2" charset="2"/>
+              <a:buChar char="Ø"/>
+              <a:defRPr/>
+            </a:pPr>
+            <a:r>
+              <a:rPr lang="en-US" altLang="zh-TW" sz="1600" b="1" kern="0" dirty="0">
+                <a:solidFill>
+                  <a:prstClr val="black"/>
+                </a:solidFill>
+              </a:rPr>
+              <a:t>Taiwan-</a:t>
+            </a:r>
+            <a:r>
+              <a:rPr lang="en-US" altLang="zh-TW" sz="1600" b="1" kern="0" dirty="0" err="1">
+                <a:solidFill>
+                  <a:prstClr val="black"/>
+                </a:solidFill>
+              </a:rPr>
+              <a:t>LLaMA</a:t>
+            </a:r>
+            <a:r>
+              <a:rPr lang="en-US" altLang="zh-TW" sz="1600" kern="0" dirty="0">
+                <a:solidFill>
+                  <a:prstClr val="black"/>
+                </a:solidFill>
+              </a:rPr>
+              <a:t>: NTU,</a:t>
+            </a:r>
+            <a:r>
+              <a:rPr lang="zh-TW" altLang="en-US" sz="1600" kern="0" dirty="0">
+                <a:solidFill>
+                  <a:prstClr val="black"/>
+                </a:solidFill>
+              </a:rPr>
+              <a:t> </a:t>
+            </a:r>
+            <a:r>
+              <a:rPr lang="en-US" altLang="zh-TW" sz="1600" kern="0" dirty="0">
+                <a:solidFill>
+                  <a:prstClr val="black"/>
+                </a:solidFill>
+              </a:rPr>
+              <a:t>Community Friendly.</a:t>
+            </a:r>
+          </a:p>
+          <a:p>
+            <a:pPr marL="285750" indent="-285750">
+              <a:lnSpc>
+                <a:spcPts val="1800"/>
+              </a:lnSpc>
+              <a:spcBef>
+                <a:spcPts val="600"/>
+              </a:spcBef>
+              <a:spcAft>
+                <a:spcPts val="600"/>
+              </a:spcAft>
+              <a:buFont typeface="Wingdings" panose="05000000000000000000" pitchFamily="2" charset="2"/>
+              <a:buChar char="Ø"/>
+              <a:defRPr/>
+            </a:pPr>
+            <a:r>
+              <a:rPr lang="en-US" altLang="zh-TW" sz="1600" b="1" kern="0" dirty="0">
+                <a:solidFill>
+                  <a:prstClr val="black"/>
+                </a:solidFill>
+              </a:rPr>
+              <a:t>MR Breeze</a:t>
+            </a:r>
+            <a:r>
+              <a:rPr lang="en-US" altLang="zh-TW" sz="1600" kern="0" dirty="0">
+                <a:solidFill>
+                  <a:prstClr val="black"/>
+                </a:solidFill>
+              </a:rPr>
+              <a:t>: Media Tech Research, fast, edge AI.</a:t>
+            </a:r>
           </a:p>
         </p:txBody>
       </p:sp>

--- a/ai-overview.pptx
+++ b/ai-overview.pptx
@@ -5,16 +5,17 @@
     <p:sldMasterId id="2147483648" r:id="rId1"/>
   </p:sldMasterIdLst>
   <p:notesMasterIdLst>
-    <p:notesMasterId r:id="rId6"/>
+    <p:notesMasterId r:id="rId7"/>
   </p:notesMasterIdLst>
   <p:handoutMasterIdLst>
-    <p:handoutMasterId r:id="rId7"/>
+    <p:handoutMasterId r:id="rId8"/>
   </p:handoutMasterIdLst>
   <p:sldIdLst>
     <p:sldId id="3557" r:id="rId2"/>
     <p:sldId id="3558" r:id="rId3"/>
     <p:sldId id="3508" r:id="rId4"/>
-    <p:sldId id="3550" r:id="rId5"/>
+    <p:sldId id="3559" r:id="rId5"/>
+    <p:sldId id="3550" r:id="rId6"/>
   </p:sldIdLst>
   <p:sldSz cx="9144000" cy="6858000" type="screen4x3"/>
   <p:notesSz cx="6797675" cy="9925050"/>
@@ -121,6 +122,7 @@
             <p14:sldId id="3557"/>
             <p14:sldId id="3558"/>
             <p14:sldId id="3508"/>
+            <p14:sldId id="3559"/>
           </p14:sldIdLst>
         </p14:section>
         <p14:section name="Conclusion" id="{D9E6914C-A73F-4176-B0F8-3F87EAC09119}">
@@ -251,7 +253,7 @@
           <a:p>
             <a:fld id="{982F7CBC-87DD-4F69-8F50-7ED68F7FF790}" type="datetimeFigureOut">
               <a:rPr lang="zh-TW" altLang="en-US" smtClean="0"/>
-              <a:t>2026/10/15</a:t>
+              <a:t>2026/10/30</a:t>
             </a:fld>
             <a:endParaRPr lang="zh-TW" altLang="en-US"/>
           </a:p>
@@ -428,7 +430,7 @@
           <a:p>
             <a:fld id="{863167AA-796B-4B6A-95ED-1C0BCB3E5802}" type="datetimeFigureOut">
               <a:rPr lang="zh-TW" altLang="en-US" smtClean="0"/>
-              <a:t>2026/10/15</a:t>
+              <a:t>2026/10/30</a:t>
             </a:fld>
             <a:endParaRPr lang="zh-TW" altLang="en-US"/>
           </a:p>
@@ -2307,6 +2309,129 @@
   <p:cSld>
     <p:spTree>
       <p:nvGrpSpPr>
+        <p:cNvPr id="1" name="">
+          <a:extLst>
+            <a:ext uri="{FF2B5EF4-FFF2-40B4-BE49-F238E27FC236}">
+              <a16:creationId xmlns:a16="http://schemas.microsoft.com/office/drawing/2014/main" id="{B8BAC273-7701-059D-CA5B-9915FD9ABE38}"/>
+            </a:ext>
+          </a:extLst>
+        </p:cNvPr>
+        <p:cNvGrpSpPr/>
+        <p:nvPr/>
+      </p:nvGrpSpPr>
+      <p:grpSpPr>
+        <a:xfrm>
+          <a:off x="0" y="0"/>
+          <a:ext cx="0" cy="0"/>
+          <a:chOff x="0" y="0"/>
+          <a:chExt cx="0" cy="0"/>
+        </a:xfrm>
+      </p:grpSpPr>
+      <p:sp>
+        <p:nvSpPr>
+          <p:cNvPr id="2" name="投影片影像版面配置區 1">
+            <a:extLst>
+              <a:ext uri="{FF2B5EF4-FFF2-40B4-BE49-F238E27FC236}">
+                <a16:creationId xmlns:a16="http://schemas.microsoft.com/office/drawing/2014/main" id="{4F258703-666C-945F-1D8B-8631A2A8168D}"/>
+              </a:ext>
+            </a:extLst>
+          </p:cNvPr>
+          <p:cNvSpPr>
+            <a:spLocks noGrp="1" noRot="1" noChangeAspect="1"/>
+          </p:cNvSpPr>
+          <p:nvPr>
+            <p:ph type="sldImg"/>
+          </p:nvPr>
+        </p:nvSpPr>
+        <p:spPr/>
+        <p:txBody>
+          <a:bodyPr/>
+          <a:lstStyle/>
+          <a:p>
+            <a:endParaRPr lang="zh-TW" altLang="en-US"/>
+          </a:p>
+        </p:txBody>
+      </p:sp>
+      <p:sp>
+        <p:nvSpPr>
+          <p:cNvPr id="3" name="備忘稿版面配置區 2">
+            <a:extLst>
+              <a:ext uri="{FF2B5EF4-FFF2-40B4-BE49-F238E27FC236}">
+                <a16:creationId xmlns:a16="http://schemas.microsoft.com/office/drawing/2014/main" id="{72E3EDA9-DC83-A368-F430-96146D254BE2}"/>
+              </a:ext>
+            </a:extLst>
+          </p:cNvPr>
+          <p:cNvSpPr>
+            <a:spLocks noGrp="1"/>
+          </p:cNvSpPr>
+          <p:nvPr>
+            <p:ph type="body" idx="1"/>
+          </p:nvPr>
+        </p:nvSpPr>
+        <p:spPr/>
+        <p:txBody>
+          <a:bodyPr/>
+          <a:lstStyle/>
+          <a:p>
+            <a:endParaRPr lang="en-US" altLang="zh-TW" sz="1200" b="0" u="none" strike="noStrike" kern="1200" dirty="0">
+              <a:solidFill>
+                <a:schemeClr val="tx1"/>
+              </a:solidFill>
+              <a:effectLst/>
+              <a:latin typeface="+mn-lt"/>
+              <a:ea typeface="+mn-ea"/>
+              <a:cs typeface="+mn-cs"/>
+            </a:endParaRPr>
+          </a:p>
+        </p:txBody>
+      </p:sp>
+      <p:sp>
+        <p:nvSpPr>
+          <p:cNvPr id="4" name="投影片編號版面配置區 3">
+            <a:extLst>
+              <a:ext uri="{FF2B5EF4-FFF2-40B4-BE49-F238E27FC236}">
+                <a16:creationId xmlns:a16="http://schemas.microsoft.com/office/drawing/2014/main" id="{42FC81C7-7142-4DD4-03A7-698F97D97E3E}"/>
+              </a:ext>
+            </a:extLst>
+          </p:cNvPr>
+          <p:cNvSpPr>
+            <a:spLocks noGrp="1"/>
+          </p:cNvSpPr>
+          <p:nvPr>
+            <p:ph type="sldNum" sz="quarter" idx="5"/>
+          </p:nvPr>
+        </p:nvSpPr>
+        <p:spPr/>
+        <p:txBody>
+          <a:bodyPr/>
+          <a:lstStyle/>
+          <a:p>
+            <a:fld id="{E3A6CE5E-F349-486D-8749-82EF2AD71FA8}" type="slidenum">
+              <a:rPr lang="zh-TW" altLang="en-US" smtClean="0"/>
+              <a:t>4</a:t>
+            </a:fld>
+            <a:endParaRPr lang="zh-TW" altLang="en-US"/>
+          </a:p>
+        </p:txBody>
+      </p:sp>
+    </p:spTree>
+    <p:extLst>
+      <p:ext uri="{BB962C8B-B14F-4D97-AF65-F5344CB8AC3E}">
+        <p14:creationId xmlns:p14="http://schemas.microsoft.com/office/powerpoint/2010/main" val="4289749802"/>
+      </p:ext>
+    </p:extLst>
+  </p:cSld>
+  <p:clrMapOvr>
+    <a:masterClrMapping/>
+  </p:clrMapOvr>
+</p:notes>
+</file>
+
+<file path=ppt/notesSlides/notesSlide5.xml><?xml version="1.0" encoding="utf-8"?>
+<p:notes xmlns:a="http://schemas.openxmlformats.org/drawingml/2006/main" xmlns:r="http://schemas.openxmlformats.org/officeDocument/2006/relationships" xmlns:p="http://schemas.openxmlformats.org/presentationml/2006/main">
+  <p:cSld>
+    <p:spTree>
+      <p:nvGrpSpPr>
         <p:cNvPr id="1" name=""/>
         <p:cNvGrpSpPr/>
         <p:nvPr/>
@@ -3056,7 +3181,7 @@
           <a:p>
             <a:fld id="{E3A6CE5E-F349-486D-8749-82EF2AD71FA8}" type="slidenum">
               <a:rPr lang="zh-TW" altLang="en-US" smtClean="0"/>
-              <a:t>4</a:t>
+              <a:t>5</a:t>
             </a:fld>
             <a:endParaRPr lang="zh-TW" altLang="en-US"/>
           </a:p>
@@ -14129,6 +14254,1944 @@
 </file>
 
 <file path=ppt/slides/slide4.xml><?xml version="1.0" encoding="utf-8"?>
+<p:sld xmlns:a="http://schemas.openxmlformats.org/drawingml/2006/main" xmlns:r="http://schemas.openxmlformats.org/officeDocument/2006/relationships" xmlns:p="http://schemas.openxmlformats.org/presentationml/2006/main" show="0">
+  <p:cSld>
+    <p:spTree>
+      <p:nvGrpSpPr>
+        <p:cNvPr id="1" name="">
+          <a:extLst>
+            <a:ext uri="{FF2B5EF4-FFF2-40B4-BE49-F238E27FC236}">
+              <a16:creationId xmlns:a16="http://schemas.microsoft.com/office/drawing/2014/main" id="{706302FC-D0BC-02CC-8785-7DCA47DA675D}"/>
+            </a:ext>
+          </a:extLst>
+        </p:cNvPr>
+        <p:cNvGrpSpPr/>
+        <p:nvPr/>
+      </p:nvGrpSpPr>
+      <p:grpSpPr>
+        <a:xfrm>
+          <a:off x="0" y="0"/>
+          <a:ext cx="0" cy="0"/>
+          <a:chOff x="0" y="0"/>
+          <a:chExt cx="0" cy="0"/>
+        </a:xfrm>
+      </p:grpSpPr>
+      <p:cxnSp>
+        <p:nvCxnSpPr>
+          <p:cNvPr id="99" name="直線接點 98">
+            <a:extLst>
+              <a:ext uri="{FF2B5EF4-FFF2-40B4-BE49-F238E27FC236}">
+                <a16:creationId xmlns:a16="http://schemas.microsoft.com/office/drawing/2014/main" id="{EE80DDFA-3CE7-B459-F0CC-D3E55E2CF5DD}"/>
+              </a:ext>
+            </a:extLst>
+          </p:cNvPr>
+          <p:cNvCxnSpPr/>
+          <p:nvPr/>
+        </p:nvCxnSpPr>
+        <p:spPr>
+          <a:xfrm>
+            <a:off x="2843808" y="1412776"/>
+            <a:ext cx="3600400" cy="0"/>
+          </a:xfrm>
+          <a:prstGeom prst="line">
+            <a:avLst/>
+          </a:prstGeom>
+          <a:ln w="28575">
+            <a:solidFill>
+              <a:schemeClr val="accent4">
+                <a:lumMod val="20000"/>
+                <a:lumOff val="80000"/>
+              </a:schemeClr>
+            </a:solidFill>
+            <a:prstDash val="sysDash"/>
+          </a:ln>
+        </p:spPr>
+        <p:style>
+          <a:lnRef idx="1">
+            <a:schemeClr val="accent1"/>
+          </a:lnRef>
+          <a:fillRef idx="0">
+            <a:schemeClr val="accent1"/>
+          </a:fillRef>
+          <a:effectRef idx="0">
+            <a:schemeClr val="accent1"/>
+          </a:effectRef>
+          <a:fontRef idx="minor">
+            <a:schemeClr val="tx1"/>
+          </a:fontRef>
+        </p:style>
+      </p:cxnSp>
+      <p:sp>
+        <p:nvSpPr>
+          <p:cNvPr id="8" name="標題 1">
+            <a:extLst>
+              <a:ext uri="{FF2B5EF4-FFF2-40B4-BE49-F238E27FC236}">
+                <a16:creationId xmlns:a16="http://schemas.microsoft.com/office/drawing/2014/main" id="{3A44A353-E013-F042-6E3F-2889A8BF1DFC}"/>
+              </a:ext>
+            </a:extLst>
+          </p:cNvPr>
+          <p:cNvSpPr txBox="1">
+            <a:spLocks/>
+          </p:cNvSpPr>
+          <p:nvPr/>
+        </p:nvSpPr>
+        <p:spPr>
+          <a:xfrm>
+            <a:off x="179512" y="116632"/>
+            <a:ext cx="7713554" cy="612186"/>
+          </a:xfrm>
+          <a:prstGeom prst="rect">
+            <a:avLst/>
+          </a:prstGeom>
+        </p:spPr>
+        <p:txBody>
+          <a:bodyPr/>
+          <a:lstStyle>
+            <a:lvl1pPr algn="l" defTabSz="914400" rtl="0" eaLnBrk="1" latinLnBrk="0" hangingPunct="1">
+              <a:spcBef>
+                <a:spcPct val="0"/>
+              </a:spcBef>
+              <a:buNone/>
+              <a:defRPr sz="2400" kern="1200">
+                <a:solidFill>
+                  <a:schemeClr val="tx1"/>
+                </a:solidFill>
+                <a:latin typeface="+mj-lt"/>
+                <a:ea typeface="+mj-ea"/>
+                <a:cs typeface="+mj-cs"/>
+              </a:defRPr>
+            </a:lvl1pPr>
+          </a:lstStyle>
+          <a:p>
+            <a:r>
+              <a:rPr lang="en-US" altLang="zh-TW" sz="2800" dirty="0">
+                <a:latin typeface="Noto Sans HK" panose="020B0200000000000000" pitchFamily="34" charset="-120"/>
+                <a:ea typeface="Noto Sans HK" panose="020B0200000000000000" pitchFamily="34" charset="-120"/>
+                <a:cs typeface="Aharoni" panose="020F0502020204030204" pitchFamily="2" charset="-79"/>
+              </a:rPr>
+              <a:t>AI Infrastructure</a:t>
+            </a:r>
+          </a:p>
+          <a:p>
+            <a:r>
+              <a:rPr lang="en-US" altLang="zh-TW" sz="1400" dirty="0">
+                <a:latin typeface="Noto Sans HK" panose="020B0200000000000000" pitchFamily="34" charset="-120"/>
+                <a:ea typeface="Noto Sans HK" panose="020B0200000000000000" pitchFamily="34" charset="-120"/>
+                <a:cs typeface="Aharoni" panose="020F0502020204030204" pitchFamily="2" charset="-79"/>
+                <a:sym typeface="Wingdings" panose="05000000000000000000" pitchFamily="2" charset="2"/>
+              </a:rPr>
+              <a:t>.</a:t>
+            </a:r>
+          </a:p>
+          <a:p>
+            <a:pPr marL="285750" indent="-285750">
+              <a:buFontTx/>
+              <a:buChar char="-"/>
+            </a:pPr>
+            <a:endParaRPr lang="en-US" altLang="zh-TW" sz="1400" dirty="0">
+              <a:latin typeface="Noto Sans HK" panose="020B0200000000000000" pitchFamily="34" charset="-120"/>
+              <a:ea typeface="Noto Sans HK" panose="020B0200000000000000" pitchFamily="34" charset="-120"/>
+              <a:cs typeface="Arial" panose="020B0604020202020204" pitchFamily="34" charset="0"/>
+            </a:endParaRPr>
+          </a:p>
+        </p:txBody>
+      </p:sp>
+      <p:sp>
+        <p:nvSpPr>
+          <p:cNvPr id="72" name="文字方塊 71">
+            <a:extLst>
+              <a:ext uri="{FF2B5EF4-FFF2-40B4-BE49-F238E27FC236}">
+                <a16:creationId xmlns:a16="http://schemas.microsoft.com/office/drawing/2014/main" id="{6849A154-5F50-AB30-77D7-F15DFDD5B115}"/>
+              </a:ext>
+            </a:extLst>
+          </p:cNvPr>
+          <p:cNvSpPr txBox="1"/>
+          <p:nvPr/>
+        </p:nvSpPr>
+        <p:spPr>
+          <a:xfrm>
+            <a:off x="192112" y="5517232"/>
+            <a:ext cx="6252096" cy="1092607"/>
+          </a:xfrm>
+          <a:prstGeom prst="rect">
+            <a:avLst/>
+          </a:prstGeom>
+          <a:solidFill>
+            <a:schemeClr val="bg1">
+              <a:alpha val="90000"/>
+            </a:schemeClr>
+          </a:solidFill>
+        </p:spPr>
+        <p:txBody>
+          <a:bodyPr wrap="none">
+            <a:spAutoFit/>
+          </a:bodyPr>
+          <a:lstStyle/>
+          <a:p>
+            <a:pPr>
+              <a:lnSpc>
+                <a:spcPts val="1800"/>
+              </a:lnSpc>
+              <a:spcBef>
+                <a:spcPts val="600"/>
+              </a:spcBef>
+              <a:spcAft>
+                <a:spcPts val="600"/>
+              </a:spcAft>
+              <a:buNone/>
+            </a:pPr>
+            <a:r>
+              <a:rPr lang="en-US" altLang="zh-TW" sz="2000" b="1" u="none" strike="noStrike" dirty="0">
+                <a:effectLst/>
+              </a:rPr>
+              <a:t>Conclusion</a:t>
+            </a:r>
+          </a:p>
+          <a:p>
+            <a:pPr marL="285750" indent="-285750">
+              <a:lnSpc>
+                <a:spcPts val="1800"/>
+              </a:lnSpc>
+              <a:spcBef>
+                <a:spcPts val="600"/>
+              </a:spcBef>
+              <a:spcAft>
+                <a:spcPts val="600"/>
+              </a:spcAft>
+              <a:buFont typeface="Wingdings" panose="05000000000000000000" pitchFamily="2" charset="2"/>
+              <a:buChar char="Ø"/>
+            </a:pPr>
+            <a:r>
+              <a:rPr lang="en-US" altLang="zh-TW" sz="1600" b="1" dirty="0"/>
+              <a:t>Model Converge:</a:t>
+            </a:r>
+            <a:r>
+              <a:rPr lang="en-US" altLang="zh-TW" sz="1600" dirty="0"/>
+              <a:t> Parameters, cost, power.</a:t>
+            </a:r>
+          </a:p>
+          <a:p>
+            <a:pPr marL="285750" indent="-285750">
+              <a:lnSpc>
+                <a:spcPts val="1800"/>
+              </a:lnSpc>
+              <a:spcBef>
+                <a:spcPts val="600"/>
+              </a:spcBef>
+              <a:spcAft>
+                <a:spcPts val="600"/>
+              </a:spcAft>
+              <a:buFont typeface="Wingdings" panose="05000000000000000000" pitchFamily="2" charset="2"/>
+              <a:buChar char="Ø"/>
+            </a:pPr>
+            <a:r>
+              <a:rPr lang="en-US" altLang="zh-TW" sz="1600" b="1" dirty="0"/>
+              <a:t>Nobel Physics 2024:</a:t>
+            </a:r>
+            <a:r>
+              <a:rPr lang="en-US" altLang="zh-TW" sz="1600" dirty="0"/>
+              <a:t> MLP= BM(physics) + Backpropagation(Hinton).</a:t>
+            </a:r>
+          </a:p>
+        </p:txBody>
+      </p:sp>
+      <p:sp>
+        <p:nvSpPr>
+          <p:cNvPr id="18" name="橢圓 17">
+            <a:extLst>
+              <a:ext uri="{FF2B5EF4-FFF2-40B4-BE49-F238E27FC236}">
+                <a16:creationId xmlns:a16="http://schemas.microsoft.com/office/drawing/2014/main" id="{E1B9C56C-DF0C-41F5-B2F3-B6B130762027}"/>
+              </a:ext>
+            </a:extLst>
+          </p:cNvPr>
+          <p:cNvSpPr/>
+          <p:nvPr/>
+        </p:nvSpPr>
+        <p:spPr>
+          <a:xfrm>
+            <a:off x="5169345" y="5641786"/>
+            <a:ext cx="495818" cy="447885"/>
+          </a:xfrm>
+          <a:prstGeom prst="ellipse">
+            <a:avLst/>
+          </a:prstGeom>
+          <a:solidFill>
+            <a:schemeClr val="accent1">
+              <a:lumMod val="20000"/>
+              <a:lumOff val="80000"/>
+              <a:alpha val="70000"/>
+            </a:schemeClr>
+          </a:solidFill>
+          <a:ln w="31750">
+            <a:solidFill>
+              <a:schemeClr val="bg1">
+                <a:lumMod val="75000"/>
+              </a:schemeClr>
+            </a:solidFill>
+          </a:ln>
+        </p:spPr>
+        <p:style>
+          <a:lnRef idx="2">
+            <a:schemeClr val="accent1">
+              <a:shade val="15000"/>
+            </a:schemeClr>
+          </a:lnRef>
+          <a:fillRef idx="1">
+            <a:schemeClr val="accent1"/>
+          </a:fillRef>
+          <a:effectRef idx="0">
+            <a:schemeClr val="accent1"/>
+          </a:effectRef>
+          <a:fontRef idx="minor">
+            <a:schemeClr val="lt1"/>
+          </a:fontRef>
+        </p:style>
+        <p:txBody>
+          <a:bodyPr wrap="none" lIns="0" tIns="0" rIns="0" bIns="0" rtlCol="0" anchor="ctr" anchorCtr="1"/>
+          <a:lstStyle/>
+          <a:p>
+            <a:pPr algn="ctr"/>
+            <a:r>
+              <a:rPr lang="en-US" altLang="zh-TW" sz="1000" dirty="0">
+                <a:solidFill>
+                  <a:schemeClr val="tx1"/>
+                </a:solidFill>
+                <a:latin typeface="ADLaM Display" panose="02010000000000000000" pitchFamily="2" charset="0"/>
+                <a:ea typeface="ADLaM Display" panose="02010000000000000000" pitchFamily="2" charset="0"/>
+                <a:cs typeface="ADLaM Display" panose="02010000000000000000" pitchFamily="2" charset="0"/>
+              </a:rPr>
+              <a:t>Gemma</a:t>
+            </a:r>
+          </a:p>
+          <a:p>
+            <a:pPr algn="ctr"/>
+            <a:r>
+              <a:rPr lang="en-US" altLang="zh-TW" sz="1000" dirty="0">
+                <a:solidFill>
+                  <a:schemeClr val="tx1"/>
+                </a:solidFill>
+                <a:latin typeface="ADLaM Display" panose="02010000000000000000" pitchFamily="2" charset="0"/>
+                <a:ea typeface="ADLaM Display" panose="02010000000000000000" pitchFamily="2" charset="0"/>
+                <a:cs typeface="ADLaM Display" panose="02010000000000000000" pitchFamily="2" charset="0"/>
+              </a:rPr>
+              <a:t>4</a:t>
+            </a:r>
+          </a:p>
+        </p:txBody>
+      </p:sp>
+      <p:sp>
+        <p:nvSpPr>
+          <p:cNvPr id="56" name="橢圓 55">
+            <a:extLst>
+              <a:ext uri="{FF2B5EF4-FFF2-40B4-BE49-F238E27FC236}">
+                <a16:creationId xmlns:a16="http://schemas.microsoft.com/office/drawing/2014/main" id="{58CC6E29-095F-1EFA-8B3D-30C3984AD0C4}"/>
+              </a:ext>
+            </a:extLst>
+          </p:cNvPr>
+          <p:cNvSpPr/>
+          <p:nvPr/>
+        </p:nvSpPr>
+        <p:spPr>
+          <a:xfrm>
+            <a:off x="1148091" y="2564904"/>
+            <a:ext cx="389945" cy="414562"/>
+          </a:xfrm>
+          <a:prstGeom prst="ellipse">
+            <a:avLst/>
+          </a:prstGeom>
+          <a:solidFill>
+            <a:schemeClr val="accent4">
+              <a:lumMod val="20000"/>
+              <a:lumOff val="80000"/>
+              <a:alpha val="70000"/>
+            </a:schemeClr>
+          </a:solidFill>
+          <a:ln w="31750">
+            <a:solidFill>
+              <a:schemeClr val="bg1">
+                <a:lumMod val="75000"/>
+              </a:schemeClr>
+            </a:solidFill>
+          </a:ln>
+        </p:spPr>
+        <p:style>
+          <a:lnRef idx="2">
+            <a:schemeClr val="accent1">
+              <a:shade val="15000"/>
+            </a:schemeClr>
+          </a:lnRef>
+          <a:fillRef idx="1">
+            <a:schemeClr val="accent1"/>
+          </a:fillRef>
+          <a:effectRef idx="0">
+            <a:schemeClr val="accent1"/>
+          </a:effectRef>
+          <a:fontRef idx="minor">
+            <a:schemeClr val="lt1"/>
+          </a:fontRef>
+        </p:style>
+        <p:txBody>
+          <a:bodyPr wrap="none" lIns="0" tIns="36000" rIns="0" bIns="0" rtlCol="0" anchor="ctr" anchorCtr="1"/>
+          <a:lstStyle/>
+          <a:p>
+            <a:pPr algn="ctr">
+              <a:lnSpc>
+                <a:spcPts val="1000"/>
+              </a:lnSpc>
+            </a:pPr>
+            <a:r>
+              <a:rPr lang="en-US" altLang="zh-TW" sz="1000" dirty="0">
+                <a:solidFill>
+                  <a:schemeClr val="tx1"/>
+                </a:solidFill>
+                <a:latin typeface="ADLaM Display" panose="02010000000000000000" pitchFamily="2" charset="0"/>
+                <a:ea typeface="ADLaM Display" panose="02010000000000000000" pitchFamily="2" charset="0"/>
+                <a:cs typeface="ADLaM Display" panose="02010000000000000000" pitchFamily="2" charset="0"/>
+              </a:rPr>
+              <a:t>Mamba</a:t>
+            </a:r>
+          </a:p>
+          <a:p>
+            <a:pPr algn="ctr"/>
+            <a:r>
+              <a:rPr lang="en-US" altLang="zh-TW" sz="800" dirty="0">
+                <a:solidFill>
+                  <a:schemeClr val="tx1"/>
+                </a:solidFill>
+                <a:ea typeface="ADLaM Display" panose="02010000000000000000" pitchFamily="2" charset="0"/>
+                <a:cs typeface="ADLaM Display" panose="02010000000000000000" pitchFamily="2" charset="0"/>
+              </a:rPr>
+              <a:t>2023</a:t>
+            </a:r>
+          </a:p>
+        </p:txBody>
+      </p:sp>
+      <p:sp>
+        <p:nvSpPr>
+          <p:cNvPr id="58" name="橢圓 57">
+            <a:extLst>
+              <a:ext uri="{FF2B5EF4-FFF2-40B4-BE49-F238E27FC236}">
+                <a16:creationId xmlns:a16="http://schemas.microsoft.com/office/drawing/2014/main" id="{892E27DD-A637-F4D4-06F1-72E8D624F2BE}"/>
+              </a:ext>
+            </a:extLst>
+          </p:cNvPr>
+          <p:cNvSpPr/>
+          <p:nvPr/>
+        </p:nvSpPr>
+        <p:spPr>
+          <a:xfrm>
+            <a:off x="1043608" y="3159034"/>
+            <a:ext cx="598913" cy="557998"/>
+          </a:xfrm>
+          <a:prstGeom prst="ellipse">
+            <a:avLst/>
+          </a:prstGeom>
+          <a:solidFill>
+            <a:schemeClr val="accent4">
+              <a:lumMod val="20000"/>
+              <a:lumOff val="80000"/>
+              <a:alpha val="70000"/>
+            </a:schemeClr>
+          </a:solidFill>
+          <a:ln w="31750">
+            <a:solidFill>
+              <a:schemeClr val="bg1">
+                <a:lumMod val="75000"/>
+              </a:schemeClr>
+            </a:solidFill>
+          </a:ln>
+        </p:spPr>
+        <p:style>
+          <a:lnRef idx="2">
+            <a:schemeClr val="accent1">
+              <a:shade val="15000"/>
+            </a:schemeClr>
+          </a:lnRef>
+          <a:fillRef idx="1">
+            <a:schemeClr val="accent1"/>
+          </a:fillRef>
+          <a:effectRef idx="0">
+            <a:schemeClr val="accent1"/>
+          </a:effectRef>
+          <a:fontRef idx="minor">
+            <a:schemeClr val="lt1"/>
+          </a:fontRef>
+        </p:style>
+        <p:txBody>
+          <a:bodyPr wrap="none" lIns="0" tIns="36000" rIns="0" bIns="0" rtlCol="0" anchor="ctr" anchorCtr="1"/>
+          <a:lstStyle/>
+          <a:p>
+            <a:pPr algn="ctr">
+              <a:lnSpc>
+                <a:spcPts val="1000"/>
+              </a:lnSpc>
+            </a:pPr>
+            <a:r>
+              <a:rPr lang="en-US" altLang="zh-TW" sz="1000" dirty="0">
+                <a:solidFill>
+                  <a:schemeClr val="tx1"/>
+                </a:solidFill>
+                <a:latin typeface="ADLaM Display" panose="02010000000000000000" pitchFamily="2" charset="0"/>
+                <a:ea typeface="ADLaM Display" panose="02010000000000000000" pitchFamily="2" charset="0"/>
+                <a:cs typeface="ADLaM Display" panose="02010000000000000000" pitchFamily="2" charset="0"/>
+              </a:rPr>
+              <a:t>Flash Attention</a:t>
+            </a:r>
+          </a:p>
+          <a:p>
+            <a:pPr algn="ctr">
+              <a:lnSpc>
+                <a:spcPts val="1000"/>
+              </a:lnSpc>
+            </a:pPr>
+            <a:r>
+              <a:rPr lang="en-US" altLang="zh-TW" sz="1000" dirty="0">
+                <a:solidFill>
+                  <a:schemeClr val="tx1"/>
+                </a:solidFill>
+                <a:ea typeface="ADLaM Display" panose="02010000000000000000" pitchFamily="2" charset="0"/>
+                <a:cs typeface="ADLaM Display" panose="02010000000000000000" pitchFamily="2" charset="0"/>
+              </a:rPr>
+              <a:t>FA1 ~ FA4</a:t>
+            </a:r>
+          </a:p>
+          <a:p>
+            <a:pPr algn="ctr">
+              <a:lnSpc>
+                <a:spcPts val="1000"/>
+              </a:lnSpc>
+            </a:pPr>
+            <a:r>
+              <a:rPr lang="en-US" altLang="zh-TW" sz="1000" dirty="0">
+                <a:solidFill>
+                  <a:schemeClr val="tx1"/>
+                </a:solidFill>
+                <a:ea typeface="ADLaM Display" panose="02010000000000000000" pitchFamily="2" charset="0"/>
+                <a:cs typeface="ADLaM Display" panose="02010000000000000000" pitchFamily="2" charset="0"/>
+              </a:rPr>
+              <a:t>Dao-AILab</a:t>
+            </a:r>
+          </a:p>
+        </p:txBody>
+      </p:sp>
+      <p:sp>
+        <p:nvSpPr>
+          <p:cNvPr id="60" name="橢圓 59">
+            <a:extLst>
+              <a:ext uri="{FF2B5EF4-FFF2-40B4-BE49-F238E27FC236}">
+                <a16:creationId xmlns:a16="http://schemas.microsoft.com/office/drawing/2014/main" id="{78B9C38D-C5AF-B68A-9F1C-2CD3CE556C07}"/>
+              </a:ext>
+            </a:extLst>
+          </p:cNvPr>
+          <p:cNvSpPr/>
+          <p:nvPr/>
+        </p:nvSpPr>
+        <p:spPr>
+          <a:xfrm>
+            <a:off x="1043609" y="3861048"/>
+            <a:ext cx="598912" cy="557997"/>
+          </a:xfrm>
+          <a:prstGeom prst="ellipse">
+            <a:avLst/>
+          </a:prstGeom>
+          <a:solidFill>
+            <a:schemeClr val="accent4">
+              <a:lumMod val="20000"/>
+              <a:lumOff val="80000"/>
+              <a:alpha val="70000"/>
+            </a:schemeClr>
+          </a:solidFill>
+          <a:ln w="31750">
+            <a:solidFill>
+              <a:schemeClr val="bg1">
+                <a:lumMod val="75000"/>
+              </a:schemeClr>
+            </a:solidFill>
+          </a:ln>
+        </p:spPr>
+        <p:style>
+          <a:lnRef idx="2">
+            <a:schemeClr val="accent1">
+              <a:shade val="15000"/>
+            </a:schemeClr>
+          </a:lnRef>
+          <a:fillRef idx="1">
+            <a:schemeClr val="accent1"/>
+          </a:fillRef>
+          <a:effectRef idx="0">
+            <a:schemeClr val="accent1"/>
+          </a:effectRef>
+          <a:fontRef idx="minor">
+            <a:schemeClr val="lt1"/>
+          </a:fontRef>
+        </p:style>
+        <p:txBody>
+          <a:bodyPr wrap="none" lIns="0" tIns="36000" rIns="0" bIns="0" rtlCol="0" anchor="ctr" anchorCtr="1"/>
+          <a:lstStyle/>
+          <a:p>
+            <a:pPr algn="ctr">
+              <a:lnSpc>
+                <a:spcPts val="1000"/>
+              </a:lnSpc>
+            </a:pPr>
+            <a:r>
+              <a:rPr lang="en-US" altLang="zh-TW" sz="1000" dirty="0">
+                <a:solidFill>
+                  <a:schemeClr val="tx1"/>
+                </a:solidFill>
+                <a:latin typeface="ADLaM Display" panose="02010000000000000000" pitchFamily="2" charset="0"/>
+                <a:ea typeface="ADLaM Display" panose="02010000000000000000" pitchFamily="2" charset="0"/>
+                <a:cs typeface="ADLaM Display" panose="02010000000000000000" pitchFamily="2" charset="0"/>
+              </a:rPr>
+              <a:t>NB</a:t>
+            </a:r>
+          </a:p>
+          <a:p>
+            <a:pPr algn="ctr"/>
+            <a:r>
+              <a:rPr lang="en-US" altLang="zh-TW" sz="800" dirty="0">
+                <a:solidFill>
+                  <a:schemeClr val="tx1"/>
+                </a:solidFill>
+                <a:ea typeface="ADLaM Display" panose="02010000000000000000" pitchFamily="2" charset="0"/>
+                <a:cs typeface="ADLaM Display" panose="02010000000000000000" pitchFamily="2" charset="0"/>
+              </a:rPr>
+              <a:t>2026</a:t>
+            </a:r>
+          </a:p>
+        </p:txBody>
+      </p:sp>
+      <p:sp>
+        <p:nvSpPr>
+          <p:cNvPr id="64" name="橢圓 63">
+            <a:extLst>
+              <a:ext uri="{FF2B5EF4-FFF2-40B4-BE49-F238E27FC236}">
+                <a16:creationId xmlns:a16="http://schemas.microsoft.com/office/drawing/2014/main" id="{2DDFA83B-C4FD-D720-6D2F-11F9E59F4A16}"/>
+              </a:ext>
+            </a:extLst>
+          </p:cNvPr>
+          <p:cNvSpPr/>
+          <p:nvPr/>
+        </p:nvSpPr>
+        <p:spPr>
+          <a:xfrm>
+            <a:off x="1148090" y="1205495"/>
+            <a:ext cx="389945" cy="414562"/>
+          </a:xfrm>
+          <a:prstGeom prst="ellipse">
+            <a:avLst/>
+          </a:prstGeom>
+          <a:solidFill>
+            <a:schemeClr val="accent4">
+              <a:lumMod val="20000"/>
+              <a:lumOff val="80000"/>
+              <a:alpha val="70000"/>
+            </a:schemeClr>
+          </a:solidFill>
+          <a:ln w="31750">
+            <a:solidFill>
+              <a:schemeClr val="bg1">
+                <a:lumMod val="75000"/>
+              </a:schemeClr>
+            </a:solidFill>
+          </a:ln>
+        </p:spPr>
+        <p:style>
+          <a:lnRef idx="2">
+            <a:schemeClr val="accent1">
+              <a:shade val="15000"/>
+            </a:schemeClr>
+          </a:lnRef>
+          <a:fillRef idx="1">
+            <a:schemeClr val="accent1"/>
+          </a:fillRef>
+          <a:effectRef idx="0">
+            <a:schemeClr val="accent1"/>
+          </a:effectRef>
+          <a:fontRef idx="minor">
+            <a:schemeClr val="lt1"/>
+          </a:fontRef>
+        </p:style>
+        <p:txBody>
+          <a:bodyPr wrap="none" lIns="0" tIns="36000" rIns="0" bIns="0" rtlCol="0" anchor="ctr" anchorCtr="1"/>
+          <a:lstStyle/>
+          <a:p>
+            <a:pPr algn="ctr">
+              <a:lnSpc>
+                <a:spcPts val="1000"/>
+              </a:lnSpc>
+            </a:pPr>
+            <a:r>
+              <a:rPr lang="en-US" altLang="zh-TW" sz="1000" dirty="0">
+                <a:solidFill>
+                  <a:schemeClr val="tx1"/>
+                </a:solidFill>
+                <a:latin typeface="ADLaM Display" panose="02010000000000000000" pitchFamily="2" charset="0"/>
+                <a:ea typeface="ADLaM Display" panose="02010000000000000000" pitchFamily="2" charset="0"/>
+                <a:cs typeface="ADLaM Display" panose="02010000000000000000" pitchFamily="2" charset="0"/>
+              </a:rPr>
+              <a:t>SSM</a:t>
+            </a:r>
+          </a:p>
+          <a:p>
+            <a:pPr algn="ctr"/>
+            <a:r>
+              <a:rPr lang="en-US" altLang="zh-TW" sz="800" dirty="0">
+                <a:solidFill>
+                  <a:schemeClr val="tx1"/>
+                </a:solidFill>
+                <a:ea typeface="ADLaM Display" panose="02010000000000000000" pitchFamily="2" charset="0"/>
+                <a:cs typeface="ADLaM Display" panose="02010000000000000000" pitchFamily="2" charset="0"/>
+              </a:rPr>
+              <a:t>1970</a:t>
+            </a:r>
+          </a:p>
+        </p:txBody>
+      </p:sp>
+      <p:sp>
+        <p:nvSpPr>
+          <p:cNvPr id="75" name="橢圓 74">
+            <a:extLst>
+              <a:ext uri="{FF2B5EF4-FFF2-40B4-BE49-F238E27FC236}">
+                <a16:creationId xmlns:a16="http://schemas.microsoft.com/office/drawing/2014/main" id="{16932FEF-28BF-7A85-5710-D3B5672D7B52}"/>
+              </a:ext>
+            </a:extLst>
+          </p:cNvPr>
+          <p:cNvSpPr/>
+          <p:nvPr/>
+        </p:nvSpPr>
+        <p:spPr>
+          <a:xfrm>
+            <a:off x="5820242" y="5645411"/>
+            <a:ext cx="495818" cy="447885"/>
+          </a:xfrm>
+          <a:prstGeom prst="ellipse">
+            <a:avLst/>
+          </a:prstGeom>
+          <a:solidFill>
+            <a:schemeClr val="accent1">
+              <a:lumMod val="20000"/>
+              <a:lumOff val="80000"/>
+              <a:alpha val="70000"/>
+            </a:schemeClr>
+          </a:solidFill>
+          <a:ln w="31750">
+            <a:solidFill>
+              <a:schemeClr val="bg1">
+                <a:lumMod val="75000"/>
+              </a:schemeClr>
+            </a:solidFill>
+          </a:ln>
+        </p:spPr>
+        <p:style>
+          <a:lnRef idx="2">
+            <a:schemeClr val="accent1">
+              <a:shade val="15000"/>
+            </a:schemeClr>
+          </a:lnRef>
+          <a:fillRef idx="1">
+            <a:schemeClr val="accent1"/>
+          </a:fillRef>
+          <a:effectRef idx="0">
+            <a:schemeClr val="accent1"/>
+          </a:effectRef>
+          <a:fontRef idx="minor">
+            <a:schemeClr val="lt1"/>
+          </a:fontRef>
+        </p:style>
+        <p:txBody>
+          <a:bodyPr wrap="none" lIns="0" tIns="0" rIns="0" bIns="0" rtlCol="0" anchor="ctr" anchorCtr="1"/>
+          <a:lstStyle/>
+          <a:p>
+            <a:pPr algn="ctr"/>
+            <a:r>
+              <a:rPr lang="en-US" altLang="zh-TW" sz="1000" dirty="0">
+                <a:solidFill>
+                  <a:schemeClr val="tx1"/>
+                </a:solidFill>
+                <a:latin typeface="ADLaM Display" panose="02010000000000000000" pitchFamily="2" charset="0"/>
+                <a:ea typeface="ADLaM Display" panose="02010000000000000000" pitchFamily="2" charset="0"/>
+                <a:cs typeface="ADLaM Display" panose="02010000000000000000" pitchFamily="2" charset="0"/>
+              </a:rPr>
+              <a:t>MS Phi</a:t>
+            </a:r>
+          </a:p>
+          <a:p>
+            <a:pPr algn="ctr"/>
+            <a:r>
+              <a:rPr lang="en-US" altLang="zh-TW" sz="1000" dirty="0">
+                <a:solidFill>
+                  <a:schemeClr val="tx1"/>
+                </a:solidFill>
+                <a:latin typeface="ADLaM Display" panose="02010000000000000000" pitchFamily="2" charset="0"/>
+                <a:ea typeface="ADLaM Display" panose="02010000000000000000" pitchFamily="2" charset="0"/>
+                <a:cs typeface="ADLaM Display" panose="02010000000000000000" pitchFamily="2" charset="0"/>
+              </a:rPr>
+              <a:t>4-mini</a:t>
+            </a:r>
+          </a:p>
+        </p:txBody>
+      </p:sp>
+      <p:sp>
+        <p:nvSpPr>
+          <p:cNvPr id="78" name="橢圓 77">
+            <a:extLst>
+              <a:ext uri="{FF2B5EF4-FFF2-40B4-BE49-F238E27FC236}">
+                <a16:creationId xmlns:a16="http://schemas.microsoft.com/office/drawing/2014/main" id="{78989110-2484-E2BA-99F9-A343277288E5}"/>
+              </a:ext>
+            </a:extLst>
+          </p:cNvPr>
+          <p:cNvSpPr/>
+          <p:nvPr/>
+        </p:nvSpPr>
+        <p:spPr>
+          <a:xfrm>
+            <a:off x="6452446" y="5638161"/>
+            <a:ext cx="495818" cy="447885"/>
+          </a:xfrm>
+          <a:prstGeom prst="ellipse">
+            <a:avLst/>
+          </a:prstGeom>
+          <a:solidFill>
+            <a:schemeClr val="accent1">
+              <a:lumMod val="20000"/>
+              <a:lumOff val="80000"/>
+              <a:alpha val="70000"/>
+            </a:schemeClr>
+          </a:solidFill>
+          <a:ln w="31750">
+            <a:solidFill>
+              <a:schemeClr val="bg1">
+                <a:lumMod val="75000"/>
+              </a:schemeClr>
+            </a:solidFill>
+          </a:ln>
+        </p:spPr>
+        <p:style>
+          <a:lnRef idx="2">
+            <a:schemeClr val="accent1">
+              <a:shade val="15000"/>
+            </a:schemeClr>
+          </a:lnRef>
+          <a:fillRef idx="1">
+            <a:schemeClr val="accent1"/>
+          </a:fillRef>
+          <a:effectRef idx="0">
+            <a:schemeClr val="accent1"/>
+          </a:effectRef>
+          <a:fontRef idx="minor">
+            <a:schemeClr val="lt1"/>
+          </a:fontRef>
+        </p:style>
+        <p:txBody>
+          <a:bodyPr wrap="none" lIns="0" tIns="0" rIns="0" bIns="0" rtlCol="0" anchor="ctr" anchorCtr="1"/>
+          <a:lstStyle/>
+          <a:p>
+            <a:pPr algn="ctr"/>
+            <a:r>
+              <a:rPr lang="en-US" altLang="zh-TW" sz="1000" dirty="0">
+                <a:solidFill>
+                  <a:schemeClr val="tx1"/>
+                </a:solidFill>
+                <a:latin typeface="ADLaM Display" panose="02010000000000000000" pitchFamily="2" charset="0"/>
+                <a:ea typeface="ADLaM Display" panose="02010000000000000000" pitchFamily="2" charset="0"/>
+                <a:cs typeface="ADLaM Display" panose="02010000000000000000" pitchFamily="2" charset="0"/>
+              </a:rPr>
+              <a:t>Llama</a:t>
+            </a:r>
+          </a:p>
+          <a:p>
+            <a:pPr algn="ctr"/>
+            <a:r>
+              <a:rPr lang="en-US" altLang="zh-TW" sz="1000" dirty="0">
+                <a:solidFill>
+                  <a:schemeClr val="tx1"/>
+                </a:solidFill>
+                <a:latin typeface="ADLaM Display" panose="02010000000000000000" pitchFamily="2" charset="0"/>
+                <a:ea typeface="ADLaM Display" panose="02010000000000000000" pitchFamily="2" charset="0"/>
+                <a:cs typeface="ADLaM Display" panose="02010000000000000000" pitchFamily="2" charset="0"/>
+              </a:rPr>
+              <a:t>4</a:t>
+            </a:r>
+          </a:p>
+        </p:txBody>
+      </p:sp>
+      <p:sp>
+        <p:nvSpPr>
+          <p:cNvPr id="5" name="梯形 4">
+            <a:extLst>
+              <a:ext uri="{FF2B5EF4-FFF2-40B4-BE49-F238E27FC236}">
+                <a16:creationId xmlns:a16="http://schemas.microsoft.com/office/drawing/2014/main" id="{5417A936-FD4D-D4E4-E859-B0375CDA41B9}"/>
+              </a:ext>
+            </a:extLst>
+          </p:cNvPr>
+          <p:cNvSpPr/>
+          <p:nvPr/>
+        </p:nvSpPr>
+        <p:spPr>
+          <a:xfrm>
+            <a:off x="2951496" y="3586728"/>
+            <a:ext cx="1044440" cy="442126"/>
+          </a:xfrm>
+          <a:prstGeom prst="trapezoid">
+            <a:avLst>
+              <a:gd name="adj" fmla="val 0"/>
+            </a:avLst>
+          </a:prstGeom>
+          <a:solidFill>
+            <a:schemeClr val="bg1">
+              <a:lumMod val="95000"/>
+              <a:alpha val="70000"/>
+            </a:schemeClr>
+          </a:solidFill>
+          <a:ln w="25400">
+            <a:solidFill>
+              <a:schemeClr val="bg1">
+                <a:lumMod val="75000"/>
+              </a:schemeClr>
+            </a:solidFill>
+          </a:ln>
+        </p:spPr>
+        <p:style>
+          <a:lnRef idx="2">
+            <a:schemeClr val="accent1">
+              <a:shade val="15000"/>
+            </a:schemeClr>
+          </a:lnRef>
+          <a:fillRef idx="1">
+            <a:schemeClr val="accent1"/>
+          </a:fillRef>
+          <a:effectRef idx="0">
+            <a:schemeClr val="accent1"/>
+          </a:effectRef>
+          <a:fontRef idx="minor">
+            <a:schemeClr val="lt1"/>
+          </a:fontRef>
+        </p:style>
+        <p:txBody>
+          <a:bodyPr wrap="none" lIns="0" tIns="0" rIns="0" bIns="0" rtlCol="0" anchor="ctr" anchorCtr="1"/>
+          <a:lstStyle/>
+          <a:p>
+            <a:pPr algn="ctr"/>
+            <a:r>
+              <a:rPr lang="en-US" altLang="zh-TW" sz="1200" b="1" dirty="0">
+                <a:solidFill>
+                  <a:schemeClr val="accent1">
+                    <a:lumMod val="50000"/>
+                  </a:schemeClr>
+                </a:solidFill>
+                <a:cs typeface="ADLaM Display" panose="02010000000000000000" pitchFamily="2" charset="0"/>
+              </a:rPr>
+              <a:t>Tensor RT-LLM</a:t>
+            </a:r>
+            <a:br>
+              <a:rPr lang="en-US" altLang="zh-TW" sz="1200" dirty="0">
+                <a:solidFill>
+                  <a:schemeClr val="accent1">
+                    <a:lumMod val="50000"/>
+                  </a:schemeClr>
+                </a:solidFill>
+                <a:cs typeface="ADLaM Display" panose="02010000000000000000" pitchFamily="2" charset="0"/>
+              </a:rPr>
+            </a:br>
+            <a:r>
+              <a:rPr lang="en-US" altLang="zh-TW" sz="1200" dirty="0">
+                <a:solidFill>
+                  <a:schemeClr val="accent1">
+                    <a:lumMod val="50000"/>
+                  </a:schemeClr>
+                </a:solidFill>
+                <a:cs typeface="ADLaM Display" panose="02010000000000000000" pitchFamily="2" charset="0"/>
+              </a:rPr>
+              <a:t>NVIDIA</a:t>
+            </a:r>
+            <a:endParaRPr lang="zh-TW" altLang="en-US" sz="1200" dirty="0">
+              <a:solidFill>
+                <a:schemeClr val="accent1">
+                  <a:lumMod val="50000"/>
+                </a:schemeClr>
+              </a:solidFill>
+              <a:cs typeface="ADLaM Display" panose="02010000000000000000" pitchFamily="2" charset="0"/>
+            </a:endParaRPr>
+          </a:p>
+        </p:txBody>
+      </p:sp>
+      <p:sp>
+        <p:nvSpPr>
+          <p:cNvPr id="7" name="梯形 6">
+            <a:extLst>
+              <a:ext uri="{FF2B5EF4-FFF2-40B4-BE49-F238E27FC236}">
+                <a16:creationId xmlns:a16="http://schemas.microsoft.com/office/drawing/2014/main" id="{7CDD6906-A69D-911C-BABA-CF739FAA9D17}"/>
+              </a:ext>
+            </a:extLst>
+          </p:cNvPr>
+          <p:cNvSpPr/>
+          <p:nvPr/>
+        </p:nvSpPr>
+        <p:spPr>
+          <a:xfrm>
+            <a:off x="2951496" y="2902770"/>
+            <a:ext cx="1044440" cy="442126"/>
+          </a:xfrm>
+          <a:prstGeom prst="trapezoid">
+            <a:avLst>
+              <a:gd name="adj" fmla="val 0"/>
+            </a:avLst>
+          </a:prstGeom>
+          <a:solidFill>
+            <a:schemeClr val="bg1">
+              <a:lumMod val="95000"/>
+              <a:alpha val="70000"/>
+            </a:schemeClr>
+          </a:solidFill>
+          <a:ln w="25400">
+            <a:solidFill>
+              <a:schemeClr val="bg1">
+                <a:lumMod val="75000"/>
+              </a:schemeClr>
+            </a:solidFill>
+          </a:ln>
+        </p:spPr>
+        <p:style>
+          <a:lnRef idx="2">
+            <a:schemeClr val="accent1">
+              <a:shade val="15000"/>
+            </a:schemeClr>
+          </a:lnRef>
+          <a:fillRef idx="1">
+            <a:schemeClr val="accent1"/>
+          </a:fillRef>
+          <a:effectRef idx="0">
+            <a:schemeClr val="accent1"/>
+          </a:effectRef>
+          <a:fontRef idx="minor">
+            <a:schemeClr val="lt1"/>
+          </a:fontRef>
+        </p:style>
+        <p:txBody>
+          <a:bodyPr wrap="none" lIns="0" tIns="0" rIns="0" bIns="0" rtlCol="0" anchor="ctr" anchorCtr="1"/>
+          <a:lstStyle/>
+          <a:p>
+            <a:pPr marL="0" marR="0" lvl="0" indent="0" algn="ctr" defTabSz="914400" rtl="0" eaLnBrk="1" fontAlgn="auto" latinLnBrk="0" hangingPunct="1">
+              <a:lnSpc>
+                <a:spcPct val="100000"/>
+              </a:lnSpc>
+              <a:spcBef>
+                <a:spcPts val="0"/>
+              </a:spcBef>
+              <a:spcAft>
+                <a:spcPts val="0"/>
+              </a:spcAft>
+              <a:buClrTx/>
+              <a:buSzTx/>
+              <a:buFontTx/>
+              <a:buNone/>
+              <a:tabLst/>
+              <a:defRPr/>
+            </a:pPr>
+            <a:r>
+              <a:rPr kumimoji="0" lang="en-US" altLang="zh-TW" sz="1200" b="1" i="0" u="none" strike="noStrike" kern="1200" cap="none" spc="0" normalizeH="0" baseline="0" noProof="0" dirty="0">
+                <a:ln>
+                  <a:noFill/>
+                </a:ln>
+                <a:solidFill>
+                  <a:srgbClr val="4F81BD">
+                    <a:lumMod val="50000"/>
+                  </a:srgbClr>
+                </a:solidFill>
+                <a:effectLst/>
+                <a:uLnTx/>
+                <a:uFillTx/>
+                <a:ea typeface="新細明體" panose="02020500000000000000" pitchFamily="18" charset="-120"/>
+                <a:cs typeface="ADLaM Display" panose="02010000000000000000" pitchFamily="2" charset="0"/>
+              </a:rPr>
+              <a:t>Triton</a:t>
+            </a:r>
+            <a:br>
+              <a:rPr kumimoji="0" lang="en-US" altLang="zh-TW" sz="1200" b="0" i="0" u="none" strike="noStrike" kern="1200" cap="none" spc="0" normalizeH="0" baseline="0" noProof="0" dirty="0">
+                <a:ln>
+                  <a:noFill/>
+                </a:ln>
+                <a:solidFill>
+                  <a:srgbClr val="4F81BD">
+                    <a:lumMod val="50000"/>
+                  </a:srgbClr>
+                </a:solidFill>
+                <a:effectLst/>
+                <a:uLnTx/>
+                <a:uFillTx/>
+                <a:ea typeface="新細明體" panose="02020500000000000000" pitchFamily="18" charset="-120"/>
+                <a:cs typeface="ADLaM Display" panose="02010000000000000000" pitchFamily="2" charset="0"/>
+              </a:rPr>
+            </a:br>
+            <a:r>
+              <a:rPr kumimoji="0" lang="en-US" altLang="zh-TW" sz="1200" b="0" i="0" u="none" strike="noStrike" kern="1200" cap="none" spc="0" normalizeH="0" baseline="0" noProof="0" dirty="0">
+                <a:ln>
+                  <a:noFill/>
+                </a:ln>
+                <a:solidFill>
+                  <a:srgbClr val="4F81BD">
+                    <a:lumMod val="50000"/>
+                  </a:srgbClr>
+                </a:solidFill>
+                <a:effectLst/>
+                <a:uLnTx/>
+                <a:uFillTx/>
+                <a:ea typeface="新細明體" panose="02020500000000000000" pitchFamily="18" charset="-120"/>
+                <a:cs typeface="ADLaM Display" panose="02010000000000000000" pitchFamily="2" charset="0"/>
+              </a:rPr>
+              <a:t>OpenAI</a:t>
+            </a:r>
+            <a:endParaRPr lang="zh-TW" altLang="en-US" sz="1200" dirty="0">
+              <a:solidFill>
+                <a:schemeClr val="accent1">
+                  <a:lumMod val="50000"/>
+                </a:schemeClr>
+              </a:solidFill>
+              <a:cs typeface="ADLaM Display" panose="02010000000000000000" pitchFamily="2" charset="0"/>
+            </a:endParaRPr>
+          </a:p>
+        </p:txBody>
+      </p:sp>
+      <p:sp>
+        <p:nvSpPr>
+          <p:cNvPr id="10" name="梯形 9">
+            <a:extLst>
+              <a:ext uri="{FF2B5EF4-FFF2-40B4-BE49-F238E27FC236}">
+                <a16:creationId xmlns:a16="http://schemas.microsoft.com/office/drawing/2014/main" id="{66A385D4-DAB3-A27A-0E2F-D40085FAC61A}"/>
+              </a:ext>
+            </a:extLst>
+          </p:cNvPr>
+          <p:cNvSpPr/>
+          <p:nvPr/>
+        </p:nvSpPr>
+        <p:spPr>
+          <a:xfrm>
+            <a:off x="2951496" y="2159726"/>
+            <a:ext cx="1044440" cy="442126"/>
+          </a:xfrm>
+          <a:prstGeom prst="trapezoid">
+            <a:avLst>
+              <a:gd name="adj" fmla="val 0"/>
+            </a:avLst>
+          </a:prstGeom>
+          <a:solidFill>
+            <a:schemeClr val="bg1">
+              <a:lumMod val="95000"/>
+              <a:alpha val="70000"/>
+            </a:schemeClr>
+          </a:solidFill>
+          <a:ln w="25400">
+            <a:solidFill>
+              <a:schemeClr val="bg1">
+                <a:lumMod val="75000"/>
+              </a:schemeClr>
+            </a:solidFill>
+          </a:ln>
+        </p:spPr>
+        <p:style>
+          <a:lnRef idx="2">
+            <a:schemeClr val="accent1">
+              <a:shade val="15000"/>
+            </a:schemeClr>
+          </a:lnRef>
+          <a:fillRef idx="1">
+            <a:schemeClr val="accent1"/>
+          </a:fillRef>
+          <a:effectRef idx="0">
+            <a:schemeClr val="accent1"/>
+          </a:effectRef>
+          <a:fontRef idx="minor">
+            <a:schemeClr val="lt1"/>
+          </a:fontRef>
+        </p:style>
+        <p:txBody>
+          <a:bodyPr wrap="none" lIns="0" tIns="0" rIns="0" bIns="0" rtlCol="0" anchor="ctr" anchorCtr="1"/>
+          <a:lstStyle/>
+          <a:p>
+            <a:pPr marL="0" marR="0" lvl="0" indent="0" algn="ctr" defTabSz="914400" rtl="0" eaLnBrk="1" fontAlgn="auto" latinLnBrk="0" hangingPunct="1">
+              <a:lnSpc>
+                <a:spcPct val="100000"/>
+              </a:lnSpc>
+              <a:spcBef>
+                <a:spcPts val="0"/>
+              </a:spcBef>
+              <a:spcAft>
+                <a:spcPts val="0"/>
+              </a:spcAft>
+              <a:buClrTx/>
+              <a:buSzTx/>
+              <a:buFontTx/>
+              <a:buNone/>
+              <a:tabLst/>
+              <a:defRPr/>
+            </a:pPr>
+            <a:r>
+              <a:rPr kumimoji="0" lang="en-US" altLang="zh-TW" sz="1200" b="1" i="0" u="none" strike="noStrike" kern="1200" cap="none" spc="0" normalizeH="0" baseline="0" noProof="0" dirty="0">
+                <a:ln>
+                  <a:noFill/>
+                </a:ln>
+                <a:solidFill>
+                  <a:srgbClr val="4F81BD">
+                    <a:lumMod val="50000"/>
+                  </a:srgbClr>
+                </a:solidFill>
+                <a:effectLst/>
+                <a:uLnTx/>
+                <a:uFillTx/>
+                <a:ea typeface="新細明體" panose="02020500000000000000" pitchFamily="18" charset="-120"/>
+                <a:cs typeface="ADLaM Display" panose="02010000000000000000" pitchFamily="2" charset="0"/>
+              </a:rPr>
+              <a:t>Flash Attention</a:t>
+            </a:r>
+            <a:br>
+              <a:rPr kumimoji="0" lang="en-US" altLang="zh-TW" sz="1200" b="0" i="0" u="none" strike="noStrike" kern="1200" cap="none" spc="0" normalizeH="0" baseline="0" noProof="0" dirty="0">
+                <a:ln>
+                  <a:noFill/>
+                </a:ln>
+                <a:solidFill>
+                  <a:srgbClr val="4F81BD">
+                    <a:lumMod val="50000"/>
+                  </a:srgbClr>
+                </a:solidFill>
+                <a:effectLst/>
+                <a:uLnTx/>
+                <a:uFillTx/>
+                <a:ea typeface="新細明體" panose="02020500000000000000" pitchFamily="18" charset="-120"/>
+                <a:cs typeface="ADLaM Display" panose="02010000000000000000" pitchFamily="2" charset="0"/>
+              </a:rPr>
+            </a:br>
+            <a:r>
+              <a:rPr kumimoji="0" lang="en-US" altLang="zh-TW" sz="1200" b="0" i="0" u="none" strike="noStrike" kern="1200" cap="none" spc="0" normalizeH="0" baseline="0" noProof="0" dirty="0">
+                <a:ln>
+                  <a:noFill/>
+                </a:ln>
+                <a:solidFill>
+                  <a:srgbClr val="4F81BD">
+                    <a:lumMod val="50000"/>
+                  </a:srgbClr>
+                </a:solidFill>
+                <a:effectLst/>
+                <a:uLnTx/>
+                <a:uFillTx/>
+                <a:ea typeface="新細明體" panose="02020500000000000000" pitchFamily="18" charset="-120"/>
+                <a:cs typeface="ADLaM Display" panose="02010000000000000000" pitchFamily="2" charset="0"/>
+              </a:rPr>
+              <a:t>FA1 ~ FA4</a:t>
+            </a:r>
+            <a:endParaRPr lang="zh-TW" altLang="en-US" sz="1200" dirty="0">
+              <a:solidFill>
+                <a:schemeClr val="accent1">
+                  <a:lumMod val="50000"/>
+                </a:schemeClr>
+              </a:solidFill>
+              <a:cs typeface="ADLaM Display" panose="02010000000000000000" pitchFamily="2" charset="0"/>
+            </a:endParaRPr>
+          </a:p>
+        </p:txBody>
+      </p:sp>
+      <p:sp>
+        <p:nvSpPr>
+          <p:cNvPr id="12" name="梯形 11">
+            <a:extLst>
+              <a:ext uri="{FF2B5EF4-FFF2-40B4-BE49-F238E27FC236}">
+                <a16:creationId xmlns:a16="http://schemas.microsoft.com/office/drawing/2014/main" id="{E8FE181C-DBAB-DA64-1BBA-263BDD97FE5B}"/>
+              </a:ext>
+            </a:extLst>
+          </p:cNvPr>
+          <p:cNvSpPr/>
+          <p:nvPr/>
+        </p:nvSpPr>
+        <p:spPr>
+          <a:xfrm>
+            <a:off x="2951496" y="4342812"/>
+            <a:ext cx="1044440" cy="442126"/>
+          </a:xfrm>
+          <a:prstGeom prst="trapezoid">
+            <a:avLst>
+              <a:gd name="adj" fmla="val 0"/>
+            </a:avLst>
+          </a:prstGeom>
+          <a:solidFill>
+            <a:schemeClr val="bg1">
+              <a:lumMod val="95000"/>
+              <a:alpha val="70000"/>
+            </a:schemeClr>
+          </a:solidFill>
+          <a:ln w="25400">
+            <a:solidFill>
+              <a:schemeClr val="bg1">
+                <a:lumMod val="75000"/>
+              </a:schemeClr>
+            </a:solidFill>
+          </a:ln>
+        </p:spPr>
+        <p:style>
+          <a:lnRef idx="2">
+            <a:schemeClr val="accent1">
+              <a:shade val="15000"/>
+            </a:schemeClr>
+          </a:lnRef>
+          <a:fillRef idx="1">
+            <a:schemeClr val="accent1"/>
+          </a:fillRef>
+          <a:effectRef idx="0">
+            <a:schemeClr val="accent1"/>
+          </a:effectRef>
+          <a:fontRef idx="minor">
+            <a:schemeClr val="lt1"/>
+          </a:fontRef>
+        </p:style>
+        <p:txBody>
+          <a:bodyPr wrap="none" lIns="0" tIns="0" rIns="0" bIns="0" rtlCol="0" anchor="ctr" anchorCtr="1"/>
+          <a:lstStyle/>
+          <a:p>
+            <a:pPr algn="ctr"/>
+            <a:r>
+              <a:rPr lang="en-US" altLang="zh-TW" sz="1200" b="1" dirty="0">
+                <a:solidFill>
+                  <a:schemeClr val="accent1">
+                    <a:lumMod val="50000"/>
+                  </a:schemeClr>
+                </a:solidFill>
+                <a:cs typeface="ADLaM Display" panose="02010000000000000000" pitchFamily="2" charset="0"/>
+              </a:rPr>
+              <a:t>GPU</a:t>
+            </a:r>
+            <a:br>
+              <a:rPr lang="en-US" altLang="zh-TW" sz="1200" dirty="0">
+                <a:solidFill>
+                  <a:schemeClr val="accent1">
+                    <a:lumMod val="50000"/>
+                  </a:schemeClr>
+                </a:solidFill>
+                <a:cs typeface="ADLaM Display" panose="02010000000000000000" pitchFamily="2" charset="0"/>
+              </a:rPr>
+            </a:br>
+            <a:r>
+              <a:rPr lang="en-US" altLang="zh-TW" sz="1200" dirty="0">
+                <a:solidFill>
+                  <a:schemeClr val="accent1">
+                    <a:lumMod val="50000"/>
+                  </a:schemeClr>
+                </a:solidFill>
+                <a:cs typeface="ADLaM Display" panose="02010000000000000000" pitchFamily="2" charset="0"/>
+              </a:rPr>
+              <a:t>NVIDIA</a:t>
+            </a:r>
+            <a:endParaRPr lang="zh-TW" altLang="en-US" sz="1200" dirty="0">
+              <a:solidFill>
+                <a:schemeClr val="accent1">
+                  <a:lumMod val="50000"/>
+                </a:schemeClr>
+              </a:solidFill>
+              <a:cs typeface="ADLaM Display" panose="02010000000000000000" pitchFamily="2" charset="0"/>
+            </a:endParaRPr>
+          </a:p>
+        </p:txBody>
+      </p:sp>
+      <p:sp>
+        <p:nvSpPr>
+          <p:cNvPr id="19" name="文字方塊 18">
+            <a:extLst>
+              <a:ext uri="{FF2B5EF4-FFF2-40B4-BE49-F238E27FC236}">
+                <a16:creationId xmlns:a16="http://schemas.microsoft.com/office/drawing/2014/main" id="{E3A1A78E-82D5-DD2A-6C5A-0ADA54CE07CC}"/>
+              </a:ext>
+            </a:extLst>
+          </p:cNvPr>
+          <p:cNvSpPr txBox="1"/>
+          <p:nvPr/>
+        </p:nvSpPr>
+        <p:spPr>
+          <a:xfrm>
+            <a:off x="4279947" y="789963"/>
+            <a:ext cx="2420408" cy="1277273"/>
+          </a:xfrm>
+          <a:prstGeom prst="rect">
+            <a:avLst/>
+          </a:prstGeom>
+          <a:noFill/>
+        </p:spPr>
+        <p:txBody>
+          <a:bodyPr wrap="square">
+            <a:spAutoFit/>
+          </a:bodyPr>
+          <a:lstStyle/>
+          <a:p>
+            <a:r>
+              <a:rPr lang="zh-TW" altLang="zh-TW" sz="1100" b="1" u="none" strike="noStrike" kern="1200" dirty="0">
+                <a:solidFill>
+                  <a:schemeClr val="tx1"/>
+                </a:solidFill>
+                <a:effectLst/>
+                <a:ea typeface="微軟正黑體" panose="020B0604030504040204" pitchFamily="34" charset="-120"/>
+              </a:rPr>
+              <a:t>FlashAttention (FA 系列)</a:t>
+            </a:r>
+            <a:r>
+              <a:rPr lang="en-US" altLang="zh-TW" sz="1100" b="1" u="none" strike="noStrike" kern="1200" dirty="0">
+                <a:solidFill>
+                  <a:schemeClr val="tx1"/>
+                </a:solidFill>
+                <a:effectLst/>
+                <a:ea typeface="微軟正黑體" panose="020B0604030504040204" pitchFamily="34" charset="-120"/>
+              </a:rPr>
+              <a:t> </a:t>
+            </a:r>
+          </a:p>
+          <a:p>
+            <a:r>
+              <a:rPr lang="zh-TW" altLang="zh-TW" sz="1100" b="1" u="none" strike="noStrike" kern="1200" dirty="0">
+                <a:solidFill>
+                  <a:schemeClr val="tx1"/>
+                </a:solidFill>
+                <a:effectLst/>
+                <a:ea typeface="微軟正黑體" panose="020B0604030504040204" pitchFamily="34" charset="-120"/>
+              </a:rPr>
+              <a:t>維護者</a:t>
+            </a:r>
+            <a:r>
+              <a:rPr lang="en-US" altLang="zh-TW" sz="1100" b="1" u="none" strike="noStrike" kern="1200" dirty="0">
+                <a:solidFill>
+                  <a:schemeClr val="tx1"/>
+                </a:solidFill>
+                <a:effectLst/>
+                <a:ea typeface="微軟正黑體" panose="020B0604030504040204" pitchFamily="34" charset="-120"/>
+              </a:rPr>
+              <a:t>: </a:t>
+            </a:r>
+            <a:r>
+              <a:rPr lang="zh-TW" altLang="zh-TW" sz="1100" b="0" u="none" strike="noStrike" kern="1200" dirty="0">
+                <a:solidFill>
+                  <a:schemeClr val="tx1"/>
+                </a:solidFill>
+                <a:effectLst/>
+                <a:ea typeface="微軟正黑體" panose="020B0604030504040204" pitchFamily="34" charset="-120"/>
+              </a:rPr>
+              <a:t>Tri Dao 教授團隊</a:t>
+            </a:r>
+            <a:r>
+              <a:rPr lang="en-US" altLang="zh-TW" sz="1100" b="0" u="none" strike="noStrike" kern="1200" dirty="0">
+                <a:solidFill>
+                  <a:schemeClr val="tx1"/>
+                </a:solidFill>
+                <a:effectLst/>
+                <a:ea typeface="微軟正黑體" panose="020B0604030504040204" pitchFamily="34" charset="-120"/>
+              </a:rPr>
+              <a:t> (</a:t>
+            </a:r>
+            <a:r>
+              <a:rPr lang="zh-TW" altLang="zh-TW" sz="1100" b="0" u="none" strike="noStrike" kern="1200" dirty="0">
+                <a:solidFill>
+                  <a:schemeClr val="tx1"/>
+                </a:solidFill>
+                <a:effectLst/>
+                <a:ea typeface="微軟正黑體" panose="020B0604030504040204" pitchFamily="34" charset="-120"/>
+              </a:rPr>
+              <a:t>Dao-AILab</a:t>
+            </a:r>
+            <a:r>
+              <a:rPr lang="en-US" altLang="zh-TW" sz="1100" dirty="0">
+                <a:ea typeface="微軟正黑體" panose="020B0604030504040204" pitchFamily="34" charset="-120"/>
+              </a:rPr>
+              <a:t>)</a:t>
+            </a:r>
+          </a:p>
+          <a:p>
+            <a:endParaRPr lang="zh-TW" altLang="zh-TW" sz="1100" b="0" u="none" strike="noStrike" kern="1200" dirty="0">
+              <a:solidFill>
+                <a:schemeClr val="tx1"/>
+              </a:solidFill>
+              <a:effectLst/>
+              <a:ea typeface="微軟正黑體" panose="020B0604030504040204" pitchFamily="34" charset="-120"/>
+            </a:endParaRPr>
+          </a:p>
+          <a:p>
+            <a:r>
+              <a:rPr lang="zh-TW" altLang="zh-TW" sz="1100" b="0" u="none" strike="noStrike" kern="1200" dirty="0">
+                <a:solidFill>
+                  <a:schemeClr val="tx1"/>
+                </a:solidFill>
+                <a:effectLst/>
+                <a:ea typeface="微軟正黑體" panose="020B0604030504040204" pitchFamily="34" charset="-120"/>
+              </a:rPr>
+              <a:t> </a:t>
+            </a:r>
+            <a:r>
+              <a:rPr lang="en-US" altLang="zh-TW" sz="1100" b="0" u="none" strike="noStrike" kern="1200" dirty="0">
+                <a:solidFill>
+                  <a:schemeClr val="tx1"/>
+                </a:solidFill>
+                <a:effectLst/>
+                <a:ea typeface="微軟正黑體" panose="020B0604030504040204" pitchFamily="34" charset="-120"/>
+                <a:sym typeface="Wingdings" panose="05000000000000000000" pitchFamily="2" charset="2"/>
+              </a:rPr>
+              <a:t></a:t>
+            </a:r>
+            <a:r>
+              <a:rPr lang="zh-TW" altLang="en-US" sz="1100" b="0" u="none" strike="noStrike" kern="1200" dirty="0">
+                <a:solidFill>
+                  <a:schemeClr val="tx1"/>
+                </a:solidFill>
+                <a:effectLst/>
+                <a:ea typeface="微軟正黑體" panose="020B0604030504040204" pitchFamily="34" charset="-120"/>
+                <a:sym typeface="Wingdings" panose="05000000000000000000" pitchFamily="2" charset="2"/>
+              </a:rPr>
+              <a:t> </a:t>
+            </a:r>
+            <a:r>
+              <a:rPr lang="zh-TW" altLang="zh-TW" sz="1100" b="0" u="none" strike="noStrike" kern="1200" dirty="0">
+                <a:solidFill>
+                  <a:schemeClr val="tx1"/>
+                </a:solidFill>
+                <a:effectLst/>
+                <a:ea typeface="微軟正黑體" panose="020B0604030504040204" pitchFamily="34" charset="-120"/>
+              </a:rPr>
+              <a:t>Softmax </a:t>
+            </a:r>
+            <a:r>
+              <a:rPr lang="en-US" altLang="zh-TW" sz="1100" dirty="0">
+                <a:ea typeface="微軟正黑體" panose="020B0604030504040204" pitchFamily="34" charset="-120"/>
+              </a:rPr>
+              <a:t>(QK^T)V</a:t>
+            </a:r>
+            <a:endParaRPr lang="zh-TW" altLang="zh-TW" sz="1100" b="0" u="none" strike="noStrike" kern="1200" dirty="0">
+              <a:solidFill>
+                <a:schemeClr val="tx1"/>
+              </a:solidFill>
+              <a:effectLst/>
+              <a:ea typeface="微軟正黑體" panose="020B0604030504040204" pitchFamily="34" charset="-120"/>
+            </a:endParaRPr>
+          </a:p>
+          <a:p>
+            <a:r>
+              <a:rPr lang="en-US" altLang="zh-TW" sz="1100" b="1" u="none" strike="noStrike" kern="1200" dirty="0">
+                <a:solidFill>
+                  <a:schemeClr val="tx1"/>
+                </a:solidFill>
+                <a:effectLst/>
+                <a:ea typeface="微軟正黑體" panose="020B0604030504040204" pitchFamily="34" charset="-120"/>
+                <a:sym typeface="Wingdings" panose="05000000000000000000" pitchFamily="2" charset="2"/>
+              </a:rPr>
+              <a:t></a:t>
+            </a:r>
+            <a:r>
+              <a:rPr lang="en-US" altLang="zh-TW" sz="1100" b="1" u="none" strike="noStrike" kern="1200" dirty="0">
+                <a:solidFill>
+                  <a:schemeClr val="tx1"/>
+                </a:solidFill>
+                <a:effectLst/>
+                <a:ea typeface="微軟正黑體" panose="020B0604030504040204" pitchFamily="34" charset="-120"/>
+              </a:rPr>
+              <a:t> </a:t>
+            </a:r>
+            <a:r>
+              <a:rPr lang="zh-TW" altLang="zh-TW" sz="1100" b="0" u="none" strike="noStrike" kern="1200" dirty="0">
+                <a:solidFill>
+                  <a:schemeClr val="tx1"/>
+                </a:solidFill>
+                <a:effectLst/>
+                <a:ea typeface="微軟正黑體" panose="020B0604030504040204" pitchFamily="34" charset="-120"/>
+              </a:rPr>
+              <a:t>O(N</a:t>
+            </a:r>
+            <a:r>
+              <a:rPr lang="zh-TW" altLang="zh-TW" sz="1100" b="0" u="none" strike="noStrike" kern="1200" baseline="30000" dirty="0">
+                <a:solidFill>
+                  <a:schemeClr val="tx1"/>
+                </a:solidFill>
+                <a:effectLst/>
+                <a:ea typeface="微軟正黑體" panose="020B0604030504040204" pitchFamily="34" charset="-120"/>
+              </a:rPr>
+              <a:t>2</a:t>
+            </a:r>
+            <a:r>
+              <a:rPr lang="en-US" altLang="zh-TW" sz="1100" b="0" u="none" strike="noStrike" kern="1200" baseline="30000" dirty="0">
+                <a:solidFill>
+                  <a:schemeClr val="tx1"/>
+                </a:solidFill>
+                <a:effectLst/>
+                <a:ea typeface="微軟正黑體" panose="020B0604030504040204" pitchFamily="34" charset="-120"/>
+              </a:rPr>
+              <a:t> </a:t>
+            </a:r>
+            <a:r>
+              <a:rPr lang="en-US" altLang="zh-TW" sz="1100" b="0" u="none" strike="noStrike" kern="1200" dirty="0">
+                <a:solidFill>
+                  <a:schemeClr val="tx1"/>
+                </a:solidFill>
+                <a:effectLst/>
+                <a:ea typeface="微軟正黑體" panose="020B0604030504040204" pitchFamily="34" charset="-120"/>
+              </a:rPr>
+              <a:t>x d</a:t>
+            </a:r>
+            <a:r>
+              <a:rPr lang="zh-TW" altLang="zh-TW" sz="1100" b="0" u="none" strike="noStrike" kern="1200" dirty="0">
+                <a:solidFill>
+                  <a:schemeClr val="tx1"/>
+                </a:solidFill>
+                <a:effectLst/>
+                <a:ea typeface="微軟正黑體" panose="020B0604030504040204" pitchFamily="34" charset="-120"/>
+              </a:rPr>
+              <a:t>) </a:t>
+            </a:r>
+            <a:r>
+              <a:rPr lang="en-US" altLang="zh-TW" sz="1100" dirty="0">
+                <a:ea typeface="微軟正黑體" panose="020B0604030504040204" pitchFamily="34" charset="-120"/>
+              </a:rPr>
+              <a:t>(</a:t>
+            </a:r>
+            <a:r>
+              <a:rPr lang="zh-TW" altLang="zh-TW" sz="1100" b="0" u="none" strike="noStrike" kern="1200" dirty="0">
+                <a:solidFill>
+                  <a:schemeClr val="tx1"/>
+                </a:solidFill>
+                <a:effectLst/>
+                <a:ea typeface="微軟正黑體" panose="020B0604030504040204" pitchFamily="34" charset="-120"/>
+              </a:rPr>
+              <a:t>平方成長</a:t>
+            </a:r>
+            <a:r>
+              <a:rPr lang="en-US" altLang="zh-TW" sz="1100" dirty="0">
+                <a:ea typeface="微軟正黑體" panose="020B0604030504040204" pitchFamily="34" charset="-120"/>
+              </a:rPr>
+              <a:t>)</a:t>
+            </a:r>
+            <a:br>
+              <a:rPr lang="en-US" altLang="zh-TW" sz="1100" b="0" u="none" strike="noStrike" kern="1200" dirty="0">
+                <a:solidFill>
+                  <a:schemeClr val="tx1"/>
+                </a:solidFill>
+                <a:effectLst/>
+                <a:ea typeface="微軟正黑體" panose="020B0604030504040204" pitchFamily="34" charset="-120"/>
+              </a:rPr>
+            </a:br>
+            <a:r>
+              <a:rPr lang="zh-TW" altLang="zh-TW" sz="1100" b="1" u="none" strike="noStrike" kern="1200" dirty="0">
+                <a:solidFill>
+                  <a:schemeClr val="tx1"/>
+                </a:solidFill>
+                <a:effectLst/>
+                <a:ea typeface="微軟正黑體" panose="020B0604030504040204" pitchFamily="34" charset="-120"/>
+              </a:rPr>
+              <a:t>目標</a:t>
+            </a:r>
+            <a:r>
+              <a:rPr lang="en-US" altLang="zh-TW" sz="1100" b="1" u="none" strike="noStrike" kern="1200" dirty="0">
+                <a:solidFill>
+                  <a:schemeClr val="tx1"/>
+                </a:solidFill>
+                <a:effectLst/>
+                <a:ea typeface="微軟正黑體" panose="020B0604030504040204" pitchFamily="34" charset="-120"/>
+              </a:rPr>
+              <a:t>: </a:t>
+            </a:r>
+            <a:r>
+              <a:rPr lang="zh-TW" altLang="zh-TW" sz="1100" b="0" u="none" strike="noStrike" kern="1200" dirty="0">
+                <a:solidFill>
+                  <a:schemeClr val="tx1"/>
+                </a:solidFill>
+                <a:effectLst/>
+                <a:ea typeface="微軟正黑體" panose="020B0604030504040204" pitchFamily="34" charset="-120"/>
+              </a:rPr>
+              <a:t>在數學不妥協的前提下，把現有 Transformer 的效能榨到極致。</a:t>
+            </a:r>
+          </a:p>
+        </p:txBody>
+      </p:sp>
+      <p:sp>
+        <p:nvSpPr>
+          <p:cNvPr id="21" name="文字方塊 20">
+            <a:extLst>
+              <a:ext uri="{FF2B5EF4-FFF2-40B4-BE49-F238E27FC236}">
+                <a16:creationId xmlns:a16="http://schemas.microsoft.com/office/drawing/2014/main" id="{82D5963F-DB45-C383-C525-86E8163B3506}"/>
+              </a:ext>
+            </a:extLst>
+          </p:cNvPr>
+          <p:cNvSpPr txBox="1"/>
+          <p:nvPr/>
+        </p:nvSpPr>
+        <p:spPr>
+          <a:xfrm>
+            <a:off x="6704376" y="620687"/>
+            <a:ext cx="2260112" cy="1615827"/>
+          </a:xfrm>
+          <a:prstGeom prst="rect">
+            <a:avLst/>
+          </a:prstGeom>
+          <a:noFill/>
+        </p:spPr>
+        <p:txBody>
+          <a:bodyPr wrap="square">
+            <a:spAutoFit/>
+          </a:bodyPr>
+          <a:lstStyle/>
+          <a:p>
+            <a:r>
+              <a:rPr lang="zh-TW" altLang="zh-TW" sz="1100" b="1" u="none" strike="noStrike" kern="1200" dirty="0">
+                <a:solidFill>
+                  <a:schemeClr val="tx1"/>
+                </a:solidFill>
+                <a:effectLst/>
+                <a:ea typeface="微軟正黑體" panose="020B0604030504040204" pitchFamily="34" charset="-120"/>
+              </a:rPr>
+              <a:t>Flash Linear Attention (FLA 庫)</a:t>
+            </a:r>
+          </a:p>
+          <a:p>
+            <a:r>
+              <a:rPr lang="zh-TW" altLang="zh-TW" sz="1100" b="1" u="none" strike="noStrike" kern="1200" dirty="0">
+                <a:solidFill>
+                  <a:schemeClr val="tx1"/>
+                </a:solidFill>
+                <a:effectLst/>
+                <a:ea typeface="微軟正黑體" panose="020B0604030504040204" pitchFamily="34" charset="-120"/>
+              </a:rPr>
+              <a:t>維護者</a:t>
+            </a:r>
+            <a:r>
+              <a:rPr lang="en-US" altLang="zh-TW" sz="1100" b="0" u="none" strike="noStrike" kern="1200" dirty="0">
+                <a:solidFill>
+                  <a:schemeClr val="tx1"/>
+                </a:solidFill>
+                <a:effectLst/>
+                <a:ea typeface="微軟正黑體" panose="020B0604030504040204" pitchFamily="34" charset="-120"/>
+              </a:rPr>
+              <a:t>: </a:t>
+            </a:r>
+            <a:r>
+              <a:rPr lang="zh-TW" altLang="zh-TW" sz="1100" b="0" u="none" strike="noStrike" kern="1200" dirty="0">
+                <a:solidFill>
+                  <a:schemeClr val="tx1"/>
+                </a:solidFill>
+                <a:effectLst/>
+                <a:ea typeface="微軟正黑體" panose="020B0604030504040204" pitchFamily="34" charset="-120"/>
+              </a:rPr>
+              <a:t>Songlin Yang &amp; Yu Zhang (FLA 開源團隊)</a:t>
+            </a:r>
+          </a:p>
+          <a:p>
+            <a:endParaRPr lang="en-US" altLang="zh-TW" sz="1100" b="1" u="none" strike="noStrike" kern="1200" dirty="0">
+              <a:solidFill>
+                <a:schemeClr val="tx1"/>
+              </a:solidFill>
+              <a:effectLst/>
+              <a:ea typeface="微軟正黑體" panose="020B0604030504040204" pitchFamily="34" charset="-120"/>
+            </a:endParaRPr>
+          </a:p>
+          <a:p>
+            <a:r>
+              <a:rPr lang="en-US" altLang="zh-TW" sz="1100" dirty="0">
+                <a:ea typeface="微軟正黑體" panose="020B0604030504040204" pitchFamily="34" charset="-120"/>
+                <a:sym typeface="Wingdings" panose="05000000000000000000" pitchFamily="2" charset="2"/>
+              </a:rPr>
+              <a:t></a:t>
+            </a:r>
+            <a:r>
+              <a:rPr lang="zh-TW" altLang="en-US" sz="1100" dirty="0">
+                <a:ea typeface="微軟正黑體" panose="020B0604030504040204" pitchFamily="34" charset="-120"/>
+              </a:rPr>
+              <a:t> </a:t>
+            </a:r>
+            <a:r>
+              <a:rPr lang="en-US" altLang="zh-TW" sz="1100" dirty="0">
+                <a:ea typeface="微軟正黑體" panose="020B0604030504040204" pitchFamily="34" charset="-120"/>
+              </a:rPr>
+              <a:t>φ(Q)( φ(K)</a:t>
+            </a:r>
+            <a:r>
+              <a:rPr lang="en-US" altLang="zh-TW" sz="1100" baseline="30000" dirty="0">
+                <a:ea typeface="微軟正黑體" panose="020B0604030504040204" pitchFamily="34" charset="-120"/>
+              </a:rPr>
+              <a:t>T</a:t>
+            </a:r>
+            <a:r>
+              <a:rPr lang="zh-TW" altLang="en-US" sz="1100" baseline="30000" dirty="0">
+                <a:ea typeface="微軟正黑體" panose="020B0604030504040204" pitchFamily="34" charset="-120"/>
+              </a:rPr>
+              <a:t> </a:t>
+            </a:r>
+            <a:r>
+              <a:rPr lang="en-US" altLang="zh-TW" sz="1100" dirty="0">
+                <a:ea typeface="微軟正黑體" panose="020B0604030504040204" pitchFamily="34" charset="-120"/>
+              </a:rPr>
+              <a:t>V )</a:t>
+            </a:r>
+            <a:endParaRPr lang="en-US" altLang="zh-TW" sz="1100" b="1" u="none" strike="noStrike" kern="1200" dirty="0">
+              <a:solidFill>
+                <a:schemeClr val="tx1"/>
+              </a:solidFill>
+              <a:effectLst/>
+              <a:ea typeface="微軟正黑體" panose="020B0604030504040204" pitchFamily="34" charset="-120"/>
+            </a:endParaRPr>
+          </a:p>
+          <a:p>
+            <a:r>
+              <a:rPr lang="en-US" altLang="zh-TW" sz="1100" b="0" u="none" strike="noStrike" kern="1200" dirty="0">
+                <a:solidFill>
+                  <a:schemeClr val="tx1"/>
+                </a:solidFill>
+                <a:effectLst/>
+                <a:ea typeface="微軟正黑體" panose="020B0604030504040204" pitchFamily="34" charset="-120"/>
+                <a:sym typeface="Wingdings" panose="05000000000000000000" pitchFamily="2" charset="2"/>
+              </a:rPr>
+              <a:t></a:t>
+            </a:r>
+            <a:r>
+              <a:rPr lang="zh-TW" altLang="en-US" sz="1100" b="0" u="none" strike="noStrike" kern="1200" dirty="0">
+                <a:solidFill>
+                  <a:schemeClr val="tx1"/>
+                </a:solidFill>
+                <a:effectLst/>
+                <a:ea typeface="微軟正黑體" panose="020B0604030504040204" pitchFamily="34" charset="-120"/>
+                <a:sym typeface="Wingdings" panose="05000000000000000000" pitchFamily="2" charset="2"/>
+              </a:rPr>
+              <a:t> </a:t>
+            </a:r>
+            <a:r>
+              <a:rPr lang="zh-TW" altLang="zh-TW" sz="1100" b="0" u="none" strike="noStrike" kern="1200" dirty="0">
+                <a:solidFill>
+                  <a:schemeClr val="tx1"/>
+                </a:solidFill>
+                <a:effectLst/>
+                <a:ea typeface="微軟正黑體" panose="020B0604030504040204" pitchFamily="34" charset="-120"/>
+              </a:rPr>
+              <a:t>O(N</a:t>
+            </a:r>
+            <a:r>
+              <a:rPr lang="en-US" altLang="zh-TW" sz="1100" b="0" u="none" strike="noStrike" kern="1200" dirty="0">
+                <a:solidFill>
+                  <a:schemeClr val="tx1"/>
+                </a:solidFill>
+                <a:effectLst/>
+                <a:ea typeface="微軟正黑體" panose="020B0604030504040204" pitchFamily="34" charset="-120"/>
+              </a:rPr>
+              <a:t>*</a:t>
+            </a:r>
+            <a:r>
+              <a:rPr lang="zh-TW" altLang="zh-TW" sz="1100" b="0" u="none" strike="noStrike" kern="1200" dirty="0">
+                <a:solidFill>
+                  <a:schemeClr val="tx1"/>
+                </a:solidFill>
+                <a:effectLst/>
+                <a:ea typeface="微軟正黑體" panose="020B0604030504040204" pitchFamily="34" charset="-120"/>
+              </a:rPr>
+              <a:t>d</a:t>
+            </a:r>
+            <a:r>
+              <a:rPr lang="zh-TW" altLang="zh-TW" sz="1100" b="0" u="none" strike="noStrike" kern="1200" baseline="30000" dirty="0">
+                <a:solidFill>
+                  <a:schemeClr val="tx1"/>
+                </a:solidFill>
+                <a:effectLst/>
+                <a:ea typeface="微軟正黑體" panose="020B0604030504040204" pitchFamily="34" charset="-120"/>
+              </a:rPr>
+              <a:t>2</a:t>
+            </a:r>
+            <a:r>
+              <a:rPr lang="zh-TW" altLang="zh-TW" sz="1100" b="0" u="none" strike="noStrike" kern="1200" dirty="0">
+                <a:solidFill>
+                  <a:schemeClr val="tx1"/>
+                </a:solidFill>
+                <a:effectLst/>
+                <a:ea typeface="微軟正黑體" panose="020B0604030504040204" pitchFamily="34" charset="-120"/>
+              </a:rPr>
+              <a:t>) </a:t>
+            </a:r>
+            <a:r>
+              <a:rPr lang="en-US" altLang="zh-TW" sz="1100" dirty="0">
+                <a:ea typeface="微軟正黑體" panose="020B0604030504040204" pitchFamily="34" charset="-120"/>
+              </a:rPr>
+              <a:t>(</a:t>
+            </a:r>
+            <a:r>
+              <a:rPr lang="zh-TW" altLang="zh-TW" sz="1100" b="0" u="none" strike="noStrike" kern="1200" dirty="0">
+                <a:solidFill>
+                  <a:schemeClr val="tx1"/>
+                </a:solidFill>
+                <a:effectLst/>
+                <a:ea typeface="微軟正黑體" panose="020B0604030504040204" pitchFamily="34" charset="-120"/>
+              </a:rPr>
+              <a:t>線性成長</a:t>
+            </a:r>
+            <a:r>
+              <a:rPr lang="en-US" altLang="zh-TW" sz="1100" b="0" u="none" strike="noStrike" kern="1200" dirty="0">
+                <a:solidFill>
+                  <a:schemeClr val="tx1"/>
+                </a:solidFill>
+                <a:effectLst/>
+                <a:ea typeface="微軟正黑體" panose="020B0604030504040204" pitchFamily="34" charset="-120"/>
+              </a:rPr>
+              <a:t>)</a:t>
+            </a:r>
+            <a:endParaRPr lang="zh-TW" altLang="zh-TW" sz="1100" b="0" u="none" strike="noStrike" kern="1200" dirty="0">
+              <a:solidFill>
+                <a:schemeClr val="tx1"/>
+              </a:solidFill>
+              <a:effectLst/>
+              <a:ea typeface="微軟正黑體" panose="020B0604030504040204" pitchFamily="34" charset="-120"/>
+            </a:endParaRPr>
+          </a:p>
+          <a:p>
+            <a:r>
+              <a:rPr lang="zh-TW" altLang="zh-TW" sz="1100" b="1" u="none" strike="noStrike" kern="1200" dirty="0">
+                <a:solidFill>
+                  <a:schemeClr val="tx1"/>
+                </a:solidFill>
+                <a:effectLst/>
+                <a:ea typeface="微軟正黑體" panose="020B0604030504040204" pitchFamily="34" charset="-120"/>
+              </a:rPr>
+              <a:t>目標</a:t>
+            </a:r>
+            <a:r>
+              <a:rPr lang="en-US" altLang="zh-TW" sz="1100" b="1" u="none" strike="noStrike" kern="1200" dirty="0">
+                <a:solidFill>
+                  <a:schemeClr val="tx1"/>
+                </a:solidFill>
+                <a:effectLst/>
+                <a:ea typeface="微軟正黑體" panose="020B0604030504040204" pitchFamily="34" charset="-120"/>
+              </a:rPr>
+              <a:t>: </a:t>
+            </a:r>
+            <a:r>
+              <a:rPr lang="zh-TW" altLang="zh-TW" sz="1100" b="0" u="none" strike="noStrike" kern="1200" dirty="0">
+                <a:solidFill>
+                  <a:schemeClr val="tx1"/>
+                </a:solidFill>
+                <a:effectLst/>
+                <a:ea typeface="微軟正黑體" panose="020B0604030504040204" pitchFamily="34" charset="-120"/>
+              </a:rPr>
+              <a:t>幫新架構鋪路，克服線性注意力在 GPU 上難以並行化的工程難題。</a:t>
+            </a:r>
+          </a:p>
+        </p:txBody>
+      </p:sp>
+    </p:spTree>
+    <p:extLst>
+      <p:ext uri="{BB962C8B-B14F-4D97-AF65-F5344CB8AC3E}">
+        <p14:creationId xmlns:p14="http://schemas.microsoft.com/office/powerpoint/2010/main" val="1008479346"/>
+      </p:ext>
+    </p:extLst>
+  </p:cSld>
+  <p:clrMapOvr>
+    <a:masterClrMapping/>
+  </p:clrMapOvr>
+  <mc:AlternateContent xmlns:mc="http://schemas.openxmlformats.org/markup-compatibility/2006" xmlns:p159="http://schemas.microsoft.com/office/powerpoint/2015/09/main">
+    <mc:Choice Requires="p159">
+      <p:transition xmlns:p14="http://schemas.microsoft.com/office/powerpoint/2010/main" spd="slow" p14:dur="2000" advClick="0">
+        <p159:morph option="byObject"/>
+      </p:transition>
+    </mc:Choice>
+    <mc:Fallback xmlns="">
+      <p:transition spd="slow" advClick="0">
+        <p:fade/>
+      </p:transition>
+    </mc:Fallback>
+  </mc:AlternateContent>
+</p:sld>
+</file>
+
+<file path=ppt/slides/slide5.xml><?xml version="1.0" encoding="utf-8"?>
 <p:sld xmlns:a="http://schemas.openxmlformats.org/drawingml/2006/main" xmlns:r="http://schemas.openxmlformats.org/officeDocument/2006/relationships" xmlns:p="http://schemas.openxmlformats.org/presentationml/2006/main">
   <p:cSld>
     <p:spTree>
